--- a/Presentation/passwords.pptx
+++ b/Presentation/passwords.pptx
@@ -1,21 +1,20 @@
 
 <file path=ppt/presentation.xml><?xml version="1.0" encoding="utf-8"?>
-<p:presentation xmlns:a="http://schemas.openxmlformats.org/drawingml/2006/main" xmlns:r="http://schemas.openxmlformats.org/officeDocument/2006/relationships" xmlns:p="http://schemas.openxmlformats.org/presentationml/2006/main" saveSubsetFonts="1">
+<p:presentation xmlns:a="http://schemas.openxmlformats.org/drawingml/2006/main" xmlns:r="http://schemas.openxmlformats.org/officeDocument/2006/relationships" xmlns:p="http://schemas.openxmlformats.org/presentationml/2006/main" xmlns:m="http://schemas.openxmlformats.org/officeDocument/2006/math" xmlns:w="http://schemas.openxmlformats.org/wordprocessingml/2006/main" saveSubsetFonts="1">
   <p:sldMasterIdLst>
     <p:sldMasterId id="2147483648" r:id="rId1"/>
   </p:sldMasterIdLst>
   <p:notesMasterIdLst>
-    <p:notesMasterId r:id="rId10"/>
+    <p:notesMasterId r:id="rId11"/>
   </p:notesMasterIdLst>
   <p:sldIdLst>
-    <p:sldId id="256" r:id="rId2"/>
-    <p:sldId id="261" r:id="rId3"/>
-    <p:sldId id="264" r:id="rId4"/>
-    <p:sldId id="268" r:id="rId5"/>
-    <p:sldId id="267" r:id="rId6"/>
-    <p:sldId id="270" r:id="rId7"/>
-    <p:sldId id="266" r:id="rId8"/>
-    <p:sldId id="269" r:id="rId9"/>
+    <p:sldId id="256" r:id="rId4"/>
+    <p:sldId id="257" r:id="rId5"/>
+    <p:sldId id="258" r:id="rId6"/>
+    <p:sldId id="259" r:id="rId7"/>
+    <p:sldId id="260" r:id="rId8"/>
+    <p:sldId id="261" r:id="rId9"/>
+    <p:sldId id="262" r:id="rId10"/>
   </p:sldIdLst>
   <p:sldSz cx="12192000" cy="6858000"/>
   <p:notesSz cx="6858000" cy="9144000"/>
@@ -23,8 +22,8 @@
     <a:defPPr>
       <a:defRPr lang="fr-FR"/>
     </a:defPPr>
-    <a:lvl1pPr marL="0" algn="l" defTabSz="914400" rtl="0" eaLnBrk="1" latinLnBrk="0" hangingPunct="1">
-      <a:defRPr sz="1800" kern="1200">
+    <a:lvl1pPr marL="0" algn="l" defTabSz="914400" rtl="0">
+      <a:defRPr sz="1800">
         <a:solidFill>
           <a:schemeClr val="tx1"/>
         </a:solidFill>
@@ -33,8 +32,8 @@
         <a:cs typeface="+mn-cs"/>
       </a:defRPr>
     </a:lvl1pPr>
-    <a:lvl2pPr marL="457200" algn="l" defTabSz="914400" rtl="0" eaLnBrk="1" latinLnBrk="0" hangingPunct="1">
-      <a:defRPr sz="1800" kern="1200">
+    <a:lvl2pPr marL="457200" algn="l" defTabSz="914400" rtl="0">
+      <a:defRPr sz="1800">
         <a:solidFill>
           <a:schemeClr val="tx1"/>
         </a:solidFill>
@@ -43,8 +42,8 @@
         <a:cs typeface="+mn-cs"/>
       </a:defRPr>
     </a:lvl2pPr>
-    <a:lvl3pPr marL="914400" algn="l" defTabSz="914400" rtl="0" eaLnBrk="1" latinLnBrk="0" hangingPunct="1">
-      <a:defRPr sz="1800" kern="1200">
+    <a:lvl3pPr marL="914400" algn="l" defTabSz="914400" rtl="0">
+      <a:defRPr sz="1800">
         <a:solidFill>
           <a:schemeClr val="tx1"/>
         </a:solidFill>
@@ -53,8 +52,8 @@
         <a:cs typeface="+mn-cs"/>
       </a:defRPr>
     </a:lvl3pPr>
-    <a:lvl4pPr marL="1371600" algn="l" defTabSz="914400" rtl="0" eaLnBrk="1" latinLnBrk="0" hangingPunct="1">
-      <a:defRPr sz="1800" kern="1200">
+    <a:lvl4pPr marL="1371600" algn="l" defTabSz="914400" rtl="0">
+      <a:defRPr sz="1800">
         <a:solidFill>
           <a:schemeClr val="tx1"/>
         </a:solidFill>
@@ -63,8 +62,8 @@
         <a:cs typeface="+mn-cs"/>
       </a:defRPr>
     </a:lvl4pPr>
-    <a:lvl5pPr marL="1828800" algn="l" defTabSz="914400" rtl="0" eaLnBrk="1" latinLnBrk="0" hangingPunct="1">
-      <a:defRPr sz="1800" kern="1200">
+    <a:lvl5pPr marL="1828800" algn="l" defTabSz="914400" rtl="0">
+      <a:defRPr sz="1800">
         <a:solidFill>
           <a:schemeClr val="tx1"/>
         </a:solidFill>
@@ -73,8 +72,8 @@
         <a:cs typeface="+mn-cs"/>
       </a:defRPr>
     </a:lvl5pPr>
-    <a:lvl6pPr marL="2286000" algn="l" defTabSz="914400" rtl="0" eaLnBrk="1" latinLnBrk="0" hangingPunct="1">
-      <a:defRPr sz="1800" kern="1200">
+    <a:lvl6pPr marL="2286000" algn="l" defTabSz="914400" rtl="0">
+      <a:defRPr sz="1800">
         <a:solidFill>
           <a:schemeClr val="tx1"/>
         </a:solidFill>
@@ -83,8 +82,8 @@
         <a:cs typeface="+mn-cs"/>
       </a:defRPr>
     </a:lvl6pPr>
-    <a:lvl7pPr marL="2743200" algn="l" defTabSz="914400" rtl="0" eaLnBrk="1" latinLnBrk="0" hangingPunct="1">
-      <a:defRPr sz="1800" kern="1200">
+    <a:lvl7pPr marL="2743200" algn="l" defTabSz="914400" rtl="0">
+      <a:defRPr sz="1800">
         <a:solidFill>
           <a:schemeClr val="tx1"/>
         </a:solidFill>
@@ -93,8 +92,8 @@
         <a:cs typeface="+mn-cs"/>
       </a:defRPr>
     </a:lvl7pPr>
-    <a:lvl8pPr marL="3200400" algn="l" defTabSz="914400" rtl="0" eaLnBrk="1" latinLnBrk="0" hangingPunct="1">
-      <a:defRPr sz="1800" kern="1200">
+    <a:lvl8pPr marL="3200400" algn="l" defTabSz="914400" rtl="0">
+      <a:defRPr sz="1800">
         <a:solidFill>
           <a:schemeClr val="tx1"/>
         </a:solidFill>
@@ -103,8 +102,8 @@
         <a:cs typeface="+mn-cs"/>
       </a:defRPr>
     </a:lvl8pPr>
-    <a:lvl9pPr marL="3657600" algn="l" defTabSz="914400" rtl="0" eaLnBrk="1" latinLnBrk="0" hangingPunct="1">
-      <a:defRPr sz="1800" kern="1200">
+    <a:lvl9pPr marL="3657600" algn="l" defTabSz="914400" rtl="0">
+      <a:defRPr sz="1800">
         <a:solidFill>
           <a:schemeClr val="tx1"/>
         </a:solidFill>
@@ -114,39 +113,12 @@
       </a:defRPr>
     </a:lvl9pPr>
   </p:defaultTextStyle>
-  <p:extLst>
-    <p:ext uri="{521415D9-36F7-43E2-AB2F-B90AF26B5E84}">
-      <p14:sectionLst xmlns:p14="http://schemas.microsoft.com/office/powerpoint/2010/main">
-        <p14:section name="Default Section" id="{D0F040D8-02AF-4AB4-AFE9-5B2F7D21931E}">
-          <p14:sldIdLst>
-            <p14:sldId id="256"/>
-            <p14:sldId id="261"/>
-            <p14:sldId id="264"/>
-            <p14:sldId id="268"/>
-            <p14:sldId id="267"/>
-            <p14:sldId id="270"/>
-            <p14:sldId id="266"/>
-            <p14:sldId id="269"/>
-          </p14:sldIdLst>
-        </p14:section>
-      </p14:sectionLst>
-    </p:ext>
-  </p:extLst>
 </p:presentation>
-</file>
-
-<file path=ppt/revisionInfo.xml><?xml version="1.0" encoding="utf-8"?>
-<p1510:revInfo xmlns:a="http://schemas.openxmlformats.org/drawingml/2006/main" xmlns:r="http://schemas.openxmlformats.org/officeDocument/2006/relationships" xmlns:p1510="http://schemas.microsoft.com/office/powerpoint/2015/10/main">
-  <p1510:revLst>
-    <p1510:client id="{4C35AC25-5A48-EBC3-6708-44EE87067F70}" v="2040" dt="2026-03-28T13:07:01.903"/>
-    <p1510:client id="{A90BB966-10AA-062C-0D9F-B96EF210B5AC}" v="1012" dt="2026-03-28T17:29:14.442"/>
-  </p1510:revLst>
-</p1510:revInfo>
 </file>
 
 <file path=ppt/notesMasters/notesMaster1.xml><?xml version="1.0" encoding="utf-8"?>
 <p:notesMaster xmlns:a="http://schemas.openxmlformats.org/drawingml/2006/main" xmlns:r="http://schemas.openxmlformats.org/officeDocument/2006/relationships" xmlns:p="http://schemas.openxmlformats.org/presentationml/2006/main">
-  <p:cSld>
+  <p:cSld name="">
     <p:bg>
       <p:bgRef idx="1001">
         <a:schemeClr val="bg1"/>
@@ -158,7 +130,7 @@
         <p:cNvGrpSpPr/>
         <p:nvPr/>
       </p:nvGrpSpPr>
-      <p:grpSpPr>
+      <p:grpSpPr bwMode="auto">
         <a:xfrm>
           <a:off x="0" y="0"/>
           <a:ext cx="0" cy="0"/>
@@ -168,7 +140,7 @@
       </p:grpSpPr>
       <p:sp>
         <p:nvSpPr>
-          <p:cNvPr id="2" name="Espace réservé de l'en-tête 1"/>
+          <p:cNvPr id="1796252797" name="Espace réservé de l'en-tête 1"/>
           <p:cNvSpPr>
             <a:spLocks noGrp="1"/>
           </p:cNvSpPr>
@@ -176,7 +148,7 @@
             <p:ph type="hdr" sz="quarter"/>
           </p:nvPr>
         </p:nvSpPr>
-        <p:spPr>
+        <p:spPr bwMode="auto">
           <a:xfrm>
             <a:off x="0" y="0"/>
             <a:ext cx="2971800" cy="458788"/>
@@ -193,13 +165,16 @@
             </a:lvl1pPr>
           </a:lstStyle>
           <a:p>
+            <a:pPr>
+              <a:defRPr/>
+            </a:pPr>
             <a:endParaRPr lang="fr-FR"/>
           </a:p>
         </p:txBody>
       </p:sp>
       <p:sp>
         <p:nvSpPr>
-          <p:cNvPr id="3" name="Espace réservé de la date 2"/>
+          <p:cNvPr id="312864292" name="Espace réservé de la date 2"/>
           <p:cNvSpPr>
             <a:spLocks noGrp="1"/>
           </p:cNvSpPr>
@@ -207,7 +182,7 @@
             <p:ph type="dt" idx="1"/>
           </p:nvPr>
         </p:nvSpPr>
-        <p:spPr>
+        <p:spPr bwMode="auto">
           <a:xfrm>
             <a:off x="3884613" y="0"/>
             <a:ext cx="2971800" cy="458788"/>
@@ -224,7 +199,11 @@
             </a:lvl1pPr>
           </a:lstStyle>
           <a:p>
+            <a:pPr>
+              <a:defRPr/>
+            </a:pPr>
             <a:fld id="{735DE62C-5220-46EA-9BE3-B45DB196C1A3}" type="datetimeFigureOut">
+              <a:rPr/>
               <a:t>3/28/2026</a:t>
             </a:fld>
             <a:endParaRPr lang="fr-FR"/>
@@ -233,15 +212,15 @@
       </p:sp>
       <p:sp>
         <p:nvSpPr>
-          <p:cNvPr id="4" name="Espace réservé de l'image des diapositives 3"/>
-          <p:cNvSpPr>
-            <a:spLocks noGrp="1" noRot="1" noChangeAspect="1"/>
+          <p:cNvPr id="105162375" name="Espace réservé de l'image des diapositives 3"/>
+          <p:cNvSpPr>
+            <a:spLocks noChangeAspect="1" noGrp="1" noRot="1"/>
           </p:cNvSpPr>
           <p:nvPr>
             <p:ph type="sldImg" idx="2"/>
           </p:nvPr>
         </p:nvSpPr>
-        <p:spPr>
+        <p:spPr bwMode="auto">
           <a:xfrm>
             <a:off x="685800" y="1143000"/>
             <a:ext cx="5486400" cy="3086100"/>
@@ -260,13 +239,16 @@
           <a:bodyPr vert="horz" lIns="91440" tIns="45720" rIns="91440" bIns="45720" rtlCol="0" anchor="ctr"/>
           <a:lstStyle/>
           <a:p>
+            <a:pPr>
+              <a:defRPr/>
+            </a:pPr>
             <a:endParaRPr lang="fr-FR"/>
           </a:p>
         </p:txBody>
       </p:sp>
       <p:sp>
         <p:nvSpPr>
-          <p:cNvPr id="5" name="Espace réservé des notes 4"/>
+          <p:cNvPr id="466521609" name="Espace réservé des notes 4"/>
           <p:cNvSpPr>
             <a:spLocks noGrp="1"/>
           </p:cNvSpPr>
@@ -274,7 +256,7 @@
             <p:ph type="body" sz="quarter" idx="3"/>
           </p:nvPr>
         </p:nvSpPr>
-        <p:spPr>
+        <p:spPr bwMode="auto">
           <a:xfrm>
             <a:off x="685800" y="4400550"/>
             <a:ext cx="5486400" cy="3600450"/>
@@ -287,45 +269,60 @@
           <a:bodyPr vert="horz" lIns="91440" tIns="45720" rIns="91440" bIns="45720" rtlCol="0"/>
           <a:lstStyle/>
           <a:p>
-            <a:pPr lvl="0"/>
+            <a:pPr lvl="0">
+              <a:defRPr/>
+            </a:pPr>
             <a:r>
               <a:rPr lang="fr-FR"/>
               <a:t>Cliquez pour modifier les styles du texte du masque</a:t>
             </a:r>
-          </a:p>
-          <a:p>
-            <a:pPr lvl="1"/>
+            <a:endParaRPr/>
+          </a:p>
+          <a:p>
+            <a:pPr lvl="1">
+              <a:defRPr/>
+            </a:pPr>
             <a:r>
               <a:rPr lang="fr-FR"/>
               <a:t>Deuxième niveau</a:t>
             </a:r>
-          </a:p>
-          <a:p>
-            <a:pPr lvl="2"/>
+            <a:endParaRPr/>
+          </a:p>
+          <a:p>
+            <a:pPr lvl="2">
+              <a:defRPr/>
+            </a:pPr>
             <a:r>
               <a:rPr lang="fr-FR"/>
               <a:t>Troisième niveau</a:t>
             </a:r>
-          </a:p>
-          <a:p>
-            <a:pPr lvl="3"/>
+            <a:endParaRPr/>
+          </a:p>
+          <a:p>
+            <a:pPr lvl="3">
+              <a:defRPr/>
+            </a:pPr>
             <a:r>
               <a:rPr lang="fr-FR"/>
               <a:t>Quatrième niveau</a:t>
             </a:r>
-          </a:p>
-          <a:p>
-            <a:pPr lvl="4"/>
+            <a:endParaRPr/>
+          </a:p>
+          <a:p>
+            <a:pPr lvl="4">
+              <a:defRPr/>
+            </a:pPr>
             <a:r>
               <a:rPr lang="fr-FR"/>
               <a:t>Cinquième niveau</a:t>
             </a:r>
-          </a:p>
-        </p:txBody>
-      </p:sp>
-      <p:sp>
-        <p:nvSpPr>
-          <p:cNvPr id="6" name="Espace réservé du pied de page 5"/>
+            <a:endParaRPr/>
+          </a:p>
+        </p:txBody>
+      </p:sp>
+      <p:sp>
+        <p:nvSpPr>
+          <p:cNvPr id="817378717" name="Espace réservé du pied de page 5"/>
           <p:cNvSpPr>
             <a:spLocks noGrp="1"/>
           </p:cNvSpPr>
@@ -333,7 +330,7 @@
             <p:ph type="ftr" sz="quarter" idx="4"/>
           </p:nvPr>
         </p:nvSpPr>
-        <p:spPr>
+        <p:spPr bwMode="auto">
           <a:xfrm>
             <a:off x="0" y="8685213"/>
             <a:ext cx="2971800" cy="458787"/>
@@ -350,13 +347,16 @@
             </a:lvl1pPr>
           </a:lstStyle>
           <a:p>
+            <a:pPr>
+              <a:defRPr/>
+            </a:pPr>
             <a:endParaRPr lang="fr-FR"/>
           </a:p>
         </p:txBody>
       </p:sp>
       <p:sp>
         <p:nvSpPr>
-          <p:cNvPr id="7" name="Espace réservé du numéro de diapositive 6"/>
+          <p:cNvPr id="738348637" name="Espace réservé du numéro de diapositive 6"/>
           <p:cNvSpPr>
             <a:spLocks noGrp="1"/>
           </p:cNvSpPr>
@@ -364,7 +364,7 @@
             <p:ph type="sldNum" sz="quarter" idx="5"/>
           </p:nvPr>
         </p:nvSpPr>
-        <p:spPr>
+        <p:spPr bwMode="auto">
           <a:xfrm>
             <a:off x="3884613" y="8685213"/>
             <a:ext cx="2971800" cy="458787"/>
@@ -381,7 +381,11 @@
             </a:lvl1pPr>
           </a:lstStyle>
           <a:p>
+            <a:pPr>
+              <a:defRPr/>
+            </a:pPr>
             <a:fld id="{ED9F3D29-5E90-42D2-A1A8-ECEBBDEB87CD}" type="slidenum">
+              <a:rPr/>
               <a:t>‹#›</a:t>
             </a:fld>
             <a:endParaRPr lang="fr-FR"/>
@@ -389,16 +393,11 @@
         </p:txBody>
       </p:sp>
     </p:spTree>
-    <p:extLst>
-      <p:ext uri="{BB962C8B-B14F-4D97-AF65-F5344CB8AC3E}">
-        <p14:creationId xmlns:p14="http://schemas.microsoft.com/office/powerpoint/2010/main" val="1676445838"/>
-      </p:ext>
-    </p:extLst>
   </p:cSld>
   <p:clrMap bg1="lt1" tx1="dk1" bg2="lt2" tx2="dk2" accent1="accent1" accent2="accent2" accent3="accent3" accent4="accent4" accent5="accent5" accent6="accent6" hlink="hlink" folHlink="folHlink"/>
   <p:notesStyle>
-    <a:lvl1pPr marL="0" algn="l" defTabSz="914400" rtl="0" eaLnBrk="1" latinLnBrk="0" hangingPunct="1">
-      <a:defRPr sz="1200" kern="1200">
+    <a:lvl1pPr marL="0" algn="l" defTabSz="914400" rtl="0">
+      <a:defRPr sz="1200">
         <a:solidFill>
           <a:schemeClr val="tx1"/>
         </a:solidFill>
@@ -407,8 +406,8 @@
         <a:cs typeface="+mn-cs"/>
       </a:defRPr>
     </a:lvl1pPr>
-    <a:lvl2pPr marL="457200" algn="l" defTabSz="914400" rtl="0" eaLnBrk="1" latinLnBrk="0" hangingPunct="1">
-      <a:defRPr sz="1200" kern="1200">
+    <a:lvl2pPr marL="457200" algn="l" defTabSz="914400" rtl="0">
+      <a:defRPr sz="1200">
         <a:solidFill>
           <a:schemeClr val="tx1"/>
         </a:solidFill>
@@ -417,8 +416,8 @@
         <a:cs typeface="+mn-cs"/>
       </a:defRPr>
     </a:lvl2pPr>
-    <a:lvl3pPr marL="914400" algn="l" defTabSz="914400" rtl="0" eaLnBrk="1" latinLnBrk="0" hangingPunct="1">
-      <a:defRPr sz="1200" kern="1200">
+    <a:lvl3pPr marL="914400" algn="l" defTabSz="914400" rtl="0">
+      <a:defRPr sz="1200">
         <a:solidFill>
           <a:schemeClr val="tx1"/>
         </a:solidFill>
@@ -427,8 +426,8 @@
         <a:cs typeface="+mn-cs"/>
       </a:defRPr>
     </a:lvl3pPr>
-    <a:lvl4pPr marL="1371600" algn="l" defTabSz="914400" rtl="0" eaLnBrk="1" latinLnBrk="0" hangingPunct="1">
-      <a:defRPr sz="1200" kern="1200">
+    <a:lvl4pPr marL="1371600" algn="l" defTabSz="914400" rtl="0">
+      <a:defRPr sz="1200">
         <a:solidFill>
           <a:schemeClr val="tx1"/>
         </a:solidFill>
@@ -437,8 +436,8 @@
         <a:cs typeface="+mn-cs"/>
       </a:defRPr>
     </a:lvl4pPr>
-    <a:lvl5pPr marL="1828800" algn="l" defTabSz="914400" rtl="0" eaLnBrk="1" latinLnBrk="0" hangingPunct="1">
-      <a:defRPr sz="1200" kern="1200">
+    <a:lvl5pPr marL="1828800" algn="l" defTabSz="914400" rtl="0">
+      <a:defRPr sz="1200">
         <a:solidFill>
           <a:schemeClr val="tx1"/>
         </a:solidFill>
@@ -447,8 +446,8 @@
         <a:cs typeface="+mn-cs"/>
       </a:defRPr>
     </a:lvl5pPr>
-    <a:lvl6pPr marL="2286000" algn="l" defTabSz="914400" rtl="0" eaLnBrk="1" latinLnBrk="0" hangingPunct="1">
-      <a:defRPr sz="1200" kern="1200">
+    <a:lvl6pPr marL="2286000" algn="l" defTabSz="914400" rtl="0">
+      <a:defRPr sz="1200">
         <a:solidFill>
           <a:schemeClr val="tx1"/>
         </a:solidFill>
@@ -457,8 +456,8 @@
         <a:cs typeface="+mn-cs"/>
       </a:defRPr>
     </a:lvl6pPr>
-    <a:lvl7pPr marL="2743200" algn="l" defTabSz="914400" rtl="0" eaLnBrk="1" latinLnBrk="0" hangingPunct="1">
-      <a:defRPr sz="1200" kern="1200">
+    <a:lvl7pPr marL="2743200" algn="l" defTabSz="914400" rtl="0">
+      <a:defRPr sz="1200">
         <a:solidFill>
           <a:schemeClr val="tx1"/>
         </a:solidFill>
@@ -467,8 +466,8 @@
         <a:cs typeface="+mn-cs"/>
       </a:defRPr>
     </a:lvl7pPr>
-    <a:lvl8pPr marL="3200400" algn="l" defTabSz="914400" rtl="0" eaLnBrk="1" latinLnBrk="0" hangingPunct="1">
-      <a:defRPr sz="1200" kern="1200">
+    <a:lvl8pPr marL="3200400" algn="l" defTabSz="914400" rtl="0">
+      <a:defRPr sz="1200">
         <a:solidFill>
           <a:schemeClr val="tx1"/>
         </a:solidFill>
@@ -477,8 +476,8 @@
         <a:cs typeface="+mn-cs"/>
       </a:defRPr>
     </a:lvl8pPr>
-    <a:lvl9pPr marL="3657600" algn="l" defTabSz="914400" rtl="0" eaLnBrk="1" latinLnBrk="0" hangingPunct="1">
-      <a:defRPr sz="1200" kern="1200">
+    <a:lvl9pPr marL="3657600" algn="l" defTabSz="914400" rtl="0">
+      <a:defRPr sz="1200">
         <a:solidFill>
           <a:schemeClr val="tx1"/>
         </a:solidFill>
@@ -492,15 +491,15 @@
 </file>
 
 <file path=ppt/notesSlides/notesSlide1.xml><?xml version="1.0" encoding="utf-8"?>
-<p:notes xmlns:a="http://schemas.openxmlformats.org/drawingml/2006/main" xmlns:r="http://schemas.openxmlformats.org/officeDocument/2006/relationships" xmlns:p="http://schemas.openxmlformats.org/presentationml/2006/main">
-  <p:cSld>
+<p:notes xmlns:a="http://schemas.openxmlformats.org/drawingml/2006/main" xmlns:r="http://schemas.openxmlformats.org/officeDocument/2006/relationships" xmlns:p="http://schemas.openxmlformats.org/presentationml/2006/main" xmlns:m="http://schemas.openxmlformats.org/officeDocument/2006/math" xmlns:w="http://schemas.openxmlformats.org/wordprocessingml/2006/main">
+  <p:cSld name="">
     <p:spTree>
       <p:nvGrpSpPr>
         <p:cNvPr id="1" name=""/>
         <p:cNvGrpSpPr/>
         <p:nvPr/>
       </p:nvGrpSpPr>
-      <p:grpSpPr>
+      <p:grpSpPr bwMode="auto">
         <a:xfrm>
           <a:off x="0" y="0"/>
           <a:ext cx="0" cy="0"/>
@@ -510,19 +509,19 @@
       </p:grpSpPr>
       <p:sp>
         <p:nvSpPr>
-          <p:cNvPr id="2" name="Espace réservé de l'image des diapositives 1"/>
-          <p:cNvSpPr>
-            <a:spLocks noGrp="1" noRot="1" noChangeAspect="1"/>
+          <p:cNvPr id="2" name="Slide Image Placeholder 1"/>
+          <p:cNvSpPr>
+            <a:spLocks noChangeAspect="1" noGrp="1" noRot="1"/>
           </p:cNvSpPr>
           <p:nvPr>
             <p:ph type="sldImg"/>
           </p:nvPr>
         </p:nvSpPr>
-        <p:spPr/>
-      </p:sp>
-      <p:sp>
-        <p:nvSpPr>
-          <p:cNvPr id="3" name="Espace réservé des notes 2"/>
+        <p:spPr bwMode="auto"/>
+      </p:sp>
+      <p:sp>
+        <p:nvSpPr>
+          <p:cNvPr id="3" name="Notes Placeholder 2"/>
           <p:cNvSpPr>
             <a:spLocks noGrp="1"/>
           </p:cNvSpPr>
@@ -530,47 +529,45 @@
             <p:ph type="body" idx="1"/>
           </p:nvPr>
         </p:nvSpPr>
-        <p:spPr/>
+        <p:spPr bwMode="auto"/>
         <p:txBody>
           <a:bodyPr/>
           <a:lstStyle/>
           <a:p>
             <a:pPr>
-              <a:buFont typeface="Calibri,Sans-Serif"/>
-              <a:buChar char="-"/>
-            </a:pPr>
-            <a:endParaRPr lang="en-US"/>
-          </a:p>
-        </p:txBody>
-      </p:sp>
-      <p:sp>
-        <p:nvSpPr>
-          <p:cNvPr id="4" name="Espace réservé du numéro de diapositive 3"/>
-          <p:cNvSpPr>
-            <a:spLocks noGrp="1"/>
-          </p:cNvSpPr>
-          <p:nvPr>
-            <p:ph type="sldNum" sz="quarter" idx="5"/>
-          </p:nvPr>
-        </p:nvSpPr>
-        <p:spPr/>
+              <a:defRPr/>
+            </a:pPr>
+            <a:endParaRPr/>
+          </a:p>
+        </p:txBody>
+      </p:sp>
+      <p:sp>
+        <p:nvSpPr>
+          <p:cNvPr id="4" name="Slide Number Placeholder 3"/>
+          <p:cNvSpPr>
+            <a:spLocks noGrp="1"/>
+          </p:cNvSpPr>
+          <p:nvPr>
+            <p:ph type="sldNum" sz="quarter" idx="10"/>
+          </p:nvPr>
+        </p:nvSpPr>
+        <p:spPr bwMode="auto"/>
         <p:txBody>
           <a:bodyPr/>
           <a:lstStyle/>
           <a:p>
-            <a:fld id="{ED9F3D29-5E90-42D2-A1A8-ECEBBDEB87CD}" type="slidenum">
-              <a:t>3</a:t>
+            <a:pPr>
+              <a:defRPr/>
+            </a:pPr>
+            <a:fld id="{290B6E6F-05FC-F686-AB07-F9150618EBD1}" type="slidenum">
+              <a:rPr/>
+              <a:t/>
             </a:fld>
-            <a:endParaRPr lang="fr-FR"/>
+            <a:endParaRPr/>
           </a:p>
         </p:txBody>
       </p:sp>
     </p:spTree>
-    <p:extLst>
-      <p:ext uri="{BB962C8B-B14F-4D97-AF65-F5344CB8AC3E}">
-        <p14:creationId xmlns:p14="http://schemas.microsoft.com/office/powerpoint/2010/main" val="1680998507"/>
-      </p:ext>
-    </p:extLst>
   </p:cSld>
   <p:clrMapOvr>
     <a:masterClrMapping/>
@@ -579,21 +576,15 @@
 </file>
 
 <file path=ppt/notesSlides/notesSlide2.xml><?xml version="1.0" encoding="utf-8"?>
-<p:notes xmlns:a="http://schemas.openxmlformats.org/drawingml/2006/main" xmlns:r="http://schemas.openxmlformats.org/officeDocument/2006/relationships" xmlns:p="http://schemas.openxmlformats.org/presentationml/2006/main">
-  <p:cSld>
+<p:notes xmlns:a="http://schemas.openxmlformats.org/drawingml/2006/main" xmlns:r="http://schemas.openxmlformats.org/officeDocument/2006/relationships" xmlns:p="http://schemas.openxmlformats.org/presentationml/2006/main" xmlns:m="http://schemas.openxmlformats.org/officeDocument/2006/math" xmlns:w="http://schemas.openxmlformats.org/wordprocessingml/2006/main">
+  <p:cSld name="">
     <p:spTree>
       <p:nvGrpSpPr>
-        <p:cNvPr id="1" name="">
-          <a:extLst>
-            <a:ext uri="{FF2B5EF4-FFF2-40B4-BE49-F238E27FC236}">
-              <a16:creationId xmlns:a16="http://schemas.microsoft.com/office/drawing/2014/main" id="{42558E0D-2460-C689-229E-B9D2ABABEDE0}"/>
-            </a:ext>
-          </a:extLst>
-        </p:cNvPr>
+        <p:cNvPr id="1" name=""/>
         <p:cNvGrpSpPr/>
         <p:nvPr/>
       </p:nvGrpSpPr>
-      <p:grpSpPr>
+      <p:grpSpPr bwMode="auto">
         <a:xfrm>
           <a:off x="0" y="0"/>
           <a:ext cx="0" cy="0"/>
@@ -603,31 +594,19 @@
       </p:grpSpPr>
       <p:sp>
         <p:nvSpPr>
-          <p:cNvPr id="2" name="Espace réservé de l'image des diapositives 1">
-            <a:extLst>
-              <a:ext uri="{FF2B5EF4-FFF2-40B4-BE49-F238E27FC236}">
-                <a16:creationId xmlns:a16="http://schemas.microsoft.com/office/drawing/2014/main" id="{77BDFF6D-E54D-338D-B2C9-B721ED7EFFAD}"/>
-              </a:ext>
-            </a:extLst>
-          </p:cNvPr>
-          <p:cNvSpPr>
-            <a:spLocks noGrp="1" noRot="1" noChangeAspect="1"/>
+          <p:cNvPr id="721205019" name="Espace réservé de l'image des diapositives 1"/>
+          <p:cNvSpPr>
+            <a:spLocks noChangeAspect="1" noGrp="1" noRot="1"/>
           </p:cNvSpPr>
           <p:nvPr>
             <p:ph type="sldImg"/>
           </p:nvPr>
         </p:nvSpPr>
-        <p:spPr/>
-      </p:sp>
-      <p:sp>
-        <p:nvSpPr>
-          <p:cNvPr id="3" name="Espace réservé des notes 2">
-            <a:extLst>
-              <a:ext uri="{FF2B5EF4-FFF2-40B4-BE49-F238E27FC236}">
-                <a16:creationId xmlns:a16="http://schemas.microsoft.com/office/drawing/2014/main" id="{9ABCDF0B-33F9-C924-11A6-E4F8D64D684E}"/>
-              </a:ext>
-            </a:extLst>
-          </p:cNvPr>
+        <p:spPr bwMode="auto"/>
+      </p:sp>
+      <p:sp>
+        <p:nvSpPr>
+          <p:cNvPr id="63576877" name="Espace réservé des notes 2"/>
           <p:cNvSpPr>
             <a:spLocks noGrp="1"/>
           </p:cNvSpPr>
@@ -635,24 +614,15 @@
             <p:ph type="body" idx="1"/>
           </p:nvPr>
         </p:nvSpPr>
-        <p:spPr/>
+        <p:spPr bwMode="auto"/>
         <p:txBody>
           <a:bodyPr/>
           <a:lstStyle/>
-          <a:p>
-            <a:pPr marL="285750" indent="-285750">
-              <a:buFont typeface="Calibri,Sans-Serif"/>
-              <a:buChar char="-"/>
-            </a:pPr>
-            <a:endParaRPr lang="en-US" b="1" dirty="0">
-              <a:ea typeface="Calibri"/>
-              <a:cs typeface="Calibri"/>
-            </a:endParaRPr>
-          </a:p>
           <a:p>
             <a:pPr>
               <a:buFont typeface="Calibri,Sans-Serif"/>
               <a:buChar char="-"/>
+              <a:defRPr/>
             </a:pPr>
             <a:endParaRPr lang="en-US"/>
           </a:p>
@@ -660,13 +630,7 @@
       </p:sp>
       <p:sp>
         <p:nvSpPr>
-          <p:cNvPr id="4" name="Espace réservé du numéro de diapositive 3">
-            <a:extLst>
-              <a:ext uri="{FF2B5EF4-FFF2-40B4-BE49-F238E27FC236}">
-                <a16:creationId xmlns:a16="http://schemas.microsoft.com/office/drawing/2014/main" id="{5DCA0828-1455-3CCE-D8AA-E5ECE8D60EC2}"/>
-              </a:ext>
-            </a:extLst>
-          </p:cNvPr>
+          <p:cNvPr id="1601554158" name="Espace réservé du numéro de diapositive 3"/>
           <p:cNvSpPr>
             <a:spLocks noGrp="1"/>
           </p:cNvSpPr>
@@ -674,24 +638,23 @@
             <p:ph type="sldNum" sz="quarter" idx="5"/>
           </p:nvPr>
         </p:nvSpPr>
-        <p:spPr/>
+        <p:spPr bwMode="auto"/>
         <p:txBody>
           <a:bodyPr/>
           <a:lstStyle/>
           <a:p>
+            <a:pPr>
+              <a:defRPr/>
+            </a:pPr>
             <a:fld id="{ED9F3D29-5E90-42D2-A1A8-ECEBBDEB87CD}" type="slidenum">
-              <a:t>4</a:t>
+              <a:rPr/>
+              <a:t>3</a:t>
             </a:fld>
             <a:endParaRPr lang="fr-FR"/>
           </a:p>
         </p:txBody>
       </p:sp>
     </p:spTree>
-    <p:extLst>
-      <p:ext uri="{BB962C8B-B14F-4D97-AF65-F5344CB8AC3E}">
-        <p14:creationId xmlns:p14="http://schemas.microsoft.com/office/powerpoint/2010/main" val="2147411353"/>
-      </p:ext>
-    </p:extLst>
   </p:cSld>
   <p:clrMapOvr>
     <a:masterClrMapping/>
@@ -700,21 +663,15 @@
 </file>
 
 <file path=ppt/notesSlides/notesSlide3.xml><?xml version="1.0" encoding="utf-8"?>
-<p:notes xmlns:a="http://schemas.openxmlformats.org/drawingml/2006/main" xmlns:r="http://schemas.openxmlformats.org/officeDocument/2006/relationships" xmlns:p="http://schemas.openxmlformats.org/presentationml/2006/main">
-  <p:cSld>
+<p:notes xmlns:a="http://schemas.openxmlformats.org/drawingml/2006/main" xmlns:r="http://schemas.openxmlformats.org/officeDocument/2006/relationships" xmlns:p="http://schemas.openxmlformats.org/presentationml/2006/main" xmlns:m="http://schemas.openxmlformats.org/officeDocument/2006/math" xmlns:w="http://schemas.openxmlformats.org/wordprocessingml/2006/main">
+  <p:cSld name="">
     <p:spTree>
       <p:nvGrpSpPr>
-        <p:cNvPr id="1" name="">
-          <a:extLst>
-            <a:ext uri="{FF2B5EF4-FFF2-40B4-BE49-F238E27FC236}">
-              <a16:creationId xmlns:a16="http://schemas.microsoft.com/office/drawing/2014/main" id="{B0100CFA-6680-4EEF-7841-70E7348F982A}"/>
-            </a:ext>
-          </a:extLst>
-        </p:cNvPr>
+        <p:cNvPr id="1" name=""/>
         <p:cNvGrpSpPr/>
         <p:nvPr/>
       </p:nvGrpSpPr>
-      <p:grpSpPr>
+      <p:grpSpPr bwMode="auto">
         <a:xfrm>
           <a:off x="0" y="0"/>
           <a:ext cx="0" cy="0"/>
@@ -724,31 +681,19 @@
       </p:grpSpPr>
       <p:sp>
         <p:nvSpPr>
-          <p:cNvPr id="2" name="Espace réservé de l'image des diapositives 1">
-            <a:extLst>
-              <a:ext uri="{FF2B5EF4-FFF2-40B4-BE49-F238E27FC236}">
-                <a16:creationId xmlns:a16="http://schemas.microsoft.com/office/drawing/2014/main" id="{99B35AB5-240D-C5E3-BC5A-DDEB371964B8}"/>
-              </a:ext>
-            </a:extLst>
-          </p:cNvPr>
-          <p:cNvSpPr>
-            <a:spLocks noGrp="1" noRot="1" noChangeAspect="1"/>
+          <p:cNvPr id="1084345699" name="Espace réservé de l'image des diapositives 1"/>
+          <p:cNvSpPr>
+            <a:spLocks noChangeAspect="1" noGrp="1" noRot="1"/>
           </p:cNvSpPr>
           <p:nvPr>
             <p:ph type="sldImg"/>
           </p:nvPr>
         </p:nvSpPr>
-        <p:spPr/>
-      </p:sp>
-      <p:sp>
-        <p:nvSpPr>
-          <p:cNvPr id="3" name="Espace réservé des notes 2">
-            <a:extLst>
-              <a:ext uri="{FF2B5EF4-FFF2-40B4-BE49-F238E27FC236}">
-                <a16:creationId xmlns:a16="http://schemas.microsoft.com/office/drawing/2014/main" id="{5D8234C0-377D-B543-AC09-4D7ACEE56E40}"/>
-              </a:ext>
-            </a:extLst>
-          </p:cNvPr>
+        <p:spPr bwMode="auto"/>
+      </p:sp>
+      <p:sp>
+        <p:nvSpPr>
+          <p:cNvPr id="1302958486" name="Espace réservé des notes 2"/>
           <p:cNvSpPr>
             <a:spLocks noGrp="1"/>
           </p:cNvSpPr>
@@ -756,7 +701,7 @@
             <p:ph type="body" idx="1"/>
           </p:nvPr>
         </p:nvSpPr>
-        <p:spPr/>
+        <p:spPr bwMode="auto"/>
         <p:txBody>
           <a:bodyPr/>
           <a:lstStyle/>
@@ -764,23 +709,26 @@
             <a:pPr marL="285750" indent="-285750">
               <a:buFont typeface="Calibri,Sans-Serif"/>
               <a:buChar char="-"/>
-            </a:pPr>
-            <a:endParaRPr lang="en-US" b="1" dirty="0">
+              <a:defRPr/>
+            </a:pPr>
+            <a:endParaRPr lang="en-US" b="1">
               <a:ea typeface="Calibri"/>
               <a:cs typeface="Calibri"/>
             </a:endParaRPr>
           </a:p>
-        </p:txBody>
-      </p:sp>
-      <p:sp>
-        <p:nvSpPr>
-          <p:cNvPr id="4" name="Espace réservé du numéro de diapositive 3">
-            <a:extLst>
-              <a:ext uri="{FF2B5EF4-FFF2-40B4-BE49-F238E27FC236}">
-                <a16:creationId xmlns:a16="http://schemas.microsoft.com/office/drawing/2014/main" id="{E572CFBE-1C56-FB78-0FA1-4DB5E86CA015}"/>
-              </a:ext>
-            </a:extLst>
-          </p:cNvPr>
+          <a:p>
+            <a:pPr>
+              <a:buFont typeface="Calibri,Sans-Serif"/>
+              <a:buChar char="-"/>
+              <a:defRPr/>
+            </a:pPr>
+            <a:endParaRPr lang="en-US"/>
+          </a:p>
+        </p:txBody>
+      </p:sp>
+      <p:sp>
+        <p:nvSpPr>
+          <p:cNvPr id="1405227170" name="Espace réservé du numéro de diapositive 3"/>
           <p:cNvSpPr>
             <a:spLocks noGrp="1"/>
           </p:cNvSpPr>
@@ -788,24 +736,23 @@
             <p:ph type="sldNum" sz="quarter" idx="5"/>
           </p:nvPr>
         </p:nvSpPr>
-        <p:spPr/>
+        <p:spPr bwMode="auto"/>
         <p:txBody>
           <a:bodyPr/>
           <a:lstStyle/>
           <a:p>
+            <a:pPr>
+              <a:defRPr/>
+            </a:pPr>
             <a:fld id="{ED9F3D29-5E90-42D2-A1A8-ECEBBDEB87CD}" type="slidenum">
-              <a:t>5</a:t>
+              <a:rPr/>
+              <a:t>4</a:t>
             </a:fld>
             <a:endParaRPr lang="fr-FR"/>
           </a:p>
         </p:txBody>
       </p:sp>
     </p:spTree>
-    <p:extLst>
-      <p:ext uri="{BB962C8B-B14F-4D97-AF65-F5344CB8AC3E}">
-        <p14:creationId xmlns:p14="http://schemas.microsoft.com/office/powerpoint/2010/main" val="2439994301"/>
-      </p:ext>
-    </p:extLst>
   </p:cSld>
   <p:clrMapOvr>
     <a:masterClrMapping/>
@@ -814,21 +761,15 @@
 </file>
 
 <file path=ppt/notesSlides/notesSlide4.xml><?xml version="1.0" encoding="utf-8"?>
-<p:notes xmlns:a="http://schemas.openxmlformats.org/drawingml/2006/main" xmlns:r="http://schemas.openxmlformats.org/officeDocument/2006/relationships" xmlns:p="http://schemas.openxmlformats.org/presentationml/2006/main">
-  <p:cSld>
+<p:notes xmlns:a="http://schemas.openxmlformats.org/drawingml/2006/main" xmlns:r="http://schemas.openxmlformats.org/officeDocument/2006/relationships" xmlns:p="http://schemas.openxmlformats.org/presentationml/2006/main" xmlns:m="http://schemas.openxmlformats.org/officeDocument/2006/math" xmlns:w="http://schemas.openxmlformats.org/wordprocessingml/2006/main">
+  <p:cSld name="">
     <p:spTree>
       <p:nvGrpSpPr>
-        <p:cNvPr id="1" name="">
-          <a:extLst>
-            <a:ext uri="{FF2B5EF4-FFF2-40B4-BE49-F238E27FC236}">
-              <a16:creationId xmlns:a16="http://schemas.microsoft.com/office/drawing/2014/main" id="{8AF89929-5A4F-5754-6A7D-FCF0CD0C4941}"/>
-            </a:ext>
-          </a:extLst>
-        </p:cNvPr>
+        <p:cNvPr id="1" name=""/>
         <p:cNvGrpSpPr/>
         <p:nvPr/>
       </p:nvGrpSpPr>
-      <p:grpSpPr>
+      <p:grpSpPr bwMode="auto">
         <a:xfrm>
           <a:off x="0" y="0"/>
           <a:ext cx="0" cy="0"/>
@@ -838,31 +779,19 @@
       </p:grpSpPr>
       <p:sp>
         <p:nvSpPr>
-          <p:cNvPr id="2" name="Espace réservé de l'image des diapositives 1">
-            <a:extLst>
-              <a:ext uri="{FF2B5EF4-FFF2-40B4-BE49-F238E27FC236}">
-                <a16:creationId xmlns:a16="http://schemas.microsoft.com/office/drawing/2014/main" id="{68A3F3D7-DD5D-5F9D-794E-0BF0DC6A572F}"/>
-              </a:ext>
-            </a:extLst>
-          </p:cNvPr>
-          <p:cNvSpPr>
-            <a:spLocks noGrp="1" noRot="1" noChangeAspect="1"/>
+          <p:cNvPr id="1929439877" name="Espace réservé de l'image des diapositives 1"/>
+          <p:cNvSpPr>
+            <a:spLocks noChangeAspect="1" noGrp="1" noRot="1"/>
           </p:cNvSpPr>
           <p:nvPr>
             <p:ph type="sldImg"/>
           </p:nvPr>
         </p:nvSpPr>
-        <p:spPr/>
-      </p:sp>
-      <p:sp>
-        <p:nvSpPr>
-          <p:cNvPr id="3" name="Espace réservé des notes 2">
-            <a:extLst>
-              <a:ext uri="{FF2B5EF4-FFF2-40B4-BE49-F238E27FC236}">
-                <a16:creationId xmlns:a16="http://schemas.microsoft.com/office/drawing/2014/main" id="{60A5CE36-BB43-4DEB-B4B8-CA3F64B12ED8}"/>
-              </a:ext>
-            </a:extLst>
-          </p:cNvPr>
+        <p:spPr bwMode="auto"/>
+      </p:sp>
+      <p:sp>
+        <p:nvSpPr>
+          <p:cNvPr id="546795849" name="Espace réservé des notes 2"/>
           <p:cNvSpPr>
             <a:spLocks noGrp="1"/>
           </p:cNvSpPr>
@@ -870,7 +799,7 @@
             <p:ph type="body" idx="1"/>
           </p:nvPr>
         </p:nvSpPr>
-        <p:spPr/>
+        <p:spPr bwMode="auto"/>
         <p:txBody>
           <a:bodyPr/>
           <a:lstStyle/>
@@ -878,8 +807,9 @@
             <a:pPr marL="285750" indent="-285750">
               <a:buFont typeface="Calibri,Sans-Serif"/>
               <a:buChar char="-"/>
-            </a:pPr>
-            <a:endParaRPr lang="en-US" b="1" dirty="0">
+              <a:defRPr/>
+            </a:pPr>
+            <a:endParaRPr lang="en-US" b="1">
               <a:ea typeface="Calibri"/>
               <a:cs typeface="Calibri"/>
             </a:endParaRPr>
@@ -888,13 +818,7 @@
       </p:sp>
       <p:sp>
         <p:nvSpPr>
-          <p:cNvPr id="4" name="Espace réservé du numéro de diapositive 3">
-            <a:extLst>
-              <a:ext uri="{FF2B5EF4-FFF2-40B4-BE49-F238E27FC236}">
-                <a16:creationId xmlns:a16="http://schemas.microsoft.com/office/drawing/2014/main" id="{19A32671-2B9D-D4C0-2C8E-2043D26011E9}"/>
-              </a:ext>
-            </a:extLst>
-          </p:cNvPr>
+          <p:cNvPr id="1236811047" name="Espace réservé du numéro de diapositive 3"/>
           <p:cNvSpPr>
             <a:spLocks noGrp="1"/>
           </p:cNvSpPr>
@@ -902,24 +826,23 @@
             <p:ph type="sldNum" sz="quarter" idx="5"/>
           </p:nvPr>
         </p:nvSpPr>
-        <p:spPr/>
+        <p:spPr bwMode="auto"/>
         <p:txBody>
           <a:bodyPr/>
           <a:lstStyle/>
           <a:p>
+            <a:pPr>
+              <a:defRPr/>
+            </a:pPr>
             <a:fld id="{ED9F3D29-5E90-42D2-A1A8-ECEBBDEB87CD}" type="slidenum">
-              <a:t>6</a:t>
+              <a:rPr/>
+              <a:t>5</a:t>
             </a:fld>
             <a:endParaRPr lang="fr-FR"/>
           </a:p>
         </p:txBody>
       </p:sp>
     </p:spTree>
-    <p:extLst>
-      <p:ext uri="{BB962C8B-B14F-4D97-AF65-F5344CB8AC3E}">
-        <p14:creationId xmlns:p14="http://schemas.microsoft.com/office/powerpoint/2010/main" val="3680945668"/>
-      </p:ext>
-    </p:extLst>
   </p:cSld>
   <p:clrMapOvr>
     <a:masterClrMapping/>
@@ -928,21 +851,15 @@
 </file>
 
 <file path=ppt/notesSlides/notesSlide5.xml><?xml version="1.0" encoding="utf-8"?>
-<p:notes xmlns:a="http://schemas.openxmlformats.org/drawingml/2006/main" xmlns:r="http://schemas.openxmlformats.org/officeDocument/2006/relationships" xmlns:p="http://schemas.openxmlformats.org/presentationml/2006/main">
-  <p:cSld>
+<p:notes xmlns:a="http://schemas.openxmlformats.org/drawingml/2006/main" xmlns:r="http://schemas.openxmlformats.org/officeDocument/2006/relationships" xmlns:p="http://schemas.openxmlformats.org/presentationml/2006/main" xmlns:m="http://schemas.openxmlformats.org/officeDocument/2006/math" xmlns:w="http://schemas.openxmlformats.org/wordprocessingml/2006/main">
+  <p:cSld name="">
     <p:spTree>
       <p:nvGrpSpPr>
-        <p:cNvPr id="1" name="">
-          <a:extLst>
-            <a:ext uri="{FF2B5EF4-FFF2-40B4-BE49-F238E27FC236}">
-              <a16:creationId xmlns:a16="http://schemas.microsoft.com/office/drawing/2014/main" id="{A8BFD476-5991-F7B6-2E8A-B2625F60FF0F}"/>
-            </a:ext>
-          </a:extLst>
-        </p:cNvPr>
+        <p:cNvPr id="1" name=""/>
         <p:cNvGrpSpPr/>
         <p:nvPr/>
       </p:nvGrpSpPr>
-      <p:grpSpPr>
+      <p:grpSpPr bwMode="auto">
         <a:xfrm>
           <a:off x="0" y="0"/>
           <a:ext cx="0" cy="0"/>
@@ -952,31 +869,19 @@
       </p:grpSpPr>
       <p:sp>
         <p:nvSpPr>
-          <p:cNvPr id="2" name="Espace réservé de l'image des diapositives 1">
-            <a:extLst>
-              <a:ext uri="{FF2B5EF4-FFF2-40B4-BE49-F238E27FC236}">
-                <a16:creationId xmlns:a16="http://schemas.microsoft.com/office/drawing/2014/main" id="{CF69176F-50CB-AA02-93B8-B41083538D19}"/>
-              </a:ext>
-            </a:extLst>
-          </p:cNvPr>
-          <p:cNvSpPr>
-            <a:spLocks noGrp="1" noRot="1" noChangeAspect="1"/>
+          <p:cNvPr id="921420717" name="Espace réservé de l'image des diapositives 1"/>
+          <p:cNvSpPr>
+            <a:spLocks noChangeAspect="1" noGrp="1" noRot="1"/>
           </p:cNvSpPr>
           <p:nvPr>
             <p:ph type="sldImg"/>
           </p:nvPr>
         </p:nvSpPr>
-        <p:spPr/>
-      </p:sp>
-      <p:sp>
-        <p:nvSpPr>
-          <p:cNvPr id="3" name="Espace réservé des notes 2">
-            <a:extLst>
-              <a:ext uri="{FF2B5EF4-FFF2-40B4-BE49-F238E27FC236}">
-                <a16:creationId xmlns:a16="http://schemas.microsoft.com/office/drawing/2014/main" id="{0DB20828-7085-7F9B-6F07-EC131838D12F}"/>
-              </a:ext>
-            </a:extLst>
-          </p:cNvPr>
+        <p:spPr bwMode="auto"/>
+      </p:sp>
+      <p:sp>
+        <p:nvSpPr>
+          <p:cNvPr id="696593637" name="Espace réservé des notes 2"/>
           <p:cNvSpPr>
             <a:spLocks noGrp="1"/>
           </p:cNvSpPr>
@@ -984,7 +889,7 @@
             <p:ph type="body" idx="1"/>
           </p:nvPr>
         </p:nvSpPr>
-        <p:spPr/>
+        <p:spPr bwMode="auto"/>
         <p:txBody>
           <a:bodyPr/>
           <a:lstStyle/>
@@ -992,8 +897,9 @@
             <a:pPr marL="285750" indent="-285750">
               <a:buFont typeface="Calibri,Sans-Serif"/>
               <a:buChar char="-"/>
-            </a:pPr>
-            <a:endParaRPr lang="en-US" b="1" dirty="0">
+              <a:defRPr/>
+            </a:pPr>
+            <a:endParaRPr lang="en-US" b="1">
               <a:ea typeface="Calibri"/>
               <a:cs typeface="Calibri"/>
             </a:endParaRPr>
@@ -1002,13 +908,7 @@
       </p:sp>
       <p:sp>
         <p:nvSpPr>
-          <p:cNvPr id="4" name="Espace réservé du numéro de diapositive 3">
-            <a:extLst>
-              <a:ext uri="{FF2B5EF4-FFF2-40B4-BE49-F238E27FC236}">
-                <a16:creationId xmlns:a16="http://schemas.microsoft.com/office/drawing/2014/main" id="{722B832E-2C9F-61A2-B4EF-FC4AA9C39CA0}"/>
-              </a:ext>
-            </a:extLst>
-          </p:cNvPr>
+          <p:cNvPr id="610195464" name="Espace réservé du numéro de diapositive 3"/>
           <p:cNvSpPr>
             <a:spLocks noGrp="1"/>
           </p:cNvSpPr>
@@ -1016,12 +916,16 @@
             <p:ph type="sldNum" sz="quarter" idx="5"/>
           </p:nvPr>
         </p:nvSpPr>
-        <p:spPr/>
+        <p:spPr bwMode="auto"/>
         <p:txBody>
           <a:bodyPr/>
           <a:lstStyle/>
           <a:p>
+            <a:pPr>
+              <a:defRPr/>
+            </a:pPr>
             <a:fld id="{ED9F3D29-5E90-42D2-A1A8-ECEBBDEB87CD}" type="slidenum">
+              <a:rPr/>
               <a:t>6</a:t>
             </a:fld>
             <a:endParaRPr lang="fr-FR"/>
@@ -1029,11 +933,6 @@
         </p:txBody>
       </p:sp>
     </p:spTree>
-    <p:extLst>
-      <p:ext uri="{BB962C8B-B14F-4D97-AF65-F5344CB8AC3E}">
-        <p14:creationId xmlns:p14="http://schemas.microsoft.com/office/powerpoint/2010/main" val="4025957032"/>
-      </p:ext>
-    </p:extLst>
   </p:cSld>
   <p:clrMapOvr>
     <a:masterClrMapping/>
@@ -1042,21 +941,15 @@
 </file>
 
 <file path=ppt/notesSlides/notesSlide6.xml><?xml version="1.0" encoding="utf-8"?>
-<p:notes xmlns:a="http://schemas.openxmlformats.org/drawingml/2006/main" xmlns:r="http://schemas.openxmlformats.org/officeDocument/2006/relationships" xmlns:p="http://schemas.openxmlformats.org/presentationml/2006/main">
-  <p:cSld>
+<p:notes xmlns:a="http://schemas.openxmlformats.org/drawingml/2006/main" xmlns:r="http://schemas.openxmlformats.org/officeDocument/2006/relationships" xmlns:p="http://schemas.openxmlformats.org/presentationml/2006/main" xmlns:m="http://schemas.openxmlformats.org/officeDocument/2006/math" xmlns:w="http://schemas.openxmlformats.org/wordprocessingml/2006/main">
+  <p:cSld name="">
     <p:spTree>
       <p:nvGrpSpPr>
-        <p:cNvPr id="1" name="">
-          <a:extLst>
-            <a:ext uri="{FF2B5EF4-FFF2-40B4-BE49-F238E27FC236}">
-              <a16:creationId xmlns:a16="http://schemas.microsoft.com/office/drawing/2014/main" id="{09AB2460-4E1E-6D42-C105-FCF1052E6B09}"/>
-            </a:ext>
-          </a:extLst>
-        </p:cNvPr>
+        <p:cNvPr id="1" name=""/>
         <p:cNvGrpSpPr/>
         <p:nvPr/>
       </p:nvGrpSpPr>
-      <p:grpSpPr>
+      <p:grpSpPr bwMode="auto">
         <a:xfrm>
           <a:off x="0" y="0"/>
           <a:ext cx="0" cy="0"/>
@@ -1066,31 +959,19 @@
       </p:grpSpPr>
       <p:sp>
         <p:nvSpPr>
-          <p:cNvPr id="2" name="Espace réservé de l'image des diapositives 1">
-            <a:extLst>
-              <a:ext uri="{FF2B5EF4-FFF2-40B4-BE49-F238E27FC236}">
-                <a16:creationId xmlns:a16="http://schemas.microsoft.com/office/drawing/2014/main" id="{638D4E13-F035-7B9C-2686-7A7FD9A2806A}"/>
-              </a:ext>
-            </a:extLst>
-          </p:cNvPr>
-          <p:cNvSpPr>
-            <a:spLocks noGrp="1" noRot="1" noChangeAspect="1"/>
+          <p:cNvPr id="858539536" name="Espace réservé de l'image des diapositives 1"/>
+          <p:cNvSpPr>
+            <a:spLocks noChangeAspect="1" noGrp="1" noRot="1"/>
           </p:cNvSpPr>
           <p:nvPr>
             <p:ph type="sldImg"/>
           </p:nvPr>
         </p:nvSpPr>
-        <p:spPr/>
-      </p:sp>
-      <p:sp>
-        <p:nvSpPr>
-          <p:cNvPr id="3" name="Espace réservé des notes 2">
-            <a:extLst>
-              <a:ext uri="{FF2B5EF4-FFF2-40B4-BE49-F238E27FC236}">
-                <a16:creationId xmlns:a16="http://schemas.microsoft.com/office/drawing/2014/main" id="{C72EC966-67A5-6566-CC02-035BAF207D47}"/>
-              </a:ext>
-            </a:extLst>
-          </p:cNvPr>
+        <p:spPr bwMode="auto"/>
+      </p:sp>
+      <p:sp>
+        <p:nvSpPr>
+          <p:cNvPr id="1966483531" name="Espace réservé des notes 2"/>
           <p:cNvSpPr>
             <a:spLocks noGrp="1"/>
           </p:cNvSpPr>
@@ -1098,7 +979,7 @@
             <p:ph type="body" idx="1"/>
           </p:nvPr>
         </p:nvSpPr>
-        <p:spPr/>
+        <p:spPr bwMode="auto"/>
         <p:txBody>
           <a:bodyPr/>
           <a:lstStyle/>
@@ -1106,8 +987,9 @@
             <a:pPr marL="285750" indent="-285750">
               <a:buFont typeface="Calibri,Sans-Serif"/>
               <a:buChar char="-"/>
-            </a:pPr>
-            <a:endParaRPr lang="en-US" b="1" dirty="0">
+              <a:defRPr/>
+            </a:pPr>
+            <a:endParaRPr lang="en-US" b="1">
               <a:ea typeface="Calibri"/>
               <a:cs typeface="Calibri"/>
             </a:endParaRPr>
@@ -1116,6 +998,7 @@
             <a:pPr>
               <a:buFont typeface="Calibri,Sans-Serif"/>
               <a:buChar char="-"/>
+              <a:defRPr/>
             </a:pPr>
             <a:endParaRPr lang="en-US"/>
           </a:p>
@@ -1123,13 +1006,7 @@
       </p:sp>
       <p:sp>
         <p:nvSpPr>
-          <p:cNvPr id="4" name="Espace réservé du numéro de diapositive 3">
-            <a:extLst>
-              <a:ext uri="{FF2B5EF4-FFF2-40B4-BE49-F238E27FC236}">
-                <a16:creationId xmlns:a16="http://schemas.microsoft.com/office/drawing/2014/main" id="{49C5205F-9D7B-5DE9-B988-9827BAEB1216}"/>
-              </a:ext>
-            </a:extLst>
-          </p:cNvPr>
+          <p:cNvPr id="127620805" name="Espace réservé du numéro de diapositive 3"/>
           <p:cNvSpPr>
             <a:spLocks noGrp="1"/>
           </p:cNvSpPr>
@@ -1137,12 +1014,16 @@
             <p:ph type="sldNum" sz="quarter" idx="5"/>
           </p:nvPr>
         </p:nvSpPr>
-        <p:spPr/>
+        <p:spPr bwMode="auto"/>
         <p:txBody>
           <a:bodyPr/>
           <a:lstStyle/>
           <a:p>
+            <a:pPr>
+              <a:defRPr/>
+            </a:pPr>
             <a:fld id="{ED9F3D29-5E90-42D2-A1A8-ECEBBDEB87CD}" type="slidenum">
+              <a:rPr/>
               <a:t>7</a:t>
             </a:fld>
             <a:endParaRPr lang="fr-FR"/>
@@ -1150,11 +1031,6 @@
         </p:txBody>
       </p:sp>
     </p:spTree>
-    <p:extLst>
-      <p:ext uri="{BB962C8B-B14F-4D97-AF65-F5344CB8AC3E}">
-        <p14:creationId xmlns:p14="http://schemas.microsoft.com/office/powerpoint/2010/main" val="4096269804"/>
-      </p:ext>
-    </p:extLst>
   </p:cSld>
   <p:clrMapOvr>
     <a:masterClrMapping/>
@@ -1163,21 +1039,15 @@
 </file>
 
 <file path=ppt/notesSlides/notesSlide7.xml><?xml version="1.0" encoding="utf-8"?>
-<p:notes xmlns:a="http://schemas.openxmlformats.org/drawingml/2006/main" xmlns:r="http://schemas.openxmlformats.org/officeDocument/2006/relationships" xmlns:p="http://schemas.openxmlformats.org/presentationml/2006/main">
-  <p:cSld>
+<p:notes xmlns:a="http://schemas.openxmlformats.org/drawingml/2006/main" xmlns:r="http://schemas.openxmlformats.org/officeDocument/2006/relationships" xmlns:p="http://schemas.openxmlformats.org/presentationml/2006/main" xmlns:m="http://schemas.openxmlformats.org/officeDocument/2006/math" xmlns:w="http://schemas.openxmlformats.org/wordprocessingml/2006/main">
+  <p:cSld name="">
     <p:spTree>
       <p:nvGrpSpPr>
-        <p:cNvPr id="1" name="">
-          <a:extLst>
-            <a:ext uri="{FF2B5EF4-FFF2-40B4-BE49-F238E27FC236}">
-              <a16:creationId xmlns:a16="http://schemas.microsoft.com/office/drawing/2014/main" id="{75837BCA-2EFE-EB47-764C-234218AB19D1}"/>
-            </a:ext>
-          </a:extLst>
-        </p:cNvPr>
+        <p:cNvPr id="1" name=""/>
         <p:cNvGrpSpPr/>
         <p:nvPr/>
       </p:nvGrpSpPr>
-      <p:grpSpPr>
+      <p:grpSpPr bwMode="auto">
         <a:xfrm>
           <a:off x="0" y="0"/>
           <a:ext cx="0" cy="0"/>
@@ -1187,31 +1057,19 @@
       </p:grpSpPr>
       <p:sp>
         <p:nvSpPr>
-          <p:cNvPr id="2" name="Espace réservé de l'image des diapositives 1">
-            <a:extLst>
-              <a:ext uri="{FF2B5EF4-FFF2-40B4-BE49-F238E27FC236}">
-                <a16:creationId xmlns:a16="http://schemas.microsoft.com/office/drawing/2014/main" id="{7EF83FFE-E824-9FFF-874C-3E090DC31980}"/>
-              </a:ext>
-            </a:extLst>
-          </p:cNvPr>
-          <p:cNvSpPr>
-            <a:spLocks noGrp="1" noRot="1" noChangeAspect="1"/>
+          <p:cNvPr id="894621977" name="Espace réservé de l'image des diapositives 1"/>
+          <p:cNvSpPr>
+            <a:spLocks noChangeAspect="1" noGrp="1" noRot="1"/>
           </p:cNvSpPr>
           <p:nvPr>
             <p:ph type="sldImg"/>
           </p:nvPr>
         </p:nvSpPr>
-        <p:spPr/>
-      </p:sp>
-      <p:sp>
-        <p:nvSpPr>
-          <p:cNvPr id="3" name="Espace réservé des notes 2">
-            <a:extLst>
-              <a:ext uri="{FF2B5EF4-FFF2-40B4-BE49-F238E27FC236}">
-                <a16:creationId xmlns:a16="http://schemas.microsoft.com/office/drawing/2014/main" id="{08637522-2941-27B2-B4CA-8E900761774F}"/>
-              </a:ext>
-            </a:extLst>
-          </p:cNvPr>
+        <p:spPr bwMode="auto"/>
+      </p:sp>
+      <p:sp>
+        <p:nvSpPr>
+          <p:cNvPr id="562598974" name="Espace réservé des notes 2"/>
           <p:cNvSpPr>
             <a:spLocks noGrp="1"/>
           </p:cNvSpPr>
@@ -1219,12 +1077,15 @@
             <p:ph type="body" idx="1"/>
           </p:nvPr>
         </p:nvSpPr>
-        <p:spPr/>
+        <p:spPr bwMode="auto"/>
         <p:txBody>
           <a:bodyPr/>
           <a:lstStyle/>
           <a:p>
-            <a:endParaRPr lang="en-US" b="1" dirty="0">
+            <a:pPr>
+              <a:defRPr/>
+            </a:pPr>
+            <a:endParaRPr lang="en-US" b="1">
               <a:ea typeface="Calibri"/>
               <a:cs typeface="Calibri"/>
             </a:endParaRPr>
@@ -1233,6 +1094,7 @@
             <a:pPr>
               <a:buFont typeface="Calibri,Sans-Serif"/>
               <a:buChar char="-"/>
+              <a:defRPr/>
             </a:pPr>
             <a:endParaRPr lang="en-US"/>
           </a:p>
@@ -1240,13 +1102,7 @@
       </p:sp>
       <p:sp>
         <p:nvSpPr>
-          <p:cNvPr id="4" name="Espace réservé du numéro de diapositive 3">
-            <a:extLst>
-              <a:ext uri="{FF2B5EF4-FFF2-40B4-BE49-F238E27FC236}">
-                <a16:creationId xmlns:a16="http://schemas.microsoft.com/office/drawing/2014/main" id="{86B7F545-8914-9D30-B59E-472958EA3EF6}"/>
-              </a:ext>
-            </a:extLst>
-          </p:cNvPr>
+          <p:cNvPr id="358815075" name="Espace réservé du numéro de diapositive 3"/>
           <p:cNvSpPr>
             <a:spLocks noGrp="1"/>
           </p:cNvSpPr>
@@ -1254,12 +1110,16 @@
             <p:ph type="sldNum" sz="quarter" idx="5"/>
           </p:nvPr>
         </p:nvSpPr>
-        <p:spPr/>
+        <p:spPr bwMode="auto"/>
         <p:txBody>
           <a:bodyPr/>
           <a:lstStyle/>
           <a:p>
+            <a:pPr>
+              <a:defRPr/>
+            </a:pPr>
             <a:fld id="{ED9F3D29-5E90-42D2-A1A8-ECEBBDEB87CD}" type="slidenum">
+              <a:rPr/>
               <a:t>8</a:t>
             </a:fld>
             <a:endParaRPr lang="fr-FR"/>
@@ -1267,11 +1127,6 @@
         </p:txBody>
       </p:sp>
     </p:spTree>
-    <p:extLst>
-      <p:ext uri="{BB962C8B-B14F-4D97-AF65-F5344CB8AC3E}">
-        <p14:creationId xmlns:p14="http://schemas.microsoft.com/office/powerpoint/2010/main" val="2959177119"/>
-      </p:ext>
-    </p:extLst>
   </p:cSld>
   <p:clrMapOvr>
     <a:masterClrMapping/>
@@ -1280,7 +1135,7 @@
 </file>
 
 <file path=ppt/slideLayouts/slideLayout1.xml><?xml version="1.0" encoding="utf-8"?>
-<p:sldLayout xmlns:a="http://schemas.openxmlformats.org/drawingml/2006/main" xmlns:r="http://schemas.openxmlformats.org/officeDocument/2006/relationships" xmlns:p="http://schemas.openxmlformats.org/presentationml/2006/main" type="title" preserve="1">
+<p:sldLayout xmlns:a="http://schemas.openxmlformats.org/drawingml/2006/main" xmlns:r="http://schemas.openxmlformats.org/officeDocument/2006/relationships" xmlns:p="http://schemas.openxmlformats.org/presentationml/2006/main" xmlns:m="http://schemas.openxmlformats.org/officeDocument/2006/math" xmlns:w="http://schemas.openxmlformats.org/wordprocessingml/2006/main" matchingName="" preserve="1" showMasterPhAnim="0" showMasterSp="1" type="title" userDrawn="1">
   <p:cSld name="Diapositive de titre">
     <p:spTree>
       <p:nvGrpSpPr>
@@ -1288,7 +1143,7 @@
         <p:cNvGrpSpPr/>
         <p:nvPr/>
       </p:nvGrpSpPr>
-      <p:grpSpPr>
+      <p:grpSpPr bwMode="auto">
         <a:xfrm>
           <a:off x="0" y="0"/>
           <a:ext cx="0" cy="0"/>
@@ -1298,7 +1153,7 @@
       </p:grpSpPr>
       <p:sp>
         <p:nvSpPr>
-          <p:cNvPr id="2" name="Titre 1"/>
+          <p:cNvPr id="1082904227" name="Titre 1"/>
           <p:cNvSpPr>
             <a:spLocks noGrp="1"/>
           </p:cNvSpPr>
@@ -1306,7 +1161,7 @@
             <p:ph type="ctrTitle"/>
           </p:nvPr>
         </p:nvSpPr>
-        <p:spPr>
+        <p:spPr bwMode="auto">
           <a:xfrm>
             <a:off x="1524000" y="1122363"/>
             <a:ext cx="9144000" cy="2387600"/>
@@ -1320,16 +1175,20 @@
             </a:lvl1pPr>
           </a:lstStyle>
           <a:p>
+            <a:pPr>
+              <a:defRPr/>
+            </a:pPr>
             <a:r>
               <a:rPr lang="fr-FR"/>
               <a:t>Modifiez le style du titre</a:t>
             </a:r>
-          </a:p>
-        </p:txBody>
-      </p:sp>
-      <p:sp>
-        <p:nvSpPr>
-          <p:cNvPr id="3" name="Sous-titre 2"/>
+            <a:endParaRPr/>
+          </a:p>
+        </p:txBody>
+      </p:sp>
+      <p:sp>
+        <p:nvSpPr>
+          <p:cNvPr id="1164032582" name="Sous-titre 2"/>
           <p:cNvSpPr>
             <a:spLocks noGrp="1"/>
           </p:cNvSpPr>
@@ -1337,7 +1196,7 @@
             <p:ph type="subTitle" idx="1"/>
           </p:nvPr>
         </p:nvSpPr>
-        <p:spPr>
+        <p:spPr bwMode="auto">
           <a:xfrm>
             <a:off x="1524000" y="3602038"/>
             <a:ext cx="9144000" cy="1655762"/>
@@ -1384,16 +1243,20 @@
             </a:lvl9pPr>
           </a:lstStyle>
           <a:p>
+            <a:pPr>
+              <a:defRPr/>
+            </a:pPr>
             <a:r>
               <a:rPr lang="fr-FR"/>
               <a:t>Modifiez le style des sous-titres du masque</a:t>
             </a:r>
-          </a:p>
-        </p:txBody>
-      </p:sp>
-      <p:sp>
-        <p:nvSpPr>
-          <p:cNvPr id="4" name="Espace réservé de la date 3"/>
+            <a:endParaRPr/>
+          </a:p>
+        </p:txBody>
+      </p:sp>
+      <p:sp>
+        <p:nvSpPr>
+          <p:cNvPr id="2070326188" name="Espace réservé de la date 3"/>
           <p:cNvSpPr>
             <a:spLocks noGrp="1"/>
           </p:cNvSpPr>
@@ -1401,13 +1264,16 @@
             <p:ph type="dt" sz="half" idx="10"/>
           </p:nvPr>
         </p:nvSpPr>
-        <p:spPr/>
+        <p:spPr bwMode="auto"/>
         <p:txBody>
           <a:bodyPr/>
           <a:lstStyle/>
           <a:p>
+            <a:pPr>
+              <a:defRPr/>
+            </a:pPr>
             <a:fld id="{638941B0-F4D5-4460-BCAD-F7E2B41A8257}" type="datetimeFigureOut">
-              <a:rPr lang="fr-FR" smtClean="0"/>
+              <a:rPr lang="fr-FR"/>
               <a:t>28/03/2026</a:t>
             </a:fld>
             <a:endParaRPr lang="fr-FR"/>
@@ -1416,7 +1282,7 @@
       </p:sp>
       <p:sp>
         <p:nvSpPr>
-          <p:cNvPr id="5" name="Espace réservé du pied de page 4"/>
+          <p:cNvPr id="412848984" name="Espace réservé du pied de page 4"/>
           <p:cNvSpPr>
             <a:spLocks noGrp="1"/>
           </p:cNvSpPr>
@@ -1424,18 +1290,21 @@
             <p:ph type="ftr" sz="quarter" idx="11"/>
           </p:nvPr>
         </p:nvSpPr>
-        <p:spPr/>
+        <p:spPr bwMode="auto"/>
         <p:txBody>
           <a:bodyPr/>
           <a:lstStyle/>
           <a:p>
+            <a:pPr>
+              <a:defRPr/>
+            </a:pPr>
             <a:endParaRPr lang="fr-FR"/>
           </a:p>
         </p:txBody>
       </p:sp>
       <p:sp>
         <p:nvSpPr>
-          <p:cNvPr id="6" name="Espace réservé du numéro de diapositive 5"/>
+          <p:cNvPr id="995789536" name="Espace réservé du numéro de diapositive 5"/>
           <p:cNvSpPr>
             <a:spLocks noGrp="1"/>
           </p:cNvSpPr>
@@ -1443,13 +1312,16 @@
             <p:ph type="sldNum" sz="quarter" idx="12"/>
           </p:nvPr>
         </p:nvSpPr>
-        <p:spPr/>
+        <p:spPr bwMode="auto"/>
         <p:txBody>
           <a:bodyPr/>
           <a:lstStyle/>
           <a:p>
+            <a:pPr>
+              <a:defRPr/>
+            </a:pPr>
             <a:fld id="{27C6CCC6-2BE5-4E42-96A4-D1E8E81A3D8E}" type="slidenum">
-              <a:rPr lang="fr-FR" smtClean="0"/>
+              <a:rPr lang="fr-FR"/>
               <a:t>‹#›</a:t>
             </a:fld>
             <a:endParaRPr lang="fr-FR"/>
@@ -1457,23 +1329,15 @@
         </p:txBody>
       </p:sp>
     </p:spTree>
-    <p:extLst>
-      <p:ext uri="{BB962C8B-B14F-4D97-AF65-F5344CB8AC3E}">
-        <p14:creationId xmlns:p14="http://schemas.microsoft.com/office/powerpoint/2010/main" val="3310491181"/>
-      </p:ext>
-    </p:extLst>
   </p:cSld>
   <p:clrMapOvr>
     <a:masterClrMapping/>
   </p:clrMapOvr>
-  <p:transition>
-    <p:fade/>
-  </p:transition>
 </p:sldLayout>
 </file>
 
 <file path=ppt/slideLayouts/slideLayout10.xml><?xml version="1.0" encoding="utf-8"?>
-<p:sldLayout xmlns:a="http://schemas.openxmlformats.org/drawingml/2006/main" xmlns:r="http://schemas.openxmlformats.org/officeDocument/2006/relationships" xmlns:p="http://schemas.openxmlformats.org/presentationml/2006/main" type="vertTx" preserve="1">
+<p:sldLayout xmlns:a="http://schemas.openxmlformats.org/drawingml/2006/main" xmlns:r="http://schemas.openxmlformats.org/officeDocument/2006/relationships" xmlns:p="http://schemas.openxmlformats.org/presentationml/2006/main" xmlns:m="http://schemas.openxmlformats.org/officeDocument/2006/math" xmlns:w="http://schemas.openxmlformats.org/wordprocessingml/2006/main" matchingName="" preserve="1" showMasterPhAnim="0" showMasterSp="1" type="vertTx" userDrawn="1">
   <p:cSld name="Titre et texte vertical">
     <p:spTree>
       <p:nvGrpSpPr>
@@ -1481,7 +1345,7 @@
         <p:cNvGrpSpPr/>
         <p:nvPr/>
       </p:nvGrpSpPr>
-      <p:grpSpPr>
+      <p:grpSpPr bwMode="auto">
         <a:xfrm>
           <a:off x="0" y="0"/>
           <a:ext cx="0" cy="0"/>
@@ -1491,7 +1355,7 @@
       </p:grpSpPr>
       <p:sp>
         <p:nvSpPr>
-          <p:cNvPr id="2" name="Titre 1"/>
+          <p:cNvPr id="1537333039" name="Titre 1"/>
           <p:cNvSpPr>
             <a:spLocks noGrp="1"/>
           </p:cNvSpPr>
@@ -1499,21 +1363,25 @@
             <p:ph type="title"/>
           </p:nvPr>
         </p:nvSpPr>
-        <p:spPr/>
+        <p:spPr bwMode="auto"/>
         <p:txBody>
           <a:bodyPr/>
           <a:lstStyle/>
           <a:p>
+            <a:pPr>
+              <a:defRPr/>
+            </a:pPr>
             <a:r>
               <a:rPr lang="fr-FR"/>
               <a:t>Modifiez le style du titre</a:t>
             </a:r>
-          </a:p>
-        </p:txBody>
-      </p:sp>
-      <p:sp>
-        <p:nvSpPr>
-          <p:cNvPr id="3" name="Espace réservé du texte vertical 2"/>
+            <a:endParaRPr/>
+          </a:p>
+        </p:txBody>
+      </p:sp>
+      <p:sp>
+        <p:nvSpPr>
+          <p:cNvPr id="1761471801" name="Espace réservé du texte vertical 2"/>
           <p:cNvSpPr>
             <a:spLocks noGrp="1"/>
           </p:cNvSpPr>
@@ -1521,50 +1389,65 @@
             <p:ph type="body" orient="vert" idx="1"/>
           </p:nvPr>
         </p:nvSpPr>
-        <p:spPr/>
+        <p:spPr bwMode="auto"/>
         <p:txBody>
           <a:bodyPr vert="eaVert"/>
           <a:lstStyle/>
           <a:p>
-            <a:pPr lvl="0"/>
+            <a:pPr lvl="0">
+              <a:defRPr/>
+            </a:pPr>
             <a:r>
               <a:rPr lang="fr-FR"/>
               <a:t>Modifiez les styles du texte du masque</a:t>
             </a:r>
-          </a:p>
-          <a:p>
-            <a:pPr lvl="1"/>
+            <a:endParaRPr/>
+          </a:p>
+          <a:p>
+            <a:pPr lvl="1">
+              <a:defRPr/>
+            </a:pPr>
             <a:r>
               <a:rPr lang="fr-FR"/>
               <a:t>Deuxième niveau</a:t>
             </a:r>
-          </a:p>
-          <a:p>
-            <a:pPr lvl="2"/>
+            <a:endParaRPr/>
+          </a:p>
+          <a:p>
+            <a:pPr lvl="2">
+              <a:defRPr/>
+            </a:pPr>
             <a:r>
               <a:rPr lang="fr-FR"/>
               <a:t>Troisième niveau</a:t>
             </a:r>
-          </a:p>
-          <a:p>
-            <a:pPr lvl="3"/>
+            <a:endParaRPr/>
+          </a:p>
+          <a:p>
+            <a:pPr lvl="3">
+              <a:defRPr/>
+            </a:pPr>
             <a:r>
               <a:rPr lang="fr-FR"/>
               <a:t>Quatrième niveau</a:t>
             </a:r>
-          </a:p>
-          <a:p>
-            <a:pPr lvl="4"/>
+            <a:endParaRPr/>
+          </a:p>
+          <a:p>
+            <a:pPr lvl="4">
+              <a:defRPr/>
+            </a:pPr>
             <a:r>
               <a:rPr lang="fr-FR"/>
               <a:t>Cinquième niveau</a:t>
             </a:r>
-          </a:p>
-        </p:txBody>
-      </p:sp>
-      <p:sp>
-        <p:nvSpPr>
-          <p:cNvPr id="4" name="Espace réservé de la date 3"/>
+            <a:endParaRPr/>
+          </a:p>
+        </p:txBody>
+      </p:sp>
+      <p:sp>
+        <p:nvSpPr>
+          <p:cNvPr id="521198003" name="Espace réservé de la date 3"/>
           <p:cNvSpPr>
             <a:spLocks noGrp="1"/>
           </p:cNvSpPr>
@@ -1572,13 +1455,16 @@
             <p:ph type="dt" sz="half" idx="10"/>
           </p:nvPr>
         </p:nvSpPr>
-        <p:spPr/>
+        <p:spPr bwMode="auto"/>
         <p:txBody>
           <a:bodyPr/>
           <a:lstStyle/>
           <a:p>
+            <a:pPr>
+              <a:defRPr/>
+            </a:pPr>
             <a:fld id="{638941B0-F4D5-4460-BCAD-F7E2B41A8257}" type="datetimeFigureOut">
-              <a:rPr lang="fr-FR" smtClean="0"/>
+              <a:rPr lang="fr-FR"/>
               <a:t>28/03/2026</a:t>
             </a:fld>
             <a:endParaRPr lang="fr-FR"/>
@@ -1587,7 +1473,7 @@
       </p:sp>
       <p:sp>
         <p:nvSpPr>
-          <p:cNvPr id="5" name="Espace réservé du pied de page 4"/>
+          <p:cNvPr id="1544752252" name="Espace réservé du pied de page 4"/>
           <p:cNvSpPr>
             <a:spLocks noGrp="1"/>
           </p:cNvSpPr>
@@ -1595,18 +1481,21 @@
             <p:ph type="ftr" sz="quarter" idx="11"/>
           </p:nvPr>
         </p:nvSpPr>
-        <p:spPr/>
+        <p:spPr bwMode="auto"/>
         <p:txBody>
           <a:bodyPr/>
           <a:lstStyle/>
           <a:p>
+            <a:pPr>
+              <a:defRPr/>
+            </a:pPr>
             <a:endParaRPr lang="fr-FR"/>
           </a:p>
         </p:txBody>
       </p:sp>
       <p:sp>
         <p:nvSpPr>
-          <p:cNvPr id="6" name="Espace réservé du numéro de diapositive 5"/>
+          <p:cNvPr id="607878507" name="Espace réservé du numéro de diapositive 5"/>
           <p:cNvSpPr>
             <a:spLocks noGrp="1"/>
           </p:cNvSpPr>
@@ -1614,13 +1503,16 @@
             <p:ph type="sldNum" sz="quarter" idx="12"/>
           </p:nvPr>
         </p:nvSpPr>
-        <p:spPr/>
+        <p:spPr bwMode="auto"/>
         <p:txBody>
           <a:bodyPr/>
           <a:lstStyle/>
           <a:p>
+            <a:pPr>
+              <a:defRPr/>
+            </a:pPr>
             <a:fld id="{27C6CCC6-2BE5-4E42-96A4-D1E8E81A3D8E}" type="slidenum">
-              <a:rPr lang="fr-FR" smtClean="0"/>
+              <a:rPr lang="fr-FR"/>
               <a:t>‹#›</a:t>
             </a:fld>
             <a:endParaRPr lang="fr-FR"/>
@@ -1628,23 +1520,15 @@
         </p:txBody>
       </p:sp>
     </p:spTree>
-    <p:extLst>
-      <p:ext uri="{BB962C8B-B14F-4D97-AF65-F5344CB8AC3E}">
-        <p14:creationId xmlns:p14="http://schemas.microsoft.com/office/powerpoint/2010/main" val="4172787210"/>
-      </p:ext>
-    </p:extLst>
   </p:cSld>
   <p:clrMapOvr>
     <a:masterClrMapping/>
   </p:clrMapOvr>
-  <p:transition>
-    <p:fade/>
-  </p:transition>
 </p:sldLayout>
 </file>
 
 <file path=ppt/slideLayouts/slideLayout11.xml><?xml version="1.0" encoding="utf-8"?>
-<p:sldLayout xmlns:a="http://schemas.openxmlformats.org/drawingml/2006/main" xmlns:r="http://schemas.openxmlformats.org/officeDocument/2006/relationships" xmlns:p="http://schemas.openxmlformats.org/presentationml/2006/main" type="vertTitleAndTx" preserve="1">
+<p:sldLayout xmlns:a="http://schemas.openxmlformats.org/drawingml/2006/main" xmlns:r="http://schemas.openxmlformats.org/officeDocument/2006/relationships" xmlns:p="http://schemas.openxmlformats.org/presentationml/2006/main" xmlns:m="http://schemas.openxmlformats.org/officeDocument/2006/math" xmlns:w="http://schemas.openxmlformats.org/wordprocessingml/2006/main" matchingName="" preserve="1" showMasterPhAnim="0" showMasterSp="1" type="vertTitleAndTx" userDrawn="1">
   <p:cSld name="Titre vertical et texte">
     <p:spTree>
       <p:nvGrpSpPr>
@@ -1652,7 +1536,7 @@
         <p:cNvGrpSpPr/>
         <p:nvPr/>
       </p:nvGrpSpPr>
-      <p:grpSpPr>
+      <p:grpSpPr bwMode="auto">
         <a:xfrm>
           <a:off x="0" y="0"/>
           <a:ext cx="0" cy="0"/>
@@ -1662,7 +1546,7 @@
       </p:grpSpPr>
       <p:sp>
         <p:nvSpPr>
-          <p:cNvPr id="2" name="Titre vertical 1"/>
+          <p:cNvPr id="150899507" name="Titre vertical 1"/>
           <p:cNvSpPr>
             <a:spLocks noGrp="1"/>
           </p:cNvSpPr>
@@ -1670,7 +1554,7 @@
             <p:ph type="title" orient="vert"/>
           </p:nvPr>
         </p:nvSpPr>
-        <p:spPr>
+        <p:spPr bwMode="auto">
           <a:xfrm>
             <a:off x="8724900" y="365125"/>
             <a:ext cx="2628900" cy="5811838"/>
@@ -1680,16 +1564,20 @@
           <a:bodyPr vert="eaVert"/>
           <a:lstStyle/>
           <a:p>
+            <a:pPr>
+              <a:defRPr/>
+            </a:pPr>
             <a:r>
               <a:rPr lang="fr-FR"/>
               <a:t>Modifiez le style du titre</a:t>
             </a:r>
-          </a:p>
-        </p:txBody>
-      </p:sp>
-      <p:sp>
-        <p:nvSpPr>
-          <p:cNvPr id="3" name="Espace réservé du texte vertical 2"/>
+            <a:endParaRPr/>
+          </a:p>
+        </p:txBody>
+      </p:sp>
+      <p:sp>
+        <p:nvSpPr>
+          <p:cNvPr id="2115130866" name="Espace réservé du texte vertical 2"/>
           <p:cNvSpPr>
             <a:spLocks noGrp="1"/>
           </p:cNvSpPr>
@@ -1697,7 +1585,7 @@
             <p:ph type="body" orient="vert" idx="1"/>
           </p:nvPr>
         </p:nvSpPr>
-        <p:spPr>
+        <p:spPr bwMode="auto">
           <a:xfrm>
             <a:off x="838200" y="365125"/>
             <a:ext cx="7734300" cy="5811838"/>
@@ -1707,45 +1595,60 @@
           <a:bodyPr vert="eaVert"/>
           <a:lstStyle/>
           <a:p>
-            <a:pPr lvl="0"/>
+            <a:pPr lvl="0">
+              <a:defRPr/>
+            </a:pPr>
             <a:r>
               <a:rPr lang="fr-FR"/>
               <a:t>Modifiez les styles du texte du masque</a:t>
             </a:r>
-          </a:p>
-          <a:p>
-            <a:pPr lvl="1"/>
+            <a:endParaRPr/>
+          </a:p>
+          <a:p>
+            <a:pPr lvl="1">
+              <a:defRPr/>
+            </a:pPr>
             <a:r>
               <a:rPr lang="fr-FR"/>
               <a:t>Deuxième niveau</a:t>
             </a:r>
-          </a:p>
-          <a:p>
-            <a:pPr lvl="2"/>
+            <a:endParaRPr/>
+          </a:p>
+          <a:p>
+            <a:pPr lvl="2">
+              <a:defRPr/>
+            </a:pPr>
             <a:r>
               <a:rPr lang="fr-FR"/>
               <a:t>Troisième niveau</a:t>
             </a:r>
-          </a:p>
-          <a:p>
-            <a:pPr lvl="3"/>
+            <a:endParaRPr/>
+          </a:p>
+          <a:p>
+            <a:pPr lvl="3">
+              <a:defRPr/>
+            </a:pPr>
             <a:r>
               <a:rPr lang="fr-FR"/>
               <a:t>Quatrième niveau</a:t>
             </a:r>
-          </a:p>
-          <a:p>
-            <a:pPr lvl="4"/>
+            <a:endParaRPr/>
+          </a:p>
+          <a:p>
+            <a:pPr lvl="4">
+              <a:defRPr/>
+            </a:pPr>
             <a:r>
               <a:rPr lang="fr-FR"/>
               <a:t>Cinquième niveau</a:t>
             </a:r>
-          </a:p>
-        </p:txBody>
-      </p:sp>
-      <p:sp>
-        <p:nvSpPr>
-          <p:cNvPr id="4" name="Espace réservé de la date 3"/>
+            <a:endParaRPr/>
+          </a:p>
+        </p:txBody>
+      </p:sp>
+      <p:sp>
+        <p:nvSpPr>
+          <p:cNvPr id="401422855" name="Espace réservé de la date 3"/>
           <p:cNvSpPr>
             <a:spLocks noGrp="1"/>
           </p:cNvSpPr>
@@ -1753,13 +1656,16 @@
             <p:ph type="dt" sz="half" idx="10"/>
           </p:nvPr>
         </p:nvSpPr>
-        <p:spPr/>
+        <p:spPr bwMode="auto"/>
         <p:txBody>
           <a:bodyPr/>
           <a:lstStyle/>
           <a:p>
+            <a:pPr>
+              <a:defRPr/>
+            </a:pPr>
             <a:fld id="{638941B0-F4D5-4460-BCAD-F7E2B41A8257}" type="datetimeFigureOut">
-              <a:rPr lang="fr-FR" smtClean="0"/>
+              <a:rPr lang="fr-FR"/>
               <a:t>28/03/2026</a:t>
             </a:fld>
             <a:endParaRPr lang="fr-FR"/>
@@ -1768,7 +1674,7 @@
       </p:sp>
       <p:sp>
         <p:nvSpPr>
-          <p:cNvPr id="5" name="Espace réservé du pied de page 4"/>
+          <p:cNvPr id="1530103374" name="Espace réservé du pied de page 4"/>
           <p:cNvSpPr>
             <a:spLocks noGrp="1"/>
           </p:cNvSpPr>
@@ -1776,18 +1682,21 @@
             <p:ph type="ftr" sz="quarter" idx="11"/>
           </p:nvPr>
         </p:nvSpPr>
-        <p:spPr/>
+        <p:spPr bwMode="auto"/>
         <p:txBody>
           <a:bodyPr/>
           <a:lstStyle/>
           <a:p>
+            <a:pPr>
+              <a:defRPr/>
+            </a:pPr>
             <a:endParaRPr lang="fr-FR"/>
           </a:p>
         </p:txBody>
       </p:sp>
       <p:sp>
         <p:nvSpPr>
-          <p:cNvPr id="6" name="Espace réservé du numéro de diapositive 5"/>
+          <p:cNvPr id="1244348732" name="Espace réservé du numéro de diapositive 5"/>
           <p:cNvSpPr>
             <a:spLocks noGrp="1"/>
           </p:cNvSpPr>
@@ -1795,13 +1704,16 @@
             <p:ph type="sldNum" sz="quarter" idx="12"/>
           </p:nvPr>
         </p:nvSpPr>
-        <p:spPr/>
+        <p:spPr bwMode="auto"/>
         <p:txBody>
           <a:bodyPr/>
           <a:lstStyle/>
           <a:p>
+            <a:pPr>
+              <a:defRPr/>
+            </a:pPr>
             <a:fld id="{27C6CCC6-2BE5-4E42-96A4-D1E8E81A3D8E}" type="slidenum">
-              <a:rPr lang="fr-FR" smtClean="0"/>
+              <a:rPr lang="fr-FR"/>
               <a:t>‹#›</a:t>
             </a:fld>
             <a:endParaRPr lang="fr-FR"/>
@@ -1809,23 +1721,15 @@
         </p:txBody>
       </p:sp>
     </p:spTree>
-    <p:extLst>
-      <p:ext uri="{BB962C8B-B14F-4D97-AF65-F5344CB8AC3E}">
-        <p14:creationId xmlns:p14="http://schemas.microsoft.com/office/powerpoint/2010/main" val="1902177510"/>
-      </p:ext>
-    </p:extLst>
   </p:cSld>
   <p:clrMapOvr>
     <a:masterClrMapping/>
   </p:clrMapOvr>
-  <p:transition>
-    <p:fade/>
-  </p:transition>
 </p:sldLayout>
 </file>
 
 <file path=ppt/slideLayouts/slideLayout2.xml><?xml version="1.0" encoding="utf-8"?>
-<p:sldLayout xmlns:a="http://schemas.openxmlformats.org/drawingml/2006/main" xmlns:r="http://schemas.openxmlformats.org/officeDocument/2006/relationships" xmlns:p="http://schemas.openxmlformats.org/presentationml/2006/main" type="obj" preserve="1">
+<p:sldLayout xmlns:a="http://schemas.openxmlformats.org/drawingml/2006/main" xmlns:r="http://schemas.openxmlformats.org/officeDocument/2006/relationships" xmlns:p="http://schemas.openxmlformats.org/presentationml/2006/main" xmlns:m="http://schemas.openxmlformats.org/officeDocument/2006/math" xmlns:w="http://schemas.openxmlformats.org/wordprocessingml/2006/main" matchingName="" preserve="1" showMasterPhAnim="0" showMasterSp="1" type="obj" userDrawn="1">
   <p:cSld name="Titre et contenu">
     <p:spTree>
       <p:nvGrpSpPr>
@@ -1833,7 +1737,7 @@
         <p:cNvGrpSpPr/>
         <p:nvPr/>
       </p:nvGrpSpPr>
-      <p:grpSpPr>
+      <p:grpSpPr bwMode="auto">
         <a:xfrm>
           <a:off x="0" y="0"/>
           <a:ext cx="0" cy="0"/>
@@ -1843,7 +1747,7 @@
       </p:grpSpPr>
       <p:sp>
         <p:nvSpPr>
-          <p:cNvPr id="2" name="Titre 1"/>
+          <p:cNvPr id="1188976808" name="Titre 1"/>
           <p:cNvSpPr>
             <a:spLocks noGrp="1"/>
           </p:cNvSpPr>
@@ -1851,21 +1755,25 @@
             <p:ph type="title"/>
           </p:nvPr>
         </p:nvSpPr>
-        <p:spPr/>
+        <p:spPr bwMode="auto"/>
         <p:txBody>
           <a:bodyPr/>
           <a:lstStyle/>
           <a:p>
+            <a:pPr>
+              <a:defRPr/>
+            </a:pPr>
             <a:r>
               <a:rPr lang="fr-FR"/>
               <a:t>Modifiez le style du titre</a:t>
             </a:r>
-          </a:p>
-        </p:txBody>
-      </p:sp>
-      <p:sp>
-        <p:nvSpPr>
-          <p:cNvPr id="3" name="Espace réservé du contenu 2"/>
+            <a:endParaRPr/>
+          </a:p>
+        </p:txBody>
+      </p:sp>
+      <p:sp>
+        <p:nvSpPr>
+          <p:cNvPr id="469690207" name="Espace réservé du contenu 2"/>
           <p:cNvSpPr>
             <a:spLocks noGrp="1"/>
           </p:cNvSpPr>
@@ -1873,50 +1781,65 @@
             <p:ph idx="1"/>
           </p:nvPr>
         </p:nvSpPr>
-        <p:spPr/>
+        <p:spPr bwMode="auto"/>
         <p:txBody>
           <a:bodyPr/>
           <a:lstStyle/>
           <a:p>
-            <a:pPr lvl="0"/>
+            <a:pPr lvl="0">
+              <a:defRPr/>
+            </a:pPr>
             <a:r>
               <a:rPr lang="fr-FR"/>
               <a:t>Modifiez les styles du texte du masque</a:t>
             </a:r>
-          </a:p>
-          <a:p>
-            <a:pPr lvl="1"/>
+            <a:endParaRPr/>
+          </a:p>
+          <a:p>
+            <a:pPr lvl="1">
+              <a:defRPr/>
+            </a:pPr>
             <a:r>
               <a:rPr lang="fr-FR"/>
               <a:t>Deuxième niveau</a:t>
             </a:r>
-          </a:p>
-          <a:p>
-            <a:pPr lvl="2"/>
+            <a:endParaRPr/>
+          </a:p>
+          <a:p>
+            <a:pPr lvl="2">
+              <a:defRPr/>
+            </a:pPr>
             <a:r>
               <a:rPr lang="fr-FR"/>
               <a:t>Troisième niveau</a:t>
             </a:r>
-          </a:p>
-          <a:p>
-            <a:pPr lvl="3"/>
+            <a:endParaRPr/>
+          </a:p>
+          <a:p>
+            <a:pPr lvl="3">
+              <a:defRPr/>
+            </a:pPr>
             <a:r>
               <a:rPr lang="fr-FR"/>
               <a:t>Quatrième niveau</a:t>
             </a:r>
-          </a:p>
-          <a:p>
-            <a:pPr lvl="4"/>
+            <a:endParaRPr/>
+          </a:p>
+          <a:p>
+            <a:pPr lvl="4">
+              <a:defRPr/>
+            </a:pPr>
             <a:r>
               <a:rPr lang="fr-FR"/>
               <a:t>Cinquième niveau</a:t>
             </a:r>
-          </a:p>
-        </p:txBody>
-      </p:sp>
-      <p:sp>
-        <p:nvSpPr>
-          <p:cNvPr id="4" name="Espace réservé de la date 3"/>
+            <a:endParaRPr/>
+          </a:p>
+        </p:txBody>
+      </p:sp>
+      <p:sp>
+        <p:nvSpPr>
+          <p:cNvPr id="1526234681" name="Espace réservé de la date 3"/>
           <p:cNvSpPr>
             <a:spLocks noGrp="1"/>
           </p:cNvSpPr>
@@ -1924,13 +1847,16 @@
             <p:ph type="dt" sz="half" idx="10"/>
           </p:nvPr>
         </p:nvSpPr>
-        <p:spPr/>
+        <p:spPr bwMode="auto"/>
         <p:txBody>
           <a:bodyPr/>
           <a:lstStyle/>
           <a:p>
+            <a:pPr>
+              <a:defRPr/>
+            </a:pPr>
             <a:fld id="{638941B0-F4D5-4460-BCAD-F7E2B41A8257}" type="datetimeFigureOut">
-              <a:rPr lang="fr-FR" smtClean="0"/>
+              <a:rPr lang="fr-FR"/>
               <a:t>28/03/2026</a:t>
             </a:fld>
             <a:endParaRPr lang="fr-FR"/>
@@ -1939,7 +1865,7 @@
       </p:sp>
       <p:sp>
         <p:nvSpPr>
-          <p:cNvPr id="5" name="Espace réservé du pied de page 4"/>
+          <p:cNvPr id="51558349" name="Espace réservé du pied de page 4"/>
           <p:cNvSpPr>
             <a:spLocks noGrp="1"/>
           </p:cNvSpPr>
@@ -1947,18 +1873,21 @@
             <p:ph type="ftr" sz="quarter" idx="11"/>
           </p:nvPr>
         </p:nvSpPr>
-        <p:spPr/>
+        <p:spPr bwMode="auto"/>
         <p:txBody>
           <a:bodyPr/>
           <a:lstStyle/>
           <a:p>
+            <a:pPr>
+              <a:defRPr/>
+            </a:pPr>
             <a:endParaRPr lang="fr-FR"/>
           </a:p>
         </p:txBody>
       </p:sp>
       <p:sp>
         <p:nvSpPr>
-          <p:cNvPr id="6" name="Espace réservé du numéro de diapositive 5"/>
+          <p:cNvPr id="734432326" name="Espace réservé du numéro de diapositive 5"/>
           <p:cNvSpPr>
             <a:spLocks noGrp="1"/>
           </p:cNvSpPr>
@@ -1966,13 +1895,16 @@
             <p:ph type="sldNum" sz="quarter" idx="12"/>
           </p:nvPr>
         </p:nvSpPr>
-        <p:spPr/>
+        <p:spPr bwMode="auto"/>
         <p:txBody>
           <a:bodyPr/>
           <a:lstStyle/>
           <a:p>
+            <a:pPr>
+              <a:defRPr/>
+            </a:pPr>
             <a:fld id="{27C6CCC6-2BE5-4E42-96A4-D1E8E81A3D8E}" type="slidenum">
-              <a:rPr lang="fr-FR" smtClean="0"/>
+              <a:rPr lang="fr-FR"/>
               <a:t>‹#›</a:t>
             </a:fld>
             <a:endParaRPr lang="fr-FR"/>
@@ -1980,23 +1912,15 @@
         </p:txBody>
       </p:sp>
     </p:spTree>
-    <p:extLst>
-      <p:ext uri="{BB962C8B-B14F-4D97-AF65-F5344CB8AC3E}">
-        <p14:creationId xmlns:p14="http://schemas.microsoft.com/office/powerpoint/2010/main" val="3841795644"/>
-      </p:ext>
-    </p:extLst>
   </p:cSld>
   <p:clrMapOvr>
     <a:masterClrMapping/>
   </p:clrMapOvr>
-  <p:transition>
-    <p:fade/>
-  </p:transition>
 </p:sldLayout>
 </file>
 
 <file path=ppt/slideLayouts/slideLayout3.xml><?xml version="1.0" encoding="utf-8"?>
-<p:sldLayout xmlns:a="http://schemas.openxmlformats.org/drawingml/2006/main" xmlns:r="http://schemas.openxmlformats.org/officeDocument/2006/relationships" xmlns:p="http://schemas.openxmlformats.org/presentationml/2006/main" type="secHead" preserve="1">
+<p:sldLayout xmlns:a="http://schemas.openxmlformats.org/drawingml/2006/main" xmlns:r="http://schemas.openxmlformats.org/officeDocument/2006/relationships" xmlns:p="http://schemas.openxmlformats.org/presentationml/2006/main" xmlns:m="http://schemas.openxmlformats.org/officeDocument/2006/math" xmlns:w="http://schemas.openxmlformats.org/wordprocessingml/2006/main" matchingName="" preserve="1" showMasterPhAnim="0" showMasterSp="1" type="secHead" userDrawn="1">
   <p:cSld name="Titre de section">
     <p:spTree>
       <p:nvGrpSpPr>
@@ -2004,7 +1928,7 @@
         <p:cNvGrpSpPr/>
         <p:nvPr/>
       </p:nvGrpSpPr>
-      <p:grpSpPr>
+      <p:grpSpPr bwMode="auto">
         <a:xfrm>
           <a:off x="0" y="0"/>
           <a:ext cx="0" cy="0"/>
@@ -2014,7 +1938,7 @@
       </p:grpSpPr>
       <p:sp>
         <p:nvSpPr>
-          <p:cNvPr id="2" name="Titre 1"/>
+          <p:cNvPr id="741212773" name="Titre 1"/>
           <p:cNvSpPr>
             <a:spLocks noGrp="1"/>
           </p:cNvSpPr>
@@ -2022,7 +1946,7 @@
             <p:ph type="title"/>
           </p:nvPr>
         </p:nvSpPr>
-        <p:spPr>
+        <p:spPr bwMode="auto">
           <a:xfrm>
             <a:off x="831850" y="1709738"/>
             <a:ext cx="10515600" cy="2852737"/>
@@ -2036,16 +1960,20 @@
             </a:lvl1pPr>
           </a:lstStyle>
           <a:p>
+            <a:pPr>
+              <a:defRPr/>
+            </a:pPr>
             <a:r>
               <a:rPr lang="fr-FR"/>
               <a:t>Modifiez le style du titre</a:t>
             </a:r>
-          </a:p>
-        </p:txBody>
-      </p:sp>
-      <p:sp>
-        <p:nvSpPr>
-          <p:cNvPr id="3" name="Espace réservé du texte 2"/>
+            <a:endParaRPr/>
+          </a:p>
+        </p:txBody>
+      </p:sp>
+      <p:sp>
+        <p:nvSpPr>
+          <p:cNvPr id="661959040" name="Espace réservé du texte 2"/>
           <p:cNvSpPr>
             <a:spLocks noGrp="1"/>
           </p:cNvSpPr>
@@ -2053,7 +1981,7 @@
             <p:ph type="body" idx="1"/>
           </p:nvPr>
         </p:nvSpPr>
-        <p:spPr>
+        <p:spPr bwMode="auto">
           <a:xfrm>
             <a:off x="831850" y="4589463"/>
             <a:ext cx="10515600" cy="1500187"/>
@@ -2154,17 +2082,20 @@
             </a:lvl9pPr>
           </a:lstStyle>
           <a:p>
-            <a:pPr lvl="0"/>
+            <a:pPr lvl="0">
+              <a:defRPr/>
+            </a:pPr>
             <a:r>
               <a:rPr lang="fr-FR"/>
               <a:t>Modifiez les styles du texte du masque</a:t>
             </a:r>
-          </a:p>
-        </p:txBody>
-      </p:sp>
-      <p:sp>
-        <p:nvSpPr>
-          <p:cNvPr id="4" name="Espace réservé de la date 3"/>
+            <a:endParaRPr/>
+          </a:p>
+        </p:txBody>
+      </p:sp>
+      <p:sp>
+        <p:nvSpPr>
+          <p:cNvPr id="1328406837" name="Espace réservé de la date 3"/>
           <p:cNvSpPr>
             <a:spLocks noGrp="1"/>
           </p:cNvSpPr>
@@ -2172,13 +2103,16 @@
             <p:ph type="dt" sz="half" idx="10"/>
           </p:nvPr>
         </p:nvSpPr>
-        <p:spPr/>
+        <p:spPr bwMode="auto"/>
         <p:txBody>
           <a:bodyPr/>
           <a:lstStyle/>
           <a:p>
+            <a:pPr>
+              <a:defRPr/>
+            </a:pPr>
             <a:fld id="{638941B0-F4D5-4460-BCAD-F7E2B41A8257}" type="datetimeFigureOut">
-              <a:rPr lang="fr-FR" smtClean="0"/>
+              <a:rPr lang="fr-FR"/>
               <a:t>28/03/2026</a:t>
             </a:fld>
             <a:endParaRPr lang="fr-FR"/>
@@ -2187,7 +2121,7 @@
       </p:sp>
       <p:sp>
         <p:nvSpPr>
-          <p:cNvPr id="5" name="Espace réservé du pied de page 4"/>
+          <p:cNvPr id="979710305" name="Espace réservé du pied de page 4"/>
           <p:cNvSpPr>
             <a:spLocks noGrp="1"/>
           </p:cNvSpPr>
@@ -2195,18 +2129,21 @@
             <p:ph type="ftr" sz="quarter" idx="11"/>
           </p:nvPr>
         </p:nvSpPr>
-        <p:spPr/>
+        <p:spPr bwMode="auto"/>
         <p:txBody>
           <a:bodyPr/>
           <a:lstStyle/>
           <a:p>
+            <a:pPr>
+              <a:defRPr/>
+            </a:pPr>
             <a:endParaRPr lang="fr-FR"/>
           </a:p>
         </p:txBody>
       </p:sp>
       <p:sp>
         <p:nvSpPr>
-          <p:cNvPr id="6" name="Espace réservé du numéro de diapositive 5"/>
+          <p:cNvPr id="284951248" name="Espace réservé du numéro de diapositive 5"/>
           <p:cNvSpPr>
             <a:spLocks noGrp="1"/>
           </p:cNvSpPr>
@@ -2214,13 +2151,16 @@
             <p:ph type="sldNum" sz="quarter" idx="12"/>
           </p:nvPr>
         </p:nvSpPr>
-        <p:spPr/>
+        <p:spPr bwMode="auto"/>
         <p:txBody>
           <a:bodyPr/>
           <a:lstStyle/>
           <a:p>
+            <a:pPr>
+              <a:defRPr/>
+            </a:pPr>
             <a:fld id="{27C6CCC6-2BE5-4E42-96A4-D1E8E81A3D8E}" type="slidenum">
-              <a:rPr lang="fr-FR" smtClean="0"/>
+              <a:rPr lang="fr-FR"/>
               <a:t>‹#›</a:t>
             </a:fld>
             <a:endParaRPr lang="fr-FR"/>
@@ -2228,23 +2168,15 @@
         </p:txBody>
       </p:sp>
     </p:spTree>
-    <p:extLst>
-      <p:ext uri="{BB962C8B-B14F-4D97-AF65-F5344CB8AC3E}">
-        <p14:creationId xmlns:p14="http://schemas.microsoft.com/office/powerpoint/2010/main" val="3466923455"/>
-      </p:ext>
-    </p:extLst>
   </p:cSld>
   <p:clrMapOvr>
     <a:masterClrMapping/>
   </p:clrMapOvr>
-  <p:transition>
-    <p:fade/>
-  </p:transition>
 </p:sldLayout>
 </file>
 
 <file path=ppt/slideLayouts/slideLayout4.xml><?xml version="1.0" encoding="utf-8"?>
-<p:sldLayout xmlns:a="http://schemas.openxmlformats.org/drawingml/2006/main" xmlns:r="http://schemas.openxmlformats.org/officeDocument/2006/relationships" xmlns:p="http://schemas.openxmlformats.org/presentationml/2006/main" type="twoObj" preserve="1">
+<p:sldLayout xmlns:a="http://schemas.openxmlformats.org/drawingml/2006/main" xmlns:r="http://schemas.openxmlformats.org/officeDocument/2006/relationships" xmlns:p="http://schemas.openxmlformats.org/presentationml/2006/main" xmlns:m="http://schemas.openxmlformats.org/officeDocument/2006/math" xmlns:w="http://schemas.openxmlformats.org/wordprocessingml/2006/main" matchingName="" preserve="1" showMasterPhAnim="0" showMasterSp="1" type="twoObj" userDrawn="1">
   <p:cSld name="Deux contenus">
     <p:spTree>
       <p:nvGrpSpPr>
@@ -2252,7 +2184,7 @@
         <p:cNvGrpSpPr/>
         <p:nvPr/>
       </p:nvGrpSpPr>
-      <p:grpSpPr>
+      <p:grpSpPr bwMode="auto">
         <a:xfrm>
           <a:off x="0" y="0"/>
           <a:ext cx="0" cy="0"/>
@@ -2262,7 +2194,7 @@
       </p:grpSpPr>
       <p:sp>
         <p:nvSpPr>
-          <p:cNvPr id="2" name="Titre 1"/>
+          <p:cNvPr id="1235953041" name="Titre 1"/>
           <p:cNvSpPr>
             <a:spLocks noGrp="1"/>
           </p:cNvSpPr>
@@ -2270,21 +2202,25 @@
             <p:ph type="title"/>
           </p:nvPr>
         </p:nvSpPr>
-        <p:spPr/>
+        <p:spPr bwMode="auto"/>
         <p:txBody>
           <a:bodyPr/>
           <a:lstStyle/>
           <a:p>
+            <a:pPr>
+              <a:defRPr/>
+            </a:pPr>
             <a:r>
               <a:rPr lang="fr-FR"/>
               <a:t>Modifiez le style du titre</a:t>
             </a:r>
-          </a:p>
-        </p:txBody>
-      </p:sp>
-      <p:sp>
-        <p:nvSpPr>
-          <p:cNvPr id="3" name="Espace réservé du contenu 2"/>
+            <a:endParaRPr/>
+          </a:p>
+        </p:txBody>
+      </p:sp>
+      <p:sp>
+        <p:nvSpPr>
+          <p:cNvPr id="715810119" name="Espace réservé du contenu 2"/>
           <p:cNvSpPr>
             <a:spLocks noGrp="1"/>
           </p:cNvSpPr>
@@ -2292,7 +2228,7 @@
             <p:ph sz="half" idx="1"/>
           </p:nvPr>
         </p:nvSpPr>
-        <p:spPr>
+        <p:spPr bwMode="auto">
           <a:xfrm>
             <a:off x="838200" y="1825625"/>
             <a:ext cx="5181600" cy="4351338"/>
@@ -2302,45 +2238,60 @@
           <a:bodyPr/>
           <a:lstStyle/>
           <a:p>
-            <a:pPr lvl="0"/>
+            <a:pPr lvl="0">
+              <a:defRPr/>
+            </a:pPr>
             <a:r>
               <a:rPr lang="fr-FR"/>
               <a:t>Modifiez les styles du texte du masque</a:t>
             </a:r>
-          </a:p>
-          <a:p>
-            <a:pPr lvl="1"/>
+            <a:endParaRPr/>
+          </a:p>
+          <a:p>
+            <a:pPr lvl="1">
+              <a:defRPr/>
+            </a:pPr>
             <a:r>
               <a:rPr lang="fr-FR"/>
               <a:t>Deuxième niveau</a:t>
             </a:r>
-          </a:p>
-          <a:p>
-            <a:pPr lvl="2"/>
+            <a:endParaRPr/>
+          </a:p>
+          <a:p>
+            <a:pPr lvl="2">
+              <a:defRPr/>
+            </a:pPr>
             <a:r>
               <a:rPr lang="fr-FR"/>
               <a:t>Troisième niveau</a:t>
             </a:r>
-          </a:p>
-          <a:p>
-            <a:pPr lvl="3"/>
+            <a:endParaRPr/>
+          </a:p>
+          <a:p>
+            <a:pPr lvl="3">
+              <a:defRPr/>
+            </a:pPr>
             <a:r>
               <a:rPr lang="fr-FR"/>
               <a:t>Quatrième niveau</a:t>
             </a:r>
-          </a:p>
-          <a:p>
-            <a:pPr lvl="4"/>
+            <a:endParaRPr/>
+          </a:p>
+          <a:p>
+            <a:pPr lvl="4">
+              <a:defRPr/>
+            </a:pPr>
             <a:r>
               <a:rPr lang="fr-FR"/>
               <a:t>Cinquième niveau</a:t>
             </a:r>
-          </a:p>
-        </p:txBody>
-      </p:sp>
-      <p:sp>
-        <p:nvSpPr>
-          <p:cNvPr id="4" name="Espace réservé du contenu 3"/>
+            <a:endParaRPr/>
+          </a:p>
+        </p:txBody>
+      </p:sp>
+      <p:sp>
+        <p:nvSpPr>
+          <p:cNvPr id="703095521" name="Espace réservé du contenu 3"/>
           <p:cNvSpPr>
             <a:spLocks noGrp="1"/>
           </p:cNvSpPr>
@@ -2348,7 +2299,7 @@
             <p:ph sz="half" idx="2"/>
           </p:nvPr>
         </p:nvSpPr>
-        <p:spPr>
+        <p:spPr bwMode="auto">
           <a:xfrm>
             <a:off x="6172200" y="1825625"/>
             <a:ext cx="5181600" cy="4351338"/>
@@ -2358,45 +2309,60 @@
           <a:bodyPr/>
           <a:lstStyle/>
           <a:p>
-            <a:pPr lvl="0"/>
+            <a:pPr lvl="0">
+              <a:defRPr/>
+            </a:pPr>
             <a:r>
               <a:rPr lang="fr-FR"/>
               <a:t>Modifiez les styles du texte du masque</a:t>
             </a:r>
-          </a:p>
-          <a:p>
-            <a:pPr lvl="1"/>
+            <a:endParaRPr/>
+          </a:p>
+          <a:p>
+            <a:pPr lvl="1">
+              <a:defRPr/>
+            </a:pPr>
             <a:r>
               <a:rPr lang="fr-FR"/>
               <a:t>Deuxième niveau</a:t>
             </a:r>
-          </a:p>
-          <a:p>
-            <a:pPr lvl="2"/>
+            <a:endParaRPr/>
+          </a:p>
+          <a:p>
+            <a:pPr lvl="2">
+              <a:defRPr/>
+            </a:pPr>
             <a:r>
               <a:rPr lang="fr-FR"/>
               <a:t>Troisième niveau</a:t>
             </a:r>
-          </a:p>
-          <a:p>
-            <a:pPr lvl="3"/>
+            <a:endParaRPr/>
+          </a:p>
+          <a:p>
+            <a:pPr lvl="3">
+              <a:defRPr/>
+            </a:pPr>
             <a:r>
               <a:rPr lang="fr-FR"/>
               <a:t>Quatrième niveau</a:t>
             </a:r>
-          </a:p>
-          <a:p>
-            <a:pPr lvl="4"/>
+            <a:endParaRPr/>
+          </a:p>
+          <a:p>
+            <a:pPr lvl="4">
+              <a:defRPr/>
+            </a:pPr>
             <a:r>
               <a:rPr lang="fr-FR"/>
               <a:t>Cinquième niveau</a:t>
             </a:r>
-          </a:p>
-        </p:txBody>
-      </p:sp>
-      <p:sp>
-        <p:nvSpPr>
-          <p:cNvPr id="5" name="Espace réservé de la date 4"/>
+            <a:endParaRPr/>
+          </a:p>
+        </p:txBody>
+      </p:sp>
+      <p:sp>
+        <p:nvSpPr>
+          <p:cNvPr id="236257645" name="Espace réservé de la date 4"/>
           <p:cNvSpPr>
             <a:spLocks noGrp="1"/>
           </p:cNvSpPr>
@@ -2404,13 +2370,16 @@
             <p:ph type="dt" sz="half" idx="10"/>
           </p:nvPr>
         </p:nvSpPr>
-        <p:spPr/>
+        <p:spPr bwMode="auto"/>
         <p:txBody>
           <a:bodyPr/>
           <a:lstStyle/>
           <a:p>
+            <a:pPr>
+              <a:defRPr/>
+            </a:pPr>
             <a:fld id="{638941B0-F4D5-4460-BCAD-F7E2B41A8257}" type="datetimeFigureOut">
-              <a:rPr lang="fr-FR" smtClean="0"/>
+              <a:rPr lang="fr-FR"/>
               <a:t>28/03/2026</a:t>
             </a:fld>
             <a:endParaRPr lang="fr-FR"/>
@@ -2419,7 +2388,7 @@
       </p:sp>
       <p:sp>
         <p:nvSpPr>
-          <p:cNvPr id="6" name="Espace réservé du pied de page 5"/>
+          <p:cNvPr id="936544246" name="Espace réservé du pied de page 5"/>
           <p:cNvSpPr>
             <a:spLocks noGrp="1"/>
           </p:cNvSpPr>
@@ -2427,18 +2396,21 @@
             <p:ph type="ftr" sz="quarter" idx="11"/>
           </p:nvPr>
         </p:nvSpPr>
-        <p:spPr/>
+        <p:spPr bwMode="auto"/>
         <p:txBody>
           <a:bodyPr/>
           <a:lstStyle/>
           <a:p>
+            <a:pPr>
+              <a:defRPr/>
+            </a:pPr>
             <a:endParaRPr lang="fr-FR"/>
           </a:p>
         </p:txBody>
       </p:sp>
       <p:sp>
         <p:nvSpPr>
-          <p:cNvPr id="7" name="Espace réservé du numéro de diapositive 6"/>
+          <p:cNvPr id="2070852873" name="Espace réservé du numéro de diapositive 6"/>
           <p:cNvSpPr>
             <a:spLocks noGrp="1"/>
           </p:cNvSpPr>
@@ -2446,13 +2418,16 @@
             <p:ph type="sldNum" sz="quarter" idx="12"/>
           </p:nvPr>
         </p:nvSpPr>
-        <p:spPr/>
+        <p:spPr bwMode="auto"/>
         <p:txBody>
           <a:bodyPr/>
           <a:lstStyle/>
           <a:p>
+            <a:pPr>
+              <a:defRPr/>
+            </a:pPr>
             <a:fld id="{27C6CCC6-2BE5-4E42-96A4-D1E8E81A3D8E}" type="slidenum">
-              <a:rPr lang="fr-FR" smtClean="0"/>
+              <a:rPr lang="fr-FR"/>
               <a:t>‹#›</a:t>
             </a:fld>
             <a:endParaRPr lang="fr-FR"/>
@@ -2460,23 +2435,15 @@
         </p:txBody>
       </p:sp>
     </p:spTree>
-    <p:extLst>
-      <p:ext uri="{BB962C8B-B14F-4D97-AF65-F5344CB8AC3E}">
-        <p14:creationId xmlns:p14="http://schemas.microsoft.com/office/powerpoint/2010/main" val="3747632232"/>
-      </p:ext>
-    </p:extLst>
   </p:cSld>
   <p:clrMapOvr>
     <a:masterClrMapping/>
   </p:clrMapOvr>
-  <p:transition>
-    <p:fade/>
-  </p:transition>
 </p:sldLayout>
 </file>
 
 <file path=ppt/slideLayouts/slideLayout5.xml><?xml version="1.0" encoding="utf-8"?>
-<p:sldLayout xmlns:a="http://schemas.openxmlformats.org/drawingml/2006/main" xmlns:r="http://schemas.openxmlformats.org/officeDocument/2006/relationships" xmlns:p="http://schemas.openxmlformats.org/presentationml/2006/main" type="twoTxTwoObj" preserve="1">
+<p:sldLayout xmlns:a="http://schemas.openxmlformats.org/drawingml/2006/main" xmlns:r="http://schemas.openxmlformats.org/officeDocument/2006/relationships" xmlns:p="http://schemas.openxmlformats.org/presentationml/2006/main" xmlns:m="http://schemas.openxmlformats.org/officeDocument/2006/math" xmlns:w="http://schemas.openxmlformats.org/wordprocessingml/2006/main" matchingName="" preserve="1" showMasterPhAnim="0" showMasterSp="1" type="twoTxTwoObj" userDrawn="1">
   <p:cSld name="Comparaison">
     <p:spTree>
       <p:nvGrpSpPr>
@@ -2484,7 +2451,7 @@
         <p:cNvGrpSpPr/>
         <p:nvPr/>
       </p:nvGrpSpPr>
-      <p:grpSpPr>
+      <p:grpSpPr bwMode="auto">
         <a:xfrm>
           <a:off x="0" y="0"/>
           <a:ext cx="0" cy="0"/>
@@ -2494,7 +2461,7 @@
       </p:grpSpPr>
       <p:sp>
         <p:nvSpPr>
-          <p:cNvPr id="2" name="Titre 1"/>
+          <p:cNvPr id="1986346003" name="Titre 1"/>
           <p:cNvSpPr>
             <a:spLocks noGrp="1"/>
           </p:cNvSpPr>
@@ -2502,7 +2469,7 @@
             <p:ph type="title"/>
           </p:nvPr>
         </p:nvSpPr>
-        <p:spPr>
+        <p:spPr bwMode="auto">
           <a:xfrm>
             <a:off x="839788" y="365125"/>
             <a:ext cx="10515600" cy="1325563"/>
@@ -2512,16 +2479,20 @@
           <a:bodyPr/>
           <a:lstStyle/>
           <a:p>
+            <a:pPr>
+              <a:defRPr/>
+            </a:pPr>
             <a:r>
               <a:rPr lang="fr-FR"/>
               <a:t>Modifiez le style du titre</a:t>
             </a:r>
-          </a:p>
-        </p:txBody>
-      </p:sp>
-      <p:sp>
-        <p:nvSpPr>
-          <p:cNvPr id="3" name="Espace réservé du texte 2"/>
+            <a:endParaRPr/>
+          </a:p>
+        </p:txBody>
+      </p:sp>
+      <p:sp>
+        <p:nvSpPr>
+          <p:cNvPr id="2059056400" name="Espace réservé du texte 2"/>
           <p:cNvSpPr>
             <a:spLocks noGrp="1"/>
           </p:cNvSpPr>
@@ -2529,7 +2500,7 @@
             <p:ph type="body" idx="1"/>
           </p:nvPr>
         </p:nvSpPr>
-        <p:spPr>
+        <p:spPr bwMode="auto">
           <a:xfrm>
             <a:off x="839788" y="1681163"/>
             <a:ext cx="5157787" cy="823912"/>
@@ -2576,17 +2547,20 @@
             </a:lvl9pPr>
           </a:lstStyle>
           <a:p>
-            <a:pPr lvl="0"/>
+            <a:pPr lvl="0">
+              <a:defRPr/>
+            </a:pPr>
             <a:r>
               <a:rPr lang="fr-FR"/>
               <a:t>Modifiez les styles du texte du masque</a:t>
             </a:r>
-          </a:p>
-        </p:txBody>
-      </p:sp>
-      <p:sp>
-        <p:nvSpPr>
-          <p:cNvPr id="4" name="Espace réservé du contenu 3"/>
+            <a:endParaRPr/>
+          </a:p>
+        </p:txBody>
+      </p:sp>
+      <p:sp>
+        <p:nvSpPr>
+          <p:cNvPr id="446872553" name="Espace réservé du contenu 3"/>
           <p:cNvSpPr>
             <a:spLocks noGrp="1"/>
           </p:cNvSpPr>
@@ -2594,9 +2568,9 @@
             <p:ph sz="half" idx="2"/>
           </p:nvPr>
         </p:nvSpPr>
-        <p:spPr>
+        <p:spPr bwMode="auto">
           <a:xfrm>
-            <a:off x="839788" y="2505075"/>
+            <a:off x="839788" y="2505074"/>
             <a:ext cx="5157787" cy="3684588"/>
           </a:xfrm>
         </p:spPr>
@@ -2604,45 +2578,60 @@
           <a:bodyPr/>
           <a:lstStyle/>
           <a:p>
-            <a:pPr lvl="0"/>
+            <a:pPr lvl="0">
+              <a:defRPr/>
+            </a:pPr>
             <a:r>
               <a:rPr lang="fr-FR"/>
               <a:t>Modifiez les styles du texte du masque</a:t>
             </a:r>
-          </a:p>
-          <a:p>
-            <a:pPr lvl="1"/>
+            <a:endParaRPr/>
+          </a:p>
+          <a:p>
+            <a:pPr lvl="1">
+              <a:defRPr/>
+            </a:pPr>
             <a:r>
               <a:rPr lang="fr-FR"/>
               <a:t>Deuxième niveau</a:t>
             </a:r>
-          </a:p>
-          <a:p>
-            <a:pPr lvl="2"/>
+            <a:endParaRPr/>
+          </a:p>
+          <a:p>
+            <a:pPr lvl="2">
+              <a:defRPr/>
+            </a:pPr>
             <a:r>
               <a:rPr lang="fr-FR"/>
               <a:t>Troisième niveau</a:t>
             </a:r>
-          </a:p>
-          <a:p>
-            <a:pPr lvl="3"/>
+            <a:endParaRPr/>
+          </a:p>
+          <a:p>
+            <a:pPr lvl="3">
+              <a:defRPr/>
+            </a:pPr>
             <a:r>
               <a:rPr lang="fr-FR"/>
               <a:t>Quatrième niveau</a:t>
             </a:r>
-          </a:p>
-          <a:p>
-            <a:pPr lvl="4"/>
+            <a:endParaRPr/>
+          </a:p>
+          <a:p>
+            <a:pPr lvl="4">
+              <a:defRPr/>
+            </a:pPr>
             <a:r>
               <a:rPr lang="fr-FR"/>
               <a:t>Cinquième niveau</a:t>
             </a:r>
-          </a:p>
-        </p:txBody>
-      </p:sp>
-      <p:sp>
-        <p:nvSpPr>
-          <p:cNvPr id="5" name="Espace réservé du texte 4"/>
+            <a:endParaRPr/>
+          </a:p>
+        </p:txBody>
+      </p:sp>
+      <p:sp>
+        <p:nvSpPr>
+          <p:cNvPr id="730806346" name="Espace réservé du texte 4"/>
           <p:cNvSpPr>
             <a:spLocks noGrp="1"/>
           </p:cNvSpPr>
@@ -2650,7 +2639,7 @@
             <p:ph type="body" sz="quarter" idx="3"/>
           </p:nvPr>
         </p:nvSpPr>
-        <p:spPr>
+        <p:spPr bwMode="auto">
           <a:xfrm>
             <a:off x="6172200" y="1681163"/>
             <a:ext cx="5183188" cy="823912"/>
@@ -2697,17 +2686,20 @@
             </a:lvl9pPr>
           </a:lstStyle>
           <a:p>
-            <a:pPr lvl="0"/>
+            <a:pPr lvl="0">
+              <a:defRPr/>
+            </a:pPr>
             <a:r>
               <a:rPr lang="fr-FR"/>
               <a:t>Modifiez les styles du texte du masque</a:t>
             </a:r>
-          </a:p>
-        </p:txBody>
-      </p:sp>
-      <p:sp>
-        <p:nvSpPr>
-          <p:cNvPr id="6" name="Espace réservé du contenu 5"/>
+            <a:endParaRPr/>
+          </a:p>
+        </p:txBody>
+      </p:sp>
+      <p:sp>
+        <p:nvSpPr>
+          <p:cNvPr id="707477287" name="Espace réservé du contenu 5"/>
           <p:cNvSpPr>
             <a:spLocks noGrp="1"/>
           </p:cNvSpPr>
@@ -2715,9 +2707,9 @@
             <p:ph sz="quarter" idx="4"/>
           </p:nvPr>
         </p:nvSpPr>
-        <p:spPr>
+        <p:spPr bwMode="auto">
           <a:xfrm>
-            <a:off x="6172200" y="2505075"/>
+            <a:off x="6172200" y="2505074"/>
             <a:ext cx="5183188" cy="3684588"/>
           </a:xfrm>
         </p:spPr>
@@ -2725,45 +2717,60 @@
           <a:bodyPr/>
           <a:lstStyle/>
           <a:p>
-            <a:pPr lvl="0"/>
+            <a:pPr lvl="0">
+              <a:defRPr/>
+            </a:pPr>
             <a:r>
               <a:rPr lang="fr-FR"/>
               <a:t>Modifiez les styles du texte du masque</a:t>
             </a:r>
-          </a:p>
-          <a:p>
-            <a:pPr lvl="1"/>
+            <a:endParaRPr/>
+          </a:p>
+          <a:p>
+            <a:pPr lvl="1">
+              <a:defRPr/>
+            </a:pPr>
             <a:r>
               <a:rPr lang="fr-FR"/>
               <a:t>Deuxième niveau</a:t>
             </a:r>
-          </a:p>
-          <a:p>
-            <a:pPr lvl="2"/>
+            <a:endParaRPr/>
+          </a:p>
+          <a:p>
+            <a:pPr lvl="2">
+              <a:defRPr/>
+            </a:pPr>
             <a:r>
               <a:rPr lang="fr-FR"/>
               <a:t>Troisième niveau</a:t>
             </a:r>
-          </a:p>
-          <a:p>
-            <a:pPr lvl="3"/>
+            <a:endParaRPr/>
+          </a:p>
+          <a:p>
+            <a:pPr lvl="3">
+              <a:defRPr/>
+            </a:pPr>
             <a:r>
               <a:rPr lang="fr-FR"/>
               <a:t>Quatrième niveau</a:t>
             </a:r>
-          </a:p>
-          <a:p>
-            <a:pPr lvl="4"/>
+            <a:endParaRPr/>
+          </a:p>
+          <a:p>
+            <a:pPr lvl="4">
+              <a:defRPr/>
+            </a:pPr>
             <a:r>
               <a:rPr lang="fr-FR"/>
               <a:t>Cinquième niveau</a:t>
             </a:r>
-          </a:p>
-        </p:txBody>
-      </p:sp>
-      <p:sp>
-        <p:nvSpPr>
-          <p:cNvPr id="7" name="Espace réservé de la date 6"/>
+            <a:endParaRPr/>
+          </a:p>
+        </p:txBody>
+      </p:sp>
+      <p:sp>
+        <p:nvSpPr>
+          <p:cNvPr id="1210984089" name="Espace réservé de la date 6"/>
           <p:cNvSpPr>
             <a:spLocks noGrp="1"/>
           </p:cNvSpPr>
@@ -2771,13 +2778,16 @@
             <p:ph type="dt" sz="half" idx="10"/>
           </p:nvPr>
         </p:nvSpPr>
-        <p:spPr/>
+        <p:spPr bwMode="auto"/>
         <p:txBody>
           <a:bodyPr/>
           <a:lstStyle/>
           <a:p>
+            <a:pPr>
+              <a:defRPr/>
+            </a:pPr>
             <a:fld id="{638941B0-F4D5-4460-BCAD-F7E2B41A8257}" type="datetimeFigureOut">
-              <a:rPr lang="fr-FR" smtClean="0"/>
+              <a:rPr lang="fr-FR"/>
               <a:t>28/03/2026</a:t>
             </a:fld>
             <a:endParaRPr lang="fr-FR"/>
@@ -2786,7 +2796,7 @@
       </p:sp>
       <p:sp>
         <p:nvSpPr>
-          <p:cNvPr id="8" name="Espace réservé du pied de page 7"/>
+          <p:cNvPr id="1002089667" name="Espace réservé du pied de page 7"/>
           <p:cNvSpPr>
             <a:spLocks noGrp="1"/>
           </p:cNvSpPr>
@@ -2794,18 +2804,21 @@
             <p:ph type="ftr" sz="quarter" idx="11"/>
           </p:nvPr>
         </p:nvSpPr>
-        <p:spPr/>
+        <p:spPr bwMode="auto"/>
         <p:txBody>
           <a:bodyPr/>
           <a:lstStyle/>
           <a:p>
+            <a:pPr>
+              <a:defRPr/>
+            </a:pPr>
             <a:endParaRPr lang="fr-FR"/>
           </a:p>
         </p:txBody>
       </p:sp>
       <p:sp>
         <p:nvSpPr>
-          <p:cNvPr id="9" name="Espace réservé du numéro de diapositive 8"/>
+          <p:cNvPr id="1980898088" name="Espace réservé du numéro de diapositive 8"/>
           <p:cNvSpPr>
             <a:spLocks noGrp="1"/>
           </p:cNvSpPr>
@@ -2813,13 +2826,16 @@
             <p:ph type="sldNum" sz="quarter" idx="12"/>
           </p:nvPr>
         </p:nvSpPr>
-        <p:spPr/>
+        <p:spPr bwMode="auto"/>
         <p:txBody>
           <a:bodyPr/>
           <a:lstStyle/>
           <a:p>
+            <a:pPr>
+              <a:defRPr/>
+            </a:pPr>
             <a:fld id="{27C6CCC6-2BE5-4E42-96A4-D1E8E81A3D8E}" type="slidenum">
-              <a:rPr lang="fr-FR" smtClean="0"/>
+              <a:rPr lang="fr-FR"/>
               <a:t>‹#›</a:t>
             </a:fld>
             <a:endParaRPr lang="fr-FR"/>
@@ -2827,23 +2843,15 @@
         </p:txBody>
       </p:sp>
     </p:spTree>
-    <p:extLst>
-      <p:ext uri="{BB962C8B-B14F-4D97-AF65-F5344CB8AC3E}">
-        <p14:creationId xmlns:p14="http://schemas.microsoft.com/office/powerpoint/2010/main" val="2611866596"/>
-      </p:ext>
-    </p:extLst>
   </p:cSld>
   <p:clrMapOvr>
     <a:masterClrMapping/>
   </p:clrMapOvr>
-  <p:transition>
-    <p:fade/>
-  </p:transition>
 </p:sldLayout>
 </file>
 
 <file path=ppt/slideLayouts/slideLayout6.xml><?xml version="1.0" encoding="utf-8"?>
-<p:sldLayout xmlns:a="http://schemas.openxmlformats.org/drawingml/2006/main" xmlns:r="http://schemas.openxmlformats.org/officeDocument/2006/relationships" xmlns:p="http://schemas.openxmlformats.org/presentationml/2006/main" type="titleOnly" preserve="1">
+<p:sldLayout xmlns:a="http://schemas.openxmlformats.org/drawingml/2006/main" xmlns:r="http://schemas.openxmlformats.org/officeDocument/2006/relationships" xmlns:p="http://schemas.openxmlformats.org/presentationml/2006/main" xmlns:m="http://schemas.openxmlformats.org/officeDocument/2006/math" xmlns:w="http://schemas.openxmlformats.org/wordprocessingml/2006/main" matchingName="" preserve="1" showMasterPhAnim="0" showMasterSp="1" type="titleOnly" userDrawn="1">
   <p:cSld name="Titre seul">
     <p:spTree>
       <p:nvGrpSpPr>
@@ -2851,7 +2859,7 @@
         <p:cNvGrpSpPr/>
         <p:nvPr/>
       </p:nvGrpSpPr>
-      <p:grpSpPr>
+      <p:grpSpPr bwMode="auto">
         <a:xfrm>
           <a:off x="0" y="0"/>
           <a:ext cx="0" cy="0"/>
@@ -2861,7 +2869,7 @@
       </p:grpSpPr>
       <p:sp>
         <p:nvSpPr>
-          <p:cNvPr id="2" name="Titre 1"/>
+          <p:cNvPr id="220298058" name="Titre 1"/>
           <p:cNvSpPr>
             <a:spLocks noGrp="1"/>
           </p:cNvSpPr>
@@ -2869,21 +2877,25 @@
             <p:ph type="title"/>
           </p:nvPr>
         </p:nvSpPr>
-        <p:spPr/>
+        <p:spPr bwMode="auto"/>
         <p:txBody>
           <a:bodyPr/>
           <a:lstStyle/>
           <a:p>
+            <a:pPr>
+              <a:defRPr/>
+            </a:pPr>
             <a:r>
               <a:rPr lang="fr-FR"/>
               <a:t>Modifiez le style du titre</a:t>
             </a:r>
-          </a:p>
-        </p:txBody>
-      </p:sp>
-      <p:sp>
-        <p:nvSpPr>
-          <p:cNvPr id="3" name="Espace réservé de la date 2"/>
+            <a:endParaRPr/>
+          </a:p>
+        </p:txBody>
+      </p:sp>
+      <p:sp>
+        <p:nvSpPr>
+          <p:cNvPr id="729595501" name="Espace réservé de la date 2"/>
           <p:cNvSpPr>
             <a:spLocks noGrp="1"/>
           </p:cNvSpPr>
@@ -2891,13 +2903,16 @@
             <p:ph type="dt" sz="half" idx="10"/>
           </p:nvPr>
         </p:nvSpPr>
-        <p:spPr/>
+        <p:spPr bwMode="auto"/>
         <p:txBody>
           <a:bodyPr/>
           <a:lstStyle/>
           <a:p>
+            <a:pPr>
+              <a:defRPr/>
+            </a:pPr>
             <a:fld id="{638941B0-F4D5-4460-BCAD-F7E2B41A8257}" type="datetimeFigureOut">
-              <a:rPr lang="fr-FR" smtClean="0"/>
+              <a:rPr lang="fr-FR"/>
               <a:t>28/03/2026</a:t>
             </a:fld>
             <a:endParaRPr lang="fr-FR"/>
@@ -2906,7 +2921,7 @@
       </p:sp>
       <p:sp>
         <p:nvSpPr>
-          <p:cNvPr id="4" name="Espace réservé du pied de page 3"/>
+          <p:cNvPr id="548442568" name="Espace réservé du pied de page 3"/>
           <p:cNvSpPr>
             <a:spLocks noGrp="1"/>
           </p:cNvSpPr>
@@ -2914,18 +2929,21 @@
             <p:ph type="ftr" sz="quarter" idx="11"/>
           </p:nvPr>
         </p:nvSpPr>
-        <p:spPr/>
+        <p:spPr bwMode="auto"/>
         <p:txBody>
           <a:bodyPr/>
           <a:lstStyle/>
           <a:p>
+            <a:pPr>
+              <a:defRPr/>
+            </a:pPr>
             <a:endParaRPr lang="fr-FR"/>
           </a:p>
         </p:txBody>
       </p:sp>
       <p:sp>
         <p:nvSpPr>
-          <p:cNvPr id="5" name="Espace réservé du numéro de diapositive 4"/>
+          <p:cNvPr id="465785686" name="Espace réservé du numéro de diapositive 4"/>
           <p:cNvSpPr>
             <a:spLocks noGrp="1"/>
           </p:cNvSpPr>
@@ -2933,13 +2951,16 @@
             <p:ph type="sldNum" sz="quarter" idx="12"/>
           </p:nvPr>
         </p:nvSpPr>
-        <p:spPr/>
+        <p:spPr bwMode="auto"/>
         <p:txBody>
           <a:bodyPr/>
           <a:lstStyle/>
           <a:p>
+            <a:pPr>
+              <a:defRPr/>
+            </a:pPr>
             <a:fld id="{27C6CCC6-2BE5-4E42-96A4-D1E8E81A3D8E}" type="slidenum">
-              <a:rPr lang="fr-FR" smtClean="0"/>
+              <a:rPr lang="fr-FR"/>
               <a:t>‹#›</a:t>
             </a:fld>
             <a:endParaRPr lang="fr-FR"/>
@@ -2947,23 +2968,15 @@
         </p:txBody>
       </p:sp>
     </p:spTree>
-    <p:extLst>
-      <p:ext uri="{BB962C8B-B14F-4D97-AF65-F5344CB8AC3E}">
-        <p14:creationId xmlns:p14="http://schemas.microsoft.com/office/powerpoint/2010/main" val="3395854097"/>
-      </p:ext>
-    </p:extLst>
   </p:cSld>
   <p:clrMapOvr>
     <a:masterClrMapping/>
   </p:clrMapOvr>
-  <p:transition>
-    <p:fade/>
-  </p:transition>
 </p:sldLayout>
 </file>
 
 <file path=ppt/slideLayouts/slideLayout7.xml><?xml version="1.0" encoding="utf-8"?>
-<p:sldLayout xmlns:a="http://schemas.openxmlformats.org/drawingml/2006/main" xmlns:r="http://schemas.openxmlformats.org/officeDocument/2006/relationships" xmlns:p="http://schemas.openxmlformats.org/presentationml/2006/main" type="blank" preserve="1">
+<p:sldLayout xmlns:a="http://schemas.openxmlformats.org/drawingml/2006/main" xmlns:r="http://schemas.openxmlformats.org/officeDocument/2006/relationships" xmlns:p="http://schemas.openxmlformats.org/presentationml/2006/main" xmlns:m="http://schemas.openxmlformats.org/officeDocument/2006/math" xmlns:w="http://schemas.openxmlformats.org/wordprocessingml/2006/main" matchingName="" preserve="1" showMasterPhAnim="0" showMasterSp="1" type="blank" userDrawn="1">
   <p:cSld name="Vide">
     <p:spTree>
       <p:nvGrpSpPr>
@@ -2971,7 +2984,7 @@
         <p:cNvGrpSpPr/>
         <p:nvPr/>
       </p:nvGrpSpPr>
-      <p:grpSpPr>
+      <p:grpSpPr bwMode="auto">
         <a:xfrm>
           <a:off x="0" y="0"/>
           <a:ext cx="0" cy="0"/>
@@ -2981,7 +2994,7 @@
       </p:grpSpPr>
       <p:sp>
         <p:nvSpPr>
-          <p:cNvPr id="2" name="Espace réservé de la date 1"/>
+          <p:cNvPr id="1012026365" name="Espace réservé de la date 1"/>
           <p:cNvSpPr>
             <a:spLocks noGrp="1"/>
           </p:cNvSpPr>
@@ -2989,13 +3002,16 @@
             <p:ph type="dt" sz="half" idx="10"/>
           </p:nvPr>
         </p:nvSpPr>
-        <p:spPr/>
+        <p:spPr bwMode="auto"/>
         <p:txBody>
           <a:bodyPr/>
           <a:lstStyle/>
           <a:p>
+            <a:pPr>
+              <a:defRPr/>
+            </a:pPr>
             <a:fld id="{638941B0-F4D5-4460-BCAD-F7E2B41A8257}" type="datetimeFigureOut">
-              <a:rPr lang="fr-FR" smtClean="0"/>
+              <a:rPr lang="fr-FR"/>
               <a:t>28/03/2026</a:t>
             </a:fld>
             <a:endParaRPr lang="fr-FR"/>
@@ -3004,7 +3020,7 @@
       </p:sp>
       <p:sp>
         <p:nvSpPr>
-          <p:cNvPr id="3" name="Espace réservé du pied de page 2"/>
+          <p:cNvPr id="2055300676" name="Espace réservé du pied de page 2"/>
           <p:cNvSpPr>
             <a:spLocks noGrp="1"/>
           </p:cNvSpPr>
@@ -3012,18 +3028,21 @@
             <p:ph type="ftr" sz="quarter" idx="11"/>
           </p:nvPr>
         </p:nvSpPr>
-        <p:spPr/>
+        <p:spPr bwMode="auto"/>
         <p:txBody>
           <a:bodyPr/>
           <a:lstStyle/>
           <a:p>
+            <a:pPr>
+              <a:defRPr/>
+            </a:pPr>
             <a:endParaRPr lang="fr-FR"/>
           </a:p>
         </p:txBody>
       </p:sp>
       <p:sp>
         <p:nvSpPr>
-          <p:cNvPr id="4" name="Espace réservé du numéro de diapositive 3"/>
+          <p:cNvPr id="409598905" name="Espace réservé du numéro de diapositive 3"/>
           <p:cNvSpPr>
             <a:spLocks noGrp="1"/>
           </p:cNvSpPr>
@@ -3031,13 +3050,16 @@
             <p:ph type="sldNum" sz="quarter" idx="12"/>
           </p:nvPr>
         </p:nvSpPr>
-        <p:spPr/>
+        <p:spPr bwMode="auto"/>
         <p:txBody>
           <a:bodyPr/>
           <a:lstStyle/>
           <a:p>
+            <a:pPr>
+              <a:defRPr/>
+            </a:pPr>
             <a:fld id="{27C6CCC6-2BE5-4E42-96A4-D1E8E81A3D8E}" type="slidenum">
-              <a:rPr lang="fr-FR" smtClean="0"/>
+              <a:rPr lang="fr-FR"/>
               <a:t>‹#›</a:t>
             </a:fld>
             <a:endParaRPr lang="fr-FR"/>
@@ -3045,23 +3067,15 @@
         </p:txBody>
       </p:sp>
     </p:spTree>
-    <p:extLst>
-      <p:ext uri="{BB962C8B-B14F-4D97-AF65-F5344CB8AC3E}">
-        <p14:creationId xmlns:p14="http://schemas.microsoft.com/office/powerpoint/2010/main" val="4040201302"/>
-      </p:ext>
-    </p:extLst>
   </p:cSld>
   <p:clrMapOvr>
     <a:masterClrMapping/>
   </p:clrMapOvr>
-  <p:transition>
-    <p:fade/>
-  </p:transition>
 </p:sldLayout>
 </file>
 
 <file path=ppt/slideLayouts/slideLayout8.xml><?xml version="1.0" encoding="utf-8"?>
-<p:sldLayout xmlns:a="http://schemas.openxmlformats.org/drawingml/2006/main" xmlns:r="http://schemas.openxmlformats.org/officeDocument/2006/relationships" xmlns:p="http://schemas.openxmlformats.org/presentationml/2006/main" type="objTx" preserve="1">
+<p:sldLayout xmlns:a="http://schemas.openxmlformats.org/drawingml/2006/main" xmlns:r="http://schemas.openxmlformats.org/officeDocument/2006/relationships" xmlns:p="http://schemas.openxmlformats.org/presentationml/2006/main" xmlns:m="http://schemas.openxmlformats.org/officeDocument/2006/math" xmlns:w="http://schemas.openxmlformats.org/wordprocessingml/2006/main" matchingName="" preserve="1" showMasterPhAnim="0" showMasterSp="1" type="objTx" userDrawn="1">
   <p:cSld name="Contenu avec légende">
     <p:spTree>
       <p:nvGrpSpPr>
@@ -3069,7 +3083,7 @@
         <p:cNvGrpSpPr/>
         <p:nvPr/>
       </p:nvGrpSpPr>
-      <p:grpSpPr>
+      <p:grpSpPr bwMode="auto">
         <a:xfrm>
           <a:off x="0" y="0"/>
           <a:ext cx="0" cy="0"/>
@@ -3079,7 +3093,7 @@
       </p:grpSpPr>
       <p:sp>
         <p:nvSpPr>
-          <p:cNvPr id="2" name="Titre 1"/>
+          <p:cNvPr id="502949755" name="Titre 1"/>
           <p:cNvSpPr>
             <a:spLocks noGrp="1"/>
           </p:cNvSpPr>
@@ -3087,7 +3101,7 @@
             <p:ph type="title"/>
           </p:nvPr>
         </p:nvSpPr>
-        <p:spPr>
+        <p:spPr bwMode="auto">
           <a:xfrm>
             <a:off x="839788" y="457200"/>
             <a:ext cx="3932237" cy="1600200"/>
@@ -3101,16 +3115,20 @@
             </a:lvl1pPr>
           </a:lstStyle>
           <a:p>
+            <a:pPr>
+              <a:defRPr/>
+            </a:pPr>
             <a:r>
               <a:rPr lang="fr-FR"/>
               <a:t>Modifiez le style du titre</a:t>
             </a:r>
-          </a:p>
-        </p:txBody>
-      </p:sp>
-      <p:sp>
-        <p:nvSpPr>
-          <p:cNvPr id="3" name="Espace réservé du contenu 2"/>
+            <a:endParaRPr/>
+          </a:p>
+        </p:txBody>
+      </p:sp>
+      <p:sp>
+        <p:nvSpPr>
+          <p:cNvPr id="1097895086" name="Espace réservé du contenu 2"/>
           <p:cNvSpPr>
             <a:spLocks noGrp="1"/>
           </p:cNvSpPr>
@@ -3118,7 +3136,7 @@
             <p:ph idx="1"/>
           </p:nvPr>
         </p:nvSpPr>
-        <p:spPr>
+        <p:spPr bwMode="auto">
           <a:xfrm>
             <a:off x="5183188" y="987425"/>
             <a:ext cx="6172200" cy="4873625"/>
@@ -3156,45 +3174,60 @@
             </a:lvl9pPr>
           </a:lstStyle>
           <a:p>
-            <a:pPr lvl="0"/>
+            <a:pPr lvl="0">
+              <a:defRPr/>
+            </a:pPr>
             <a:r>
               <a:rPr lang="fr-FR"/>
               <a:t>Modifiez les styles du texte du masque</a:t>
             </a:r>
-          </a:p>
-          <a:p>
-            <a:pPr lvl="1"/>
+            <a:endParaRPr/>
+          </a:p>
+          <a:p>
+            <a:pPr lvl="1">
+              <a:defRPr/>
+            </a:pPr>
             <a:r>
               <a:rPr lang="fr-FR"/>
               <a:t>Deuxième niveau</a:t>
             </a:r>
-          </a:p>
-          <a:p>
-            <a:pPr lvl="2"/>
+            <a:endParaRPr/>
+          </a:p>
+          <a:p>
+            <a:pPr lvl="2">
+              <a:defRPr/>
+            </a:pPr>
             <a:r>
               <a:rPr lang="fr-FR"/>
               <a:t>Troisième niveau</a:t>
             </a:r>
-          </a:p>
-          <a:p>
-            <a:pPr lvl="3"/>
+            <a:endParaRPr/>
+          </a:p>
+          <a:p>
+            <a:pPr lvl="3">
+              <a:defRPr/>
+            </a:pPr>
             <a:r>
               <a:rPr lang="fr-FR"/>
               <a:t>Quatrième niveau</a:t>
             </a:r>
-          </a:p>
-          <a:p>
-            <a:pPr lvl="4"/>
+            <a:endParaRPr/>
+          </a:p>
+          <a:p>
+            <a:pPr lvl="4">
+              <a:defRPr/>
+            </a:pPr>
             <a:r>
               <a:rPr lang="fr-FR"/>
               <a:t>Cinquième niveau</a:t>
             </a:r>
-          </a:p>
-        </p:txBody>
-      </p:sp>
-      <p:sp>
-        <p:nvSpPr>
-          <p:cNvPr id="4" name="Espace réservé du texte 3"/>
+            <a:endParaRPr/>
+          </a:p>
+        </p:txBody>
+      </p:sp>
+      <p:sp>
+        <p:nvSpPr>
+          <p:cNvPr id="143447991" name="Espace réservé du texte 3"/>
           <p:cNvSpPr>
             <a:spLocks noGrp="1"/>
           </p:cNvSpPr>
@@ -3202,7 +3235,7 @@
             <p:ph type="body" sz="half" idx="2"/>
           </p:nvPr>
         </p:nvSpPr>
-        <p:spPr>
+        <p:spPr bwMode="auto">
           <a:xfrm>
             <a:off x="839788" y="2057400"/>
             <a:ext cx="3932237" cy="3811588"/>
@@ -3249,17 +3282,20 @@
             </a:lvl9pPr>
           </a:lstStyle>
           <a:p>
-            <a:pPr lvl="0"/>
+            <a:pPr lvl="0">
+              <a:defRPr/>
+            </a:pPr>
             <a:r>
               <a:rPr lang="fr-FR"/>
               <a:t>Modifiez les styles du texte du masque</a:t>
             </a:r>
-          </a:p>
-        </p:txBody>
-      </p:sp>
-      <p:sp>
-        <p:nvSpPr>
-          <p:cNvPr id="5" name="Espace réservé de la date 4"/>
+            <a:endParaRPr/>
+          </a:p>
+        </p:txBody>
+      </p:sp>
+      <p:sp>
+        <p:nvSpPr>
+          <p:cNvPr id="117952774" name="Espace réservé de la date 4"/>
           <p:cNvSpPr>
             <a:spLocks noGrp="1"/>
           </p:cNvSpPr>
@@ -3267,13 +3303,16 @@
             <p:ph type="dt" sz="half" idx="10"/>
           </p:nvPr>
         </p:nvSpPr>
-        <p:spPr/>
+        <p:spPr bwMode="auto"/>
         <p:txBody>
           <a:bodyPr/>
           <a:lstStyle/>
           <a:p>
+            <a:pPr>
+              <a:defRPr/>
+            </a:pPr>
             <a:fld id="{638941B0-F4D5-4460-BCAD-F7E2B41A8257}" type="datetimeFigureOut">
-              <a:rPr lang="fr-FR" smtClean="0"/>
+              <a:rPr lang="fr-FR"/>
               <a:t>28/03/2026</a:t>
             </a:fld>
             <a:endParaRPr lang="fr-FR"/>
@@ -3282,7 +3321,7 @@
       </p:sp>
       <p:sp>
         <p:nvSpPr>
-          <p:cNvPr id="6" name="Espace réservé du pied de page 5"/>
+          <p:cNvPr id="194050457" name="Espace réservé du pied de page 5"/>
           <p:cNvSpPr>
             <a:spLocks noGrp="1"/>
           </p:cNvSpPr>
@@ -3290,18 +3329,21 @@
             <p:ph type="ftr" sz="quarter" idx="11"/>
           </p:nvPr>
         </p:nvSpPr>
-        <p:spPr/>
+        <p:spPr bwMode="auto"/>
         <p:txBody>
           <a:bodyPr/>
           <a:lstStyle/>
           <a:p>
+            <a:pPr>
+              <a:defRPr/>
+            </a:pPr>
             <a:endParaRPr lang="fr-FR"/>
           </a:p>
         </p:txBody>
       </p:sp>
       <p:sp>
         <p:nvSpPr>
-          <p:cNvPr id="7" name="Espace réservé du numéro de diapositive 6"/>
+          <p:cNvPr id="187362261" name="Espace réservé du numéro de diapositive 6"/>
           <p:cNvSpPr>
             <a:spLocks noGrp="1"/>
           </p:cNvSpPr>
@@ -3309,13 +3351,16 @@
             <p:ph type="sldNum" sz="quarter" idx="12"/>
           </p:nvPr>
         </p:nvSpPr>
-        <p:spPr/>
+        <p:spPr bwMode="auto"/>
         <p:txBody>
           <a:bodyPr/>
           <a:lstStyle/>
           <a:p>
+            <a:pPr>
+              <a:defRPr/>
+            </a:pPr>
             <a:fld id="{27C6CCC6-2BE5-4E42-96A4-D1E8E81A3D8E}" type="slidenum">
-              <a:rPr lang="fr-FR" smtClean="0"/>
+              <a:rPr lang="fr-FR"/>
               <a:t>‹#›</a:t>
             </a:fld>
             <a:endParaRPr lang="fr-FR"/>
@@ -3323,23 +3368,15 @@
         </p:txBody>
       </p:sp>
     </p:spTree>
-    <p:extLst>
-      <p:ext uri="{BB962C8B-B14F-4D97-AF65-F5344CB8AC3E}">
-        <p14:creationId xmlns:p14="http://schemas.microsoft.com/office/powerpoint/2010/main" val="2706407263"/>
-      </p:ext>
-    </p:extLst>
   </p:cSld>
   <p:clrMapOvr>
     <a:masterClrMapping/>
   </p:clrMapOvr>
-  <p:transition>
-    <p:fade/>
-  </p:transition>
 </p:sldLayout>
 </file>
 
 <file path=ppt/slideLayouts/slideLayout9.xml><?xml version="1.0" encoding="utf-8"?>
-<p:sldLayout xmlns:a="http://schemas.openxmlformats.org/drawingml/2006/main" xmlns:r="http://schemas.openxmlformats.org/officeDocument/2006/relationships" xmlns:p="http://schemas.openxmlformats.org/presentationml/2006/main" type="picTx" preserve="1">
+<p:sldLayout xmlns:a="http://schemas.openxmlformats.org/drawingml/2006/main" xmlns:r="http://schemas.openxmlformats.org/officeDocument/2006/relationships" xmlns:p="http://schemas.openxmlformats.org/presentationml/2006/main" xmlns:m="http://schemas.openxmlformats.org/officeDocument/2006/math" xmlns:w="http://schemas.openxmlformats.org/wordprocessingml/2006/main" matchingName="" preserve="1" showMasterPhAnim="0" showMasterSp="1" type="picTx" userDrawn="1">
   <p:cSld name="Image avec légende">
     <p:spTree>
       <p:nvGrpSpPr>
@@ -3347,7 +3384,7 @@
         <p:cNvGrpSpPr/>
         <p:nvPr/>
       </p:nvGrpSpPr>
-      <p:grpSpPr>
+      <p:grpSpPr bwMode="auto">
         <a:xfrm>
           <a:off x="0" y="0"/>
           <a:ext cx="0" cy="0"/>
@@ -3357,7 +3394,7 @@
       </p:grpSpPr>
       <p:sp>
         <p:nvSpPr>
-          <p:cNvPr id="2" name="Titre 1"/>
+          <p:cNvPr id="1875633217" name="Titre 1"/>
           <p:cNvSpPr>
             <a:spLocks noGrp="1"/>
           </p:cNvSpPr>
@@ -3365,7 +3402,7 @@
             <p:ph type="title"/>
           </p:nvPr>
         </p:nvSpPr>
-        <p:spPr>
+        <p:spPr bwMode="auto">
           <a:xfrm>
             <a:off x="839788" y="457200"/>
             <a:ext cx="3932237" cy="1600200"/>
@@ -3379,16 +3416,20 @@
             </a:lvl1pPr>
           </a:lstStyle>
           <a:p>
+            <a:pPr>
+              <a:defRPr/>
+            </a:pPr>
             <a:r>
               <a:rPr lang="fr-FR"/>
               <a:t>Modifiez le style du titre</a:t>
             </a:r>
-          </a:p>
-        </p:txBody>
-      </p:sp>
-      <p:sp>
-        <p:nvSpPr>
-          <p:cNvPr id="3" name="Espace réservé pour une image  2"/>
+            <a:endParaRPr/>
+          </a:p>
+        </p:txBody>
+      </p:sp>
+      <p:sp>
+        <p:nvSpPr>
+          <p:cNvPr id="1999057471" name="Espace réservé pour une image  2"/>
           <p:cNvSpPr>
             <a:spLocks noGrp="1"/>
           </p:cNvSpPr>
@@ -3396,7 +3437,7 @@
             <p:ph type="pic" idx="1"/>
           </p:nvPr>
         </p:nvSpPr>
-        <p:spPr>
+        <p:spPr bwMode="auto">
           <a:xfrm>
             <a:off x="5183188" y="987425"/>
             <a:ext cx="6172200" cy="4873625"/>
@@ -3443,13 +3484,16 @@
             </a:lvl9pPr>
           </a:lstStyle>
           <a:p>
+            <a:pPr>
+              <a:defRPr/>
+            </a:pPr>
             <a:endParaRPr lang="fr-FR"/>
           </a:p>
         </p:txBody>
       </p:sp>
       <p:sp>
         <p:nvSpPr>
-          <p:cNvPr id="4" name="Espace réservé du texte 3"/>
+          <p:cNvPr id="1634857697" name="Espace réservé du texte 3"/>
           <p:cNvSpPr>
             <a:spLocks noGrp="1"/>
           </p:cNvSpPr>
@@ -3457,7 +3501,7 @@
             <p:ph type="body" sz="half" idx="2"/>
           </p:nvPr>
         </p:nvSpPr>
-        <p:spPr>
+        <p:spPr bwMode="auto">
           <a:xfrm>
             <a:off x="839788" y="2057400"/>
             <a:ext cx="3932237" cy="3811588"/>
@@ -3504,17 +3548,20 @@
             </a:lvl9pPr>
           </a:lstStyle>
           <a:p>
-            <a:pPr lvl="0"/>
+            <a:pPr lvl="0">
+              <a:defRPr/>
+            </a:pPr>
             <a:r>
               <a:rPr lang="fr-FR"/>
               <a:t>Modifiez les styles du texte du masque</a:t>
             </a:r>
-          </a:p>
-        </p:txBody>
-      </p:sp>
-      <p:sp>
-        <p:nvSpPr>
-          <p:cNvPr id="5" name="Espace réservé de la date 4"/>
+            <a:endParaRPr/>
+          </a:p>
+        </p:txBody>
+      </p:sp>
+      <p:sp>
+        <p:nvSpPr>
+          <p:cNvPr id="639353094" name="Espace réservé de la date 4"/>
           <p:cNvSpPr>
             <a:spLocks noGrp="1"/>
           </p:cNvSpPr>
@@ -3522,13 +3569,16 @@
             <p:ph type="dt" sz="half" idx="10"/>
           </p:nvPr>
         </p:nvSpPr>
-        <p:spPr/>
+        <p:spPr bwMode="auto"/>
         <p:txBody>
           <a:bodyPr/>
           <a:lstStyle/>
           <a:p>
+            <a:pPr>
+              <a:defRPr/>
+            </a:pPr>
             <a:fld id="{638941B0-F4D5-4460-BCAD-F7E2B41A8257}" type="datetimeFigureOut">
-              <a:rPr lang="fr-FR" smtClean="0"/>
+              <a:rPr lang="fr-FR"/>
               <a:t>28/03/2026</a:t>
             </a:fld>
             <a:endParaRPr lang="fr-FR"/>
@@ -3537,7 +3587,7 @@
       </p:sp>
       <p:sp>
         <p:nvSpPr>
-          <p:cNvPr id="6" name="Espace réservé du pied de page 5"/>
+          <p:cNvPr id="1802445509" name="Espace réservé du pied de page 5"/>
           <p:cNvSpPr>
             <a:spLocks noGrp="1"/>
           </p:cNvSpPr>
@@ -3545,18 +3595,21 @@
             <p:ph type="ftr" sz="quarter" idx="11"/>
           </p:nvPr>
         </p:nvSpPr>
-        <p:spPr/>
+        <p:spPr bwMode="auto"/>
         <p:txBody>
           <a:bodyPr/>
           <a:lstStyle/>
           <a:p>
+            <a:pPr>
+              <a:defRPr/>
+            </a:pPr>
             <a:endParaRPr lang="fr-FR"/>
           </a:p>
         </p:txBody>
       </p:sp>
       <p:sp>
         <p:nvSpPr>
-          <p:cNvPr id="7" name="Espace réservé du numéro de diapositive 6"/>
+          <p:cNvPr id="1358822359" name="Espace réservé du numéro de diapositive 6"/>
           <p:cNvSpPr>
             <a:spLocks noGrp="1"/>
           </p:cNvSpPr>
@@ -3564,13 +3617,16 @@
             <p:ph type="sldNum" sz="quarter" idx="12"/>
           </p:nvPr>
         </p:nvSpPr>
-        <p:spPr/>
+        <p:spPr bwMode="auto"/>
         <p:txBody>
           <a:bodyPr/>
           <a:lstStyle/>
           <a:p>
+            <a:pPr>
+              <a:defRPr/>
+            </a:pPr>
             <a:fld id="{27C6CCC6-2BE5-4E42-96A4-D1E8E81A3D8E}" type="slidenum">
-              <a:rPr lang="fr-FR" smtClean="0"/>
+              <a:rPr lang="fr-FR"/>
               <a:t>‹#›</a:t>
             </a:fld>
             <a:endParaRPr lang="fr-FR"/>
@@ -3578,30 +3634,21 @@
         </p:txBody>
       </p:sp>
     </p:spTree>
-    <p:extLst>
-      <p:ext uri="{BB962C8B-B14F-4D97-AF65-F5344CB8AC3E}">
-        <p14:creationId xmlns:p14="http://schemas.microsoft.com/office/powerpoint/2010/main" val="1610903340"/>
-      </p:ext>
-    </p:extLst>
   </p:cSld>
   <p:clrMapOvr>
     <a:masterClrMapping/>
   </p:clrMapOvr>
-  <p:transition>
-    <p:fade/>
-  </p:transition>
 </p:sldLayout>
 </file>
 
 <file path=ppt/slideMasters/slideMaster1.xml><?xml version="1.0" encoding="utf-8"?>
-<p:sldMaster xmlns:a="http://schemas.openxmlformats.org/drawingml/2006/main" xmlns:r="http://schemas.openxmlformats.org/officeDocument/2006/relationships" xmlns:p="http://schemas.openxmlformats.org/presentationml/2006/main">
-  <p:cSld>
+<p:sldMaster xmlns:a="http://schemas.openxmlformats.org/drawingml/2006/main" xmlns:r="http://schemas.openxmlformats.org/officeDocument/2006/relationships" xmlns:p="http://schemas.openxmlformats.org/presentationml/2006/main" xmlns:m="http://schemas.openxmlformats.org/officeDocument/2006/math" xmlns:w="http://schemas.openxmlformats.org/wordprocessingml/2006/main" preserve="0">
+  <p:cSld name="">
     <p:bg>
-      <p:bgPr>
+      <p:bgPr shadeToTitle="0">
         <a:solidFill>
           <a:schemeClr val="bg1"/>
         </a:solidFill>
-        <a:effectLst/>
       </p:bgPr>
     </p:bg>
     <p:spTree>
@@ -3610,7 +3657,7 @@
         <p:cNvGrpSpPr/>
         <p:nvPr/>
       </p:nvGrpSpPr>
-      <p:grpSpPr>
+      <p:grpSpPr bwMode="auto">
         <a:xfrm>
           <a:off x="0" y="0"/>
           <a:ext cx="0" cy="0"/>
@@ -3620,7 +3667,7 @@
       </p:grpSpPr>
       <p:sp>
         <p:nvSpPr>
-          <p:cNvPr id="2" name="Espace réservé du titre 1"/>
+          <p:cNvPr id="925742702" name="Espace réservé du titre 1"/>
           <p:cNvSpPr>
             <a:spLocks noGrp="1"/>
           </p:cNvSpPr>
@@ -3628,7 +3675,7 @@
             <p:ph type="title"/>
           </p:nvPr>
         </p:nvSpPr>
-        <p:spPr>
+        <p:spPr bwMode="auto">
           <a:xfrm>
             <a:off x="838200" y="365125"/>
             <a:ext cx="10515600" cy="1325563"/>
@@ -3643,16 +3690,20 @@
           </a:bodyPr>
           <a:lstStyle/>
           <a:p>
+            <a:pPr>
+              <a:defRPr/>
+            </a:pPr>
             <a:r>
               <a:rPr lang="fr-FR"/>
               <a:t>Modifiez le style du titre</a:t>
             </a:r>
-          </a:p>
-        </p:txBody>
-      </p:sp>
-      <p:sp>
-        <p:nvSpPr>
-          <p:cNvPr id="3" name="Espace réservé du texte 2"/>
+            <a:endParaRPr/>
+          </a:p>
+        </p:txBody>
+      </p:sp>
+      <p:sp>
+        <p:nvSpPr>
+          <p:cNvPr id="1040923570" name="Espace réservé du texte 2"/>
           <p:cNvSpPr>
             <a:spLocks noGrp="1"/>
           </p:cNvSpPr>
@@ -3660,7 +3711,7 @@
             <p:ph type="body" idx="1"/>
           </p:nvPr>
         </p:nvSpPr>
-        <p:spPr>
+        <p:spPr bwMode="auto">
           <a:xfrm>
             <a:off x="838200" y="1825625"/>
             <a:ext cx="10515600" cy="4351338"/>
@@ -3675,45 +3726,60 @@
           </a:bodyPr>
           <a:lstStyle/>
           <a:p>
-            <a:pPr lvl="0"/>
+            <a:pPr lvl="0">
+              <a:defRPr/>
+            </a:pPr>
             <a:r>
               <a:rPr lang="fr-FR"/>
               <a:t>Modifiez les styles du texte du masque</a:t>
             </a:r>
-          </a:p>
-          <a:p>
-            <a:pPr lvl="1"/>
+            <a:endParaRPr/>
+          </a:p>
+          <a:p>
+            <a:pPr lvl="1">
+              <a:defRPr/>
+            </a:pPr>
             <a:r>
               <a:rPr lang="fr-FR"/>
               <a:t>Deuxième niveau</a:t>
             </a:r>
-          </a:p>
-          <a:p>
-            <a:pPr lvl="2"/>
+            <a:endParaRPr/>
+          </a:p>
+          <a:p>
+            <a:pPr lvl="2">
+              <a:defRPr/>
+            </a:pPr>
             <a:r>
               <a:rPr lang="fr-FR"/>
               <a:t>Troisième niveau</a:t>
             </a:r>
-          </a:p>
-          <a:p>
-            <a:pPr lvl="3"/>
+            <a:endParaRPr/>
+          </a:p>
+          <a:p>
+            <a:pPr lvl="3">
+              <a:defRPr/>
+            </a:pPr>
             <a:r>
               <a:rPr lang="fr-FR"/>
               <a:t>Quatrième niveau</a:t>
             </a:r>
-          </a:p>
-          <a:p>
-            <a:pPr lvl="4"/>
+            <a:endParaRPr/>
+          </a:p>
+          <a:p>
+            <a:pPr lvl="4">
+              <a:defRPr/>
+            </a:pPr>
             <a:r>
               <a:rPr lang="fr-FR"/>
               <a:t>Cinquième niveau</a:t>
             </a:r>
-          </a:p>
-        </p:txBody>
-      </p:sp>
-      <p:sp>
-        <p:nvSpPr>
-          <p:cNvPr id="4" name="Espace réservé de la date 3"/>
+            <a:endParaRPr/>
+          </a:p>
+        </p:txBody>
+      </p:sp>
+      <p:sp>
+        <p:nvSpPr>
+          <p:cNvPr id="1756542850" name="Espace réservé de la date 3"/>
           <p:cNvSpPr>
             <a:spLocks noGrp="1"/>
           </p:cNvSpPr>
@@ -3721,7 +3787,7 @@
             <p:ph type="dt" sz="half" idx="2"/>
           </p:nvPr>
         </p:nvSpPr>
-        <p:spPr>
+        <p:spPr bwMode="auto">
           <a:xfrm>
             <a:off x="838200" y="6356350"/>
             <a:ext cx="2743200" cy="365125"/>
@@ -3744,8 +3810,11 @@
             </a:lvl1pPr>
           </a:lstStyle>
           <a:p>
+            <a:pPr>
+              <a:defRPr/>
+            </a:pPr>
             <a:fld id="{638941B0-F4D5-4460-BCAD-F7E2B41A8257}" type="datetimeFigureOut">
-              <a:rPr lang="fr-FR" smtClean="0"/>
+              <a:rPr lang="fr-FR"/>
               <a:t>28/03/2026</a:t>
             </a:fld>
             <a:endParaRPr lang="fr-FR"/>
@@ -3754,7 +3823,7 @@
       </p:sp>
       <p:sp>
         <p:nvSpPr>
-          <p:cNvPr id="5" name="Espace réservé du pied de page 4"/>
+          <p:cNvPr id="1178001995" name="Espace réservé du pied de page 4"/>
           <p:cNvSpPr>
             <a:spLocks noGrp="1"/>
           </p:cNvSpPr>
@@ -3762,7 +3831,7 @@
             <p:ph type="ftr" sz="quarter" idx="3"/>
           </p:nvPr>
         </p:nvSpPr>
-        <p:spPr>
+        <p:spPr bwMode="auto">
           <a:xfrm>
             <a:off x="4038600" y="6356350"/>
             <a:ext cx="4114800" cy="365125"/>
@@ -3785,13 +3854,16 @@
             </a:lvl1pPr>
           </a:lstStyle>
           <a:p>
+            <a:pPr>
+              <a:defRPr/>
+            </a:pPr>
             <a:endParaRPr lang="fr-FR"/>
           </a:p>
         </p:txBody>
       </p:sp>
       <p:sp>
         <p:nvSpPr>
-          <p:cNvPr id="6" name="Espace réservé du numéro de diapositive 5"/>
+          <p:cNvPr id="1218295669" name="Espace réservé du numéro de diapositive 5"/>
           <p:cNvSpPr>
             <a:spLocks noGrp="1"/>
           </p:cNvSpPr>
@@ -3799,7 +3871,7 @@
             <p:ph type="sldNum" sz="quarter" idx="4"/>
           </p:nvPr>
         </p:nvSpPr>
-        <p:spPr>
+        <p:spPr bwMode="auto">
           <a:xfrm>
             <a:off x="8610600" y="6356350"/>
             <a:ext cx="2743200" cy="365125"/>
@@ -3822,8 +3894,11 @@
             </a:lvl1pPr>
           </a:lstStyle>
           <a:p>
+            <a:pPr>
+              <a:defRPr/>
+            </a:pPr>
             <a:fld id="{27C6CCC6-2BE5-4E42-96A4-D1E8E81A3D8E}" type="slidenum">
-              <a:rPr lang="fr-FR" smtClean="0"/>
+              <a:rPr lang="fr-FR"/>
               <a:t>‹#›</a:t>
             </a:fld>
             <a:endParaRPr lang="fr-FR"/>
@@ -3831,11 +3906,6 @@
         </p:txBody>
       </p:sp>
     </p:spTree>
-    <p:extLst>
-      <p:ext uri="{BB962C8B-B14F-4D97-AF65-F5344CB8AC3E}">
-        <p14:creationId xmlns:p14="http://schemas.microsoft.com/office/powerpoint/2010/main" val="3071127875"/>
-      </p:ext>
-    </p:extLst>
   </p:cSld>
   <p:clrMap bg1="lt1" tx1="dk1" bg2="lt2" tx2="dk2" accent1="accent1" accent2="accent2" accent3="accent3" accent4="accent4" accent5="accent5" accent6="accent6" hlink="hlink" folHlink="folHlink"/>
   <p:sldLayoutIdLst>
@@ -3851,20 +3921,17 @@
     <p:sldLayoutId id="2147483658" r:id="rId10"/>
     <p:sldLayoutId id="2147483659" r:id="rId11"/>
   </p:sldLayoutIdLst>
-  <p:transition>
-    <p:fade/>
-  </p:transition>
   <p:txStyles>
     <p:titleStyle>
-      <a:lvl1pPr algn="l" defTabSz="914400" rtl="0" eaLnBrk="1" latinLnBrk="0" hangingPunct="1">
+      <a:lvl1pPr algn="l" defTabSz="914400" rtl="0">
         <a:lnSpc>
           <a:spcPct val="90000"/>
         </a:lnSpc>
         <a:spcBef>
-          <a:spcPct val="0"/>
+          <a:spcPts val="0"/>
         </a:spcBef>
         <a:buNone/>
-        <a:defRPr sz="4400" kern="1200">
+        <a:defRPr sz="4400">
           <a:solidFill>
             <a:schemeClr val="tx1"/>
           </a:solidFill>
@@ -3875,16 +3942,16 @@
       </a:lvl1pPr>
     </p:titleStyle>
     <p:bodyStyle>
-      <a:lvl1pPr marL="228600" indent="-228600" algn="l" defTabSz="914400" rtl="0" eaLnBrk="1" latinLnBrk="0" hangingPunct="1">
+      <a:lvl1pPr marL="228600" indent="-228600" algn="l" defTabSz="914400" rtl="0">
         <a:lnSpc>
           <a:spcPct val="90000"/>
         </a:lnSpc>
         <a:spcBef>
           <a:spcPts val="1000"/>
         </a:spcBef>
-        <a:buFont typeface="Arial" panose="020B0604020202020204" pitchFamily="34" charset="0"/>
+        <a:buFont typeface="Arial"/>
         <a:buChar char="•"/>
-        <a:defRPr sz="2800" kern="1200">
+        <a:defRPr sz="2800">
           <a:solidFill>
             <a:schemeClr val="tx1"/>
           </a:solidFill>
@@ -3893,16 +3960,16 @@
           <a:cs typeface="+mn-cs"/>
         </a:defRPr>
       </a:lvl1pPr>
-      <a:lvl2pPr marL="685800" indent="-228600" algn="l" defTabSz="914400" rtl="0" eaLnBrk="1" latinLnBrk="0" hangingPunct="1">
+      <a:lvl2pPr marL="685800" indent="-228600" algn="l" defTabSz="914400" rtl="0">
         <a:lnSpc>
           <a:spcPct val="90000"/>
         </a:lnSpc>
         <a:spcBef>
           <a:spcPts val="500"/>
         </a:spcBef>
-        <a:buFont typeface="Arial" panose="020B0604020202020204" pitchFamily="34" charset="0"/>
+        <a:buFont typeface="Arial"/>
         <a:buChar char="•"/>
-        <a:defRPr sz="2400" kern="1200">
+        <a:defRPr sz="2400">
           <a:solidFill>
             <a:schemeClr val="tx1"/>
           </a:solidFill>
@@ -3911,16 +3978,16 @@
           <a:cs typeface="+mn-cs"/>
         </a:defRPr>
       </a:lvl2pPr>
-      <a:lvl3pPr marL="1143000" indent="-228600" algn="l" defTabSz="914400" rtl="0" eaLnBrk="1" latinLnBrk="0" hangingPunct="1">
+      <a:lvl3pPr marL="1143000" indent="-228600" algn="l" defTabSz="914400" rtl="0">
         <a:lnSpc>
           <a:spcPct val="90000"/>
         </a:lnSpc>
         <a:spcBef>
           <a:spcPts val="500"/>
         </a:spcBef>
-        <a:buFont typeface="Arial" panose="020B0604020202020204" pitchFamily="34" charset="0"/>
+        <a:buFont typeface="Arial"/>
         <a:buChar char="•"/>
-        <a:defRPr sz="2000" kern="1200">
+        <a:defRPr sz="2000">
           <a:solidFill>
             <a:schemeClr val="tx1"/>
           </a:solidFill>
@@ -3929,16 +3996,16 @@
           <a:cs typeface="+mn-cs"/>
         </a:defRPr>
       </a:lvl3pPr>
-      <a:lvl4pPr marL="1600200" indent="-228600" algn="l" defTabSz="914400" rtl="0" eaLnBrk="1" latinLnBrk="0" hangingPunct="1">
+      <a:lvl4pPr marL="1600200" indent="-228600" algn="l" defTabSz="914400" rtl="0">
         <a:lnSpc>
           <a:spcPct val="90000"/>
         </a:lnSpc>
         <a:spcBef>
           <a:spcPts val="500"/>
         </a:spcBef>
-        <a:buFont typeface="Arial" panose="020B0604020202020204" pitchFamily="34" charset="0"/>
+        <a:buFont typeface="Arial"/>
         <a:buChar char="•"/>
-        <a:defRPr sz="1800" kern="1200">
+        <a:defRPr sz="1800">
           <a:solidFill>
             <a:schemeClr val="tx1"/>
           </a:solidFill>
@@ -3947,16 +4014,16 @@
           <a:cs typeface="+mn-cs"/>
         </a:defRPr>
       </a:lvl4pPr>
-      <a:lvl5pPr marL="2057400" indent="-228600" algn="l" defTabSz="914400" rtl="0" eaLnBrk="1" latinLnBrk="0" hangingPunct="1">
+      <a:lvl5pPr marL="2057400" indent="-228600" algn="l" defTabSz="914400" rtl="0">
         <a:lnSpc>
           <a:spcPct val="90000"/>
         </a:lnSpc>
         <a:spcBef>
           <a:spcPts val="500"/>
         </a:spcBef>
-        <a:buFont typeface="Arial" panose="020B0604020202020204" pitchFamily="34" charset="0"/>
+        <a:buFont typeface="Arial"/>
         <a:buChar char="•"/>
-        <a:defRPr sz="1800" kern="1200">
+        <a:defRPr sz="1800">
           <a:solidFill>
             <a:schemeClr val="tx1"/>
           </a:solidFill>
@@ -3965,16 +4032,16 @@
           <a:cs typeface="+mn-cs"/>
         </a:defRPr>
       </a:lvl5pPr>
-      <a:lvl6pPr marL="2514600" indent="-228600" algn="l" defTabSz="914400" rtl="0" eaLnBrk="1" latinLnBrk="0" hangingPunct="1">
+      <a:lvl6pPr marL="2514600" indent="-228600" algn="l" defTabSz="914400" rtl="0">
         <a:lnSpc>
           <a:spcPct val="90000"/>
         </a:lnSpc>
         <a:spcBef>
           <a:spcPts val="500"/>
         </a:spcBef>
-        <a:buFont typeface="Arial" panose="020B0604020202020204" pitchFamily="34" charset="0"/>
+        <a:buFont typeface="Arial"/>
         <a:buChar char="•"/>
-        <a:defRPr sz="1800" kern="1200">
+        <a:defRPr sz="1800">
           <a:solidFill>
             <a:schemeClr val="tx1"/>
           </a:solidFill>
@@ -3983,16 +4050,16 @@
           <a:cs typeface="+mn-cs"/>
         </a:defRPr>
       </a:lvl6pPr>
-      <a:lvl7pPr marL="2971800" indent="-228600" algn="l" defTabSz="914400" rtl="0" eaLnBrk="1" latinLnBrk="0" hangingPunct="1">
+      <a:lvl7pPr marL="2971800" indent="-228600" algn="l" defTabSz="914400" rtl="0">
         <a:lnSpc>
           <a:spcPct val="90000"/>
         </a:lnSpc>
         <a:spcBef>
           <a:spcPts val="500"/>
         </a:spcBef>
-        <a:buFont typeface="Arial" panose="020B0604020202020204" pitchFamily="34" charset="0"/>
+        <a:buFont typeface="Arial"/>
         <a:buChar char="•"/>
-        <a:defRPr sz="1800" kern="1200">
+        <a:defRPr sz="1800">
           <a:solidFill>
             <a:schemeClr val="tx1"/>
           </a:solidFill>
@@ -4001,16 +4068,16 @@
           <a:cs typeface="+mn-cs"/>
         </a:defRPr>
       </a:lvl7pPr>
-      <a:lvl8pPr marL="3429000" indent="-228600" algn="l" defTabSz="914400" rtl="0" eaLnBrk="1" latinLnBrk="0" hangingPunct="1">
+      <a:lvl8pPr marL="3429000" indent="-228600" algn="l" defTabSz="914400" rtl="0">
         <a:lnSpc>
           <a:spcPct val="90000"/>
         </a:lnSpc>
         <a:spcBef>
           <a:spcPts val="500"/>
         </a:spcBef>
-        <a:buFont typeface="Arial" panose="020B0604020202020204" pitchFamily="34" charset="0"/>
+        <a:buFont typeface="Arial"/>
         <a:buChar char="•"/>
-        <a:defRPr sz="1800" kern="1200">
+        <a:defRPr sz="1800">
           <a:solidFill>
             <a:schemeClr val="tx1"/>
           </a:solidFill>
@@ -4019,16 +4086,16 @@
           <a:cs typeface="+mn-cs"/>
         </a:defRPr>
       </a:lvl8pPr>
-      <a:lvl9pPr marL="3886200" indent="-228600" algn="l" defTabSz="914400" rtl="0" eaLnBrk="1" latinLnBrk="0" hangingPunct="1">
+      <a:lvl9pPr marL="3886200" indent="-228600" algn="l" defTabSz="914400" rtl="0">
         <a:lnSpc>
           <a:spcPct val="90000"/>
         </a:lnSpc>
         <a:spcBef>
           <a:spcPts val="500"/>
         </a:spcBef>
-        <a:buFont typeface="Arial" panose="020B0604020202020204" pitchFamily="34" charset="0"/>
+        <a:buFont typeface="Arial"/>
         <a:buChar char="•"/>
-        <a:defRPr sz="1800" kern="1200">
+        <a:defRPr sz="1800">
           <a:solidFill>
             <a:schemeClr val="tx1"/>
           </a:solidFill>
@@ -4042,8 +4109,8 @@
       <a:defPPr>
         <a:defRPr lang="fr-FR"/>
       </a:defPPr>
-      <a:lvl1pPr marL="0" algn="l" defTabSz="914400" rtl="0" eaLnBrk="1" latinLnBrk="0" hangingPunct="1">
-        <a:defRPr sz="1800" kern="1200">
+      <a:lvl1pPr marL="0" algn="l" defTabSz="914400" rtl="0">
+        <a:defRPr sz="1800">
           <a:solidFill>
             <a:schemeClr val="tx1"/>
           </a:solidFill>
@@ -4052,8 +4119,8 @@
           <a:cs typeface="+mn-cs"/>
         </a:defRPr>
       </a:lvl1pPr>
-      <a:lvl2pPr marL="457200" algn="l" defTabSz="914400" rtl="0" eaLnBrk="1" latinLnBrk="0" hangingPunct="1">
-        <a:defRPr sz="1800" kern="1200">
+      <a:lvl2pPr marL="457200" algn="l" defTabSz="914400" rtl="0">
+        <a:defRPr sz="1800">
           <a:solidFill>
             <a:schemeClr val="tx1"/>
           </a:solidFill>
@@ -4062,8 +4129,8 @@
           <a:cs typeface="+mn-cs"/>
         </a:defRPr>
       </a:lvl2pPr>
-      <a:lvl3pPr marL="914400" algn="l" defTabSz="914400" rtl="0" eaLnBrk="1" latinLnBrk="0" hangingPunct="1">
-        <a:defRPr sz="1800" kern="1200">
+      <a:lvl3pPr marL="914400" algn="l" defTabSz="914400" rtl="0">
+        <a:defRPr sz="1800">
           <a:solidFill>
             <a:schemeClr val="tx1"/>
           </a:solidFill>
@@ -4072,8 +4139,8 @@
           <a:cs typeface="+mn-cs"/>
         </a:defRPr>
       </a:lvl3pPr>
-      <a:lvl4pPr marL="1371600" algn="l" defTabSz="914400" rtl="0" eaLnBrk="1" latinLnBrk="0" hangingPunct="1">
-        <a:defRPr sz="1800" kern="1200">
+      <a:lvl4pPr marL="1371600" algn="l" defTabSz="914400" rtl="0">
+        <a:defRPr sz="1800">
           <a:solidFill>
             <a:schemeClr val="tx1"/>
           </a:solidFill>
@@ -4082,8 +4149,8 @@
           <a:cs typeface="+mn-cs"/>
         </a:defRPr>
       </a:lvl4pPr>
-      <a:lvl5pPr marL="1828800" algn="l" defTabSz="914400" rtl="0" eaLnBrk="1" latinLnBrk="0" hangingPunct="1">
-        <a:defRPr sz="1800" kern="1200">
+      <a:lvl5pPr marL="1828800" algn="l" defTabSz="914400" rtl="0">
+        <a:defRPr sz="1800">
           <a:solidFill>
             <a:schemeClr val="tx1"/>
           </a:solidFill>
@@ -4092,8 +4159,8 @@
           <a:cs typeface="+mn-cs"/>
         </a:defRPr>
       </a:lvl5pPr>
-      <a:lvl6pPr marL="2286000" algn="l" defTabSz="914400" rtl="0" eaLnBrk="1" latinLnBrk="0" hangingPunct="1">
-        <a:defRPr sz="1800" kern="1200">
+      <a:lvl6pPr marL="2286000" algn="l" defTabSz="914400" rtl="0">
+        <a:defRPr sz="1800">
           <a:solidFill>
             <a:schemeClr val="tx1"/>
           </a:solidFill>
@@ -4102,8 +4169,8 @@
           <a:cs typeface="+mn-cs"/>
         </a:defRPr>
       </a:lvl6pPr>
-      <a:lvl7pPr marL="2743200" algn="l" defTabSz="914400" rtl="0" eaLnBrk="1" latinLnBrk="0" hangingPunct="1">
-        <a:defRPr sz="1800" kern="1200">
+      <a:lvl7pPr marL="2743200" algn="l" defTabSz="914400" rtl="0">
+        <a:defRPr sz="1800">
           <a:solidFill>
             <a:schemeClr val="tx1"/>
           </a:solidFill>
@@ -4112,8 +4179,8 @@
           <a:cs typeface="+mn-cs"/>
         </a:defRPr>
       </a:lvl7pPr>
-      <a:lvl8pPr marL="3200400" algn="l" defTabSz="914400" rtl="0" eaLnBrk="1" latinLnBrk="0" hangingPunct="1">
-        <a:defRPr sz="1800" kern="1200">
+      <a:lvl8pPr marL="3200400" algn="l" defTabSz="914400" rtl="0">
+        <a:defRPr sz="1800">
           <a:solidFill>
             <a:schemeClr val="tx1"/>
           </a:solidFill>
@@ -4122,8 +4189,8 @@
           <a:cs typeface="+mn-cs"/>
         </a:defRPr>
       </a:lvl8pPr>
-      <a:lvl9pPr marL="3657600" algn="l" defTabSz="914400" rtl="0" eaLnBrk="1" latinLnBrk="0" hangingPunct="1">
-        <a:defRPr sz="1800" kern="1200">
+      <a:lvl9pPr marL="3657600" algn="l" defTabSz="914400" rtl="0">
+        <a:defRPr sz="1800">
           <a:solidFill>
             <a:schemeClr val="tx1"/>
           </a:solidFill>
@@ -4138,14 +4205,13 @@
 </file>
 
 <file path=ppt/slides/slide1.xml><?xml version="1.0" encoding="utf-8"?>
-<p:sld xmlns:a="http://schemas.openxmlformats.org/drawingml/2006/main" xmlns:r="http://schemas.openxmlformats.org/officeDocument/2006/relationships" xmlns:p="http://schemas.openxmlformats.org/presentationml/2006/main">
-  <p:cSld>
+<p:sld xmlns:a="http://schemas.openxmlformats.org/drawingml/2006/main" xmlns:r="http://schemas.openxmlformats.org/officeDocument/2006/relationships" xmlns:p="http://schemas.openxmlformats.org/presentationml/2006/main" xmlns:m="http://schemas.openxmlformats.org/officeDocument/2006/math" xmlns:w="http://schemas.openxmlformats.org/wordprocessingml/2006/main" xmlns:mc="http://schemas.openxmlformats.org/markup-compatibility/2006" showMasterPhAnim="0" showMasterSp="1" show="1">
+  <p:cSld name="">
     <p:bg>
-      <p:bgPr>
+      <p:bgPr shadeToTitle="0">
         <a:solidFill>
           <a:srgbClr val="FFFFFF"/>
         </a:solidFill>
-        <a:effectLst/>
       </p:bgPr>
     </p:bg>
     <p:spTree>
@@ -4154,7 +4220,7 @@
         <p:cNvGrpSpPr/>
         <p:nvPr/>
       </p:nvGrpSpPr>
-      <p:grpSpPr>
+      <p:grpSpPr bwMode="auto">
         <a:xfrm>
           <a:off x="0" y="0"/>
           <a:ext cx="0" cy="0"/>
@@ -4164,7 +4230,7 @@
       </p:grpSpPr>
       <p:sp>
         <p:nvSpPr>
-          <p:cNvPr id="2" name="Titre 1"/>
+          <p:cNvPr id="97910257" name="Titre 1"/>
           <p:cNvSpPr>
             <a:spLocks noGrp="1"/>
           </p:cNvSpPr>
@@ -4172,7 +4238,7 @@
             <p:ph type="ctrTitle"/>
           </p:nvPr>
         </p:nvSpPr>
-        <p:spPr>
+        <p:spPr bwMode="auto">
           <a:xfrm>
             <a:off x="489858" y="1122363"/>
             <a:ext cx="11563046" cy="2387600"/>
@@ -4184,9 +4250,11 @@
           </a:bodyPr>
           <a:lstStyle/>
           <a:p>
-            <a:pPr algn="l"/>
-            <a:r>
-              <a:rPr lang="fr-FR" sz="5400" b="1" dirty="0" err="1">
+            <a:pPr algn="l">
+              <a:defRPr/>
+            </a:pPr>
+            <a:r>
+              <a:rPr lang="fr-FR" sz="5400" b="1">
                 <a:solidFill>
                   <a:srgbClr val="00008B"/>
                 </a:solidFill>
@@ -4197,7 +4265,7 @@
               <a:t>Why</a:t>
             </a:r>
             <a:r>
-              <a:rPr lang="fr-FR" sz="5400" b="1" dirty="0">
+              <a:rPr lang="fr-FR" sz="5400" b="1">
                 <a:solidFill>
                   <a:srgbClr val="00008B"/>
                 </a:solidFill>
@@ -4208,7 +4276,7 @@
               <a:t> </a:t>
             </a:r>
             <a:r>
-              <a:rPr lang="fr-FR" sz="5400" b="1" dirty="0" err="1">
+              <a:rPr lang="fr-FR" sz="5400" b="1">
                 <a:solidFill>
                   <a:srgbClr val="00008B"/>
                 </a:solidFill>
@@ -4219,7 +4287,7 @@
               <a:t>Websites</a:t>
             </a:r>
             <a:r>
-              <a:rPr lang="fr-FR" sz="5400" b="1" dirty="0">
+              <a:rPr lang="fr-FR" sz="5400" b="1">
                 <a:solidFill>
                   <a:srgbClr val="00008B"/>
                 </a:solidFill>
@@ -4230,14 +4298,14 @@
               <a:t> Never Save</a:t>
             </a:r>
             <a:br>
-              <a:rPr lang="fr-FR" sz="5400" b="1" dirty="0">
+              <a:rPr lang="fr-FR" sz="5400" b="1">
                 <a:latin typeface="Consolas"/>
                 <a:ea typeface="+mj-lt"/>
                 <a:cs typeface="+mj-lt"/>
               </a:rPr>
             </a:br>
             <a:r>
-              <a:rPr lang="fr-FR" sz="5400" b="1" dirty="0" err="1">
+              <a:rPr lang="fr-FR" sz="5400" b="1">
                 <a:solidFill>
                   <a:srgbClr val="00008B"/>
                 </a:solidFill>
@@ -4248,7 +4316,7 @@
               <a:t>Your</a:t>
             </a:r>
             <a:r>
-              <a:rPr lang="fr-FR" sz="5400" b="1" dirty="0">
+              <a:rPr lang="fr-FR" sz="5400" b="1">
                 <a:solidFill>
                   <a:srgbClr val="00008B"/>
                 </a:solidFill>
@@ -4259,7 +4327,7 @@
               <a:t> </a:t>
             </a:r>
             <a:r>
-              <a:rPr lang="fr-FR" sz="5400" b="1" dirty="0" err="1">
+              <a:rPr lang="fr-FR" sz="5400" b="1">
                 <a:solidFill>
                   <a:srgbClr val="00008B"/>
                 </a:solidFill>
@@ -4269,7 +4337,7 @@
               </a:rPr>
               <a:t>Passwords</a:t>
             </a:r>
-            <a:endParaRPr lang="fr-FR" sz="5400" b="1" dirty="0" err="1">
+            <a:endParaRPr lang="fr-FR" sz="5400" b="1">
               <a:solidFill>
                 <a:srgbClr val="00008B"/>
               </a:solidFill>
@@ -4281,7 +4349,7 @@
       </p:sp>
       <p:sp>
         <p:nvSpPr>
-          <p:cNvPr id="3" name="Sous-titre 2"/>
+          <p:cNvPr id="1007090399" name="Sous-titre 2"/>
           <p:cNvSpPr>
             <a:spLocks noGrp="1"/>
           </p:cNvSpPr>
@@ -4289,7 +4357,7 @@
             <p:ph type="subTitle" idx="1"/>
           </p:nvPr>
         </p:nvSpPr>
-        <p:spPr>
+        <p:spPr bwMode="auto">
           <a:xfrm>
             <a:off x="489857" y="3655642"/>
             <a:ext cx="9144000" cy="1655762"/>
@@ -4301,7 +4369,9 @@
           </a:bodyPr>
           <a:lstStyle/>
           <a:p>
-            <a:pPr algn="l"/>
+            <a:pPr algn="l">
+              <a:defRPr/>
+            </a:pPr>
             <a:r>
               <a:rPr lang="fr-FR" sz="3200" b="1">
                 <a:latin typeface="Consolas"/>
@@ -4311,7 +4381,7 @@
               <a:t>How </a:t>
             </a:r>
             <a:r>
-              <a:rPr lang="fr-FR" sz="3200" b="1" err="1">
+              <a:rPr lang="fr-FR" sz="3200" b="1">
                 <a:latin typeface="Consolas"/>
                 <a:ea typeface="+mn-lt"/>
                 <a:cs typeface="+mn-lt"/>
@@ -4327,7 +4397,7 @@
               <a:t> </a:t>
             </a:r>
             <a:r>
-              <a:rPr lang="fr-FR" sz="3200" b="1" err="1">
+              <a:rPr lang="fr-FR" sz="3200" b="1">
                 <a:latin typeface="Consolas"/>
                 <a:ea typeface="+mn-lt"/>
                 <a:cs typeface="+mn-lt"/>
@@ -4342,30 +4412,23 @@
               </a:rPr>
               <a:t> in the backend</a:t>
             </a:r>
+            <a:endParaRPr/>
           </a:p>
         </p:txBody>
       </p:sp>
       <p:pic>
         <p:nvPicPr>
-          <p:cNvPr id="5" name="Picture 4" descr="A black and blue text on a black background&#10;&#10;AI-generated content may be incorrect.">
-            <a:extLst>
-              <a:ext uri="{FF2B5EF4-FFF2-40B4-BE49-F238E27FC236}">
-                <a16:creationId xmlns:a16="http://schemas.microsoft.com/office/drawing/2014/main" id="{C743F170-A794-DDBB-8BFB-2DF0E8F5D626}"/>
-              </a:ext>
-            </a:extLst>
-          </p:cNvPr>
+          <p:cNvPr id="355031107" name="Picture 4" descr="A black and blue text on a black background&#10;&#10;AI-generated content may be incorrect."/>
           <p:cNvPicPr>
             <a:picLocks noChangeAspect="1"/>
           </p:cNvPicPr>
           <p:nvPr/>
         </p:nvPicPr>
-        <p:blipFill>
-          <a:blip r:embed="rId2"/>
-          <a:stretch>
-            <a:fillRect/>
-          </a:stretch>
+        <p:blipFill rotWithShape="1">
+          <a:blip r:embed="rId3"/>
+          <a:stretch/>
         </p:blipFill>
-        <p:spPr>
+        <p:spPr bwMode="auto">
           <a:xfrm>
             <a:off x="10819492" y="-244021"/>
             <a:ext cx="1242786" cy="1206501"/>
@@ -4377,17 +4440,11 @@
       </p:pic>
       <p:cxnSp>
         <p:nvCxnSpPr>
-          <p:cNvPr id="6" name="Straight Arrow Connector 5">
-            <a:extLst>
-              <a:ext uri="{FF2B5EF4-FFF2-40B4-BE49-F238E27FC236}">
-                <a16:creationId xmlns:a16="http://schemas.microsoft.com/office/drawing/2014/main" id="{11AD315B-DFEA-F214-3733-B71405775188}"/>
-              </a:ext>
-            </a:extLst>
-          </p:cNvPr>
+          <p:cNvPr id="1103364739" name="Straight Arrow Connector 5"/>
           <p:cNvCxnSpPr/>
           <p:nvPr/>
         </p:nvCxnSpPr>
-        <p:spPr>
+        <p:spPr bwMode="auto">
           <a:xfrm>
             <a:off x="581380" y="4393132"/>
             <a:ext cx="8689615" cy="44029"/>
@@ -4414,19 +4471,13 @@
       </p:cxnSp>
       <p:sp>
         <p:nvSpPr>
-          <p:cNvPr id="7" name="TextBox 6">
-            <a:extLst>
-              <a:ext uri="{FF2B5EF4-FFF2-40B4-BE49-F238E27FC236}">
-                <a16:creationId xmlns:a16="http://schemas.microsoft.com/office/drawing/2014/main" id="{B55F4E29-2361-E601-D414-50B65910AA58}"/>
-              </a:ext>
-            </a:extLst>
-          </p:cNvPr>
+          <p:cNvPr id="1153161379" name="TextBox 6"/>
           <p:cNvSpPr txBox="1"/>
           <p:nvPr/>
         </p:nvSpPr>
-        <p:spPr>
+        <p:spPr bwMode="auto">
           <a:xfrm>
-            <a:off x="-936" y="6489382"/>
+            <a:off x="489856" y="5965506"/>
             <a:ext cx="7647354" cy="369332"/>
           </a:xfrm>
           <a:prstGeom prst="rect">
@@ -4436,13 +4487,14 @@
         </p:spPr>
         <p:txBody>
           <a:bodyPr rot="0" spcFirstLastPara="0" vertOverflow="overflow" horzOverflow="overflow" vert="horz" wrap="square" lIns="91440" tIns="45720" rIns="91440" bIns="45720" numCol="1" spcCol="0" rtlCol="0" fromWordArt="0" anchor="t" anchorCtr="0" forceAA="0" compatLnSpc="1">
-            <a:prstTxWarp prst="textNoShape">
-              <a:avLst/>
-            </a:prstTxWarp>
+            <a:prstTxWarp prst="textNoShape"/>
             <a:spAutoFit/>
           </a:bodyPr>
           <a:lstStyle/>
           <a:p>
+            <a:pPr>
+              <a:defRPr/>
+            </a:pPr>
             <a:r>
               <a:rPr lang="en-US" b="1">
                 <a:latin typeface="Consolas"/>
@@ -4454,24 +4506,19 @@
         </p:txBody>
       </p:sp>
     </p:spTree>
-    <p:extLst>
-      <p:ext uri="{BB962C8B-B14F-4D97-AF65-F5344CB8AC3E}">
-        <p14:creationId xmlns:p14="http://schemas.microsoft.com/office/powerpoint/2010/main" val="3784089036"/>
-      </p:ext>
-    </p:extLst>
   </p:cSld>
   <p:clrMapOvr>
     <a:masterClrMapping/>
   </p:clrMapOvr>
   <mc:AlternateContent xmlns:mc="http://schemas.openxmlformats.org/markup-compatibility/2006">
-    <mc:Choice xmlns:p14="http://schemas.microsoft.com/office/powerpoint/2010/main" Requires="p14">
-      <p:transition p14:dur="250">
-        <p:fade/>
+    <mc:Choice xmlns:p159="http://schemas.microsoft.com/office/powerpoint/2015/09/main" xmlns:p14="http://schemas.microsoft.com/office/powerpoint/2010/main" Requires="p159">
+      <p:transition spd="fast" p14:dur="250" advClick="1">
+        <p:fade thruBlk="0"/>
       </p:transition>
     </mc:Choice>
     <mc:Fallback>
-      <p:transition>
-        <p:fade/>
+      <p:transition spd="fast" advClick="1">
+        <p:fade thruBlk="0"/>
       </p:transition>
     </mc:Fallback>
   </mc:AlternateContent>
@@ -4479,21 +4526,15 @@
 </file>
 
 <file path=ppt/slides/slide2.xml><?xml version="1.0" encoding="utf-8"?>
-<p:sld xmlns:a="http://schemas.openxmlformats.org/drawingml/2006/main" xmlns:r="http://schemas.openxmlformats.org/officeDocument/2006/relationships" xmlns:p="http://schemas.openxmlformats.org/presentationml/2006/main">
-  <p:cSld>
+<p:sld xmlns:a="http://schemas.openxmlformats.org/drawingml/2006/main" xmlns:r="http://schemas.openxmlformats.org/officeDocument/2006/relationships" xmlns:p="http://schemas.openxmlformats.org/presentationml/2006/main" xmlns:m="http://schemas.openxmlformats.org/officeDocument/2006/math" xmlns:w="http://schemas.openxmlformats.org/wordprocessingml/2006/main" xmlns:mc="http://schemas.openxmlformats.org/markup-compatibility/2006" showMasterPhAnim="0" showMasterSp="1" show="1">
+  <p:cSld name="">
     <p:spTree>
       <p:nvGrpSpPr>
-        <p:cNvPr id="1" name="">
-          <a:extLst>
-            <a:ext uri="{FF2B5EF4-FFF2-40B4-BE49-F238E27FC236}">
-              <a16:creationId xmlns:a16="http://schemas.microsoft.com/office/drawing/2014/main" id="{DE11A28C-ACF1-4EC0-0F84-3F39575969BE}"/>
-            </a:ext>
-          </a:extLst>
-        </p:cNvPr>
+        <p:cNvPr id="1" name=""/>
         <p:cNvGrpSpPr/>
         <p:nvPr/>
       </p:nvGrpSpPr>
-      <p:grpSpPr>
+      <p:grpSpPr bwMode="auto">
         <a:xfrm>
           <a:off x="0" y="0"/>
           <a:ext cx="0" cy="0"/>
@@ -4503,13 +4544,7 @@
       </p:grpSpPr>
       <p:sp>
         <p:nvSpPr>
-          <p:cNvPr id="2" name="Titre 1">
-            <a:extLst>
-              <a:ext uri="{FF2B5EF4-FFF2-40B4-BE49-F238E27FC236}">
-                <a16:creationId xmlns:a16="http://schemas.microsoft.com/office/drawing/2014/main" id="{D5EF060B-7992-7B88-C0A8-71DF8EEEFA7E}"/>
-              </a:ext>
-            </a:extLst>
-          </p:cNvPr>
+          <p:cNvPr id="960454165" name="Titre 1"/>
           <p:cNvSpPr>
             <a:spLocks noGrp="1"/>
           </p:cNvSpPr>
@@ -4517,7 +4552,7 @@
             <p:ph type="title" idx="4294967295"/>
           </p:nvPr>
         </p:nvSpPr>
-        <p:spPr>
+        <p:spPr bwMode="auto">
           <a:xfrm>
             <a:off x="348343" y="307068"/>
             <a:ext cx="10515600" cy="1325563"/>
@@ -4529,6 +4564,9 @@
           </a:bodyPr>
           <a:lstStyle/>
           <a:p>
+            <a:pPr>
+              <a:defRPr/>
+            </a:pPr>
             <a:r>
               <a:rPr lang="fr-FR" b="1">
                 <a:latin typeface="Consolas"/>
@@ -4537,7 +4575,7 @@
               <a:t>The </a:t>
             </a:r>
             <a:r>
-              <a:rPr lang="fr-FR" b="1" err="1">
+              <a:rPr lang="fr-FR" b="1">
                 <a:latin typeface="Consolas"/>
                 <a:cs typeface="Courier New"/>
               </a:rPr>
@@ -4551,36 +4589,29 @@
               <a:t> </a:t>
             </a:r>
             <a:r>
-              <a:rPr lang="fr-FR" b="1" err="1">
+              <a:rPr lang="fr-FR" b="1">
                 <a:latin typeface="Consolas"/>
                 <a:cs typeface="Courier New"/>
               </a:rPr>
               <a:t>Problem</a:t>
             </a:r>
+            <a:endParaRPr/>
           </a:p>
         </p:txBody>
       </p:sp>
       <p:pic>
         <p:nvPicPr>
-          <p:cNvPr id="17" name="Picture 16" descr="A black and blue text on a black background&#10;&#10;AI-generated content may be incorrect.">
-            <a:extLst>
-              <a:ext uri="{FF2B5EF4-FFF2-40B4-BE49-F238E27FC236}">
-                <a16:creationId xmlns:a16="http://schemas.microsoft.com/office/drawing/2014/main" id="{D6834974-FAF5-B955-AF99-37309BE16EFA}"/>
-              </a:ext>
-            </a:extLst>
-          </p:cNvPr>
+          <p:cNvPr id="912627149" name="Picture 16" descr="A black and blue text on a black background&#10;&#10;AI-generated content may be incorrect."/>
           <p:cNvPicPr>
             <a:picLocks noChangeAspect="1"/>
           </p:cNvPicPr>
           <p:nvPr/>
         </p:nvPicPr>
-        <p:blipFill>
+        <p:blipFill rotWithShape="1">
           <a:blip r:embed="rId3"/>
-          <a:stretch>
-            <a:fillRect/>
-          </a:stretch>
+          <a:stretch/>
         </p:blipFill>
-        <p:spPr>
+        <p:spPr bwMode="auto">
           <a:xfrm>
             <a:off x="10819492" y="-244021"/>
             <a:ext cx="1242786" cy="1206501"/>
@@ -4592,17 +4623,11 @@
       </p:pic>
       <p:sp>
         <p:nvSpPr>
-          <p:cNvPr id="5" name="TextBox 7">
-            <a:extLst>
-              <a:ext uri="{FF2B5EF4-FFF2-40B4-BE49-F238E27FC236}">
-                <a16:creationId xmlns:a16="http://schemas.microsoft.com/office/drawing/2014/main" id="{CD8E5C3C-A163-3101-FDFA-A42B2EEFEF80}"/>
-              </a:ext>
-            </a:extLst>
-          </p:cNvPr>
+          <p:cNvPr id="1797239890" name="TextBox 7"/>
           <p:cNvSpPr txBox="1"/>
           <p:nvPr/>
         </p:nvSpPr>
-        <p:spPr>
+        <p:spPr bwMode="auto">
           <a:xfrm>
             <a:off x="5052558" y="2121219"/>
             <a:ext cx="6959926" cy="2769989"/>
@@ -4614,9 +4639,7 @@
         </p:spPr>
         <p:txBody>
           <a:bodyPr rot="0" spcFirstLastPara="0" vertOverflow="overflow" horzOverflow="overflow" vert="horz" wrap="square" lIns="91440" tIns="45720" rIns="91440" bIns="45720" numCol="1" spcCol="0" rtlCol="0" fromWordArt="0" anchor="t" anchorCtr="0" forceAA="0" compatLnSpc="1">
-            <a:prstTxWarp prst="textNoShape">
-              <a:avLst/>
-            </a:prstTxWarp>
+            <a:prstTxWarp prst="textNoShape"/>
             <a:spAutoFit/>
           </a:bodyPr>
           <a:lstStyle/>
@@ -4624,6 +4647,7 @@
             <a:pPr marL="285750" indent="-285750">
               <a:buFont typeface="Calibri"/>
               <a:buChar char="-"/>
+              <a:defRPr/>
             </a:pPr>
             <a:r>
               <a:rPr lang="en-US" sz="2400" b="1">
@@ -4631,7 +4655,7 @@
               </a:rPr>
               <a:t>Exact input = Exact database record</a:t>
             </a:r>
-            <a:endParaRPr lang="en-US" sz="2400" b="1" dirty="0">
+            <a:endParaRPr lang="en-US" sz="2400" b="1">
               <a:latin typeface="Consolas"/>
             </a:endParaRPr>
           </a:p>
@@ -4639,8 +4663,9 @@
             <a:pPr marL="285750" indent="-285750">
               <a:buFont typeface="Calibri"/>
               <a:buChar char="-"/>
-            </a:pPr>
-            <a:endParaRPr lang="en-US" sz="2400" b="1" dirty="0">
+              <a:defRPr/>
+            </a:pPr>
+            <a:endParaRPr lang="en-US" sz="2400" b="1">
               <a:latin typeface="Consolas"/>
             </a:endParaRPr>
           </a:p>
@@ -4648,6 +4673,7 @@
             <a:pPr marL="285750" indent="-285750">
               <a:buFont typeface="Calibri"/>
               <a:buChar char="-"/>
+              <a:defRPr/>
             </a:pPr>
             <a:r>
               <a:rPr lang="en-US" sz="2400" b="1">
@@ -4655,7 +4681,7 @@
               </a:rPr>
               <a:t>One breach = Total Database Compromise</a:t>
             </a:r>
-            <a:endParaRPr lang="en-US" sz="2400" b="1" dirty="0">
+            <a:endParaRPr lang="en-US" sz="2400" b="1">
               <a:latin typeface="Consolas"/>
             </a:endParaRPr>
           </a:p>
@@ -4663,8 +4689,9 @@
             <a:pPr marL="285750" indent="-285750">
               <a:buFont typeface="Calibri"/>
               <a:buChar char="-"/>
-            </a:pPr>
-            <a:endParaRPr lang="en-US" sz="2400" b="1" dirty="0">
+              <a:defRPr/>
+            </a:pPr>
+            <a:endParaRPr lang="en-US" sz="2400" b="1">
               <a:latin typeface="Consolas"/>
             </a:endParaRPr>
           </a:p>
@@ -4672,6 +4699,7 @@
             <a:pPr marL="285750" indent="-285750">
               <a:buFont typeface="Calibri"/>
               <a:buChar char="-"/>
+              <a:defRPr/>
             </a:pPr>
             <a:r>
               <a:rPr lang="en-US" sz="2400" b="1">
@@ -4679,11 +4707,13 @@
               </a:rPr>
               <a:t>NEVER leave passwords in plaintext</a:t>
             </a:r>
+            <a:endParaRPr/>
           </a:p>
           <a:p>
             <a:pPr marL="285750" indent="-285750">
               <a:buFont typeface="Calibri"/>
               <a:buChar char="-"/>
+              <a:defRPr/>
             </a:pPr>
             <a:endParaRPr lang="en-US" b="1">
               <a:latin typeface="Consolas"/>
@@ -4693,12 +4723,16 @@
             <a:pPr marL="285750" indent="-285750">
               <a:buFont typeface="Calibri"/>
               <a:buChar char="-"/>
+              <a:defRPr/>
             </a:pPr>
             <a:endParaRPr lang="en-US" b="1">
               <a:latin typeface="Consolas"/>
             </a:endParaRPr>
           </a:p>
           <a:p>
+            <a:pPr>
+              <a:defRPr/>
+            </a:pPr>
             <a:endParaRPr lang="en-US" b="1">
               <a:latin typeface="Consolas"/>
             </a:endParaRPr>
@@ -4707,63 +4741,41 @@
       </p:sp>
       <p:graphicFrame>
         <p:nvGraphicFramePr>
-          <p:cNvPr id="8" name="Table 7">
-            <a:extLst>
-              <a:ext uri="{FF2B5EF4-FFF2-40B4-BE49-F238E27FC236}">
-                <a16:creationId xmlns:a16="http://schemas.microsoft.com/office/drawing/2014/main" id="{7E9E5DB6-2AD3-E0BB-A0EE-B4A15BA131E8}"/>
-              </a:ext>
-            </a:extLst>
-          </p:cNvPr>
+          <p:cNvPr id="2027582524" name="Table 7"/>
           <p:cNvGraphicFramePr>
-            <a:graphicFrameLocks noGrp="1"/>
+            <a:graphicFrameLocks xmlns:a="http://schemas.openxmlformats.org/drawingml/2006/main" noGrp="1"/>
           </p:cNvGraphicFramePr>
-          <p:nvPr>
-            <p:extLst>
-              <p:ext uri="{D42A27DB-BD31-4B8C-83A1-F6EECF244321}">
-                <p14:modId xmlns:p14="http://schemas.microsoft.com/office/powerpoint/2010/main" val="558427801"/>
-              </p:ext>
-            </p:extLst>
-          </p:nvPr>
+          <p:nvPr/>
         </p:nvGraphicFramePr>
-        <p:xfrm>
+        <p:xfrm rot="0">
           <a:off x="1085157" y="1640240"/>
           <a:ext cx="3799244" cy="3485787"/>
         </p:xfrm>
         <a:graphic>
           <a:graphicData uri="http://schemas.openxmlformats.org/drawingml/2006/table">
             <a:tbl>
-              <a:tblPr firstRow="1" bandRow="1">
+              <a:tblPr firstRow="1" firstCol="0" lastRow="0" lastCol="0" bandRow="1" bandCol="0">
                 <a:tableStyleId>{793D81CF-94F2-401A-BA57-92F5A7B2D0C5}</a:tableStyleId>
               </a:tblPr>
               <a:tblGrid>
-                <a:gridCol w="1888789">
-                  <a:extLst>
-                    <a:ext uri="{9D8B030D-6E8A-4147-A177-3AD203B41FA5}">
-                      <a16:colId xmlns:a16="http://schemas.microsoft.com/office/drawing/2014/main" val="54938029"/>
-                    </a:ext>
-                  </a:extLst>
-                </a:gridCol>
-                <a:gridCol w="1910455">
-                  <a:extLst>
-                    <a:ext uri="{9D8B030D-6E8A-4147-A177-3AD203B41FA5}">
-                      <a16:colId xmlns:a16="http://schemas.microsoft.com/office/drawing/2014/main" val="1290070235"/>
-                    </a:ext>
-                  </a:extLst>
-                </a:gridCol>
+                <a:gridCol w="1888789"/>
+                <a:gridCol w="1910455"/>
               </a:tblGrid>
               <a:tr h="1161929">
                 <a:tc>
                   <a:txBody>
                     <a:bodyPr/>
-                    <a:lstStyle/>
                     <a:p>
-                      <a:pPr algn="ctr"/>
+                      <a:pPr algn="ctr">
+                        <a:defRPr/>
+                      </a:pPr>
                       <a:r>
                         <a:rPr lang="en-US" b="1" i="0">
                           <a:latin typeface="Consolas"/>
                         </a:rPr>
                         <a:t>Username</a:t>
                       </a:r>
+                      <a:endParaRPr/>
                     </a:p>
                   </a:txBody>
                   <a:tcPr anchor="ctr"/>
@@ -4771,38 +4783,36 @@
                 <a:tc>
                   <a:txBody>
                     <a:bodyPr/>
-                    <a:lstStyle/>
                     <a:p>
-                      <a:pPr algn="ctr"/>
+                      <a:pPr algn="ctr">
+                        <a:defRPr/>
+                      </a:pPr>
                       <a:r>
                         <a:rPr lang="en-US" b="1" i="0">
                           <a:latin typeface="Consolas"/>
                         </a:rPr>
                         <a:t>Password</a:t>
                       </a:r>
+                      <a:endParaRPr/>
                     </a:p>
                   </a:txBody>
                   <a:tcPr anchor="ctr"/>
                 </a:tc>
-                <a:extLst>
-                  <a:ext uri="{0D108BD9-81ED-4DB2-BD59-A6C34878D82A}">
-                    <a16:rowId xmlns:a16="http://schemas.microsoft.com/office/drawing/2014/main" val="3003469212"/>
-                  </a:ext>
-                </a:extLst>
               </a:tr>
               <a:tr h="1161929">
                 <a:tc>
                   <a:txBody>
                     <a:bodyPr/>
-                    <a:lstStyle/>
                     <a:p>
                       <a:pPr marL="0" indent="0" algn="ctr">
                         <a:buNone/>
+                        <a:defRPr/>
                       </a:pPr>
                       <a:r>
                         <a:rPr lang="en-US"/>
                         <a:t>admin</a:t>
                       </a:r>
+                      <a:endParaRPr/>
                     </a:p>
                   </a:txBody>
                   <a:tcPr anchor="ctr"/>
@@ -4810,41 +4820,39 @@
                 <a:tc>
                   <a:txBody>
                     <a:bodyPr/>
-                    <a:lstStyle/>
                     <a:p>
-                      <a:pPr algn="ctr"/>
+                      <a:pPr algn="ctr">
+                        <a:defRPr/>
+                      </a:pPr>
                       <a:r>
                         <a:rPr lang="en-US" b="1" i="0">
                           <a:latin typeface="Consolas"/>
                         </a:rPr>
                         <a:t>admin67</a:t>
                       </a:r>
+                      <a:endParaRPr/>
                     </a:p>
                   </a:txBody>
                   <a:tcPr anchor="ctr"/>
                 </a:tc>
-                <a:extLst>
-                  <a:ext uri="{0D108BD9-81ED-4DB2-BD59-A6C34878D82A}">
-                    <a16:rowId xmlns:a16="http://schemas.microsoft.com/office/drawing/2014/main" val="3658796194"/>
-                  </a:ext>
-                </a:extLst>
               </a:tr>
               <a:tr h="1161929">
                 <a:tc>
                   <a:txBody>
                     <a:bodyPr/>
-                    <a:lstStyle/>
                     <a:p>
-                      <a:pPr algn="ctr"/>
+                      <a:pPr algn="ctr">
+                        <a:defRPr/>
+                      </a:pPr>
                       <a:r>
-                        <a:rPr lang="en-US" err="1"/>
+                        <a:rPr lang="en-US"/>
                         <a:t>charl</a:t>
                       </a:r>
                       <a:r>
                         <a:rPr lang="en-US"/>
                         <a:t>ie</a:t>
                       </a:r>
-                      <a:endParaRPr lang="en-US" err="1"/>
+                      <a:endParaRPr lang="en-US"/>
                     </a:p>
                   </a:txBody>
                   <a:tcPr anchor="ctr"/>
@@ -4852,24 +4860,21 @@
                 <a:tc>
                   <a:txBody>
                     <a:bodyPr/>
-                    <a:lstStyle/>
                     <a:p>
-                      <a:pPr algn="ctr"/>
+                      <a:pPr algn="ctr">
+                        <a:defRPr/>
+                      </a:pPr>
                       <a:r>
                         <a:rPr lang="en-US" b="1" i="0">
                           <a:latin typeface="Consolas"/>
                         </a:rPr>
                         <a:t>cats123</a:t>
                       </a:r>
+                      <a:endParaRPr/>
                     </a:p>
                   </a:txBody>
                   <a:tcPr anchor="ctr"/>
                 </a:tc>
-                <a:extLst>
-                  <a:ext uri="{0D108BD9-81ED-4DB2-BD59-A6C34878D82A}">
-                    <a16:rowId xmlns:a16="http://schemas.microsoft.com/office/drawing/2014/main" val="1448562511"/>
-                  </a:ext>
-                </a:extLst>
               </a:tr>
             </a:tbl>
           </a:graphicData>
@@ -4877,17 +4882,11 @@
       </p:graphicFrame>
       <p:sp>
         <p:nvSpPr>
-          <p:cNvPr id="10" name="Rectangle 9">
-            <a:extLst>
-              <a:ext uri="{FF2B5EF4-FFF2-40B4-BE49-F238E27FC236}">
-                <a16:creationId xmlns:a16="http://schemas.microsoft.com/office/drawing/2014/main" id="{FFE14EC5-43B0-11D1-90C1-17D814CBE24A}"/>
-              </a:ext>
-            </a:extLst>
-          </p:cNvPr>
+          <p:cNvPr id="1992265927" name="Rectangle 9"/>
           <p:cNvSpPr/>
           <p:nvPr/>
         </p:nvSpPr>
-        <p:spPr>
+        <p:spPr bwMode="auto">
           <a:xfrm>
             <a:off x="2993507" y="1644355"/>
             <a:ext cx="1897723" cy="3485646"/>
@@ -4922,30 +4921,27 @@
           <a:bodyPr rtlCol="0" anchor="ctr"/>
           <a:lstStyle/>
           <a:p>
-            <a:pPr algn="ctr"/>
+            <a:pPr algn="ctr">
+              <a:defRPr/>
+            </a:pPr>
             <a:endParaRPr lang="en-US"/>
           </a:p>
         </p:txBody>
       </p:sp>
     </p:spTree>
-    <p:extLst>
-      <p:ext uri="{BB962C8B-B14F-4D97-AF65-F5344CB8AC3E}">
-        <p14:creationId xmlns:p14="http://schemas.microsoft.com/office/powerpoint/2010/main" val="2148067090"/>
-      </p:ext>
-    </p:extLst>
   </p:cSld>
   <p:clrMapOvr>
     <a:masterClrMapping/>
   </p:clrMapOvr>
   <mc:AlternateContent xmlns:mc="http://schemas.openxmlformats.org/markup-compatibility/2006">
-    <mc:Choice xmlns:p14="http://schemas.microsoft.com/office/powerpoint/2010/main" Requires="p14">
-      <p:transition p14:dur="250">
-        <p:fade/>
+    <mc:Choice xmlns:p159="http://schemas.microsoft.com/office/powerpoint/2015/09/main" xmlns:p14="http://schemas.microsoft.com/office/powerpoint/2010/main" Requires="p159">
+      <p:transition spd="fast" p14:dur="250" advClick="1">
+        <p:fade thruBlk="0"/>
       </p:transition>
     </mc:Choice>
     <mc:Fallback>
-      <p:transition>
-        <p:fade/>
+      <p:transition spd="fast" advClick="1">
+        <p:fade thruBlk="0"/>
       </p:transition>
     </mc:Fallback>
   </mc:AlternateContent>
@@ -4953,21 +4949,15 @@
 </file>
 
 <file path=ppt/slides/slide3.xml><?xml version="1.0" encoding="utf-8"?>
-<p:sld xmlns:a="http://schemas.openxmlformats.org/drawingml/2006/main" xmlns:r="http://schemas.openxmlformats.org/officeDocument/2006/relationships" xmlns:p="http://schemas.openxmlformats.org/presentationml/2006/main">
-  <p:cSld>
+<p:sld xmlns:a="http://schemas.openxmlformats.org/drawingml/2006/main" xmlns:r="http://schemas.openxmlformats.org/officeDocument/2006/relationships" xmlns:p="http://schemas.openxmlformats.org/presentationml/2006/main" xmlns:m="http://schemas.openxmlformats.org/officeDocument/2006/math" xmlns:w="http://schemas.openxmlformats.org/wordprocessingml/2006/main" xmlns:mc="http://schemas.openxmlformats.org/markup-compatibility/2006" showMasterPhAnim="0" showMasterSp="1" show="1">
+  <p:cSld name="">
     <p:spTree>
       <p:nvGrpSpPr>
-        <p:cNvPr id="1" name="">
-          <a:extLst>
-            <a:ext uri="{FF2B5EF4-FFF2-40B4-BE49-F238E27FC236}">
-              <a16:creationId xmlns:a16="http://schemas.microsoft.com/office/drawing/2014/main" id="{6451C332-519A-F372-7F8A-63EC4653805A}"/>
-            </a:ext>
-          </a:extLst>
-        </p:cNvPr>
+        <p:cNvPr id="1" name=""/>
         <p:cNvGrpSpPr/>
         <p:nvPr/>
       </p:nvGrpSpPr>
-      <p:grpSpPr>
+      <p:grpSpPr bwMode="auto">
         <a:xfrm>
           <a:off x="0" y="0"/>
           <a:ext cx="0" cy="0"/>
@@ -4977,13 +4967,7 @@
       </p:grpSpPr>
       <p:sp>
         <p:nvSpPr>
-          <p:cNvPr id="2" name="Titre 1">
-            <a:extLst>
-              <a:ext uri="{FF2B5EF4-FFF2-40B4-BE49-F238E27FC236}">
-                <a16:creationId xmlns:a16="http://schemas.microsoft.com/office/drawing/2014/main" id="{9811A8A5-0494-2E78-7ACD-E2361183A0B4}"/>
-              </a:ext>
-            </a:extLst>
-          </p:cNvPr>
+          <p:cNvPr id="1509825436" name="Titre 1"/>
           <p:cNvSpPr>
             <a:spLocks noGrp="1"/>
           </p:cNvSpPr>
@@ -4991,7 +4975,7 @@
             <p:ph type="title" idx="4294967295"/>
           </p:nvPr>
         </p:nvSpPr>
-        <p:spPr>
+        <p:spPr bwMode="auto">
           <a:xfrm>
             <a:off x="348343" y="307068"/>
             <a:ext cx="10515600" cy="1325563"/>
@@ -5003,51 +4987,47 @@
           </a:bodyPr>
           <a:lstStyle/>
           <a:p>
-            <a:r>
-              <a:rPr lang="fr-FR" b="1" dirty="0" err="1">
+            <a:pPr>
+              <a:defRPr/>
+            </a:pPr>
+            <a:r>
+              <a:rPr lang="fr-FR" b="1">
                 <a:latin typeface="Consolas"/>
                 <a:cs typeface="Courier New"/>
               </a:rPr>
               <a:t>Hashing</a:t>
             </a:r>
             <a:r>
-              <a:rPr lang="fr-FR" b="1" dirty="0">
+              <a:rPr lang="fr-FR" b="1">
                 <a:latin typeface="Consolas"/>
                 <a:cs typeface="Courier New"/>
               </a:rPr>
               <a:t> </a:t>
             </a:r>
             <a:r>
-              <a:rPr lang="fr-FR" b="1" dirty="0" err="1">
+              <a:rPr lang="fr-FR" b="1">
                 <a:latin typeface="Consolas"/>
                 <a:cs typeface="Courier New"/>
               </a:rPr>
               <a:t>Algorithms</a:t>
             </a:r>
+            <a:endParaRPr b="1"/>
           </a:p>
         </p:txBody>
       </p:sp>
       <p:pic>
         <p:nvPicPr>
-          <p:cNvPr id="17" name="Picture 16" descr="A black and blue text on a black background&#10;&#10;AI-generated content may be incorrect.">
-            <a:extLst>
-              <a:ext uri="{FF2B5EF4-FFF2-40B4-BE49-F238E27FC236}">
-                <a16:creationId xmlns:a16="http://schemas.microsoft.com/office/drawing/2014/main" id="{11517CA6-59AD-F9FA-54BE-69502BBD58D0}"/>
-              </a:ext>
-            </a:extLst>
-          </p:cNvPr>
+          <p:cNvPr id="1436436534" name="Picture 16" descr="A black and blue text on a black background&#10;&#10;AI-generated content may be incorrect."/>
           <p:cNvPicPr>
             <a:picLocks noChangeAspect="1"/>
           </p:cNvPicPr>
           <p:nvPr/>
         </p:nvPicPr>
-        <p:blipFill>
+        <p:blipFill rotWithShape="1">
           <a:blip r:embed="rId3"/>
-          <a:stretch>
-            <a:fillRect/>
-          </a:stretch>
+          <a:stretch/>
         </p:blipFill>
-        <p:spPr>
+        <p:spPr bwMode="auto">
           <a:xfrm>
             <a:off x="10819492" y="-244021"/>
             <a:ext cx="1242786" cy="1206501"/>
@@ -5059,17 +5039,11 @@
       </p:pic>
       <p:sp>
         <p:nvSpPr>
-          <p:cNvPr id="5" name="TextBox 7">
-            <a:extLst>
-              <a:ext uri="{FF2B5EF4-FFF2-40B4-BE49-F238E27FC236}">
-                <a16:creationId xmlns:a16="http://schemas.microsoft.com/office/drawing/2014/main" id="{078DDADF-406F-D617-8BD0-F8C74D14B639}"/>
-              </a:ext>
-            </a:extLst>
-          </p:cNvPr>
+          <p:cNvPr id="1529693048" name="TextBox 7"/>
           <p:cNvSpPr txBox="1"/>
           <p:nvPr/>
         </p:nvSpPr>
-        <p:spPr>
+        <p:spPr bwMode="auto">
           <a:xfrm>
             <a:off x="407512" y="1632293"/>
             <a:ext cx="10256829" cy="2492990"/>
@@ -5081,9 +5055,7 @@
         </p:spPr>
         <p:txBody>
           <a:bodyPr rot="0" spcFirstLastPara="0" vertOverflow="overflow" horzOverflow="overflow" vert="horz" wrap="square" lIns="91440" tIns="45720" rIns="91440" bIns="45720" numCol="1" spcCol="0" rtlCol="0" fromWordArt="0" anchor="t" anchorCtr="0" forceAA="0" compatLnSpc="1">
-            <a:prstTxWarp prst="textNoShape">
-              <a:avLst/>
-            </a:prstTxWarp>
+            <a:prstTxWarp prst="textNoShape"/>
             <a:spAutoFit/>
           </a:bodyPr>
           <a:lstStyle/>
@@ -5091,6 +5063,7 @@
             <a:pPr marL="285750" indent="-285750">
               <a:buFont typeface="Calibri"/>
               <a:buChar char="-"/>
+              <a:defRPr/>
             </a:pPr>
             <a:r>
               <a:rPr lang="en-US" sz="2400" b="1">
@@ -5098,7 +5071,7 @@
               </a:rPr>
               <a:t>One-way mathematical function</a:t>
             </a:r>
-            <a:endParaRPr lang="en-US" sz="2400" b="1" dirty="0">
+            <a:endParaRPr lang="en-US" sz="2400" b="1">
               <a:latin typeface="Consolas"/>
             </a:endParaRPr>
           </a:p>
@@ -5106,8 +5079,9 @@
             <a:pPr marL="285750" indent="-285750">
               <a:buFont typeface="Calibri"/>
               <a:buChar char="-"/>
-            </a:pPr>
-            <a:endParaRPr lang="en-US" sz="2400" b="1" dirty="0">
+              <a:defRPr/>
+            </a:pPr>
+            <a:endParaRPr lang="en-US" sz="2400" b="1">
               <a:latin typeface="Consolas"/>
             </a:endParaRPr>
           </a:p>
@@ -5115,6 +5089,7 @@
             <a:pPr marL="285750" indent="-285750">
               <a:buFont typeface="Calibri"/>
               <a:buChar char="-"/>
+              <a:defRPr/>
             </a:pPr>
             <a:r>
               <a:rPr lang="en-US" sz="2400" b="1">
@@ -5130,7 +5105,7 @@
               </a:rPr>
               <a:t>, chaotic string</a:t>
             </a:r>
-            <a:endParaRPr lang="en-US" sz="2400" b="1" dirty="0">
+            <a:endParaRPr lang="en-US" sz="2400" b="1">
               <a:latin typeface="Consolas"/>
             </a:endParaRPr>
           </a:p>
@@ -5138,8 +5113,9 @@
             <a:pPr marL="285750" indent="-285750">
               <a:buFont typeface="Calibri"/>
               <a:buChar char="-"/>
-            </a:pPr>
-            <a:endParaRPr lang="en-US" sz="2400" b="1" dirty="0">
+              <a:defRPr/>
+            </a:pPr>
+            <a:endParaRPr lang="en-US" sz="2400" b="1">
               <a:latin typeface="Consolas"/>
             </a:endParaRPr>
           </a:p>
@@ -5147,6 +5123,7 @@
             <a:pPr marL="285750" indent="-285750">
               <a:buFont typeface="Calibri"/>
               <a:buChar char="-"/>
+              <a:defRPr/>
             </a:pPr>
             <a:r>
               <a:rPr lang="en-US" sz="2400" b="1">
@@ -5154,17 +5131,22 @@
               </a:rPr>
               <a:t>Compare hashes, never see the password</a:t>
             </a:r>
+            <a:endParaRPr/>
           </a:p>
           <a:p>
             <a:pPr marL="285750" indent="-285750">
               <a:buFont typeface="Calibri"/>
               <a:buChar char="-"/>
+              <a:defRPr/>
             </a:pPr>
             <a:endParaRPr lang="en-US" b="1">
               <a:latin typeface="Consolas"/>
             </a:endParaRPr>
           </a:p>
           <a:p>
+            <a:pPr>
+              <a:defRPr/>
+            </a:pPr>
             <a:endParaRPr lang="en-US" b="1">
               <a:latin typeface="Consolas"/>
             </a:endParaRPr>
@@ -5173,26 +5155,18 @@
       </p:sp>
       <p:pic>
         <p:nvPicPr>
-          <p:cNvPr id="7" name="Picture 6" descr="A diagram of a road&#10;&#10;AI-generated content may be incorrect.">
-            <a:extLst>
-              <a:ext uri="{FF2B5EF4-FFF2-40B4-BE49-F238E27FC236}">
-                <a16:creationId xmlns:a16="http://schemas.microsoft.com/office/drawing/2014/main" id="{B739044B-5AF3-4D45-694D-04D5EC4452B9}"/>
-              </a:ext>
-            </a:extLst>
-          </p:cNvPr>
+          <p:cNvPr id="318032922" name="Picture 6" descr="A diagram of a road&#10;&#10;AI-generated content may be incorrect."/>
           <p:cNvPicPr>
             <a:picLocks noChangeAspect="1"/>
           </p:cNvPicPr>
           <p:nvPr/>
         </p:nvPicPr>
-        <p:blipFill>
+        <p:blipFill rotWithShape="1">
           <a:blip r:embed="rId4"/>
-          <a:srcRect l="6952" t="31703" r="7122" b="15981"/>
-          <a:stretch>
-            <a:fillRect/>
-          </a:stretch>
+          <a:srcRect l="6952" t="31703" r="7122" b="15980"/>
+          <a:stretch/>
         </p:blipFill>
-        <p:spPr>
+        <p:spPr bwMode="auto">
           <a:xfrm>
             <a:off x="2963492" y="3777649"/>
             <a:ext cx="5745455" cy="2443098"/>
@@ -5203,24 +5177,19 @@
         </p:spPr>
       </p:pic>
     </p:spTree>
-    <p:extLst>
-      <p:ext uri="{BB962C8B-B14F-4D97-AF65-F5344CB8AC3E}">
-        <p14:creationId xmlns:p14="http://schemas.microsoft.com/office/powerpoint/2010/main" val="3510781529"/>
-      </p:ext>
-    </p:extLst>
   </p:cSld>
   <p:clrMapOvr>
     <a:masterClrMapping/>
   </p:clrMapOvr>
   <mc:AlternateContent xmlns:mc="http://schemas.openxmlformats.org/markup-compatibility/2006">
-    <mc:Choice xmlns:p14="http://schemas.microsoft.com/office/powerpoint/2010/main" Requires="p14">
-      <p:transition p14:dur="250">
-        <p:fade/>
+    <mc:Choice xmlns:p159="http://schemas.microsoft.com/office/powerpoint/2015/09/main" xmlns:p14="http://schemas.microsoft.com/office/powerpoint/2010/main" Requires="p159">
+      <p:transition spd="fast" p14:dur="250" advClick="1">
+        <p:fade thruBlk="0"/>
       </p:transition>
     </mc:Choice>
     <mc:Fallback>
-      <p:transition>
-        <p:fade/>
+      <p:transition spd="fast" advClick="1">
+        <p:fade thruBlk="0"/>
       </p:transition>
     </mc:Fallback>
   </mc:AlternateContent>
@@ -5228,21 +5197,15 @@
 </file>
 
 <file path=ppt/slides/slide4.xml><?xml version="1.0" encoding="utf-8"?>
-<p:sld xmlns:a="http://schemas.openxmlformats.org/drawingml/2006/main" xmlns:r="http://schemas.openxmlformats.org/officeDocument/2006/relationships" xmlns:p="http://schemas.openxmlformats.org/presentationml/2006/main">
-  <p:cSld>
+<p:sld xmlns:a="http://schemas.openxmlformats.org/drawingml/2006/main" xmlns:r="http://schemas.openxmlformats.org/officeDocument/2006/relationships" xmlns:p="http://schemas.openxmlformats.org/presentationml/2006/main" xmlns:m="http://schemas.openxmlformats.org/officeDocument/2006/math" xmlns:w="http://schemas.openxmlformats.org/wordprocessingml/2006/main" xmlns:mc="http://schemas.openxmlformats.org/markup-compatibility/2006" showMasterPhAnim="0" showMasterSp="1" show="1">
+  <p:cSld name="">
     <p:spTree>
       <p:nvGrpSpPr>
-        <p:cNvPr id="1" name="">
-          <a:extLst>
-            <a:ext uri="{FF2B5EF4-FFF2-40B4-BE49-F238E27FC236}">
-              <a16:creationId xmlns:a16="http://schemas.microsoft.com/office/drawing/2014/main" id="{0CE1DACB-D65A-1068-700D-A7D77E8FFBE1}"/>
-            </a:ext>
-          </a:extLst>
-        </p:cNvPr>
+        <p:cNvPr id="1" name=""/>
         <p:cNvGrpSpPr/>
         <p:nvPr/>
       </p:nvGrpSpPr>
-      <p:grpSpPr>
+      <p:grpSpPr bwMode="auto">
         <a:xfrm>
           <a:off x="0" y="0"/>
           <a:ext cx="0" cy="0"/>
@@ -5252,13 +5215,7 @@
       </p:grpSpPr>
       <p:sp>
         <p:nvSpPr>
-          <p:cNvPr id="2" name="Titre 1">
-            <a:extLst>
-              <a:ext uri="{FF2B5EF4-FFF2-40B4-BE49-F238E27FC236}">
-                <a16:creationId xmlns:a16="http://schemas.microsoft.com/office/drawing/2014/main" id="{2E4C53B9-A97A-6148-18E7-A1024D0EF6CA}"/>
-              </a:ext>
-            </a:extLst>
-          </p:cNvPr>
+          <p:cNvPr id="1221056421" name="Titre 1"/>
           <p:cNvSpPr>
             <a:spLocks noGrp="1"/>
           </p:cNvSpPr>
@@ -5266,7 +5223,7 @@
             <p:ph type="title" idx="4294967295"/>
           </p:nvPr>
         </p:nvSpPr>
-        <p:spPr>
+        <p:spPr bwMode="auto">
           <a:xfrm>
             <a:off x="348343" y="307068"/>
             <a:ext cx="10515600" cy="1325563"/>
@@ -5278,8 +5235,11 @@
           </a:bodyPr>
           <a:lstStyle/>
           <a:p>
-            <a:r>
-              <a:rPr lang="fr-FR" b="1" err="1">
+            <a:pPr>
+              <a:defRPr/>
+            </a:pPr>
+            <a:r>
+              <a:rPr lang="fr-FR" b="1">
                 <a:latin typeface="Consolas"/>
                 <a:ea typeface="+mj-lt"/>
                 <a:cs typeface="Courier New"/>
@@ -5295,7 +5255,7 @@
               <a:t>: The </a:t>
             </a:r>
             <a:r>
-              <a:rPr lang="fr-FR" b="1" err="1">
+              <a:rPr lang="fr-FR" b="1">
                 <a:latin typeface="Consolas"/>
                 <a:ea typeface="+mj-lt"/>
                 <a:cs typeface="Courier New"/>
@@ -5311,14 +5271,14 @@
               <a:t> </a:t>
             </a:r>
             <a:r>
-              <a:rPr lang="fr-FR" b="1" err="1">
+              <a:rPr lang="fr-FR" b="1">
                 <a:latin typeface="Consolas"/>
                 <a:ea typeface="+mj-lt"/>
                 <a:cs typeface="Courier New"/>
               </a:rPr>
               <a:t>View</a:t>
             </a:r>
-            <a:endParaRPr lang="fr-FR" err="1">
+            <a:endParaRPr lang="fr-FR">
               <a:latin typeface="Aptos Display"/>
               <a:ea typeface="+mj-lt"/>
               <a:cs typeface="Courier New"/>
@@ -5328,25 +5288,17 @@
       </p:sp>
       <p:pic>
         <p:nvPicPr>
-          <p:cNvPr id="17" name="Picture 16" descr="A black and blue text on a black background&#10;&#10;AI-generated content may be incorrect.">
-            <a:extLst>
-              <a:ext uri="{FF2B5EF4-FFF2-40B4-BE49-F238E27FC236}">
-                <a16:creationId xmlns:a16="http://schemas.microsoft.com/office/drawing/2014/main" id="{18FD51C6-885C-7DF8-9B92-7C4771B9DC29}"/>
-              </a:ext>
-            </a:extLst>
-          </p:cNvPr>
+          <p:cNvPr id="1058541677" name="Picture 16" descr="A black and blue text on a black background&#10;&#10;AI-generated content may be incorrect."/>
           <p:cNvPicPr>
             <a:picLocks noChangeAspect="1"/>
           </p:cNvPicPr>
           <p:nvPr/>
         </p:nvPicPr>
-        <p:blipFill>
+        <p:blipFill rotWithShape="1">
           <a:blip r:embed="rId3"/>
-          <a:stretch>
-            <a:fillRect/>
-          </a:stretch>
+          <a:stretch/>
         </p:blipFill>
-        <p:spPr>
+        <p:spPr bwMode="auto">
           <a:xfrm>
             <a:off x="10819492" y="-244021"/>
             <a:ext cx="1242786" cy="1206501"/>
@@ -5358,17 +5310,11 @@
       </p:pic>
       <p:sp>
         <p:nvSpPr>
-          <p:cNvPr id="5" name="TextBox 7">
-            <a:extLst>
-              <a:ext uri="{FF2B5EF4-FFF2-40B4-BE49-F238E27FC236}">
-                <a16:creationId xmlns:a16="http://schemas.microsoft.com/office/drawing/2014/main" id="{2E397F01-C11F-868D-2AE8-10C3EB9A737A}"/>
-              </a:ext>
-            </a:extLst>
-          </p:cNvPr>
+          <p:cNvPr id="1838905575" name="TextBox 7"/>
           <p:cNvSpPr txBox="1"/>
           <p:nvPr/>
         </p:nvSpPr>
-        <p:spPr>
+        <p:spPr bwMode="auto">
           <a:xfrm>
             <a:off x="5424899" y="2355015"/>
             <a:ext cx="6639541" cy="2769989"/>
@@ -5380,9 +5326,7 @@
         </p:spPr>
         <p:txBody>
           <a:bodyPr rot="0" spcFirstLastPara="0" vertOverflow="overflow" horzOverflow="overflow" vert="horz" wrap="square" lIns="91440" tIns="45720" rIns="91440" bIns="45720" numCol="1" spcCol="0" rtlCol="0" fromWordArt="0" anchor="t" anchorCtr="0" forceAA="0" compatLnSpc="1">
-            <a:prstTxWarp prst="textNoShape">
-              <a:avLst/>
-            </a:prstTxWarp>
+            <a:prstTxWarp prst="textNoShape"/>
             <a:spAutoFit/>
           </a:bodyPr>
           <a:lstStyle/>
@@ -5390,6 +5334,7 @@
             <a:pPr marL="285750" indent="-285750">
               <a:buFont typeface="Calibri"/>
               <a:buChar char="-"/>
+              <a:defRPr/>
             </a:pPr>
             <a:r>
               <a:rPr lang="en-US" sz="2400" b="1">
@@ -5397,7 +5342,7 @@
               </a:rPr>
               <a:t>Plaintext exists ONLY in RAM</a:t>
             </a:r>
-            <a:endParaRPr lang="en-US" sz="2400" b="1" dirty="0">
+            <a:endParaRPr lang="en-US" sz="2400" b="1">
               <a:latin typeface="Consolas"/>
             </a:endParaRPr>
           </a:p>
@@ -5405,8 +5350,9 @@
             <a:pPr marL="285750" indent="-285750">
               <a:buFont typeface="Calibri"/>
               <a:buChar char="-"/>
-            </a:pPr>
-            <a:endParaRPr lang="en-US" sz="2400" b="1" dirty="0">
+              <a:defRPr/>
+            </a:pPr>
+            <a:endParaRPr lang="en-US" sz="2400" b="1">
               <a:latin typeface="Consolas"/>
             </a:endParaRPr>
           </a:p>
@@ -5414,6 +5360,7 @@
             <a:pPr marL="285750" indent="-285750">
               <a:buFont typeface="Calibri"/>
               <a:buChar char="-"/>
+              <a:defRPr/>
             </a:pPr>
             <a:r>
               <a:rPr lang="en-US" sz="2400" b="1">
@@ -5421,7 +5368,7 @@
               </a:rPr>
               <a:t>Database stores ONLY the hash</a:t>
             </a:r>
-            <a:endParaRPr lang="en-US" sz="2400" b="1" dirty="0">
+            <a:endParaRPr lang="en-US" sz="2400" b="1">
               <a:latin typeface="Consolas"/>
             </a:endParaRPr>
           </a:p>
@@ -5429,8 +5376,9 @@
             <a:pPr marL="285750" indent="-285750">
               <a:buFont typeface="Calibri"/>
               <a:buChar char="-"/>
-            </a:pPr>
-            <a:endParaRPr lang="en-US" sz="2400" b="1" dirty="0">
+              <a:defRPr/>
+            </a:pPr>
+            <a:endParaRPr lang="en-US" sz="2400" b="1">
               <a:latin typeface="Consolas"/>
             </a:endParaRPr>
           </a:p>
@@ -5438,6 +5386,7 @@
             <a:pPr marL="285750" indent="-285750">
               <a:buFont typeface="Calibri"/>
               <a:buChar char="-"/>
+              <a:defRPr/>
             </a:pPr>
             <a:r>
               <a:rPr lang="en-US" sz="2400" b="1">
@@ -5445,11 +5394,13 @@
               </a:rPr>
               <a:t>Match input hash vs. stored hash</a:t>
             </a:r>
+            <a:endParaRPr/>
           </a:p>
           <a:p>
             <a:pPr marL="285750" indent="-285750">
               <a:buFont typeface="Calibri"/>
               <a:buChar char="-"/>
+              <a:defRPr/>
             </a:pPr>
             <a:endParaRPr lang="en-US" b="1">
               <a:latin typeface="Consolas"/>
@@ -5459,12 +5410,16 @@
             <a:pPr marL="285750" indent="-285750">
               <a:buFont typeface="Calibri"/>
               <a:buChar char="-"/>
+              <a:defRPr/>
             </a:pPr>
             <a:endParaRPr lang="en-US" b="1">
               <a:latin typeface="Consolas"/>
             </a:endParaRPr>
           </a:p>
           <a:p>
+            <a:pPr>
+              <a:defRPr/>
+            </a:pPr>
             <a:endParaRPr lang="en-US" b="1">
               <a:latin typeface="Consolas"/>
             </a:endParaRPr>
@@ -5473,70 +5428,42 @@
       </p:sp>
       <p:graphicFrame>
         <p:nvGraphicFramePr>
-          <p:cNvPr id="8" name="Table 7">
-            <a:extLst>
-              <a:ext uri="{FF2B5EF4-FFF2-40B4-BE49-F238E27FC236}">
-                <a16:creationId xmlns:a16="http://schemas.microsoft.com/office/drawing/2014/main" id="{542C2ADC-CFD5-CD3B-B235-A167B3BB54D6}"/>
-              </a:ext>
-            </a:extLst>
-          </p:cNvPr>
+          <p:cNvPr id="655621744" name="Table 7"/>
           <p:cNvGraphicFramePr>
-            <a:graphicFrameLocks noGrp="1"/>
+            <a:graphicFrameLocks xmlns:a="http://schemas.openxmlformats.org/drawingml/2006/main" noGrp="1"/>
           </p:cNvGraphicFramePr>
-          <p:nvPr>
-            <p:extLst>
-              <p:ext uri="{D42A27DB-BD31-4B8C-83A1-F6EECF244321}">
-                <p14:modId xmlns:p14="http://schemas.microsoft.com/office/powerpoint/2010/main" val="2934341041"/>
-              </p:ext>
-            </p:extLst>
-          </p:nvPr>
+          <p:nvPr/>
         </p:nvGraphicFramePr>
-        <p:xfrm>
-          <a:off x="606093" y="1884594"/>
+        <p:xfrm rot="0">
+          <a:off x="421499" y="1884594"/>
           <a:ext cx="4401418" cy="4306580"/>
         </p:xfrm>
         <a:graphic>
           <a:graphicData uri="http://schemas.openxmlformats.org/drawingml/2006/table">
             <a:tbl>
-              <a:tblPr firstRow="1" bandRow="1">
+              <a:tblPr firstRow="1" firstCol="0" lastRow="0" lastCol="0" bandRow="1" bandCol="0">
                 <a:tableStyleId>{793D81CF-94F2-401A-BA57-92F5A7B2D0C5}</a:tableStyleId>
               </a:tblPr>
               <a:tblGrid>
-                <a:gridCol w="1226001">
-                  <a:extLst>
-                    <a:ext uri="{9D8B030D-6E8A-4147-A177-3AD203B41FA5}">
-                      <a16:colId xmlns:a16="http://schemas.microsoft.com/office/drawing/2014/main" val="54938029"/>
-                    </a:ext>
-                  </a:extLst>
-                </a:gridCol>
-                <a:gridCol w="1705737">
-                  <a:extLst>
-                    <a:ext uri="{9D8B030D-6E8A-4147-A177-3AD203B41FA5}">
-                      <a16:colId xmlns:a16="http://schemas.microsoft.com/office/drawing/2014/main" val="1290070235"/>
-                    </a:ext>
-                  </a:extLst>
-                </a:gridCol>
-                <a:gridCol w="1469680">
-                  <a:extLst>
-                    <a:ext uri="{9D8B030D-6E8A-4147-A177-3AD203B41FA5}">
-                      <a16:colId xmlns:a16="http://schemas.microsoft.com/office/drawing/2014/main" val="2782693283"/>
-                    </a:ext>
-                  </a:extLst>
-                </a:gridCol>
+                <a:gridCol w="1396492"/>
+                <a:gridCol w="1658200"/>
+                <a:gridCol w="1531317"/>
               </a:tblGrid>
               <a:tr h="861316">
                 <a:tc>
                   <a:txBody>
                     <a:bodyPr/>
-                    <a:lstStyle/>
                     <a:p>
-                      <a:pPr algn="ctr"/>
+                      <a:pPr algn="ctr">
+                        <a:defRPr/>
+                      </a:pPr>
                       <a:r>
                         <a:rPr lang="en-US" b="1" i="0">
                           <a:latin typeface="Consolas"/>
                         </a:rPr>
                         <a:t>Username</a:t>
                       </a:r>
+                      <a:endParaRPr/>
                     </a:p>
                   </a:txBody>
                   <a:tcPr anchor="ctr"/>
@@ -5544,9 +5471,10 @@
                 <a:tc>
                   <a:txBody>
                     <a:bodyPr/>
-                    <a:lstStyle/>
                     <a:p>
-                      <a:pPr algn="ctr"/>
+                      <a:pPr algn="ctr">
+                        <a:defRPr/>
+                      </a:pPr>
                       <a:r>
                         <a:rPr lang="en-US" b="1" i="0">
                           <a:latin typeface="Consolas"/>
@@ -5564,6 +5492,7 @@
                         </a:rPr>
                         <a:t>(Plaintext)</a:t>
                       </a:r>
+                      <a:endParaRPr/>
                     </a:p>
                   </a:txBody>
                   <a:tcPr anchor="ctr"/>
@@ -5571,10 +5500,10 @@
                 <a:tc>
                   <a:txBody>
                     <a:bodyPr/>
-                    <a:lstStyle/>
                     <a:p>
                       <a:pPr lvl="0" algn="ctr">
                         <a:buNone/>
+                        <a:defRPr/>
                       </a:pPr>
                       <a:r>
                         <a:rPr lang="en-US" b="1" i="0">
@@ -5582,10 +5511,12 @@
                         </a:rPr>
                         <a:t>Password</a:t>
                       </a:r>
+                      <a:endParaRPr/>
                     </a:p>
                     <a:p>
                       <a:pPr lvl="0" algn="ctr">
                         <a:buNone/>
+                        <a:defRPr/>
                       </a:pPr>
                       <a:r>
                         <a:rPr lang="en-US" b="1" i="0">
@@ -5593,29 +5524,26 @@
                         </a:rPr>
                         <a:t>(Hashed)</a:t>
                       </a:r>
+                      <a:endParaRPr/>
                     </a:p>
                   </a:txBody>
                   <a:tcPr anchor="ctr"/>
                 </a:tc>
-                <a:extLst>
-                  <a:ext uri="{0D108BD9-81ED-4DB2-BD59-A6C34878D82A}">
-                    <a16:rowId xmlns:a16="http://schemas.microsoft.com/office/drawing/2014/main" val="3003469212"/>
-                  </a:ext>
-                </a:extLst>
               </a:tr>
               <a:tr h="861316">
                 <a:tc>
                   <a:txBody>
                     <a:bodyPr/>
-                    <a:lstStyle/>
                     <a:p>
                       <a:pPr marL="0" indent="0" algn="ctr">
                         <a:buNone/>
+                        <a:defRPr/>
                       </a:pPr>
                       <a:r>
                         <a:rPr lang="en-US"/>
                         <a:t>admin</a:t>
                       </a:r>
+                      <a:endParaRPr/>
                     </a:p>
                   </a:txBody>
                   <a:tcPr anchor="ctr"/>
@@ -5623,15 +5551,17 @@
                 <a:tc>
                   <a:txBody>
                     <a:bodyPr/>
-                    <a:lstStyle/>
                     <a:p>
-                      <a:pPr algn="ctr"/>
+                      <a:pPr algn="ctr">
+                        <a:defRPr/>
+                      </a:pPr>
                       <a:r>
                         <a:rPr lang="en-US" b="0" i="1">
                           <a:latin typeface="Consolas"/>
                         </a:rPr>
                         <a:t>admin67</a:t>
                       </a:r>
+                      <a:endParaRPr/>
                     </a:p>
                   </a:txBody>
                   <a:tcPr anchor="ctr"/>
@@ -5639,13 +5569,13 @@
                 <a:tc>
                   <a:txBody>
                     <a:bodyPr/>
-                    <a:lstStyle/>
                     <a:p>
                       <a:pPr lvl="0" algn="ctr">
                         <a:buNone/>
+                        <a:defRPr/>
                       </a:pPr>
                       <a:r>
-                        <a:rPr lang="en-US" sz="1800" b="1" i="0" u="none" strike="noStrike" noProof="0">
+                        <a:rPr lang="en-US" sz="1800" b="1" i="0" u="none" strike="noStrike">
                           <a:latin typeface="Consolas"/>
                         </a:rPr>
                         <a:t>5897cfa...</a:t>
@@ -5657,23 +5587,20 @@
                   </a:txBody>
                   <a:tcPr anchor="ctr"/>
                 </a:tc>
-                <a:extLst>
-                  <a:ext uri="{0D108BD9-81ED-4DB2-BD59-A6C34878D82A}">
-                    <a16:rowId xmlns:a16="http://schemas.microsoft.com/office/drawing/2014/main" val="3658796194"/>
-                  </a:ext>
-                </a:extLst>
               </a:tr>
               <a:tr h="861316">
                 <a:tc>
                   <a:txBody>
                     <a:bodyPr/>
-                    <a:lstStyle/>
                     <a:p>
-                      <a:pPr algn="ctr"/>
+                      <a:pPr algn="ctr">
+                        <a:defRPr/>
+                      </a:pPr>
                       <a:r>
-                        <a:rPr lang="en-US" err="1"/>
+                        <a:rPr lang="en-US"/>
                         <a:t>charlie</a:t>
                       </a:r>
+                      <a:endParaRPr/>
                     </a:p>
                   </a:txBody>
                   <a:tcPr anchor="ctr"/>
@@ -5681,15 +5608,17 @@
                 <a:tc>
                   <a:txBody>
                     <a:bodyPr/>
-                    <a:lstStyle/>
                     <a:p>
-                      <a:pPr algn="ctr"/>
+                      <a:pPr algn="ctr">
+                        <a:defRPr/>
+                      </a:pPr>
                       <a:r>
                         <a:rPr lang="en-US" b="0" i="1" u="none">
                           <a:latin typeface="Consolas"/>
                         </a:rPr>
                         <a:t>cats123</a:t>
                       </a:r>
+                      <a:endParaRPr/>
                     </a:p>
                   </a:txBody>
                   <a:tcPr anchor="ctr"/>
@@ -5697,40 +5626,37 @@
                 <a:tc>
                   <a:txBody>
                     <a:bodyPr/>
-                    <a:lstStyle/>
                     <a:p>
                       <a:pPr lvl="0" algn="ctr">
                         <a:buNone/>
+                        <a:defRPr/>
                       </a:pPr>
                       <a:r>
-                        <a:rPr lang="en-US" sz="1800" b="1" i="0" u="none" strike="noStrike" noProof="0">
+                        <a:rPr lang="en-US" sz="1800" b="1" i="0" u="none" strike="noStrike">
                           <a:latin typeface="Consolas"/>
                         </a:rPr>
                         <a:t>f6d4692...</a:t>
                       </a:r>
+                      <a:endParaRPr/>
                     </a:p>
                   </a:txBody>
                   <a:tcPr anchor="ctr"/>
                 </a:tc>
-                <a:extLst>
-                  <a:ext uri="{0D108BD9-81ED-4DB2-BD59-A6C34878D82A}">
-                    <a16:rowId xmlns:a16="http://schemas.microsoft.com/office/drawing/2014/main" val="1448562511"/>
-                  </a:ext>
-                </a:extLst>
               </a:tr>
               <a:tr h="861316">
                 <a:tc>
                   <a:txBody>
                     <a:bodyPr/>
-                    <a:lstStyle/>
                     <a:p>
                       <a:pPr lvl="0" algn="ctr">
                         <a:buNone/>
+                        <a:defRPr/>
                       </a:pPr>
                       <a:r>
-                        <a:rPr lang="en-US" err="1"/>
+                        <a:rPr lang="en-US"/>
                         <a:t>alice</a:t>
                       </a:r>
+                      <a:endParaRPr/>
                     </a:p>
                   </a:txBody>
                   <a:tcPr anchor="ctr"/>
@@ -5738,10 +5664,10 @@
                 <a:tc>
                   <a:txBody>
                     <a:bodyPr/>
-                    <a:lstStyle/>
                     <a:p>
                       <a:pPr lvl="0" algn="ctr">
                         <a:buNone/>
+                        <a:defRPr/>
                       </a:pPr>
                       <a:r>
                         <a:rPr lang="en-US" b="0" i="1">
@@ -5749,6 +5675,7 @@
                         </a:rPr>
                         <a:t>cats123</a:t>
                       </a:r>
+                      <a:endParaRPr/>
                     </a:p>
                   </a:txBody>
                   <a:tcPr anchor="ctr"/>
@@ -5756,13 +5683,13 @@
                 <a:tc>
                   <a:txBody>
                     <a:bodyPr/>
-                    <a:lstStyle/>
                     <a:p>
                       <a:pPr lvl="0" algn="ctr">
                         <a:buNone/>
+                        <a:defRPr/>
                       </a:pPr>
                       <a:r>
-                        <a:rPr lang="en-US" sz="1800" b="1" i="0" u="none" strike="noStrike" noProof="0">
+                        <a:rPr lang="en-US" sz="1800" b="1" i="0" u="none" strike="noStrike">
                           <a:solidFill>
                             <a:srgbClr val="000000"/>
                           </a:solidFill>
@@ -5770,29 +5697,26 @@
                         </a:rPr>
                         <a:t>f6d4692...</a:t>
                       </a:r>
+                      <a:endParaRPr/>
                     </a:p>
                   </a:txBody>
                   <a:tcPr anchor="ctr"/>
                 </a:tc>
-                <a:extLst>
-                  <a:ext uri="{0D108BD9-81ED-4DB2-BD59-A6C34878D82A}">
-                    <a16:rowId xmlns:a16="http://schemas.microsoft.com/office/drawing/2014/main" val="658915838"/>
-                  </a:ext>
-                </a:extLst>
               </a:tr>
               <a:tr h="861316">
                 <a:tc>
                   <a:txBody>
                     <a:bodyPr/>
-                    <a:lstStyle/>
                     <a:p>
                       <a:pPr lvl="0" algn="ctr">
                         <a:buNone/>
+                        <a:defRPr/>
                       </a:pPr>
                       <a:r>
                         <a:rPr lang="en-US"/>
                         <a:t>bob</a:t>
                       </a:r>
+                      <a:endParaRPr/>
                     </a:p>
                   </a:txBody>
                   <a:tcPr anchor="ctr"/>
@@ -5800,17 +5724,18 @@
                 <a:tc>
                   <a:txBody>
                     <a:bodyPr/>
-                    <a:lstStyle/>
                     <a:p>
                       <a:pPr lvl="0" algn="ctr">
                         <a:buNone/>
+                        <a:defRPr/>
                       </a:pPr>
                       <a:r>
-                        <a:rPr lang="en-US" b="0" i="1" err="1">
+                        <a:rPr lang="en-US" b="0" i="1">
                           <a:latin typeface="Consolas"/>
                         </a:rPr>
                         <a:t>p@ssword</a:t>
                       </a:r>
+                      <a:endParaRPr/>
                     </a:p>
                   </a:txBody>
                   <a:tcPr anchor="ctr"/>
@@ -5818,13 +5743,13 @@
                 <a:tc>
                   <a:txBody>
                     <a:bodyPr/>
-                    <a:lstStyle/>
                     <a:p>
                       <a:pPr lvl="0" algn="ctr">
                         <a:buNone/>
+                        <a:defRPr/>
                       </a:pPr>
                       <a:r>
-                        <a:rPr lang="en-US" sz="1800" b="1" i="0" u="none" strike="noStrike" noProof="0">
+                        <a:rPr lang="en-US" sz="1800" b="1" i="0" u="none" strike="noStrike">
                           <a:latin typeface="Consolas"/>
                         </a:rPr>
                         <a:t>0fd2059...</a:t>
@@ -5836,11 +5761,6 @@
                   </a:txBody>
                   <a:tcPr anchor="ctr"/>
                 </a:tc>
-                <a:extLst>
-                  <a:ext uri="{0D108BD9-81ED-4DB2-BD59-A6C34878D82A}">
-                    <a16:rowId xmlns:a16="http://schemas.microsoft.com/office/drawing/2014/main" val="346161631"/>
-                  </a:ext>
-                </a:extLst>
               </a:tr>
             </a:tbl>
           </a:graphicData>
@@ -5848,17 +5768,11 @@
       </p:graphicFrame>
       <p:sp>
         <p:nvSpPr>
-          <p:cNvPr id="7" name="Rectangle 6">
-            <a:extLst>
-              <a:ext uri="{FF2B5EF4-FFF2-40B4-BE49-F238E27FC236}">
-                <a16:creationId xmlns:a16="http://schemas.microsoft.com/office/drawing/2014/main" id="{5E35588C-9BDE-0620-8525-877E157754A2}"/>
-              </a:ext>
-            </a:extLst>
-          </p:cNvPr>
+          <p:cNvPr id="303353905" name="Rectangle 6"/>
           <p:cNvSpPr/>
           <p:nvPr/>
         </p:nvSpPr>
-        <p:spPr>
+        <p:spPr bwMode="auto">
           <a:xfrm>
             <a:off x="1816991" y="1896745"/>
             <a:ext cx="1719157" cy="4319122"/>
@@ -5893,24 +5807,20 @@
           <a:bodyPr rtlCol="0" anchor="ctr"/>
           <a:lstStyle/>
           <a:p>
-            <a:pPr algn="ctr"/>
+            <a:pPr algn="ctr">
+              <a:defRPr/>
+            </a:pPr>
             <a:endParaRPr lang="en-US"/>
           </a:p>
         </p:txBody>
       </p:sp>
       <p:sp>
         <p:nvSpPr>
-          <p:cNvPr id="9" name="TextBox 8">
-            <a:extLst>
-              <a:ext uri="{FF2B5EF4-FFF2-40B4-BE49-F238E27FC236}">
-                <a16:creationId xmlns:a16="http://schemas.microsoft.com/office/drawing/2014/main" id="{4AE5E72A-E96C-598B-0A73-8D6B48BA5C06}"/>
-              </a:ext>
-            </a:extLst>
-          </p:cNvPr>
+          <p:cNvPr id="1827194933" name="TextBox 8"/>
           <p:cNvSpPr txBox="1"/>
           <p:nvPr/>
         </p:nvSpPr>
-        <p:spPr>
+        <p:spPr bwMode="auto">
           <a:xfrm>
             <a:off x="1817261" y="1522658"/>
             <a:ext cx="1735543" cy="369332"/>
@@ -5922,14 +5832,14 @@
         </p:spPr>
         <p:txBody>
           <a:bodyPr rot="0" spcFirstLastPara="0" vertOverflow="overflow" horzOverflow="overflow" vert="horz" wrap="square" lIns="91440" tIns="45720" rIns="91440" bIns="45720" numCol="1" spcCol="0" rtlCol="0" fromWordArt="0" anchor="t" anchorCtr="0" forceAA="0" compatLnSpc="1">
-            <a:prstTxWarp prst="textNoShape">
-              <a:avLst/>
-            </a:prstTxWarp>
+            <a:prstTxWarp prst="textNoShape"/>
             <a:spAutoFit/>
           </a:bodyPr>
           <a:lstStyle/>
           <a:p>
-            <a:pPr algn="ctr"/>
+            <a:pPr algn="ctr">
+              <a:defRPr/>
+            </a:pPr>
             <a:r>
               <a:rPr lang="en-US" b="1">
                 <a:solidFill>
@@ -5948,24 +5858,19 @@
         </p:txBody>
       </p:sp>
     </p:spTree>
-    <p:extLst>
-      <p:ext uri="{BB962C8B-B14F-4D97-AF65-F5344CB8AC3E}">
-        <p14:creationId xmlns:p14="http://schemas.microsoft.com/office/powerpoint/2010/main" val="3911176493"/>
-      </p:ext>
-    </p:extLst>
   </p:cSld>
   <p:clrMapOvr>
     <a:masterClrMapping/>
   </p:clrMapOvr>
   <mc:AlternateContent xmlns:mc="http://schemas.openxmlformats.org/markup-compatibility/2006">
-    <mc:Choice xmlns:p14="http://schemas.microsoft.com/office/powerpoint/2010/main" Requires="p14">
-      <p:transition p14:dur="250">
-        <p:fade/>
+    <mc:Choice xmlns:p159="http://schemas.microsoft.com/office/powerpoint/2015/09/main" xmlns:p14="http://schemas.microsoft.com/office/powerpoint/2010/main" Requires="p159">
+      <p:transition spd="fast" p14:dur="250" advClick="1">
+        <p:fade thruBlk="0"/>
       </p:transition>
     </mc:Choice>
     <mc:Fallback>
-      <p:transition>
-        <p:fade/>
+      <p:transition spd="fast" advClick="1">
+        <p:fade thruBlk="0"/>
       </p:transition>
     </mc:Fallback>
   </mc:AlternateContent>
@@ -5973,21 +5878,15 @@
 </file>
 
 <file path=ppt/slides/slide5.xml><?xml version="1.0" encoding="utf-8"?>
-<p:sld xmlns:a="http://schemas.openxmlformats.org/drawingml/2006/main" xmlns:r="http://schemas.openxmlformats.org/officeDocument/2006/relationships" xmlns:p="http://schemas.openxmlformats.org/presentationml/2006/main">
-  <p:cSld>
+<p:sld xmlns:a="http://schemas.openxmlformats.org/drawingml/2006/main" xmlns:r="http://schemas.openxmlformats.org/officeDocument/2006/relationships" xmlns:p="http://schemas.openxmlformats.org/presentationml/2006/main" xmlns:m="http://schemas.openxmlformats.org/officeDocument/2006/math" xmlns:w="http://schemas.openxmlformats.org/wordprocessingml/2006/main" xmlns:mc="http://schemas.openxmlformats.org/markup-compatibility/2006" showMasterPhAnim="0" showMasterSp="1" show="1">
+  <p:cSld name="">
     <p:spTree>
       <p:nvGrpSpPr>
-        <p:cNvPr id="1" name="">
-          <a:extLst>
-            <a:ext uri="{FF2B5EF4-FFF2-40B4-BE49-F238E27FC236}">
-              <a16:creationId xmlns:a16="http://schemas.microsoft.com/office/drawing/2014/main" id="{D089A5C3-E77E-54AB-E9FF-6BF282B2AF19}"/>
-            </a:ext>
-          </a:extLst>
-        </p:cNvPr>
+        <p:cNvPr id="1" name=""/>
         <p:cNvGrpSpPr/>
         <p:nvPr/>
       </p:nvGrpSpPr>
-      <p:grpSpPr>
+      <p:grpSpPr bwMode="auto">
         <a:xfrm>
           <a:off x="0" y="0"/>
           <a:ext cx="0" cy="0"/>
@@ -5997,13 +5896,7 @@
       </p:grpSpPr>
       <p:sp>
         <p:nvSpPr>
-          <p:cNvPr id="2" name="Titre 1">
-            <a:extLst>
-              <a:ext uri="{FF2B5EF4-FFF2-40B4-BE49-F238E27FC236}">
-                <a16:creationId xmlns:a16="http://schemas.microsoft.com/office/drawing/2014/main" id="{333504D3-FF66-0F5B-5441-4638308848FA}"/>
-              </a:ext>
-            </a:extLst>
-          </p:cNvPr>
+          <p:cNvPr id="523527836" name="Titre 1"/>
           <p:cNvSpPr>
             <a:spLocks noGrp="1"/>
           </p:cNvSpPr>
@@ -6011,7 +5904,7 @@
             <p:ph type="title" idx="4294967295"/>
           </p:nvPr>
         </p:nvSpPr>
-        <p:spPr>
+        <p:spPr bwMode="auto">
           <a:xfrm>
             <a:off x="348343" y="307068"/>
             <a:ext cx="10515600" cy="1325563"/>
@@ -6023,8 +5916,11 @@
           </a:bodyPr>
           <a:lstStyle/>
           <a:p>
-            <a:r>
-              <a:rPr lang="fr-FR" b="1" dirty="0" err="1">
+            <a:pPr>
+              <a:defRPr/>
+            </a:pPr>
+            <a:r>
+              <a:rPr lang="fr-FR" b="1">
                 <a:latin typeface="Consolas"/>
                 <a:ea typeface="+mj-lt"/>
                 <a:cs typeface="Courier New"/>
@@ -6032,37 +5928,30 @@
               <a:t>Hashing</a:t>
             </a:r>
             <a:r>
-              <a:rPr lang="fr-FR" b="1" dirty="0">
+              <a:rPr lang="fr-FR" b="1">
                 <a:latin typeface="Consolas"/>
                 <a:ea typeface="+mj-lt"/>
                 <a:cs typeface="Courier New"/>
               </a:rPr>
               <a:t> Limitations</a:t>
             </a:r>
+            <a:endParaRPr/>
           </a:p>
         </p:txBody>
       </p:sp>
       <p:pic>
         <p:nvPicPr>
-          <p:cNvPr id="17" name="Picture 16" descr="A black and blue text on a black background&#10;&#10;AI-generated content may be incorrect.">
-            <a:extLst>
-              <a:ext uri="{FF2B5EF4-FFF2-40B4-BE49-F238E27FC236}">
-                <a16:creationId xmlns:a16="http://schemas.microsoft.com/office/drawing/2014/main" id="{D6A0CA11-671D-1D09-2B48-3E0D5C286CBF}"/>
-              </a:ext>
-            </a:extLst>
-          </p:cNvPr>
+          <p:cNvPr id="692142616" name="Picture 16" descr="A black and blue text on a black background&#10;&#10;AI-generated content may be incorrect."/>
           <p:cNvPicPr>
             <a:picLocks noChangeAspect="1"/>
           </p:cNvPicPr>
           <p:nvPr/>
         </p:nvPicPr>
-        <p:blipFill>
+        <p:blipFill rotWithShape="1">
           <a:blip r:embed="rId3"/>
-          <a:stretch>
-            <a:fillRect/>
-          </a:stretch>
+          <a:stretch/>
         </p:blipFill>
-        <p:spPr>
+        <p:spPr bwMode="auto">
           <a:xfrm>
             <a:off x="10819492" y="-244021"/>
             <a:ext cx="1242786" cy="1206501"/>
@@ -6074,17 +5963,11 @@
       </p:pic>
       <p:sp>
         <p:nvSpPr>
-          <p:cNvPr id="5" name="TextBox 7">
-            <a:extLst>
-              <a:ext uri="{FF2B5EF4-FFF2-40B4-BE49-F238E27FC236}">
-                <a16:creationId xmlns:a16="http://schemas.microsoft.com/office/drawing/2014/main" id="{FA324728-FADC-E401-06D0-54CD1E0E9DE0}"/>
-              </a:ext>
-            </a:extLst>
-          </p:cNvPr>
+          <p:cNvPr id="473833024" name="TextBox 7"/>
           <p:cNvSpPr txBox="1"/>
           <p:nvPr/>
         </p:nvSpPr>
-        <p:spPr>
+        <p:spPr bwMode="auto">
           <a:xfrm>
             <a:off x="4865834" y="2264650"/>
             <a:ext cx="7206155" cy="3139321"/>
@@ -6096,9 +5979,7 @@
         </p:spPr>
         <p:txBody>
           <a:bodyPr rot="0" spcFirstLastPara="0" vertOverflow="overflow" horzOverflow="overflow" vert="horz" wrap="square" lIns="91440" tIns="45720" rIns="91440" bIns="45720" numCol="1" spcCol="0" rtlCol="0" fromWordArt="0" anchor="t" anchorCtr="0" forceAA="0" compatLnSpc="1">
-            <a:prstTxWarp prst="textNoShape">
-              <a:avLst/>
-            </a:prstTxWarp>
+            <a:prstTxWarp prst="textNoShape"/>
             <a:spAutoFit/>
           </a:bodyPr>
           <a:lstStyle/>
@@ -6106,6 +5987,7 @@
             <a:pPr marL="285750" indent="-285750">
               <a:buFont typeface="Calibri"/>
               <a:buChar char="-"/>
+              <a:defRPr/>
             </a:pPr>
             <a:r>
               <a:rPr lang="en-US" sz="2400" b="1">
@@ -6113,7 +5995,7 @@
               </a:rPr>
               <a:t>Deterministic, Same input = Same output</a:t>
             </a:r>
-            <a:endParaRPr lang="en-US" sz="2400" b="1" dirty="0">
+            <a:endParaRPr lang="en-US" sz="2400" b="1">
               <a:latin typeface="Consolas"/>
             </a:endParaRPr>
           </a:p>
@@ -6121,8 +6003,9 @@
             <a:pPr marL="285750" indent="-285750">
               <a:buFont typeface="Calibri"/>
               <a:buChar char="-"/>
-            </a:pPr>
-            <a:endParaRPr lang="en-US" sz="2400" b="1" dirty="0">
+              <a:defRPr/>
+            </a:pPr>
+            <a:endParaRPr lang="en-US" sz="2400" b="1">
               <a:latin typeface="Consolas"/>
             </a:endParaRPr>
           </a:p>
@@ -6130,6 +6013,7 @@
             <a:pPr marL="285750" indent="-285750">
               <a:buFont typeface="Calibri"/>
               <a:buChar char="-"/>
+              <a:defRPr/>
             </a:pPr>
             <a:r>
               <a:rPr lang="en-US" sz="2400" b="1">
@@ -6137,7 +6021,7 @@
               </a:rPr>
               <a:t>Identical passwords are exposed</a:t>
             </a:r>
-            <a:endParaRPr lang="en-US" sz="2400" b="1" dirty="0">
+            <a:endParaRPr lang="en-US" sz="2400" b="1">
               <a:latin typeface="Consolas"/>
             </a:endParaRPr>
           </a:p>
@@ -6145,8 +6029,9 @@
             <a:pPr marL="285750" indent="-285750">
               <a:buFont typeface="Calibri"/>
               <a:buChar char="-"/>
-            </a:pPr>
-            <a:endParaRPr lang="en-US" sz="2400" b="1" dirty="0">
+              <a:defRPr/>
+            </a:pPr>
+            <a:endParaRPr lang="en-US" sz="2400" b="1">
               <a:latin typeface="Consolas"/>
             </a:endParaRPr>
           </a:p>
@@ -6154,6 +6039,7 @@
             <a:pPr marL="285750" indent="-285750">
               <a:buFont typeface="Calibri"/>
               <a:buChar char="-"/>
+              <a:defRPr/>
             </a:pPr>
             <a:r>
               <a:rPr lang="en-US" sz="2400" b="1">
@@ -6162,7 +6048,7 @@
               <a:t>"Rainbow Tables", dictionaries with common passwords and </a:t>
             </a:r>
             <a:r>
-              <a:rPr lang="en-US" sz="2400" b="1" err="1">
+              <a:rPr lang="en-US" sz="2400" b="1">
                 <a:latin typeface="Consolas"/>
               </a:rPr>
               <a:t>their</a:t>
@@ -6173,11 +6059,13 @@
               </a:rPr>
               <a:t> hashes</a:t>
             </a:r>
+            <a:endParaRPr/>
           </a:p>
           <a:p>
             <a:pPr marL="285750" indent="-285750">
               <a:buFont typeface="Calibri"/>
               <a:buChar char="-"/>
+              <a:defRPr/>
             </a:pPr>
             <a:endParaRPr lang="en-US" b="1">
               <a:latin typeface="Consolas"/>
@@ -6187,12 +6075,16 @@
             <a:pPr marL="285750" indent="-285750">
               <a:buFont typeface="Calibri"/>
               <a:buChar char="-"/>
+              <a:defRPr/>
             </a:pPr>
             <a:endParaRPr lang="en-US" b="1">
               <a:latin typeface="Consolas"/>
             </a:endParaRPr>
           </a:p>
           <a:p>
+            <a:pPr>
+              <a:defRPr/>
+            </a:pPr>
             <a:endParaRPr lang="en-US" b="1">
               <a:latin typeface="Consolas"/>
             </a:endParaRPr>
@@ -6201,70 +6093,42 @@
       </p:sp>
       <p:graphicFrame>
         <p:nvGraphicFramePr>
-          <p:cNvPr id="8" name="Table 7">
-            <a:extLst>
-              <a:ext uri="{FF2B5EF4-FFF2-40B4-BE49-F238E27FC236}">
-                <a16:creationId xmlns:a16="http://schemas.microsoft.com/office/drawing/2014/main" id="{DFEBFF7A-2B2E-DA10-740E-C17172259BC8}"/>
-              </a:ext>
-            </a:extLst>
-          </p:cNvPr>
+          <p:cNvPr id="227650112" name="Table 7"/>
           <p:cNvGraphicFramePr>
-            <a:graphicFrameLocks noGrp="1"/>
+            <a:graphicFrameLocks xmlns:a="http://schemas.openxmlformats.org/drawingml/2006/main" noGrp="1"/>
           </p:cNvGraphicFramePr>
-          <p:nvPr>
-            <p:extLst>
-              <p:ext uri="{D42A27DB-BD31-4B8C-83A1-F6EECF244321}">
-                <p14:modId xmlns:p14="http://schemas.microsoft.com/office/powerpoint/2010/main" val="3719135146"/>
-              </p:ext>
-            </p:extLst>
-          </p:nvPr>
+          <p:nvPr/>
         </p:nvGraphicFramePr>
-        <p:xfrm>
+        <p:xfrm rot="0">
           <a:off x="352094" y="1630594"/>
           <a:ext cx="4401418" cy="4306580"/>
         </p:xfrm>
         <a:graphic>
           <a:graphicData uri="http://schemas.openxmlformats.org/drawingml/2006/table">
             <a:tbl>
-              <a:tblPr firstRow="1" bandRow="1">
+              <a:tblPr firstRow="1" firstCol="0" lastRow="0" lastCol="0" bandRow="1" bandCol="0">
                 <a:tableStyleId>{793D81CF-94F2-401A-BA57-92F5A7B2D0C5}</a:tableStyleId>
               </a:tblPr>
               <a:tblGrid>
-                <a:gridCol w="1226001">
-                  <a:extLst>
-                    <a:ext uri="{9D8B030D-6E8A-4147-A177-3AD203B41FA5}">
-                      <a16:colId xmlns:a16="http://schemas.microsoft.com/office/drawing/2014/main" val="54938029"/>
-                    </a:ext>
-                  </a:extLst>
-                </a:gridCol>
-                <a:gridCol w="1705737">
-                  <a:extLst>
-                    <a:ext uri="{9D8B030D-6E8A-4147-A177-3AD203B41FA5}">
-                      <a16:colId xmlns:a16="http://schemas.microsoft.com/office/drawing/2014/main" val="1290070235"/>
-                    </a:ext>
-                  </a:extLst>
-                </a:gridCol>
-                <a:gridCol w="1469680">
-                  <a:extLst>
-                    <a:ext uri="{9D8B030D-6E8A-4147-A177-3AD203B41FA5}">
-                      <a16:colId xmlns:a16="http://schemas.microsoft.com/office/drawing/2014/main" val="2782693283"/>
-                    </a:ext>
-                  </a:extLst>
-                </a:gridCol>
+                <a:gridCol w="1440000"/>
+                <a:gridCol w="1491737"/>
+                <a:gridCol w="1469679"/>
               </a:tblGrid>
               <a:tr h="861316">
                 <a:tc>
                   <a:txBody>
                     <a:bodyPr/>
-                    <a:lstStyle/>
                     <a:p>
-                      <a:pPr algn="ctr"/>
+                      <a:pPr algn="ctr">
+                        <a:defRPr/>
+                      </a:pPr>
                       <a:r>
                         <a:rPr lang="en-US" b="1" i="0">
                           <a:latin typeface="Consolas"/>
                         </a:rPr>
                         <a:t>Username</a:t>
                       </a:r>
+                      <a:endParaRPr/>
                     </a:p>
                   </a:txBody>
                   <a:tcPr anchor="ctr"/>
@@ -6272,9 +6136,10 @@
                 <a:tc>
                   <a:txBody>
                     <a:bodyPr/>
-                    <a:lstStyle/>
                     <a:p>
-                      <a:pPr algn="ctr"/>
+                      <a:pPr algn="ctr">
+                        <a:defRPr/>
+                      </a:pPr>
                       <a:r>
                         <a:rPr lang="en-US" b="1" i="0">
                           <a:latin typeface="Consolas"/>
@@ -6292,6 +6157,7 @@
                         </a:rPr>
                         <a:t>(Plaintext)</a:t>
                       </a:r>
+                      <a:endParaRPr/>
                     </a:p>
                   </a:txBody>
                   <a:tcPr anchor="ctr"/>
@@ -6299,10 +6165,10 @@
                 <a:tc>
                   <a:txBody>
                     <a:bodyPr/>
-                    <a:lstStyle/>
                     <a:p>
                       <a:pPr lvl="0" algn="ctr">
                         <a:buNone/>
+                        <a:defRPr/>
                       </a:pPr>
                       <a:r>
                         <a:rPr lang="en-US" b="1" i="0">
@@ -6310,10 +6176,12 @@
                         </a:rPr>
                         <a:t>Password</a:t>
                       </a:r>
+                      <a:endParaRPr/>
                     </a:p>
                     <a:p>
                       <a:pPr lvl="0" algn="ctr">
                         <a:buNone/>
+                        <a:defRPr/>
                       </a:pPr>
                       <a:r>
                         <a:rPr lang="en-US" b="1" i="0">
@@ -6321,29 +6189,26 @@
                         </a:rPr>
                         <a:t>(Hashed)</a:t>
                       </a:r>
+                      <a:endParaRPr/>
                     </a:p>
                   </a:txBody>
                   <a:tcPr anchor="ctr"/>
                 </a:tc>
-                <a:extLst>
-                  <a:ext uri="{0D108BD9-81ED-4DB2-BD59-A6C34878D82A}">
-                    <a16:rowId xmlns:a16="http://schemas.microsoft.com/office/drawing/2014/main" val="3003469212"/>
-                  </a:ext>
-                </a:extLst>
               </a:tr>
               <a:tr h="861316">
                 <a:tc>
                   <a:txBody>
                     <a:bodyPr/>
-                    <a:lstStyle/>
                     <a:p>
                       <a:pPr marL="0" indent="0" algn="ctr">
                         <a:buNone/>
+                        <a:defRPr/>
                       </a:pPr>
                       <a:r>
                         <a:rPr lang="en-US"/>
                         <a:t>admin</a:t>
                       </a:r>
+                      <a:endParaRPr/>
                     </a:p>
                   </a:txBody>
                   <a:tcPr anchor="ctr"/>
@@ -6351,15 +6216,17 @@
                 <a:tc>
                   <a:txBody>
                     <a:bodyPr/>
-                    <a:lstStyle/>
                     <a:p>
-                      <a:pPr algn="ctr"/>
+                      <a:pPr algn="ctr">
+                        <a:defRPr/>
+                      </a:pPr>
                       <a:r>
                         <a:rPr lang="en-US" b="0" i="1">
                           <a:latin typeface="Consolas"/>
                         </a:rPr>
                         <a:t>admin67</a:t>
                       </a:r>
+                      <a:endParaRPr/>
                     </a:p>
                   </a:txBody>
                   <a:tcPr anchor="ctr"/>
@@ -6367,13 +6234,13 @@
                 <a:tc>
                   <a:txBody>
                     <a:bodyPr/>
-                    <a:lstStyle/>
                     <a:p>
                       <a:pPr lvl="0" algn="ctr">
                         <a:buNone/>
+                        <a:defRPr/>
                       </a:pPr>
                       <a:r>
-                        <a:rPr lang="en-US" sz="1800" b="1" i="0" u="none" strike="noStrike" noProof="0">
+                        <a:rPr lang="en-US" sz="1800" b="1" i="0" u="none" strike="noStrike">
                           <a:latin typeface="Consolas"/>
                         </a:rPr>
                         <a:t>5897cfa...</a:t>
@@ -6385,23 +6252,20 @@
                   </a:txBody>
                   <a:tcPr anchor="ctr"/>
                 </a:tc>
-                <a:extLst>
-                  <a:ext uri="{0D108BD9-81ED-4DB2-BD59-A6C34878D82A}">
-                    <a16:rowId xmlns:a16="http://schemas.microsoft.com/office/drawing/2014/main" val="3658796194"/>
-                  </a:ext>
-                </a:extLst>
               </a:tr>
               <a:tr h="861316">
                 <a:tc>
                   <a:txBody>
                     <a:bodyPr/>
-                    <a:lstStyle/>
                     <a:p>
-                      <a:pPr algn="ctr"/>
+                      <a:pPr algn="ctr">
+                        <a:defRPr/>
+                      </a:pPr>
                       <a:r>
-                        <a:rPr lang="en-US" err="1"/>
+                        <a:rPr lang="en-US"/>
                         <a:t>charlie</a:t>
                       </a:r>
+                      <a:endParaRPr/>
                     </a:p>
                   </a:txBody>
                   <a:tcPr anchor="ctr"/>
@@ -6409,15 +6273,17 @@
                 <a:tc>
                   <a:txBody>
                     <a:bodyPr/>
-                    <a:lstStyle/>
                     <a:p>
-                      <a:pPr algn="ctr"/>
+                      <a:pPr algn="ctr">
+                        <a:defRPr/>
+                      </a:pPr>
                       <a:r>
                         <a:rPr lang="en-US" b="0" i="1">
                           <a:latin typeface="Consolas"/>
                         </a:rPr>
                         <a:t>cats123</a:t>
                       </a:r>
+                      <a:endParaRPr/>
                     </a:p>
                   </a:txBody>
                   <a:tcPr anchor="ctr"/>
@@ -6425,40 +6291,37 @@
                 <a:tc>
                   <a:txBody>
                     <a:bodyPr/>
-                    <a:lstStyle/>
                     <a:p>
                       <a:pPr lvl="0" algn="ctr">
                         <a:buNone/>
+                        <a:defRPr/>
                       </a:pPr>
                       <a:r>
-                        <a:rPr lang="en-US" sz="1800" b="1" i="0" u="none" strike="noStrike" noProof="0">
+                        <a:rPr lang="en-US" sz="1800" b="1" i="0" u="none" strike="noStrike">
                           <a:latin typeface="Consolas"/>
                         </a:rPr>
                         <a:t>f6d4692...</a:t>
                       </a:r>
+                      <a:endParaRPr/>
                     </a:p>
                   </a:txBody>
                   <a:tcPr anchor="ctr"/>
                 </a:tc>
-                <a:extLst>
-                  <a:ext uri="{0D108BD9-81ED-4DB2-BD59-A6C34878D82A}">
-                    <a16:rowId xmlns:a16="http://schemas.microsoft.com/office/drawing/2014/main" val="1448562511"/>
-                  </a:ext>
-                </a:extLst>
               </a:tr>
               <a:tr h="861316">
                 <a:tc>
                   <a:txBody>
                     <a:bodyPr/>
-                    <a:lstStyle/>
                     <a:p>
                       <a:pPr lvl="0" algn="ctr">
                         <a:buNone/>
+                        <a:defRPr/>
                       </a:pPr>
                       <a:r>
-                        <a:rPr lang="en-US" err="1"/>
+                        <a:rPr lang="en-US"/>
                         <a:t>alice</a:t>
                       </a:r>
+                      <a:endParaRPr/>
                     </a:p>
                   </a:txBody>
                   <a:tcPr anchor="ctr"/>
@@ -6466,10 +6329,10 @@
                 <a:tc>
                   <a:txBody>
                     <a:bodyPr/>
-                    <a:lstStyle/>
                     <a:p>
                       <a:pPr lvl="0" algn="ctr">
                         <a:buNone/>
+                        <a:defRPr/>
                       </a:pPr>
                       <a:r>
                         <a:rPr lang="en-US" b="0" i="1">
@@ -6477,6 +6340,7 @@
                         </a:rPr>
                         <a:t>cats123</a:t>
                       </a:r>
+                      <a:endParaRPr/>
                     </a:p>
                   </a:txBody>
                   <a:tcPr anchor="ctr"/>
@@ -6484,13 +6348,13 @@
                 <a:tc>
                   <a:txBody>
                     <a:bodyPr/>
-                    <a:lstStyle/>
                     <a:p>
                       <a:pPr lvl="0" algn="ctr">
                         <a:buNone/>
+                        <a:defRPr/>
                       </a:pPr>
                       <a:r>
-                        <a:rPr lang="en-US" sz="1800" b="1" i="0" u="none" strike="noStrike" noProof="0">
+                        <a:rPr lang="en-US" sz="1800" b="1" i="0" u="none" strike="noStrike">
                           <a:solidFill>
                             <a:srgbClr val="000000"/>
                           </a:solidFill>
@@ -6498,29 +6362,26 @@
                         </a:rPr>
                         <a:t>f6d4692...</a:t>
                       </a:r>
+                      <a:endParaRPr/>
                     </a:p>
                   </a:txBody>
                   <a:tcPr anchor="ctr"/>
                 </a:tc>
-                <a:extLst>
-                  <a:ext uri="{0D108BD9-81ED-4DB2-BD59-A6C34878D82A}">
-                    <a16:rowId xmlns:a16="http://schemas.microsoft.com/office/drawing/2014/main" val="658915838"/>
-                  </a:ext>
-                </a:extLst>
               </a:tr>
               <a:tr h="861316">
                 <a:tc>
                   <a:txBody>
                     <a:bodyPr/>
-                    <a:lstStyle/>
                     <a:p>
                       <a:pPr lvl="0" algn="ctr">
                         <a:buNone/>
+                        <a:defRPr/>
                       </a:pPr>
                       <a:r>
                         <a:rPr lang="en-US"/>
                         <a:t>bob</a:t>
                       </a:r>
+                      <a:endParaRPr/>
                     </a:p>
                   </a:txBody>
                   <a:tcPr anchor="ctr"/>
@@ -6528,17 +6389,18 @@
                 <a:tc>
                   <a:txBody>
                     <a:bodyPr/>
-                    <a:lstStyle/>
                     <a:p>
                       <a:pPr lvl="0" algn="ctr">
                         <a:buNone/>
+                        <a:defRPr/>
                       </a:pPr>
                       <a:r>
-                        <a:rPr lang="en-US" b="0" i="1" err="1">
+                        <a:rPr lang="en-US" b="0" i="1">
                           <a:latin typeface="Consolas"/>
                         </a:rPr>
                         <a:t>p@ssword</a:t>
                       </a:r>
+                      <a:endParaRPr/>
                     </a:p>
                   </a:txBody>
                   <a:tcPr anchor="ctr"/>
@@ -6546,13 +6408,13 @@
                 <a:tc>
                   <a:txBody>
                     <a:bodyPr/>
-                    <a:lstStyle/>
                     <a:p>
                       <a:pPr lvl="0" algn="ctr">
                         <a:buNone/>
+                        <a:defRPr/>
                       </a:pPr>
                       <a:r>
-                        <a:rPr lang="en-US" sz="1800" b="1" i="0" u="none" strike="noStrike" noProof="0">
+                        <a:rPr lang="en-US" sz="1800" b="1" i="0" u="none" strike="noStrike">
                           <a:latin typeface="Consolas"/>
                         </a:rPr>
                         <a:t>0fd2059...</a:t>
@@ -6564,650 +6426,18 @@
                   </a:txBody>
                   <a:tcPr anchor="ctr"/>
                 </a:tc>
-                <a:extLst>
-                  <a:ext uri="{0D108BD9-81ED-4DB2-BD59-A6C34878D82A}">
-                    <a16:rowId xmlns:a16="http://schemas.microsoft.com/office/drawing/2014/main" val="346161631"/>
-                  </a:ext>
-                </a:extLst>
               </a:tr>
             </a:tbl>
           </a:graphicData>
         </a:graphic>
       </p:graphicFrame>
-    </p:spTree>
-    <p:extLst>
-      <p:ext uri="{BB962C8B-B14F-4D97-AF65-F5344CB8AC3E}">
-        <p14:creationId xmlns:p14="http://schemas.microsoft.com/office/powerpoint/2010/main" val="2093933107"/>
-      </p:ext>
-    </p:extLst>
-  </p:cSld>
-  <p:clrMapOvr>
-    <a:masterClrMapping/>
-  </p:clrMapOvr>
-  <mc:AlternateContent xmlns:mc="http://schemas.openxmlformats.org/markup-compatibility/2006">
-    <mc:Choice xmlns:p14="http://schemas.microsoft.com/office/powerpoint/2010/main" Requires="p14">
-      <p:transition p14:dur="250">
-        <p:fade/>
-      </p:transition>
-    </mc:Choice>
-    <mc:Fallback>
-      <p:transition>
-        <p:fade/>
-      </p:transition>
-    </mc:Fallback>
-  </mc:AlternateContent>
-</p:sld>
-</file>
-
-<file path=ppt/slides/slide6.xml><?xml version="1.0" encoding="utf-8"?>
-<p:sld xmlns:a="http://schemas.openxmlformats.org/drawingml/2006/main" xmlns:r="http://schemas.openxmlformats.org/officeDocument/2006/relationships" xmlns:p="http://schemas.openxmlformats.org/presentationml/2006/main">
-  <p:cSld>
-    <p:spTree>
-      <p:nvGrpSpPr>
-        <p:cNvPr id="1" name="">
-          <a:extLst>
-            <a:ext uri="{FF2B5EF4-FFF2-40B4-BE49-F238E27FC236}">
-              <a16:creationId xmlns:a16="http://schemas.microsoft.com/office/drawing/2014/main" id="{4F61A073-6602-FE87-4B12-674885F7932F}"/>
-            </a:ext>
-          </a:extLst>
-        </p:cNvPr>
-        <p:cNvGrpSpPr/>
-        <p:nvPr/>
-      </p:nvGrpSpPr>
-      <p:grpSpPr>
-        <a:xfrm>
-          <a:off x="0" y="0"/>
-          <a:ext cx="0" cy="0"/>
-          <a:chOff x="0" y="0"/>
-          <a:chExt cx="0" cy="0"/>
-        </a:xfrm>
-      </p:grpSpPr>
-      <p:sp>
-        <p:nvSpPr>
-          <p:cNvPr id="2" name="Titre 1">
-            <a:extLst>
-              <a:ext uri="{FF2B5EF4-FFF2-40B4-BE49-F238E27FC236}">
-                <a16:creationId xmlns:a16="http://schemas.microsoft.com/office/drawing/2014/main" id="{673705EA-94CB-8A79-9B01-238609AF587C}"/>
-              </a:ext>
-            </a:extLst>
-          </p:cNvPr>
-          <p:cNvSpPr>
-            <a:spLocks noGrp="1"/>
-          </p:cNvSpPr>
-          <p:nvPr>
-            <p:ph type="title" idx="4294967295"/>
-          </p:nvPr>
-        </p:nvSpPr>
-        <p:spPr>
-          <a:xfrm>
-            <a:off x="348343" y="307068"/>
-            <a:ext cx="10515600" cy="1325563"/>
-          </a:xfrm>
-        </p:spPr>
-        <p:txBody>
-          <a:bodyPr>
-            <a:normAutofit/>
-          </a:bodyPr>
-          <a:lstStyle/>
-          <a:p>
-            <a:r>
-              <a:rPr lang="fr-FR" b="1" dirty="0" err="1">
-                <a:latin typeface="Consolas"/>
-                <a:ea typeface="+mj-lt"/>
-                <a:cs typeface="Courier New"/>
-              </a:rPr>
-              <a:t>Hashing</a:t>
-            </a:r>
-            <a:r>
-              <a:rPr lang="fr-FR" b="1" dirty="0">
-                <a:latin typeface="Consolas"/>
-                <a:ea typeface="+mj-lt"/>
-                <a:cs typeface="Courier New"/>
-              </a:rPr>
-              <a:t> Limitations</a:t>
-            </a:r>
-          </a:p>
-        </p:txBody>
-      </p:sp>
-      <p:pic>
-        <p:nvPicPr>
-          <p:cNvPr id="17" name="Picture 16" descr="A black and blue text on a black background&#10;&#10;AI-generated content may be incorrect.">
-            <a:extLst>
-              <a:ext uri="{FF2B5EF4-FFF2-40B4-BE49-F238E27FC236}">
-                <a16:creationId xmlns:a16="http://schemas.microsoft.com/office/drawing/2014/main" id="{C71B5CAD-02C3-2C60-D890-E1E3F2F05C51}"/>
-              </a:ext>
-            </a:extLst>
-          </p:cNvPr>
-          <p:cNvPicPr>
-            <a:picLocks noChangeAspect="1"/>
-          </p:cNvPicPr>
-          <p:nvPr/>
-        </p:nvPicPr>
-        <p:blipFill>
-          <a:blip r:embed="rId3"/>
-          <a:stretch>
-            <a:fillRect/>
-          </a:stretch>
-        </p:blipFill>
-        <p:spPr>
-          <a:xfrm>
-            <a:off x="10819492" y="-244021"/>
-            <a:ext cx="1242786" cy="1206501"/>
-          </a:xfrm>
-          <a:prstGeom prst="rect">
-            <a:avLst/>
-          </a:prstGeom>
-        </p:spPr>
-      </p:pic>
-      <p:sp>
-        <p:nvSpPr>
-          <p:cNvPr id="5" name="TextBox 7">
-            <a:extLst>
-              <a:ext uri="{FF2B5EF4-FFF2-40B4-BE49-F238E27FC236}">
-                <a16:creationId xmlns:a16="http://schemas.microsoft.com/office/drawing/2014/main" id="{6B60F715-128D-C3F1-A4D2-995BE3E56EDF}"/>
-              </a:ext>
-            </a:extLst>
-          </p:cNvPr>
-          <p:cNvSpPr txBox="1"/>
-          <p:nvPr/>
-        </p:nvSpPr>
-        <p:spPr>
-          <a:xfrm>
-            <a:off x="4865834" y="2264650"/>
-            <a:ext cx="7206155" cy="3139321"/>
-          </a:xfrm>
-          <a:prstGeom prst="rect">
-            <a:avLst/>
-          </a:prstGeom>
-          <a:noFill/>
-        </p:spPr>
-        <p:txBody>
-          <a:bodyPr rot="0" spcFirstLastPara="0" vertOverflow="overflow" horzOverflow="overflow" vert="horz" wrap="square" lIns="91440" tIns="45720" rIns="91440" bIns="45720" numCol="1" spcCol="0" rtlCol="0" fromWordArt="0" anchor="t" anchorCtr="0" forceAA="0" compatLnSpc="1">
-            <a:prstTxWarp prst="textNoShape">
-              <a:avLst/>
-            </a:prstTxWarp>
-            <a:spAutoFit/>
-          </a:bodyPr>
-          <a:lstStyle/>
-          <a:p>
-            <a:pPr marL="285750" indent="-285750">
-              <a:buFont typeface="Calibri"/>
-              <a:buChar char="-"/>
-            </a:pPr>
-            <a:r>
-              <a:rPr lang="en-US" sz="2400" b="1">
-                <a:latin typeface="Consolas"/>
-              </a:rPr>
-              <a:t>Deterministic, Same input = Same output</a:t>
-            </a:r>
-            <a:endParaRPr lang="en-US" sz="2400" b="1" dirty="0">
-              <a:latin typeface="Consolas"/>
-            </a:endParaRPr>
-          </a:p>
-          <a:p>
-            <a:pPr marL="285750" indent="-285750">
-              <a:buFont typeface="Calibri"/>
-              <a:buChar char="-"/>
-            </a:pPr>
-            <a:endParaRPr lang="en-US" sz="2400" b="1" dirty="0">
-              <a:latin typeface="Consolas"/>
-            </a:endParaRPr>
-          </a:p>
-          <a:p>
-            <a:pPr marL="285750" indent="-285750">
-              <a:buFont typeface="Calibri"/>
-              <a:buChar char="-"/>
-            </a:pPr>
-            <a:r>
-              <a:rPr lang="en-US" sz="2400" b="1">
-                <a:latin typeface="Consolas"/>
-              </a:rPr>
-              <a:t>Identical passwords are exposed</a:t>
-            </a:r>
-            <a:endParaRPr lang="en-US" sz="2400" b="1" dirty="0">
-              <a:latin typeface="Consolas"/>
-            </a:endParaRPr>
-          </a:p>
-          <a:p>
-            <a:pPr marL="285750" indent="-285750">
-              <a:buFont typeface="Calibri"/>
-              <a:buChar char="-"/>
-            </a:pPr>
-            <a:endParaRPr lang="en-US" sz="2400" b="1" dirty="0">
-              <a:latin typeface="Consolas"/>
-            </a:endParaRPr>
-          </a:p>
-          <a:p>
-            <a:pPr marL="285750" indent="-285750">
-              <a:buFont typeface="Calibri"/>
-              <a:buChar char="-"/>
-            </a:pPr>
-            <a:r>
-              <a:rPr lang="en-US" sz="2400" b="1">
-                <a:latin typeface="Consolas"/>
-              </a:rPr>
-              <a:t>"Rainbow Tables", dictionaries with common passwords and </a:t>
-            </a:r>
-            <a:r>
-              <a:rPr lang="en-US" sz="2400" b="1" err="1">
-                <a:latin typeface="Consolas"/>
-              </a:rPr>
-              <a:t>their</a:t>
-            </a:r>
-            <a:r>
-              <a:rPr lang="en-US" sz="2400" b="1">
-                <a:latin typeface="Consolas"/>
-              </a:rPr>
-              <a:t> hashes</a:t>
-            </a:r>
-          </a:p>
-          <a:p>
-            <a:pPr marL="285750" indent="-285750">
-              <a:buFont typeface="Calibri"/>
-              <a:buChar char="-"/>
-            </a:pPr>
-            <a:endParaRPr lang="en-US" b="1">
-              <a:latin typeface="Consolas"/>
-            </a:endParaRPr>
-          </a:p>
-          <a:p>
-            <a:pPr marL="285750" indent="-285750">
-              <a:buFont typeface="Calibri"/>
-              <a:buChar char="-"/>
-            </a:pPr>
-            <a:endParaRPr lang="en-US" b="1">
-              <a:latin typeface="Consolas"/>
-            </a:endParaRPr>
-          </a:p>
-          <a:p>
-            <a:endParaRPr lang="en-US" b="1">
-              <a:latin typeface="Consolas"/>
-            </a:endParaRPr>
-          </a:p>
-        </p:txBody>
-      </p:sp>
-      <p:graphicFrame>
-        <p:nvGraphicFramePr>
-          <p:cNvPr id="8" name="Table 7">
-            <a:extLst>
-              <a:ext uri="{FF2B5EF4-FFF2-40B4-BE49-F238E27FC236}">
-                <a16:creationId xmlns:a16="http://schemas.microsoft.com/office/drawing/2014/main" id="{CEC182AF-F41F-37E2-A033-49F17584A68C}"/>
-              </a:ext>
-            </a:extLst>
-          </p:cNvPr>
-          <p:cNvGraphicFramePr>
-            <a:graphicFrameLocks noGrp="1"/>
-          </p:cNvGraphicFramePr>
-          <p:nvPr/>
-        </p:nvGraphicFramePr>
-        <p:xfrm>
-          <a:off x="352094" y="1630594"/>
-          <a:ext cx="4401418" cy="4306580"/>
-        </p:xfrm>
-        <a:graphic>
-          <a:graphicData uri="http://schemas.openxmlformats.org/drawingml/2006/table">
-            <a:tbl>
-              <a:tblPr firstRow="1" bandRow="1">
-                <a:tableStyleId>{793D81CF-94F2-401A-BA57-92F5A7B2D0C5}</a:tableStyleId>
-              </a:tblPr>
-              <a:tblGrid>
-                <a:gridCol w="1226001">
-                  <a:extLst>
-                    <a:ext uri="{9D8B030D-6E8A-4147-A177-3AD203B41FA5}">
-                      <a16:colId xmlns:a16="http://schemas.microsoft.com/office/drawing/2014/main" val="54938029"/>
-                    </a:ext>
-                  </a:extLst>
-                </a:gridCol>
-                <a:gridCol w="1705737">
-                  <a:extLst>
-                    <a:ext uri="{9D8B030D-6E8A-4147-A177-3AD203B41FA5}">
-                      <a16:colId xmlns:a16="http://schemas.microsoft.com/office/drawing/2014/main" val="1290070235"/>
-                    </a:ext>
-                  </a:extLst>
-                </a:gridCol>
-                <a:gridCol w="1469680">
-                  <a:extLst>
-                    <a:ext uri="{9D8B030D-6E8A-4147-A177-3AD203B41FA5}">
-                      <a16:colId xmlns:a16="http://schemas.microsoft.com/office/drawing/2014/main" val="2782693283"/>
-                    </a:ext>
-                  </a:extLst>
-                </a:gridCol>
-              </a:tblGrid>
-              <a:tr h="861316">
-                <a:tc>
-                  <a:txBody>
-                    <a:bodyPr/>
-                    <a:lstStyle/>
-                    <a:p>
-                      <a:pPr algn="ctr"/>
-                      <a:r>
-                        <a:rPr lang="en-US" b="1" i="0">
-                          <a:latin typeface="Consolas"/>
-                        </a:rPr>
-                        <a:t>Username</a:t>
-                      </a:r>
-                    </a:p>
-                  </a:txBody>
-                  <a:tcPr anchor="ctr"/>
-                </a:tc>
-                <a:tc>
-                  <a:txBody>
-                    <a:bodyPr/>
-                    <a:lstStyle/>
-                    <a:p>
-                      <a:pPr algn="ctr"/>
-                      <a:r>
-                        <a:rPr lang="en-US" b="1" i="0">
-                          <a:latin typeface="Consolas"/>
-                        </a:rPr>
-                        <a:t>Password</a:t>
-                      </a:r>
-                      <a:br>
-                        <a:rPr lang="en-US" b="1" i="0">
-                          <a:latin typeface="Consolas"/>
-                        </a:rPr>
-                      </a:br>
-                      <a:r>
-                        <a:rPr lang="en-US" b="1" i="0">
-                          <a:latin typeface="Consolas"/>
-                        </a:rPr>
-                        <a:t>(Plaintext)</a:t>
-                      </a:r>
-                    </a:p>
-                  </a:txBody>
-                  <a:tcPr anchor="ctr"/>
-                </a:tc>
-                <a:tc>
-                  <a:txBody>
-                    <a:bodyPr/>
-                    <a:lstStyle/>
-                    <a:p>
-                      <a:pPr lvl="0" algn="ctr">
-                        <a:buNone/>
-                      </a:pPr>
-                      <a:r>
-                        <a:rPr lang="en-US" b="1" i="0">
-                          <a:latin typeface="Consolas"/>
-                        </a:rPr>
-                        <a:t>Password</a:t>
-                      </a:r>
-                    </a:p>
-                    <a:p>
-                      <a:pPr lvl="0" algn="ctr">
-                        <a:buNone/>
-                      </a:pPr>
-                      <a:r>
-                        <a:rPr lang="en-US" b="1" i="0">
-                          <a:latin typeface="Consolas"/>
-                        </a:rPr>
-                        <a:t>(Hashed)</a:t>
-                      </a:r>
-                    </a:p>
-                  </a:txBody>
-                  <a:tcPr anchor="ctr"/>
-                </a:tc>
-                <a:extLst>
-                  <a:ext uri="{0D108BD9-81ED-4DB2-BD59-A6C34878D82A}">
-                    <a16:rowId xmlns:a16="http://schemas.microsoft.com/office/drawing/2014/main" val="3003469212"/>
-                  </a:ext>
-                </a:extLst>
-              </a:tr>
-              <a:tr h="861316">
-                <a:tc>
-                  <a:txBody>
-                    <a:bodyPr/>
-                    <a:lstStyle/>
-                    <a:p>
-                      <a:pPr marL="0" indent="0" algn="ctr">
-                        <a:buNone/>
-                      </a:pPr>
-                      <a:r>
-                        <a:rPr lang="en-US"/>
-                        <a:t>admin</a:t>
-                      </a:r>
-                    </a:p>
-                  </a:txBody>
-                  <a:tcPr anchor="ctr"/>
-                </a:tc>
-                <a:tc>
-                  <a:txBody>
-                    <a:bodyPr/>
-                    <a:lstStyle/>
-                    <a:p>
-                      <a:pPr algn="ctr"/>
-                      <a:r>
-                        <a:rPr lang="en-US" b="0" i="1">
-                          <a:latin typeface="Consolas"/>
-                        </a:rPr>
-                        <a:t>admin67</a:t>
-                      </a:r>
-                    </a:p>
-                  </a:txBody>
-                  <a:tcPr anchor="ctr"/>
-                </a:tc>
-                <a:tc>
-                  <a:txBody>
-                    <a:bodyPr/>
-                    <a:lstStyle/>
-                    <a:p>
-                      <a:pPr lvl="0" algn="ctr">
-                        <a:buNone/>
-                      </a:pPr>
-                      <a:r>
-                        <a:rPr lang="en-US" sz="1800" b="1" i="0" u="none" strike="noStrike" noProof="0">
-                          <a:latin typeface="Consolas"/>
-                        </a:rPr>
-                        <a:t>5897cfa...</a:t>
-                      </a:r>
-                      <a:endParaRPr lang="en-US" b="1" i="0">
-                        <a:latin typeface="Consolas"/>
-                      </a:endParaRPr>
-                    </a:p>
-                  </a:txBody>
-                  <a:tcPr anchor="ctr"/>
-                </a:tc>
-                <a:extLst>
-                  <a:ext uri="{0D108BD9-81ED-4DB2-BD59-A6C34878D82A}">
-                    <a16:rowId xmlns:a16="http://schemas.microsoft.com/office/drawing/2014/main" val="3658796194"/>
-                  </a:ext>
-                </a:extLst>
-              </a:tr>
-              <a:tr h="861316">
-                <a:tc>
-                  <a:txBody>
-                    <a:bodyPr/>
-                    <a:lstStyle/>
-                    <a:p>
-                      <a:pPr algn="ctr"/>
-                      <a:r>
-                        <a:rPr lang="en-US" err="1"/>
-                        <a:t>charlie</a:t>
-                      </a:r>
-                    </a:p>
-                  </a:txBody>
-                  <a:tcPr anchor="ctr"/>
-                </a:tc>
-                <a:tc>
-                  <a:txBody>
-                    <a:bodyPr/>
-                    <a:lstStyle/>
-                    <a:p>
-                      <a:pPr algn="ctr"/>
-                      <a:r>
-                        <a:rPr lang="en-US" b="0" i="1">
-                          <a:latin typeface="Consolas"/>
-                        </a:rPr>
-                        <a:t>cats123</a:t>
-                      </a:r>
-                    </a:p>
-                  </a:txBody>
-                  <a:tcPr anchor="ctr"/>
-                </a:tc>
-                <a:tc>
-                  <a:txBody>
-                    <a:bodyPr/>
-                    <a:lstStyle/>
-                    <a:p>
-                      <a:pPr lvl="0" algn="ctr">
-                        <a:buNone/>
-                      </a:pPr>
-                      <a:r>
-                        <a:rPr lang="en-US" sz="1800" b="1" i="0" u="none" strike="noStrike" noProof="0">
-                          <a:latin typeface="Consolas"/>
-                        </a:rPr>
-                        <a:t>f6d4692...</a:t>
-                      </a:r>
-                    </a:p>
-                  </a:txBody>
-                  <a:tcPr anchor="ctr"/>
-                </a:tc>
-                <a:extLst>
-                  <a:ext uri="{0D108BD9-81ED-4DB2-BD59-A6C34878D82A}">
-                    <a16:rowId xmlns:a16="http://schemas.microsoft.com/office/drawing/2014/main" val="1448562511"/>
-                  </a:ext>
-                </a:extLst>
-              </a:tr>
-              <a:tr h="861316">
-                <a:tc>
-                  <a:txBody>
-                    <a:bodyPr/>
-                    <a:lstStyle/>
-                    <a:p>
-                      <a:pPr lvl="0" algn="ctr">
-                        <a:buNone/>
-                      </a:pPr>
-                      <a:r>
-                        <a:rPr lang="en-US" err="1"/>
-                        <a:t>alice</a:t>
-                      </a:r>
-                    </a:p>
-                  </a:txBody>
-                  <a:tcPr anchor="ctr"/>
-                </a:tc>
-                <a:tc>
-                  <a:txBody>
-                    <a:bodyPr/>
-                    <a:lstStyle/>
-                    <a:p>
-                      <a:pPr lvl="0" algn="ctr">
-                        <a:buNone/>
-                      </a:pPr>
-                      <a:r>
-                        <a:rPr lang="en-US" b="0" i="1">
-                          <a:latin typeface="Consolas"/>
-                        </a:rPr>
-                        <a:t>cats123</a:t>
-                      </a:r>
-                    </a:p>
-                  </a:txBody>
-                  <a:tcPr anchor="ctr"/>
-                </a:tc>
-                <a:tc>
-                  <a:txBody>
-                    <a:bodyPr/>
-                    <a:lstStyle/>
-                    <a:p>
-                      <a:pPr lvl="0" algn="ctr">
-                        <a:buNone/>
-                      </a:pPr>
-                      <a:r>
-                        <a:rPr lang="en-US" sz="1800" b="1" i="0" u="none" strike="noStrike" noProof="0">
-                          <a:solidFill>
-                            <a:srgbClr val="000000"/>
-                          </a:solidFill>
-                          <a:latin typeface="Consolas"/>
-                        </a:rPr>
-                        <a:t>f6d4692...</a:t>
-                      </a:r>
-                    </a:p>
-                  </a:txBody>
-                  <a:tcPr anchor="ctr"/>
-                </a:tc>
-                <a:extLst>
-                  <a:ext uri="{0D108BD9-81ED-4DB2-BD59-A6C34878D82A}">
-                    <a16:rowId xmlns:a16="http://schemas.microsoft.com/office/drawing/2014/main" val="658915838"/>
-                  </a:ext>
-                </a:extLst>
-              </a:tr>
-              <a:tr h="861316">
-                <a:tc>
-                  <a:txBody>
-                    <a:bodyPr/>
-                    <a:lstStyle/>
-                    <a:p>
-                      <a:pPr lvl="0" algn="ctr">
-                        <a:buNone/>
-                      </a:pPr>
-                      <a:r>
-                        <a:rPr lang="en-US"/>
-                        <a:t>bob</a:t>
-                      </a:r>
-                    </a:p>
-                  </a:txBody>
-                  <a:tcPr anchor="ctr"/>
-                </a:tc>
-                <a:tc>
-                  <a:txBody>
-                    <a:bodyPr/>
-                    <a:lstStyle/>
-                    <a:p>
-                      <a:pPr lvl="0" algn="ctr">
-                        <a:buNone/>
-                      </a:pPr>
-                      <a:r>
-                        <a:rPr lang="en-US" b="0" i="1" err="1">
-                          <a:latin typeface="Consolas"/>
-                        </a:rPr>
-                        <a:t>p@ssword</a:t>
-                      </a:r>
-                    </a:p>
-                  </a:txBody>
-                  <a:tcPr anchor="ctr"/>
-                </a:tc>
-                <a:tc>
-                  <a:txBody>
-                    <a:bodyPr/>
-                    <a:lstStyle/>
-                    <a:p>
-                      <a:pPr lvl="0" algn="ctr">
-                        <a:buNone/>
-                      </a:pPr>
-                      <a:r>
-                        <a:rPr lang="en-US" sz="1800" b="1" i="0" u="none" strike="noStrike" noProof="0">
-                          <a:latin typeface="Consolas"/>
-                        </a:rPr>
-                        <a:t>0fd2059...</a:t>
-                      </a:r>
-                      <a:endParaRPr lang="en-US" b="1" i="0">
-                        <a:latin typeface="Consolas"/>
-                      </a:endParaRPr>
-                    </a:p>
-                  </a:txBody>
-                  <a:tcPr anchor="ctr"/>
-                </a:tc>
-                <a:extLst>
-                  <a:ext uri="{0D108BD9-81ED-4DB2-BD59-A6C34878D82A}">
-                    <a16:rowId xmlns:a16="http://schemas.microsoft.com/office/drawing/2014/main" val="346161631"/>
-                  </a:ext>
-                </a:extLst>
-              </a:tr>
-            </a:tbl>
-          </a:graphicData>
-        </a:graphic>
-      </p:graphicFrame>
-      <p:sp>
-        <p:nvSpPr>
-          <p:cNvPr id="4" name="Rectangle 3">
-            <a:extLst>
-              <a:ext uri="{FF2B5EF4-FFF2-40B4-BE49-F238E27FC236}">
-                <a16:creationId xmlns:a16="http://schemas.microsoft.com/office/drawing/2014/main" id="{8CA88A34-F44E-D64C-0993-CEE9BE060A67}"/>
-              </a:ext>
-            </a:extLst>
-          </p:cNvPr>
+      <p:sp>
+        <p:nvSpPr>
+          <p:cNvPr id="264236641" name="Rectangle 3"/>
           <p:cNvSpPr/>
           <p:nvPr/>
         </p:nvSpPr>
-        <p:spPr>
+        <p:spPr bwMode="auto">
           <a:xfrm>
             <a:off x="351389" y="3337044"/>
             <a:ext cx="4389677" cy="1729166"/>
@@ -7242,52 +6472,43 @@
           <a:bodyPr rtlCol="0" anchor="ctr"/>
           <a:lstStyle/>
           <a:p>
-            <a:pPr algn="ctr"/>
+            <a:pPr algn="ctr">
+              <a:defRPr/>
+            </a:pPr>
             <a:endParaRPr lang="en-US"/>
           </a:p>
         </p:txBody>
       </p:sp>
     </p:spTree>
-    <p:extLst>
-      <p:ext uri="{BB962C8B-B14F-4D97-AF65-F5344CB8AC3E}">
-        <p14:creationId xmlns:p14="http://schemas.microsoft.com/office/powerpoint/2010/main" val="455613969"/>
-      </p:ext>
-    </p:extLst>
   </p:cSld>
   <p:clrMapOvr>
     <a:masterClrMapping/>
   </p:clrMapOvr>
   <mc:AlternateContent xmlns:mc="http://schemas.openxmlformats.org/markup-compatibility/2006">
-    <mc:Choice xmlns:p14="http://schemas.microsoft.com/office/powerpoint/2010/main" Requires="p14">
-      <p:transition p14:dur="250">
-        <p:fade/>
+    <mc:Choice xmlns:p159="http://schemas.microsoft.com/office/powerpoint/2015/09/main" xmlns:p14="http://schemas.microsoft.com/office/powerpoint/2010/main" Requires="p159">
+      <p:transition spd="fast" p14:dur="250" advClick="1">
+        <p:fade thruBlk="0"/>
       </p:transition>
     </mc:Choice>
     <mc:Fallback>
-      <p:transition>
-        <p:fade/>
+      <p:transition spd="fast" advClick="1">
+        <p:fade thruBlk="0"/>
       </p:transition>
     </mc:Fallback>
   </mc:AlternateContent>
 </p:sld>
 </file>
 
-<file path=ppt/slides/slide7.xml><?xml version="1.0" encoding="utf-8"?>
-<p:sld xmlns:a="http://schemas.openxmlformats.org/drawingml/2006/main" xmlns:r="http://schemas.openxmlformats.org/officeDocument/2006/relationships" xmlns:p="http://schemas.openxmlformats.org/presentationml/2006/main">
-  <p:cSld>
+<file path=ppt/slides/slide6.xml><?xml version="1.0" encoding="utf-8"?>
+<p:sld xmlns:a="http://schemas.openxmlformats.org/drawingml/2006/main" xmlns:r="http://schemas.openxmlformats.org/officeDocument/2006/relationships" xmlns:p="http://schemas.openxmlformats.org/presentationml/2006/main" xmlns:m="http://schemas.openxmlformats.org/officeDocument/2006/math" xmlns:w="http://schemas.openxmlformats.org/wordprocessingml/2006/main" xmlns:mc="http://schemas.openxmlformats.org/markup-compatibility/2006" showMasterPhAnim="0" showMasterSp="1" show="1">
+  <p:cSld name="">
     <p:spTree>
       <p:nvGrpSpPr>
-        <p:cNvPr id="1" name="">
-          <a:extLst>
-            <a:ext uri="{FF2B5EF4-FFF2-40B4-BE49-F238E27FC236}">
-              <a16:creationId xmlns:a16="http://schemas.microsoft.com/office/drawing/2014/main" id="{5FD26F50-65D4-C1F1-E176-FE69217C22E8}"/>
-            </a:ext>
-          </a:extLst>
-        </p:cNvPr>
+        <p:cNvPr id="1" name=""/>
         <p:cNvGrpSpPr/>
         <p:nvPr/>
       </p:nvGrpSpPr>
-      <p:grpSpPr>
+      <p:grpSpPr bwMode="auto">
         <a:xfrm>
           <a:off x="0" y="0"/>
           <a:ext cx="0" cy="0"/>
@@ -7297,13 +6518,7 @@
       </p:grpSpPr>
       <p:sp>
         <p:nvSpPr>
-          <p:cNvPr id="2" name="Titre 1">
-            <a:extLst>
-              <a:ext uri="{FF2B5EF4-FFF2-40B4-BE49-F238E27FC236}">
-                <a16:creationId xmlns:a16="http://schemas.microsoft.com/office/drawing/2014/main" id="{C4E2AC36-302E-C3B4-7689-1487FF246CEE}"/>
-              </a:ext>
-            </a:extLst>
-          </p:cNvPr>
+          <p:cNvPr id="1183291197" name="Titre 1"/>
           <p:cNvSpPr>
             <a:spLocks noGrp="1"/>
           </p:cNvSpPr>
@@ -7311,7 +6526,7 @@
             <p:ph type="title" idx="4294967295"/>
           </p:nvPr>
         </p:nvSpPr>
-        <p:spPr>
+        <p:spPr bwMode="auto">
           <a:xfrm>
             <a:off x="348343" y="307068"/>
             <a:ext cx="10515600" cy="1325563"/>
@@ -7323,51 +6538,47 @@
           </a:bodyPr>
           <a:lstStyle/>
           <a:p>
-            <a:r>
-              <a:rPr lang="fr-FR" b="1" dirty="0" err="1">
+            <a:pPr>
+              <a:defRPr/>
+            </a:pPr>
+            <a:r>
+              <a:rPr lang="fr-FR" b="1">
                 <a:latin typeface="Consolas"/>
                 <a:cs typeface="Courier New"/>
               </a:rPr>
               <a:t>Salting</a:t>
             </a:r>
             <a:r>
-              <a:rPr lang="fr-FR" b="1" dirty="0">
+              <a:rPr lang="fr-FR" b="1">
                 <a:latin typeface="Consolas"/>
                 <a:cs typeface="Courier New"/>
               </a:rPr>
               <a:t> </a:t>
             </a:r>
             <a:r>
-              <a:rPr lang="fr-FR" b="1" dirty="0" err="1">
+              <a:rPr lang="fr-FR" b="1">
                 <a:latin typeface="Consolas"/>
                 <a:cs typeface="Courier New"/>
               </a:rPr>
               <a:t>Implementation</a:t>
             </a:r>
+            <a:endParaRPr/>
           </a:p>
         </p:txBody>
       </p:sp>
       <p:pic>
         <p:nvPicPr>
-          <p:cNvPr id="17" name="Picture 16" descr="A black and blue text on a black background&#10;&#10;AI-generated content may be incorrect.">
-            <a:extLst>
-              <a:ext uri="{FF2B5EF4-FFF2-40B4-BE49-F238E27FC236}">
-                <a16:creationId xmlns:a16="http://schemas.microsoft.com/office/drawing/2014/main" id="{2319F35F-D7A4-B67D-0735-F648C852B6FC}"/>
-              </a:ext>
-            </a:extLst>
-          </p:cNvPr>
+          <p:cNvPr id="203499828" name="Picture 16" descr="A black and blue text on a black background&#10;&#10;AI-generated content may be incorrect."/>
           <p:cNvPicPr>
             <a:picLocks noChangeAspect="1"/>
           </p:cNvPicPr>
           <p:nvPr/>
         </p:nvPicPr>
-        <p:blipFill>
+        <p:blipFill rotWithShape="1">
           <a:blip r:embed="rId3"/>
-          <a:stretch>
-            <a:fillRect/>
-          </a:stretch>
+          <a:stretch/>
         </p:blipFill>
-        <p:spPr>
+        <p:spPr bwMode="auto">
           <a:xfrm>
             <a:off x="10819492" y="-244021"/>
             <a:ext cx="1242786" cy="1206501"/>
@@ -7379,19 +6590,13 @@
       </p:pic>
       <p:sp>
         <p:nvSpPr>
-          <p:cNvPr id="5" name="TextBox 7">
-            <a:extLst>
-              <a:ext uri="{FF2B5EF4-FFF2-40B4-BE49-F238E27FC236}">
-                <a16:creationId xmlns:a16="http://schemas.microsoft.com/office/drawing/2014/main" id="{F5E24FB7-EADF-AEEE-C99E-839CE046F050}"/>
-              </a:ext>
-            </a:extLst>
-          </p:cNvPr>
+          <p:cNvPr id="929387437" name="TextBox 7"/>
           <p:cNvSpPr txBox="1"/>
           <p:nvPr/>
         </p:nvSpPr>
-        <p:spPr>
+        <p:spPr bwMode="auto">
           <a:xfrm>
-            <a:off x="6230194" y="2112560"/>
+            <a:off x="6230193" y="2112560"/>
             <a:ext cx="5894860" cy="3508653"/>
           </a:xfrm>
           <a:prstGeom prst="rect">
@@ -7401,9 +6606,7 @@
         </p:spPr>
         <p:txBody>
           <a:bodyPr rot="0" spcFirstLastPara="0" vertOverflow="overflow" horzOverflow="overflow" vert="horz" wrap="square" lIns="91440" tIns="45720" rIns="91440" bIns="45720" numCol="1" spcCol="0" rtlCol="0" fromWordArt="0" anchor="t" anchorCtr="0" forceAA="0" compatLnSpc="1">
-            <a:prstTxWarp prst="textNoShape">
-              <a:avLst/>
-            </a:prstTxWarp>
+            <a:prstTxWarp prst="textNoShape"/>
             <a:spAutoFit/>
           </a:bodyPr>
           <a:lstStyle/>
@@ -7411,9 +6614,10 @@
             <a:pPr marL="285750" indent="-285750">
               <a:buFont typeface="Calibri"/>
               <a:buChar char="-"/>
-            </a:pPr>
-            <a:r>
-              <a:rPr lang="en-US" sz="2400" b="1" dirty="0">
+              <a:defRPr/>
+            </a:pPr>
+            <a:r>
+              <a:rPr lang="en-US" sz="2400" b="1">
                 <a:latin typeface="Consolas"/>
               </a:rPr>
               <a:t>Password + Unique </a:t>
@@ -7427,6 +6631,9 @@
             <a:endParaRPr lang="en-US"/>
           </a:p>
           <a:p>
+            <a:pPr>
+              <a:defRPr/>
+            </a:pPr>
             <a:r>
               <a:rPr lang="en-US" sz="2400" b="1">
                 <a:latin typeface="Consolas"/>
@@ -7434,7 +6641,7 @@
               <a:t>  = </a:t>
             </a:r>
             <a:r>
-              <a:rPr lang="en-US" sz="2400" b="1" dirty="0">
+              <a:rPr lang="en-US" sz="2400" b="1">
                 <a:latin typeface="Consolas"/>
               </a:rPr>
               <a:t>Hash</a:t>
@@ -7445,8 +6652,9 @@
             <a:pPr marL="285750" indent="-285750">
               <a:buFont typeface="Calibri"/>
               <a:buChar char="-"/>
-            </a:pPr>
-            <a:endParaRPr lang="en-US" sz="2400" b="1" dirty="0">
+              <a:defRPr/>
+            </a:pPr>
+            <a:endParaRPr lang="en-US" sz="2400" b="1">
               <a:latin typeface="Consolas"/>
             </a:endParaRPr>
           </a:p>
@@ -7454,6 +6662,7 @@
             <a:pPr marL="285750" indent="-285750">
               <a:buFont typeface="Calibri"/>
               <a:buChar char="-"/>
+              <a:defRPr/>
             </a:pPr>
             <a:r>
               <a:rPr lang="en-US" sz="2400" b="1">
@@ -7461,7 +6670,7 @@
               </a:rPr>
               <a:t>Salt saved alongside the hash</a:t>
             </a:r>
-            <a:endParaRPr lang="en-US" sz="2400" b="1" dirty="0">
+            <a:endParaRPr lang="en-US" sz="2400" b="1">
               <a:latin typeface="Consolas"/>
             </a:endParaRPr>
           </a:p>
@@ -7469,8 +6678,9 @@
             <a:pPr marL="285750" indent="-285750">
               <a:buFont typeface="Calibri"/>
               <a:buChar char="-"/>
-            </a:pPr>
-            <a:endParaRPr lang="en-US" sz="2400" b="1" dirty="0">
+              <a:defRPr/>
+            </a:pPr>
+            <a:endParaRPr lang="en-US" sz="2400" b="1">
               <a:latin typeface="Consolas"/>
             </a:endParaRPr>
           </a:p>
@@ -7478,6 +6688,7 @@
             <a:pPr marL="285750" indent="-285750">
               <a:buFont typeface="Calibri"/>
               <a:buChar char="-"/>
+              <a:defRPr/>
             </a:pPr>
             <a:r>
               <a:rPr lang="en-US" sz="2400" b="1">
@@ -7485,9 +6696,13 @@
               </a:rPr>
               <a:t>Identical passwords, different hashes</a:t>
             </a:r>
-          </a:p>
-          <a:p>
-            <a:endParaRPr lang="en-US" b="1" dirty="0">
+            <a:endParaRPr/>
+          </a:p>
+          <a:p>
+            <a:pPr>
+              <a:defRPr/>
+            </a:pPr>
+            <a:endParaRPr lang="en-US" b="1">
               <a:latin typeface="Consolas"/>
             </a:endParaRPr>
           </a:p>
@@ -7495,12 +6710,16 @@
             <a:pPr marL="285750" indent="-285750">
               <a:buFont typeface="Calibri"/>
               <a:buChar char="-"/>
+              <a:defRPr/>
             </a:pPr>
             <a:endParaRPr lang="en-US" b="1">
               <a:latin typeface="Consolas"/>
             </a:endParaRPr>
           </a:p>
           <a:p>
+            <a:pPr>
+              <a:defRPr/>
+            </a:pPr>
             <a:endParaRPr lang="en-US" b="1">
               <a:latin typeface="Consolas"/>
             </a:endParaRPr>
@@ -7509,77 +6728,43 @@
       </p:sp>
       <p:graphicFrame>
         <p:nvGraphicFramePr>
-          <p:cNvPr id="8" name="Table 7">
-            <a:extLst>
-              <a:ext uri="{FF2B5EF4-FFF2-40B4-BE49-F238E27FC236}">
-                <a16:creationId xmlns:a16="http://schemas.microsoft.com/office/drawing/2014/main" id="{957C25F1-4405-46C7-8A31-53F06E1C6B60}"/>
-              </a:ext>
-            </a:extLst>
-          </p:cNvPr>
+          <p:cNvPr id="823103249" name="Table 7"/>
           <p:cNvGraphicFramePr>
-            <a:graphicFrameLocks noGrp="1"/>
+            <a:graphicFrameLocks xmlns:a="http://schemas.openxmlformats.org/drawingml/2006/main" noGrp="1"/>
           </p:cNvGraphicFramePr>
-          <p:nvPr>
-            <p:extLst>
-              <p:ext uri="{D42A27DB-BD31-4B8C-83A1-F6EECF244321}">
-                <p14:modId xmlns:p14="http://schemas.microsoft.com/office/powerpoint/2010/main" val="262995912"/>
-              </p:ext>
-            </p:extLst>
-          </p:nvPr>
+          <p:nvPr/>
         </p:nvGraphicFramePr>
-        <p:xfrm>
+        <p:xfrm rot="0">
           <a:off x="438685" y="1717185"/>
           <a:ext cx="5718604" cy="4306580"/>
         </p:xfrm>
         <a:graphic>
           <a:graphicData uri="http://schemas.openxmlformats.org/drawingml/2006/table">
             <a:tbl>
-              <a:tblPr firstRow="1" bandRow="1">
+              <a:tblPr firstRow="1" firstCol="0" lastRow="0" lastCol="0" bandRow="1" bandCol="0">
                 <a:tableStyleId>{793D81CF-94F2-401A-BA57-92F5A7B2D0C5}</a:tableStyleId>
               </a:tblPr>
               <a:tblGrid>
-                <a:gridCol w="1194155">
-                  <a:extLst>
-                    <a:ext uri="{9D8B030D-6E8A-4147-A177-3AD203B41FA5}">
-                      <a16:colId xmlns:a16="http://schemas.microsoft.com/office/drawing/2014/main" val="54938029"/>
-                    </a:ext>
-                  </a:extLst>
-                </a:gridCol>
-                <a:gridCol w="1661433">
-                  <a:extLst>
-                    <a:ext uri="{9D8B030D-6E8A-4147-A177-3AD203B41FA5}">
-                      <a16:colId xmlns:a16="http://schemas.microsoft.com/office/drawing/2014/main" val="1290070235"/>
-                    </a:ext>
-                  </a:extLst>
-                </a:gridCol>
-                <a:gridCol w="1219200">
-                  <a:extLst>
-                    <a:ext uri="{9D8B030D-6E8A-4147-A177-3AD203B41FA5}">
-                      <a16:colId xmlns:a16="http://schemas.microsoft.com/office/drawing/2014/main" val="2005889446"/>
-                    </a:ext>
-                  </a:extLst>
-                </a:gridCol>
-                <a:gridCol w="1643816">
-                  <a:extLst>
-                    <a:ext uri="{9D8B030D-6E8A-4147-A177-3AD203B41FA5}">
-                      <a16:colId xmlns:a16="http://schemas.microsoft.com/office/drawing/2014/main" val="2782693283"/>
-                    </a:ext>
-                  </a:extLst>
-                </a:gridCol>
+                <a:gridCol w="1440000"/>
+                <a:gridCol w="1530000"/>
+                <a:gridCol w="1104787"/>
+                <a:gridCol w="1643815"/>
               </a:tblGrid>
               <a:tr h="861316">
                 <a:tc>
                   <a:txBody>
                     <a:bodyPr/>
-                    <a:lstStyle/>
                     <a:p>
-                      <a:pPr algn="ctr"/>
+                      <a:pPr algn="ctr">
+                        <a:defRPr/>
+                      </a:pPr>
                       <a:r>
                         <a:rPr lang="en-US" b="1" i="0">
                           <a:latin typeface="Consolas"/>
                         </a:rPr>
                         <a:t>Username</a:t>
                       </a:r>
+                      <a:endParaRPr/>
                     </a:p>
                   </a:txBody>
                   <a:tcPr anchor="ctr"/>
@@ -7587,9 +6772,10 @@
                 <a:tc>
                   <a:txBody>
                     <a:bodyPr/>
-                    <a:lstStyle/>
                     <a:p>
-                      <a:pPr algn="ctr"/>
+                      <a:pPr algn="ctr">
+                        <a:defRPr/>
+                      </a:pPr>
                       <a:r>
                         <a:rPr lang="en-US" b="1" i="0">
                           <a:latin typeface="Consolas"/>
@@ -7597,7 +6783,7 @@
                         <a:t>Password</a:t>
                       </a:r>
                       <a:br>
-                        <a:rPr lang="en-US" b="1" i="0" dirty="0">
+                        <a:rPr lang="en-US" b="1" i="0">
                           <a:latin typeface="Consolas"/>
                         </a:rPr>
                       </a:br>
@@ -7607,6 +6793,7 @@
                         </a:rPr>
                         <a:t>(Plaintext)</a:t>
                       </a:r>
+                      <a:endParaRPr/>
                     </a:p>
                   </a:txBody>
                   <a:tcPr anchor="ctr"/>
@@ -7614,10 +6801,10 @@
                 <a:tc>
                   <a:txBody>
                     <a:bodyPr/>
-                    <a:lstStyle/>
                     <a:p>
                       <a:pPr lvl="0" algn="ctr">
                         <a:buNone/>
+                        <a:defRPr/>
                       </a:pPr>
                       <a:r>
                         <a:rPr lang="en-US" b="1" i="0">
@@ -7625,6 +6812,7 @@
                         </a:rPr>
                         <a:t>Salt</a:t>
                       </a:r>
+                      <a:endParaRPr/>
                     </a:p>
                   </a:txBody>
                   <a:tcPr anchor="ctr"/>
@@ -7632,10 +6820,10 @@
                 <a:tc>
                   <a:txBody>
                     <a:bodyPr/>
-                    <a:lstStyle/>
                     <a:p>
                       <a:pPr lvl="0" algn="ctr">
                         <a:buNone/>
+                        <a:defRPr/>
                       </a:pPr>
                       <a:r>
                         <a:rPr lang="en-US" b="1" i="0">
@@ -7643,10 +6831,12 @@
                         </a:rPr>
                         <a:t>Password</a:t>
                       </a:r>
+                      <a:endParaRPr/>
                     </a:p>
                     <a:p>
                       <a:pPr lvl="0" algn="ctr">
                         <a:buNone/>
+                        <a:defRPr/>
                       </a:pPr>
                       <a:r>
                         <a:rPr lang="en-US" b="1" i="0">
@@ -7654,29 +6844,26 @@
                         </a:rPr>
                         <a:t>(Hashed)</a:t>
                       </a:r>
+                      <a:endParaRPr/>
                     </a:p>
                   </a:txBody>
                   <a:tcPr anchor="ctr"/>
                 </a:tc>
-                <a:extLst>
-                  <a:ext uri="{0D108BD9-81ED-4DB2-BD59-A6C34878D82A}">
-                    <a16:rowId xmlns:a16="http://schemas.microsoft.com/office/drawing/2014/main" val="3003469212"/>
-                  </a:ext>
-                </a:extLst>
               </a:tr>
               <a:tr h="861316">
                 <a:tc>
                   <a:txBody>
                     <a:bodyPr/>
-                    <a:lstStyle/>
                     <a:p>
                       <a:pPr marL="0" indent="0" algn="ctr">
                         <a:buNone/>
+                        <a:defRPr/>
                       </a:pPr>
                       <a:r>
                         <a:rPr lang="en-US"/>
                         <a:t>admin</a:t>
                       </a:r>
+                      <a:endParaRPr/>
                     </a:p>
                   </a:txBody>
                   <a:tcPr anchor="ctr"/>
@@ -7684,15 +6871,17 @@
                 <a:tc>
                   <a:txBody>
                     <a:bodyPr/>
-                    <a:lstStyle/>
                     <a:p>
-                      <a:pPr algn="ctr"/>
+                      <a:pPr algn="ctr">
+                        <a:defRPr/>
+                      </a:pPr>
                       <a:r>
                         <a:rPr lang="en-US" b="0" i="1">
                           <a:latin typeface="Consolas"/>
                         </a:rPr>
                         <a:t>admin67</a:t>
                       </a:r>
+                      <a:endParaRPr/>
                     </a:p>
                   </a:txBody>
                   <a:tcPr anchor="ctr"/>
@@ -7700,13 +6889,13 @@
                 <a:tc>
                   <a:txBody>
                     <a:bodyPr/>
-                    <a:lstStyle/>
                     <a:p>
                       <a:pPr lvl="0" algn="ctr">
                         <a:buNone/>
+                        <a:defRPr/>
                       </a:pPr>
                       <a:r>
-                        <a:rPr lang="en-US" sz="1800" b="1" i="0" u="none" strike="noStrike" noProof="0">
+                        <a:rPr lang="en-US" sz="1800" b="1" i="0" u="none" strike="noStrike">
                           <a:latin typeface="Consolas"/>
                         </a:rPr>
                         <a:t>8xF2</a:t>
@@ -7721,13 +6910,13 @@
                 <a:tc>
                   <a:txBody>
                     <a:bodyPr/>
-                    <a:lstStyle/>
                     <a:p>
                       <a:pPr lvl="0" algn="ctr">
                         <a:buNone/>
+                        <a:defRPr/>
                       </a:pPr>
                       <a:r>
-                        <a:rPr lang="en-US" sz="1800" b="1" i="0" u="none" strike="noStrike" noProof="0">
+                        <a:rPr lang="en-US" sz="1800" b="1" i="0" u="none" strike="noStrike">
                           <a:latin typeface="Consolas"/>
                         </a:rPr>
                         <a:t>b3664aba...</a:t>
@@ -7739,23 +6928,20 @@
                   </a:txBody>
                   <a:tcPr anchor="ctr"/>
                 </a:tc>
-                <a:extLst>
-                  <a:ext uri="{0D108BD9-81ED-4DB2-BD59-A6C34878D82A}">
-                    <a16:rowId xmlns:a16="http://schemas.microsoft.com/office/drawing/2014/main" val="3658796194"/>
-                  </a:ext>
-                </a:extLst>
               </a:tr>
               <a:tr h="861316">
                 <a:tc>
                   <a:txBody>
                     <a:bodyPr/>
-                    <a:lstStyle/>
                     <a:p>
-                      <a:pPr algn="ctr"/>
+                      <a:pPr algn="ctr">
+                        <a:defRPr/>
+                      </a:pPr>
                       <a:r>
-                        <a:rPr lang="en-US" dirty="0" err="1"/>
+                        <a:rPr lang="en-US"/>
                         <a:t>charlie</a:t>
                       </a:r>
+                      <a:endParaRPr/>
                     </a:p>
                   </a:txBody>
                   <a:tcPr anchor="ctr"/>
@@ -7763,15 +6949,17 @@
                 <a:tc>
                   <a:txBody>
                     <a:bodyPr/>
-                    <a:lstStyle/>
                     <a:p>
-                      <a:pPr algn="ctr"/>
+                      <a:pPr algn="ctr">
+                        <a:defRPr/>
+                      </a:pPr>
                       <a:r>
                         <a:rPr lang="en-US" b="0" i="1">
                           <a:latin typeface="Consolas"/>
                         </a:rPr>
                         <a:t>cats123</a:t>
                       </a:r>
+                      <a:endParaRPr/>
                     </a:p>
                   </a:txBody>
                   <a:tcPr anchor="ctr"/>
@@ -7779,13 +6967,13 @@
                 <a:tc>
                   <a:txBody>
                     <a:bodyPr/>
-                    <a:lstStyle/>
                     <a:p>
                       <a:pPr lvl="0" algn="ctr">
                         <a:buNone/>
+                        <a:defRPr/>
                       </a:pPr>
                       <a:r>
-                        <a:rPr lang="en-US" sz="1800" b="1" i="0" u="none" strike="noStrike" noProof="0">
+                        <a:rPr lang="en-US" sz="1800" b="1" i="0" u="none" strike="noStrike">
                           <a:latin typeface="Consolas"/>
                         </a:rPr>
                         <a:t>a7d9</a:t>
@@ -7800,40 +6988,37 @@
                 <a:tc>
                   <a:txBody>
                     <a:bodyPr/>
-                    <a:lstStyle/>
                     <a:p>
                       <a:pPr lvl="0" algn="ctr">
                         <a:buNone/>
+                        <a:defRPr/>
                       </a:pPr>
                       <a:r>
-                        <a:rPr lang="en-US" sz="1800" b="1" i="0" u="none" strike="noStrike" noProof="0">
+                        <a:rPr lang="en-US" sz="1800" b="1" i="0" u="none" strike="noStrike">
                           <a:latin typeface="Consolas"/>
                         </a:rPr>
                         <a:t>34b60fbf...</a:t>
                       </a:r>
+                      <a:endParaRPr/>
                     </a:p>
                   </a:txBody>
                   <a:tcPr anchor="ctr"/>
                 </a:tc>
-                <a:extLst>
-                  <a:ext uri="{0D108BD9-81ED-4DB2-BD59-A6C34878D82A}">
-                    <a16:rowId xmlns:a16="http://schemas.microsoft.com/office/drawing/2014/main" val="1448562511"/>
-                  </a:ext>
-                </a:extLst>
               </a:tr>
               <a:tr h="861316">
                 <a:tc>
                   <a:txBody>
                     <a:bodyPr/>
-                    <a:lstStyle/>
                     <a:p>
                       <a:pPr lvl="0" algn="ctr">
                         <a:buNone/>
+                        <a:defRPr/>
                       </a:pPr>
                       <a:r>
-                        <a:rPr lang="en-US" err="1"/>
+                        <a:rPr lang="en-US"/>
                         <a:t>alice</a:t>
                       </a:r>
+                      <a:endParaRPr/>
                     </a:p>
                   </a:txBody>
                   <a:tcPr anchor="ctr"/>
@@ -7841,10 +7026,10 @@
                 <a:tc>
                   <a:txBody>
                     <a:bodyPr/>
-                    <a:lstStyle/>
                     <a:p>
                       <a:pPr lvl="0" algn="ctr">
                         <a:buNone/>
+                        <a:defRPr/>
                       </a:pPr>
                       <a:r>
                         <a:rPr lang="en-US" b="0" i="1">
@@ -7852,6 +7037,7 @@
                         </a:rPr>
                         <a:t>cats123</a:t>
                       </a:r>
+                      <a:endParaRPr/>
                     </a:p>
                   </a:txBody>
                   <a:tcPr anchor="ctr"/>
@@ -7859,13 +7045,13 @@
                 <a:tc>
                   <a:txBody>
                     <a:bodyPr/>
-                    <a:lstStyle/>
                     <a:p>
                       <a:pPr lvl="0" algn="ctr">
                         <a:buNone/>
+                        <a:defRPr/>
                       </a:pPr>
                       <a:r>
-                        <a:rPr lang="en-US" sz="1800" b="1" i="0" u="none" strike="noStrike" noProof="0">
+                        <a:rPr lang="en-US" sz="1800" b="1" i="0" u="none" strike="noStrike">
                           <a:solidFill>
                             <a:srgbClr val="000000"/>
                           </a:solidFill>
@@ -7883,13 +7069,13 @@
                 <a:tc>
                   <a:txBody>
                     <a:bodyPr/>
-                    <a:lstStyle/>
                     <a:p>
                       <a:pPr lvl="0" algn="ctr">
                         <a:buNone/>
+                        <a:defRPr/>
                       </a:pPr>
                       <a:r>
-                        <a:rPr lang="en-US" sz="1800" b="1" i="0" u="none" strike="noStrike" noProof="0">
+                        <a:rPr lang="en-US" sz="1800" b="1" i="0" u="none" strike="noStrike">
                           <a:solidFill>
                             <a:srgbClr val="000000"/>
                           </a:solidFill>
@@ -7897,29 +7083,26 @@
                         </a:rPr>
                         <a:t>46346c13...</a:t>
                       </a:r>
+                      <a:endParaRPr/>
                     </a:p>
                   </a:txBody>
                   <a:tcPr anchor="ctr"/>
                 </a:tc>
-                <a:extLst>
-                  <a:ext uri="{0D108BD9-81ED-4DB2-BD59-A6C34878D82A}">
-                    <a16:rowId xmlns:a16="http://schemas.microsoft.com/office/drawing/2014/main" val="658915838"/>
-                  </a:ext>
-                </a:extLst>
               </a:tr>
               <a:tr h="861316">
                 <a:tc>
                   <a:txBody>
                     <a:bodyPr/>
-                    <a:lstStyle/>
                     <a:p>
                       <a:pPr lvl="0" algn="ctr">
                         <a:buNone/>
+                        <a:defRPr/>
                       </a:pPr>
                       <a:r>
                         <a:rPr lang="en-US"/>
                         <a:t>bob</a:t>
                       </a:r>
+                      <a:endParaRPr/>
                     </a:p>
                   </a:txBody>
                   <a:tcPr anchor="ctr"/>
@@ -7927,17 +7110,18 @@
                 <a:tc>
                   <a:txBody>
                     <a:bodyPr/>
-                    <a:lstStyle/>
                     <a:p>
                       <a:pPr lvl="0" algn="ctr">
                         <a:buNone/>
+                        <a:defRPr/>
                       </a:pPr>
                       <a:r>
-                        <a:rPr lang="en-US" b="0" i="1" dirty="0" err="1">
+                        <a:rPr lang="en-US" b="0" i="1">
                           <a:latin typeface="Consolas"/>
                         </a:rPr>
                         <a:t>p@ssword</a:t>
                       </a:r>
+                      <a:endParaRPr/>
                     </a:p>
                   </a:txBody>
                   <a:tcPr anchor="ctr"/>
@@ -7945,13 +7129,13 @@
                 <a:tc>
                   <a:txBody>
                     <a:bodyPr/>
-                    <a:lstStyle/>
                     <a:p>
                       <a:pPr lvl="0" algn="ctr">
                         <a:buNone/>
+                        <a:defRPr/>
                       </a:pPr>
                       <a:r>
-                        <a:rPr lang="en-US" sz="1800" b="1" i="0" u="none" strike="noStrike" noProof="0">
+                        <a:rPr lang="en-US" sz="1800" b="1" i="0" u="none" strike="noStrike">
                           <a:latin typeface="Consolas"/>
                         </a:rPr>
                         <a:t>3mK8</a:t>
@@ -7966,13 +7150,13 @@
                 <a:tc>
                   <a:txBody>
                     <a:bodyPr/>
-                    <a:lstStyle/>
                     <a:p>
                       <a:pPr lvl="0" algn="ctr">
                         <a:buNone/>
+                        <a:defRPr/>
                       </a:pPr>
                       <a:r>
-                        <a:rPr lang="en-US" sz="1800" b="1" i="0" u="none" strike="noStrike" noProof="0">
+                        <a:rPr lang="en-US" sz="1800" b="1" i="0" u="none" strike="noStrike">
                           <a:latin typeface="Consolas"/>
                         </a:rPr>
                         <a:t>4e00b7af...</a:t>
@@ -7984,11 +7168,6 @@
                   </a:txBody>
                   <a:tcPr anchor="ctr"/>
                 </a:tc>
-                <a:extLst>
-                  <a:ext uri="{0D108BD9-81ED-4DB2-BD59-A6C34878D82A}">
-                    <a16:rowId xmlns:a16="http://schemas.microsoft.com/office/drawing/2014/main" val="346161631"/>
-                  </a:ext>
-                </a:extLst>
               </a:tr>
             </a:tbl>
           </a:graphicData>
@@ -7996,17 +7175,11 @@
       </p:graphicFrame>
       <p:sp>
         <p:nvSpPr>
-          <p:cNvPr id="4" name="Rectangle 3">
-            <a:extLst>
-              <a:ext uri="{FF2B5EF4-FFF2-40B4-BE49-F238E27FC236}">
-                <a16:creationId xmlns:a16="http://schemas.microsoft.com/office/drawing/2014/main" id="{0C3C8D15-5203-BF83-A297-692B680002B4}"/>
-              </a:ext>
-            </a:extLst>
-          </p:cNvPr>
+          <p:cNvPr id="387772791" name="Rectangle 3"/>
           <p:cNvSpPr/>
           <p:nvPr/>
         </p:nvSpPr>
-        <p:spPr>
+        <p:spPr bwMode="auto">
           <a:xfrm>
             <a:off x="438199" y="3423854"/>
             <a:ext cx="5720765" cy="1729166"/>
@@ -8043,52 +7216,43 @@
           <a:bodyPr rtlCol="0" anchor="ctr"/>
           <a:lstStyle/>
           <a:p>
-            <a:pPr algn="ctr"/>
+            <a:pPr algn="ctr">
+              <a:defRPr/>
+            </a:pPr>
             <a:endParaRPr lang="en-US"/>
           </a:p>
         </p:txBody>
       </p:sp>
     </p:spTree>
-    <p:extLst>
-      <p:ext uri="{BB962C8B-B14F-4D97-AF65-F5344CB8AC3E}">
-        <p14:creationId xmlns:p14="http://schemas.microsoft.com/office/powerpoint/2010/main" val="3565494914"/>
-      </p:ext>
-    </p:extLst>
   </p:cSld>
   <p:clrMapOvr>
     <a:masterClrMapping/>
   </p:clrMapOvr>
   <mc:AlternateContent xmlns:mc="http://schemas.openxmlformats.org/markup-compatibility/2006">
-    <mc:Choice xmlns:p159="http://schemas.microsoft.com/office/powerpoint/2015/09/main" Requires="p159">
-      <p:transition spd="slow">
-        <p159:morph option="byObject"/>
+    <mc:Choice xmlns:p159="http://schemas.microsoft.com/office/powerpoint/2015/09/main" xmlns:p14="http://schemas.microsoft.com/office/powerpoint/2010/main" Requires="p159">
+      <p:transition spd="fast" p14:dur="250" advClick="1">
+        <p:fade thruBlk="0"/>
       </p:transition>
     </mc:Choice>
     <mc:Fallback>
-      <p:transition spd="slow">
-        <p:fade/>
+      <p:transition spd="fast" advClick="1">
+        <p:fade thruBlk="0"/>
       </p:transition>
     </mc:Fallback>
   </mc:AlternateContent>
 </p:sld>
 </file>
 
-<file path=ppt/slides/slide8.xml><?xml version="1.0" encoding="utf-8"?>
-<p:sld xmlns:a="http://schemas.openxmlformats.org/drawingml/2006/main" xmlns:r="http://schemas.openxmlformats.org/officeDocument/2006/relationships" xmlns:p="http://schemas.openxmlformats.org/presentationml/2006/main">
-  <p:cSld>
+<file path=ppt/slides/slide7.xml><?xml version="1.0" encoding="utf-8"?>
+<p:sld xmlns:a="http://schemas.openxmlformats.org/drawingml/2006/main" xmlns:r="http://schemas.openxmlformats.org/officeDocument/2006/relationships" xmlns:p="http://schemas.openxmlformats.org/presentationml/2006/main" xmlns:m="http://schemas.openxmlformats.org/officeDocument/2006/math" xmlns:w="http://schemas.openxmlformats.org/wordprocessingml/2006/main" xmlns:mc="http://schemas.openxmlformats.org/markup-compatibility/2006" showMasterPhAnim="0" showMasterSp="1" show="1">
+  <p:cSld name="">
     <p:spTree>
       <p:nvGrpSpPr>
-        <p:cNvPr id="1" name="">
-          <a:extLst>
-            <a:ext uri="{FF2B5EF4-FFF2-40B4-BE49-F238E27FC236}">
-              <a16:creationId xmlns:a16="http://schemas.microsoft.com/office/drawing/2014/main" id="{5CC7960B-7C03-8BE9-D979-8DE36C8F2307}"/>
-            </a:ext>
-          </a:extLst>
-        </p:cNvPr>
+        <p:cNvPr id="1" name=""/>
         <p:cNvGrpSpPr/>
         <p:nvPr/>
       </p:nvGrpSpPr>
-      <p:grpSpPr>
+      <p:grpSpPr bwMode="auto">
         <a:xfrm>
           <a:off x="0" y="0"/>
           <a:ext cx="0" cy="0"/>
@@ -8098,13 +7262,7 @@
       </p:grpSpPr>
       <p:sp>
         <p:nvSpPr>
-          <p:cNvPr id="2" name="Titre 1">
-            <a:extLst>
-              <a:ext uri="{FF2B5EF4-FFF2-40B4-BE49-F238E27FC236}">
-                <a16:creationId xmlns:a16="http://schemas.microsoft.com/office/drawing/2014/main" id="{9F95CD4E-3B42-FC20-7E78-ABD4FD921035}"/>
-              </a:ext>
-            </a:extLst>
-          </p:cNvPr>
+          <p:cNvPr id="1307971501" name="Titre 1"/>
           <p:cNvSpPr>
             <a:spLocks noGrp="1"/>
           </p:cNvSpPr>
@@ -8112,7 +7270,7 @@
             <p:ph type="title" idx="4294967295"/>
           </p:nvPr>
         </p:nvSpPr>
-        <p:spPr>
+        <p:spPr bwMode="auto">
           <a:xfrm>
             <a:off x="348343" y="307068"/>
             <a:ext cx="10515600" cy="1325563"/>
@@ -8124,37 +7282,33 @@
           </a:bodyPr>
           <a:lstStyle/>
           <a:p>
-            <a:r>
-              <a:rPr lang="fr-FR" b="1" dirty="0" err="1">
+            <a:pPr>
+              <a:defRPr/>
+            </a:pPr>
+            <a:r>
+              <a:rPr lang="fr-FR" b="1">
                 <a:latin typeface="Consolas"/>
                 <a:cs typeface="Courier New"/>
               </a:rPr>
               <a:t>Summary</a:t>
             </a:r>
+            <a:endParaRPr/>
           </a:p>
         </p:txBody>
       </p:sp>
       <p:pic>
         <p:nvPicPr>
-          <p:cNvPr id="17" name="Picture 16" descr="A black and blue text on a black background&#10;&#10;AI-generated content may be incorrect.">
-            <a:extLst>
-              <a:ext uri="{FF2B5EF4-FFF2-40B4-BE49-F238E27FC236}">
-                <a16:creationId xmlns:a16="http://schemas.microsoft.com/office/drawing/2014/main" id="{00ADEA35-524B-A7BF-1435-78B895A29B47}"/>
-              </a:ext>
-            </a:extLst>
-          </p:cNvPr>
+          <p:cNvPr id="601405142" name="Picture 16" descr="A black and blue text on a black background&#10;&#10;AI-generated content may be incorrect."/>
           <p:cNvPicPr>
             <a:picLocks noChangeAspect="1"/>
           </p:cNvPicPr>
           <p:nvPr/>
         </p:nvPicPr>
-        <p:blipFill>
+        <p:blipFill rotWithShape="1">
           <a:blip r:embed="rId3"/>
-          <a:stretch>
-            <a:fillRect/>
-          </a:stretch>
+          <a:stretch/>
         </p:blipFill>
-        <p:spPr>
+        <p:spPr bwMode="auto">
           <a:xfrm>
             <a:off x="10819492" y="-244021"/>
             <a:ext cx="1242786" cy="1206501"/>
@@ -8166,17 +7320,11 @@
       </p:pic>
       <p:sp>
         <p:nvSpPr>
-          <p:cNvPr id="5" name="TextBox 7">
-            <a:extLst>
-              <a:ext uri="{FF2B5EF4-FFF2-40B4-BE49-F238E27FC236}">
-                <a16:creationId xmlns:a16="http://schemas.microsoft.com/office/drawing/2014/main" id="{808BC27D-3B54-D0F4-39A2-08AF1AEF706B}"/>
-              </a:ext>
-            </a:extLst>
-          </p:cNvPr>
+          <p:cNvPr id="1532756280" name="TextBox 7"/>
           <p:cNvSpPr txBox="1"/>
           <p:nvPr/>
         </p:nvSpPr>
-        <p:spPr>
+        <p:spPr bwMode="auto">
           <a:xfrm>
             <a:off x="350671" y="1644969"/>
             <a:ext cx="10977746" cy="3231654"/>
@@ -8188,9 +7336,7 @@
         </p:spPr>
         <p:txBody>
           <a:bodyPr rot="0" spcFirstLastPara="0" vertOverflow="overflow" horzOverflow="overflow" vert="horz" wrap="square" lIns="91440" tIns="45720" rIns="91440" bIns="45720" numCol="1" spcCol="0" rtlCol="0" fromWordArt="0" anchor="t" anchorCtr="0" forceAA="0" compatLnSpc="1">
-            <a:prstTxWarp prst="textNoShape">
-              <a:avLst/>
-            </a:prstTxWarp>
+            <a:prstTxWarp prst="textNoShape"/>
             <a:spAutoFit/>
           </a:bodyPr>
           <a:lstStyle/>
@@ -8198,6 +7344,7 @@
             <a:pPr marL="342900" indent="-342900">
               <a:buFont typeface="Calibri"/>
               <a:buChar char="-"/>
+              <a:defRPr/>
             </a:pPr>
             <a:r>
               <a:rPr lang="en-US" sz="2400" b="1">
@@ -8205,7 +7352,7 @@
               </a:rPr>
               <a:t>Never store raw passwords</a:t>
             </a:r>
-            <a:endParaRPr lang="en-US" sz="2400" b="1" dirty="0">
+            <a:endParaRPr lang="en-US" sz="2400" b="1">
               <a:latin typeface="Consolas"/>
             </a:endParaRPr>
           </a:p>
@@ -8213,8 +7360,9 @@
             <a:pPr marL="285750" indent="-285750">
               <a:buFont typeface="Calibri"/>
               <a:buChar char="-"/>
-            </a:pPr>
-            <a:endParaRPr lang="en-US" sz="2400" b="1" dirty="0">
+              <a:defRPr/>
+            </a:pPr>
+            <a:endParaRPr lang="en-US" sz="2400" b="1">
               <a:latin typeface="Consolas"/>
             </a:endParaRPr>
           </a:p>
@@ -8222,6 +7370,7 @@
             <a:pPr marL="285750" indent="-285750">
               <a:buFont typeface="Calibri"/>
               <a:buChar char="-"/>
+              <a:defRPr/>
             </a:pPr>
             <a:r>
               <a:rPr lang="en-US" sz="2400" b="1">
@@ -8229,7 +7378,7 @@
               </a:rPr>
               <a:t>Hashing: One-way mathematical signature</a:t>
             </a:r>
-            <a:endParaRPr lang="en-US" sz="2400" b="1" dirty="0">
+            <a:endParaRPr lang="en-US" sz="2400" b="1">
               <a:latin typeface="Consolas"/>
             </a:endParaRPr>
           </a:p>
@@ -8237,8 +7386,9 @@
             <a:pPr marL="285750" indent="-285750">
               <a:buFont typeface="Calibri"/>
               <a:buChar char="-"/>
-            </a:pPr>
-            <a:endParaRPr lang="en-US" sz="2400" b="1" dirty="0">
+              <a:defRPr/>
+            </a:pPr>
+            <a:endParaRPr lang="en-US" sz="2400" b="1">
               <a:latin typeface="Consolas"/>
             </a:endParaRPr>
           </a:p>
@@ -8246,9 +7396,10 @@
             <a:pPr marL="285750" indent="-285750">
               <a:buFont typeface="Calibri"/>
               <a:buChar char="-"/>
-            </a:pPr>
-            <a:r>
-              <a:rPr lang="en-US" sz="2400" b="1" dirty="0">
+              <a:defRPr/>
+            </a:pPr>
+            <a:r>
+              <a:rPr lang="en-US" sz="2400" b="1">
                 <a:latin typeface="Consolas"/>
               </a:rPr>
               <a:t>Salting: Guarantees uni</a:t>
@@ -8265,8 +7416,9 @@
             <a:pPr marL="285750" indent="-285750">
               <a:buFont typeface="Calibri"/>
               <a:buChar char="-"/>
-            </a:pPr>
-            <a:endParaRPr lang="en-US" sz="2400" b="1" dirty="0">
+              <a:defRPr/>
+            </a:pPr>
+            <a:endParaRPr lang="en-US" sz="2400" b="1">
               <a:latin typeface="Consolas"/>
             </a:endParaRPr>
           </a:p>
@@ -8274,6 +7426,7 @@
             <a:pPr marL="285750" indent="-285750">
               <a:buFont typeface="Calibri"/>
               <a:buChar char="-"/>
+              <a:defRPr/>
             </a:pPr>
             <a:r>
               <a:rPr lang="en-US" sz="2400" b="1">
@@ -8281,7 +7434,7 @@
               </a:rPr>
               <a:t>MFA: Mandatory secondary layer of security</a:t>
             </a:r>
-            <a:endParaRPr lang="en-US" sz="2400" b="1" dirty="0">
+            <a:endParaRPr lang="en-US" sz="2400" b="1">
               <a:latin typeface="Consolas"/>
             </a:endParaRPr>
           </a:p>
@@ -8289,12 +7442,16 @@
             <a:pPr marL="285750" indent="-285750">
               <a:buFont typeface="Calibri"/>
               <a:buChar char="-"/>
+              <a:defRPr/>
             </a:pPr>
             <a:endParaRPr lang="en-US" b="1">
               <a:latin typeface="Consolas"/>
             </a:endParaRPr>
           </a:p>
           <a:p>
+            <a:pPr>
+              <a:defRPr/>
+            </a:pPr>
             <a:endParaRPr lang="en-US" b="1">
               <a:latin typeface="Consolas"/>
             </a:endParaRPr>
@@ -8303,17 +7460,11 @@
       </p:sp>
       <p:sp>
         <p:nvSpPr>
-          <p:cNvPr id="3" name="TextBox 2">
-            <a:extLst>
-              <a:ext uri="{FF2B5EF4-FFF2-40B4-BE49-F238E27FC236}">
-                <a16:creationId xmlns:a16="http://schemas.microsoft.com/office/drawing/2014/main" id="{E9F12F60-35AE-79A0-A945-93DC93E509EC}"/>
-              </a:ext>
-            </a:extLst>
-          </p:cNvPr>
+          <p:cNvPr id="1723092013" name="TextBox 2"/>
           <p:cNvSpPr txBox="1"/>
           <p:nvPr/>
         </p:nvSpPr>
-        <p:spPr>
+        <p:spPr bwMode="auto">
           <a:xfrm>
             <a:off x="9564546" y="5555848"/>
             <a:ext cx="2322653" cy="369332"/>
@@ -8325,42 +7476,38 @@
         </p:spPr>
         <p:txBody>
           <a:bodyPr rot="0" spcFirstLastPara="0" vertOverflow="overflow" horzOverflow="overflow" vert="horz" wrap="square" lIns="91440" tIns="45720" rIns="91440" bIns="45720" numCol="1" spcCol="0" rtlCol="0" fromWordArt="0" anchor="t" anchorCtr="0" forceAA="0" compatLnSpc="1">
-            <a:prstTxWarp prst="textNoShape">
-              <a:avLst/>
-            </a:prstTxWarp>
+            <a:prstTxWarp prst="textNoShape"/>
             <a:spAutoFit/>
           </a:bodyPr>
           <a:lstStyle/>
           <a:p>
-            <a:pPr algn="l"/>
+            <a:pPr algn="l">
+              <a:defRPr/>
+            </a:pPr>
             <a:r>
               <a:rPr lang="en-US" b="1">
                 <a:latin typeface="Consolas"/>
               </a:rPr>
               <a:t>Questions?</a:t>
             </a:r>
+            <a:endParaRPr/>
           </a:p>
         </p:txBody>
       </p:sp>
     </p:spTree>
-    <p:extLst>
-      <p:ext uri="{BB962C8B-B14F-4D97-AF65-F5344CB8AC3E}">
-        <p14:creationId xmlns:p14="http://schemas.microsoft.com/office/powerpoint/2010/main" val="3457307805"/>
-      </p:ext>
-    </p:extLst>
   </p:cSld>
   <p:clrMapOvr>
     <a:masterClrMapping/>
   </p:clrMapOvr>
   <mc:AlternateContent xmlns:mc="http://schemas.openxmlformats.org/markup-compatibility/2006">
-    <mc:Choice xmlns:p14="http://schemas.microsoft.com/office/powerpoint/2010/main" Requires="p14">
-      <p:transition p14:dur="250">
-        <p:fade/>
+    <mc:Choice xmlns:p159="http://schemas.microsoft.com/office/powerpoint/2015/09/main" xmlns:p14="http://schemas.microsoft.com/office/powerpoint/2010/main" Requires="p159">
+      <p:transition spd="fast" p14:dur="250" advClick="1">
+        <p:fade thruBlk="0"/>
       </p:transition>
     </mc:Choice>
     <mc:Fallback>
-      <p:transition>
-        <p:fade/>
+      <p:transition spd="fast" advClick="1">
+        <p:fade thruBlk="0"/>
       </p:transition>
     </mc:Fallback>
   </mc:AlternateContent>
@@ -8398,7 +7545,7 @@
                                           </p:stCondLst>
                                         </p:cTn>
                                         <p:tgtEl>
-                                          <p:spTgt spid="5">
+                                          <p:spTgt spid="1532756280">
                                             <p:txEl>
                                               <p:pRg st="0" end="0"/>
                                             </p:txEl>
@@ -8416,7 +7563,7 @@
                                       <p:cBhvr>
                                         <p:cTn id="7" dur="250"/>
                                         <p:tgtEl>
-                                          <p:spTgt spid="5">
+                                          <p:spTgt spid="1532756280">
                                             <p:txEl>
                                               <p:pRg st="0" end="0"/>
                                             </p:txEl>
@@ -8459,7 +7606,7 @@
                                           </p:stCondLst>
                                         </p:cTn>
                                         <p:tgtEl>
-                                          <p:spTgt spid="5">
+                                          <p:spTgt spid="1532756280">
                                             <p:txEl>
                                               <p:pRg st="2" end="2"/>
                                             </p:txEl>
@@ -8477,7 +7624,7 @@
                                       <p:cBhvr>
                                         <p:cTn id="12" dur="250"/>
                                         <p:tgtEl>
-                                          <p:spTgt spid="5">
+                                          <p:spTgt spid="1532756280">
                                             <p:txEl>
                                               <p:pRg st="2" end="2"/>
                                             </p:txEl>
@@ -8520,7 +7667,7 @@
                                           </p:stCondLst>
                                         </p:cTn>
                                         <p:tgtEl>
-                                          <p:spTgt spid="5">
+                                          <p:spTgt spid="1532756280">
                                             <p:txEl>
                                               <p:pRg st="4" end="4"/>
                                             </p:txEl>
@@ -8538,7 +7685,7 @@
                                       <p:cBhvr>
                                         <p:cTn id="17" dur="250"/>
                                         <p:tgtEl>
-                                          <p:spTgt spid="5">
+                                          <p:spTgt spid="1532756280">
                                             <p:txEl>
                                               <p:pRg st="4" end="4"/>
                                             </p:txEl>
@@ -8581,7 +7728,7 @@
                                           </p:stCondLst>
                                         </p:cTn>
                                         <p:tgtEl>
-                                          <p:spTgt spid="5">
+                                          <p:spTgt spid="1532756280">
                                             <p:txEl>
                                               <p:pRg st="6" end="6"/>
                                             </p:txEl>
@@ -8599,7 +7746,7 @@
                                       <p:cBhvr>
                                         <p:cTn id="22" dur="250"/>
                                         <p:tgtEl>
-                                          <p:spTgt spid="5">
+                                          <p:spTgt spid="1532756280">
                                             <p:txEl>
                                               <p:pRg st="6" end="6"/>
                                             </p:txEl>
@@ -8642,7 +7789,7 @@
                                           </p:stCondLst>
                                         </p:cTn>
                                         <p:tgtEl>
-                                          <p:spTgt spid="3"/>
+                                          <p:spTgt spid="1723092013"/>
                                         </p:tgtEl>
                                         <p:attrNameLst>
                                           <p:attrName>style.visibility</p:attrName>
@@ -8656,7 +7803,7 @@
                                       <p:cBhvr>
                                         <p:cTn id="27" dur="10"/>
                                         <p:tgtEl>
-                                          <p:spTgt spid="3"/>
+                                          <p:spTgt spid="1723092013"/>
                                         </p:tgtEl>
                                       </p:cBhvr>
                                     </p:animEffect>
@@ -8691,15 +7838,15 @@
       </p:par>
     </p:tnLst>
     <p:bldLst>
-      <p:bldP spid="5" grpId="0" build="p"/>
-      <p:bldP spid="3" grpId="0"/>
+      <p:bldP spid="1532756280" grpId="0" build="p"/>
+      <p:bldP spid="1723092013" grpId="0"/>
     </p:bldLst>
   </p:timing>
 </p:sld>
 </file>
 
 <file path=ppt/theme/theme1.xml><?xml version="1.0" encoding="utf-8"?>
-<a:theme xmlns:a="http://schemas.openxmlformats.org/drawingml/2006/main" name="Thème Office">
+<a:theme xmlns:a="http://schemas.openxmlformats.org/drawingml/2006/main" xmlns:r="http://schemas.openxmlformats.org/officeDocument/2006/relationships" xmlns:p="http://schemas.openxmlformats.org/presentationml/2006/main" name="Thème Office">
   <a:themeElements>
     <a:clrScheme name="Office">
       <a:dk1>
@@ -8741,74 +7888,14 @@
     </a:clrScheme>
     <a:fontScheme name="Office">
       <a:majorFont>
-        <a:latin typeface="Aptos Display" panose="020F0302020204030204"/>
-        <a:ea typeface=""/>
-        <a:cs typeface=""/>
-        <a:font script="Jpan" typeface="ＭＳ Ｐゴシック"/>
-        <a:font script="Hang" typeface="맑은 고딕"/>
-        <a:font script="Hans" typeface="宋体"/>
-        <a:font script="Hant" typeface="新細明體"/>
-        <a:font script="Arab" typeface="Times New Roman"/>
-        <a:font script="Hebr" typeface="Times New Roman"/>
-        <a:font script="Thai" typeface="Angsana New"/>
-        <a:font script="Ethi" typeface="Nyala"/>
-        <a:font script="Beng" typeface="Vrinda"/>
-        <a:font script="Gujr" typeface="Shruti"/>
-        <a:font script="Khmr" typeface="MoolBoran"/>
-        <a:font script="Knda" typeface="Tunga"/>
-        <a:font script="Guru" typeface="Raavi"/>
-        <a:font script="Cans" typeface="Euphemia"/>
-        <a:font script="Cher" typeface="Plantagenet Cherokee"/>
-        <a:font script="Yiii" typeface="Microsoft Yi Baiti"/>
-        <a:font script="Tibt" typeface="Microsoft Himalaya"/>
-        <a:font script="Thaa" typeface="MV Boli"/>
-        <a:font script="Deva" typeface="Mangal"/>
-        <a:font script="Telu" typeface="Gautami"/>
-        <a:font script="Taml" typeface="Latha"/>
-        <a:font script="Syrc" typeface="Estrangelo Edessa"/>
-        <a:font script="Orya" typeface="Kalinga"/>
-        <a:font script="Mlym" typeface="Kartika"/>
-        <a:font script="Laoo" typeface="DokChampa"/>
-        <a:font script="Sinh" typeface="Iskoola Pota"/>
-        <a:font script="Mong" typeface="Mongolian Baiti"/>
-        <a:font script="Viet" typeface="Times New Roman"/>
-        <a:font script="Uigh" typeface="Microsoft Uighur"/>
-        <a:font script="Geor" typeface="Sylfaen"/>
+        <a:latin typeface="Aptos Display"/>
+        <a:ea typeface="Arial"/>
+        <a:cs typeface="Arial"/>
       </a:majorFont>
       <a:minorFont>
-        <a:latin typeface="Aptos" panose="020B0004020202020204"/>
-        <a:ea typeface=""/>
-        <a:cs typeface=""/>
-        <a:font script="Jpan" typeface="ＭＳ Ｐゴシック"/>
-        <a:font script="Hang" typeface="맑은 고딕"/>
-        <a:font script="Hans" typeface="宋体"/>
-        <a:font script="Hant" typeface="新細明體"/>
-        <a:font script="Arab" typeface="Arial"/>
-        <a:font script="Hebr" typeface="Arial"/>
-        <a:font script="Thai" typeface="Cordia New"/>
-        <a:font script="Ethi" typeface="Nyala"/>
-        <a:font script="Beng" typeface="Vrinda"/>
-        <a:font script="Gujr" typeface="Shruti"/>
-        <a:font script="Khmr" typeface="DaunPenh"/>
-        <a:font script="Knda" typeface="Tunga"/>
-        <a:font script="Guru" typeface="Raavi"/>
-        <a:font script="Cans" typeface="Euphemia"/>
-        <a:font script="Cher" typeface="Plantagenet Cherokee"/>
-        <a:font script="Yiii" typeface="Microsoft Yi Baiti"/>
-        <a:font script="Tibt" typeface="Microsoft Himalaya"/>
-        <a:font script="Thaa" typeface="MV Boli"/>
-        <a:font script="Deva" typeface="Mangal"/>
-        <a:font script="Telu" typeface="Gautami"/>
-        <a:font script="Taml" typeface="Latha"/>
-        <a:font script="Syrc" typeface="Estrangelo Edessa"/>
-        <a:font script="Orya" typeface="Kalinga"/>
-        <a:font script="Mlym" typeface="Kartika"/>
-        <a:font script="Laoo" typeface="DokChampa"/>
-        <a:font script="Sinh" typeface="Iskoola Pota"/>
-        <a:font script="Mong" typeface="Mongolian Baiti"/>
-        <a:font script="Viet" typeface="Arial"/>
-        <a:font script="Uigh" typeface="Microsoft Uighur"/>
-        <a:font script="Geor" typeface="Sylfaen"/>
+        <a:latin typeface="Aptos"/>
+        <a:ea typeface="Arial"/>
+        <a:cs typeface="Arial"/>
       </a:minorFont>
     </a:fontScheme>
     <a:fmtScheme name="Office">
@@ -8816,7 +7903,7 @@
         <a:solidFill>
           <a:schemeClr val="phClr"/>
         </a:solidFill>
-        <a:gradFill rotWithShape="1">
+        <a:gradFill>
           <a:gsLst>
             <a:gs pos="0">
               <a:schemeClr val="phClr">
@@ -8842,7 +7929,7 @@
           </a:gsLst>
           <a:lin ang="5400000" scaled="0"/>
         </a:gradFill>
-        <a:gradFill rotWithShape="1">
+        <a:gradFill>
           <a:gsLst>
             <a:gs pos="0">
               <a:schemeClr val="phClr">
@@ -8919,7 +8006,7 @@
             <a:satMod val="170000"/>
           </a:schemeClr>
         </a:solidFill>
-        <a:gradFill rotWithShape="1">
+        <a:gradFill>
           <a:gsLst>
             <a:gs pos="0">
               <a:schemeClr val="phClr">
@@ -8951,7 +8038,7 @@
   </a:themeElements>
   <a:objectDefaults>
     <a:lnDef>
-      <a:spPr/>
+      <a:spPr bwMode="auto"/>
       <a:bodyPr/>
       <a:lstStyle/>
       <a:style>
@@ -8970,17 +8057,11 @@
       </a:style>
     </a:lnDef>
   </a:objectDefaults>
-  <a:extraClrSchemeLst/>
-  <a:extLst>
-    <a:ext uri="{05A4C25C-085E-4340-85A3-A5531E510DB2}">
-      <thm15:themeFamily xmlns:thm15="http://schemas.microsoft.com/office/thememl/2012/main" name="Office Theme" id="{2E142A2C-CD16-42D6-873A-C26D2A0506FA}" vid="{1BDDFF52-6CD6-40A5-AB3C-68EB2F1E4D0A}"/>
-    </a:ext>
-  </a:extLst>
 </a:theme>
 </file>
 
 <file path=ppt/theme/theme2.xml><?xml version="1.0" encoding="utf-8"?>
-<a:theme xmlns:a="http://schemas.openxmlformats.org/drawingml/2006/main" name="Thème Office">
+<a:theme xmlns:a="http://schemas.openxmlformats.org/drawingml/2006/main" xmlns:r="http://schemas.openxmlformats.org/officeDocument/2006/relationships" xmlns:p="http://schemas.openxmlformats.org/presentationml/2006/main" name="Thème Office">
   <a:themeElements>
     <a:clrScheme name="Office">
       <a:dk1>
@@ -9022,108 +8103,14 @@
     </a:clrScheme>
     <a:fontScheme name="Office">
       <a:majorFont>
-        <a:latin typeface="Calibri Light" panose="020F0302020204030204"/>
-        <a:ea typeface=""/>
-        <a:cs typeface=""/>
-        <a:font script="Jpan" typeface="游ゴシック Light"/>
-        <a:font script="Hang" typeface="맑은 고딕"/>
-        <a:font script="Hans" typeface="等线 Light"/>
-        <a:font script="Hant" typeface="新細明體"/>
-        <a:font script="Arab" typeface="Times New Roman"/>
-        <a:font script="Hebr" typeface="Times New Roman"/>
-        <a:font script="Thai" typeface="Angsana New"/>
-        <a:font script="Ethi" typeface="Nyala"/>
-        <a:font script="Beng" typeface="Vrinda"/>
-        <a:font script="Gujr" typeface="Shruti"/>
-        <a:font script="Khmr" typeface="MoolBoran"/>
-        <a:font script="Knda" typeface="Tunga"/>
-        <a:font script="Guru" typeface="Raavi"/>
-        <a:font script="Cans" typeface="Euphemia"/>
-        <a:font script="Cher" typeface="Plantagenet Cherokee"/>
-        <a:font script="Yiii" typeface="Microsoft Yi Baiti"/>
-        <a:font script="Tibt" typeface="Microsoft Himalaya"/>
-        <a:font script="Thaa" typeface="MV Boli"/>
-        <a:font script="Deva" typeface="Mangal"/>
-        <a:font script="Telu" typeface="Gautami"/>
-        <a:font script="Taml" typeface="Latha"/>
-        <a:font script="Syrc" typeface="Estrangelo Edessa"/>
-        <a:font script="Orya" typeface="Kalinga"/>
-        <a:font script="Mlym" typeface="Kartika"/>
-        <a:font script="Laoo" typeface="DokChampa"/>
-        <a:font script="Sinh" typeface="Iskoola Pota"/>
-        <a:font script="Mong" typeface="Mongolian Baiti"/>
-        <a:font script="Viet" typeface="Times New Roman"/>
-        <a:font script="Uigh" typeface="Microsoft Uighur"/>
-        <a:font script="Geor" typeface="Sylfaen"/>
-        <a:font script="Armn" typeface="Arial"/>
-        <a:font script="Bugi" typeface="Leelawadee UI"/>
-        <a:font script="Bopo" typeface="Microsoft JhengHei"/>
-        <a:font script="Java" typeface="Javanese Text"/>
-        <a:font script="Lisu" typeface="Segoe UI"/>
-        <a:font script="Mymr" typeface="Myanmar Text"/>
-        <a:font script="Nkoo" typeface="Ebrima"/>
-        <a:font script="Olck" typeface="Nirmala UI"/>
-        <a:font script="Osma" typeface="Ebrima"/>
-        <a:font script="Phag" typeface="Phagspa"/>
-        <a:font script="Syrn" typeface="Estrangelo Edessa"/>
-        <a:font script="Syrj" typeface="Estrangelo Edessa"/>
-        <a:font script="Syre" typeface="Estrangelo Edessa"/>
-        <a:font script="Sora" typeface="Nirmala UI"/>
-        <a:font script="Tale" typeface="Microsoft Tai Le"/>
-        <a:font script="Talu" typeface="Microsoft New Tai Lue"/>
-        <a:font script="Tfng" typeface="Ebrima"/>
+        <a:latin typeface="Calibri Light"/>
+        <a:ea typeface="Arial"/>
+        <a:cs typeface="Arial"/>
       </a:majorFont>
       <a:minorFont>
-        <a:latin typeface="Calibri" panose="020F0502020204030204"/>
-        <a:ea typeface=""/>
-        <a:cs typeface=""/>
-        <a:font script="Jpan" typeface="游ゴシック"/>
-        <a:font script="Hang" typeface="맑은 고딕"/>
-        <a:font script="Hans" typeface="等线"/>
-        <a:font script="Hant" typeface="新細明體"/>
-        <a:font script="Arab" typeface="Arial"/>
-        <a:font script="Hebr" typeface="Arial"/>
-        <a:font script="Thai" typeface="Cordia New"/>
-        <a:font script="Ethi" typeface="Nyala"/>
-        <a:font script="Beng" typeface="Vrinda"/>
-        <a:font script="Gujr" typeface="Shruti"/>
-        <a:font script="Khmr" typeface="DaunPenh"/>
-        <a:font script="Knda" typeface="Tunga"/>
-        <a:font script="Guru" typeface="Raavi"/>
-        <a:font script="Cans" typeface="Euphemia"/>
-        <a:font script="Cher" typeface="Plantagenet Cherokee"/>
-        <a:font script="Yiii" typeface="Microsoft Yi Baiti"/>
-        <a:font script="Tibt" typeface="Microsoft Himalaya"/>
-        <a:font script="Thaa" typeface="MV Boli"/>
-        <a:font script="Deva" typeface="Mangal"/>
-        <a:font script="Telu" typeface="Gautami"/>
-        <a:font script="Taml" typeface="Latha"/>
-        <a:font script="Syrc" typeface="Estrangelo Edessa"/>
-        <a:font script="Orya" typeface="Kalinga"/>
-        <a:font script="Mlym" typeface="Kartika"/>
-        <a:font script="Laoo" typeface="DokChampa"/>
-        <a:font script="Sinh" typeface="Iskoola Pota"/>
-        <a:font script="Mong" typeface="Mongolian Baiti"/>
-        <a:font script="Viet" typeface="Arial"/>
-        <a:font script="Uigh" typeface="Microsoft Uighur"/>
-        <a:font script="Geor" typeface="Sylfaen"/>
-        <a:font script="Armn" typeface="Arial"/>
-        <a:font script="Bugi" typeface="Leelawadee UI"/>
-        <a:font script="Bopo" typeface="Microsoft JhengHei"/>
-        <a:font script="Java" typeface="Javanese Text"/>
-        <a:font script="Lisu" typeface="Segoe UI"/>
-        <a:font script="Mymr" typeface="Myanmar Text"/>
-        <a:font script="Nkoo" typeface="Ebrima"/>
-        <a:font script="Olck" typeface="Nirmala UI"/>
-        <a:font script="Osma" typeface="Ebrima"/>
-        <a:font script="Phag" typeface="Phagspa"/>
-        <a:font script="Syrn" typeface="Estrangelo Edessa"/>
-        <a:font script="Syrj" typeface="Estrangelo Edessa"/>
-        <a:font script="Syre" typeface="Estrangelo Edessa"/>
-        <a:font script="Sora" typeface="Nirmala UI"/>
-        <a:font script="Tale" typeface="Microsoft Tai Le"/>
-        <a:font script="Talu" typeface="Microsoft New Tai Lue"/>
-        <a:font script="Tfng" typeface="Ebrima"/>
+        <a:latin typeface="Calibri"/>
+        <a:ea typeface="Arial"/>
+        <a:cs typeface="Arial"/>
       </a:minorFont>
     </a:fontScheme>
     <a:fmtScheme name="Office">
@@ -9131,7 +8118,7 @@
         <a:solidFill>
           <a:schemeClr val="phClr"/>
         </a:solidFill>
-        <a:gradFill rotWithShape="1">
+        <a:gradFill>
           <a:gsLst>
             <a:gs pos="0">
               <a:schemeClr val="phClr">
@@ -9157,7 +8144,7 @@
           </a:gsLst>
           <a:lin ang="5400000" scaled="0"/>
         </a:gradFill>
-        <a:gradFill rotWithShape="1">
+        <a:gradFill>
           <a:gsLst>
             <a:gs pos="0">
               <a:schemeClr val="phClr">
@@ -9234,7 +8221,7 @@
             <a:satMod val="170000"/>
           </a:schemeClr>
         </a:solidFill>
-        <a:gradFill rotWithShape="1">
+        <a:gradFill>
           <a:gsLst>
             <a:gs pos="0">
               <a:schemeClr val="phClr">
@@ -9265,11 +8252,5 @@
     </a:fmtScheme>
   </a:themeElements>
   <a:objectDefaults/>
-  <a:extraClrSchemeLst/>
-  <a:extLst>
-    <a:ext uri="{05A4C25C-085E-4340-85A3-A5531E510DB2}">
-      <thm15:themeFamily xmlns:thm15="http://schemas.microsoft.com/office/thememl/2012/main" name="Office Theme" id="{62F939B6-93AF-4DB8-9C6B-D6C7DFDC589F}" vid="{4A3C46E8-61CC-4603-A589-7422A47A8E4A}"/>
-    </a:ext>
-  </a:extLst>
 </a:theme>
 </file>
--- a/Presentation/passwords.pptx
+++ b/Presentation/passwords.pptx
@@ -1,20 +1,20 @@
 
 <file path=ppt/presentation.xml><?xml version="1.0" encoding="utf-8"?>
-<p:presentation xmlns:a="http://schemas.openxmlformats.org/drawingml/2006/main" xmlns:r="http://schemas.openxmlformats.org/officeDocument/2006/relationships" xmlns:p="http://schemas.openxmlformats.org/presentationml/2006/main" xmlns:m="http://schemas.openxmlformats.org/officeDocument/2006/math" xmlns:w="http://schemas.openxmlformats.org/wordprocessingml/2006/main" saveSubsetFonts="1">
+<p:presentation xmlns:a="http://schemas.openxmlformats.org/drawingml/2006/main" xmlns:r="http://schemas.openxmlformats.org/officeDocument/2006/relationships" xmlns:p="http://schemas.openxmlformats.org/presentationml/2006/main" saveSubsetFonts="1">
   <p:sldMasterIdLst>
     <p:sldMasterId id="2147483648" r:id="rId1"/>
   </p:sldMasterIdLst>
   <p:notesMasterIdLst>
-    <p:notesMasterId r:id="rId11"/>
+    <p:notesMasterId r:id="rId9"/>
   </p:notesMasterIdLst>
   <p:sldIdLst>
-    <p:sldId id="256" r:id="rId4"/>
-    <p:sldId id="257" r:id="rId5"/>
-    <p:sldId id="258" r:id="rId6"/>
-    <p:sldId id="259" r:id="rId7"/>
-    <p:sldId id="260" r:id="rId8"/>
-    <p:sldId id="261" r:id="rId9"/>
-    <p:sldId id="262" r:id="rId10"/>
+    <p:sldId id="256" r:id="rId2"/>
+    <p:sldId id="257" r:id="rId3"/>
+    <p:sldId id="258" r:id="rId4"/>
+    <p:sldId id="259" r:id="rId5"/>
+    <p:sldId id="260" r:id="rId6"/>
+    <p:sldId id="261" r:id="rId7"/>
+    <p:sldId id="262" r:id="rId8"/>
   </p:sldIdLst>
   <p:sldSz cx="12192000" cy="6858000"/>
   <p:notesSz cx="6858000" cy="9144000"/>
@@ -113,12 +113,36 @@
       </a:defRPr>
     </a:lvl9pPr>
   </p:defaultTextStyle>
+  <p:extLst>
+    <p:ext uri="{EFAFB233-063F-42B5-8137-9DF3F51BA10A}">
+      <p15:sldGuideLst xmlns:p15="http://schemas.microsoft.com/office/powerpoint/2012/main">
+        <p15:guide id="1" pos="3840">
+          <p15:clr>
+            <a:srgbClr val="A4A3A4"/>
+          </p15:clr>
+        </p15:guide>
+        <p15:guide id="2" orient="horz" pos="2160">
+          <p15:clr>
+            <a:srgbClr val="A4A3A4"/>
+          </p15:clr>
+        </p15:guide>
+      </p15:sldGuideLst>
+    </p:ext>
+  </p:extLst>
 </p:presentation>
+</file>
+
+<file path=ppt/revisionInfo.xml><?xml version="1.0" encoding="utf-8"?>
+<p1510:revInfo xmlns:a="http://schemas.openxmlformats.org/drawingml/2006/main" xmlns:r="http://schemas.openxmlformats.org/officeDocument/2006/relationships" xmlns:p1510="http://schemas.microsoft.com/office/powerpoint/2015/10/main">
+  <p1510:revLst>
+    <p1510:client id="{3648CAB5-DC56-841A-EC51-5E16716DE69C}" v="12" dt="2026-03-28T17:51:55.048"/>
+  </p1510:revLst>
+</p1510:revInfo>
 </file>
 
 <file path=ppt/notesMasters/notesMaster1.xml><?xml version="1.0" encoding="utf-8"?>
 <p:notesMaster xmlns:a="http://schemas.openxmlformats.org/drawingml/2006/main" xmlns:r="http://schemas.openxmlformats.org/officeDocument/2006/relationships" xmlns:p="http://schemas.openxmlformats.org/presentationml/2006/main">
-  <p:cSld name="">
+  <p:cSld>
     <p:bg>
       <p:bgRef idx="1001">
         <a:schemeClr val="bg1"/>
@@ -214,7 +238,7 @@
         <p:nvSpPr>
           <p:cNvPr id="105162375" name="Espace réservé de l'image des diapositives 3"/>
           <p:cNvSpPr>
-            <a:spLocks noChangeAspect="1" noGrp="1" noRot="1"/>
+            <a:spLocks noGrp="1" noRot="1" noChangeAspect="1"/>
           </p:cNvSpPr>
           <p:nvPr>
             <p:ph type="sldImg" idx="2"/>
@@ -491,8 +515,8 @@
 </file>
 
 <file path=ppt/notesSlides/notesSlide1.xml><?xml version="1.0" encoding="utf-8"?>
-<p:notes xmlns:a="http://schemas.openxmlformats.org/drawingml/2006/main" xmlns:r="http://schemas.openxmlformats.org/officeDocument/2006/relationships" xmlns:p="http://schemas.openxmlformats.org/presentationml/2006/main" xmlns:m="http://schemas.openxmlformats.org/officeDocument/2006/math" xmlns:w="http://schemas.openxmlformats.org/wordprocessingml/2006/main">
-  <p:cSld name="">
+<p:notes xmlns:a="http://schemas.openxmlformats.org/drawingml/2006/main" xmlns:r="http://schemas.openxmlformats.org/officeDocument/2006/relationships" xmlns:p="http://schemas.openxmlformats.org/presentationml/2006/main">
+  <p:cSld>
     <p:spTree>
       <p:nvGrpSpPr>
         <p:cNvPr id="1" name=""/>
@@ -511,7 +535,7 @@
         <p:nvSpPr>
           <p:cNvPr id="2" name="Slide Image Placeholder 1"/>
           <p:cNvSpPr>
-            <a:spLocks noChangeAspect="1" noGrp="1" noRot="1"/>
+            <a:spLocks noGrp="1" noRot="1" noChangeAspect="1"/>
           </p:cNvSpPr>
           <p:nvPr>
             <p:ph type="sldImg"/>
@@ -561,7 +585,7 @@
             </a:pPr>
             <a:fld id="{290B6E6F-05FC-F686-AB07-F9150618EBD1}" type="slidenum">
               <a:rPr/>
-              <a:t/>
+              <a:t>1</a:t>
             </a:fld>
             <a:endParaRPr/>
           </a:p>
@@ -576,8 +600,8 @@
 </file>
 
 <file path=ppt/notesSlides/notesSlide2.xml><?xml version="1.0" encoding="utf-8"?>
-<p:notes xmlns:a="http://schemas.openxmlformats.org/drawingml/2006/main" xmlns:r="http://schemas.openxmlformats.org/officeDocument/2006/relationships" xmlns:p="http://schemas.openxmlformats.org/presentationml/2006/main" xmlns:m="http://schemas.openxmlformats.org/officeDocument/2006/math" xmlns:w="http://schemas.openxmlformats.org/wordprocessingml/2006/main">
-  <p:cSld name="">
+<p:notes xmlns:a="http://schemas.openxmlformats.org/drawingml/2006/main" xmlns:r="http://schemas.openxmlformats.org/officeDocument/2006/relationships" xmlns:p="http://schemas.openxmlformats.org/presentationml/2006/main">
+  <p:cSld>
     <p:spTree>
       <p:nvGrpSpPr>
         <p:cNvPr id="1" name=""/>
@@ -596,7 +620,7 @@
         <p:nvSpPr>
           <p:cNvPr id="721205019" name="Espace réservé de l'image des diapositives 1"/>
           <p:cNvSpPr>
-            <a:spLocks noChangeAspect="1" noGrp="1" noRot="1"/>
+            <a:spLocks noGrp="1" noRot="1" noChangeAspect="1"/>
           </p:cNvSpPr>
           <p:nvPr>
             <p:ph type="sldImg"/>
@@ -648,7 +672,7 @@
             </a:pPr>
             <a:fld id="{ED9F3D29-5E90-42D2-A1A8-ECEBBDEB87CD}" type="slidenum">
               <a:rPr/>
-              <a:t>3</a:t>
+              <a:t>2</a:t>
             </a:fld>
             <a:endParaRPr lang="fr-FR"/>
           </a:p>
@@ -663,8 +687,8 @@
 </file>
 
 <file path=ppt/notesSlides/notesSlide3.xml><?xml version="1.0" encoding="utf-8"?>
-<p:notes xmlns:a="http://schemas.openxmlformats.org/drawingml/2006/main" xmlns:r="http://schemas.openxmlformats.org/officeDocument/2006/relationships" xmlns:p="http://schemas.openxmlformats.org/presentationml/2006/main" xmlns:m="http://schemas.openxmlformats.org/officeDocument/2006/math" xmlns:w="http://schemas.openxmlformats.org/wordprocessingml/2006/main">
-  <p:cSld name="">
+<p:notes xmlns:a="http://schemas.openxmlformats.org/drawingml/2006/main" xmlns:r="http://schemas.openxmlformats.org/officeDocument/2006/relationships" xmlns:p="http://schemas.openxmlformats.org/presentationml/2006/main">
+  <p:cSld>
     <p:spTree>
       <p:nvGrpSpPr>
         <p:cNvPr id="1" name=""/>
@@ -683,7 +707,7 @@
         <p:nvSpPr>
           <p:cNvPr id="1084345699" name="Espace réservé de l'image des diapositives 1"/>
           <p:cNvSpPr>
-            <a:spLocks noChangeAspect="1" noGrp="1" noRot="1"/>
+            <a:spLocks noGrp="1" noRot="1" noChangeAspect="1"/>
           </p:cNvSpPr>
           <p:nvPr>
             <p:ph type="sldImg"/>
@@ -746,7 +770,7 @@
             </a:pPr>
             <a:fld id="{ED9F3D29-5E90-42D2-A1A8-ECEBBDEB87CD}" type="slidenum">
               <a:rPr/>
-              <a:t>4</a:t>
+              <a:t>3</a:t>
             </a:fld>
             <a:endParaRPr lang="fr-FR"/>
           </a:p>
@@ -761,8 +785,8 @@
 </file>
 
 <file path=ppt/notesSlides/notesSlide4.xml><?xml version="1.0" encoding="utf-8"?>
-<p:notes xmlns:a="http://schemas.openxmlformats.org/drawingml/2006/main" xmlns:r="http://schemas.openxmlformats.org/officeDocument/2006/relationships" xmlns:p="http://schemas.openxmlformats.org/presentationml/2006/main" xmlns:m="http://schemas.openxmlformats.org/officeDocument/2006/math" xmlns:w="http://schemas.openxmlformats.org/wordprocessingml/2006/main">
-  <p:cSld name="">
+<p:notes xmlns:a="http://schemas.openxmlformats.org/drawingml/2006/main" xmlns:r="http://schemas.openxmlformats.org/officeDocument/2006/relationships" xmlns:p="http://schemas.openxmlformats.org/presentationml/2006/main">
+  <p:cSld>
     <p:spTree>
       <p:nvGrpSpPr>
         <p:cNvPr id="1" name=""/>
@@ -781,7 +805,7 @@
         <p:nvSpPr>
           <p:cNvPr id="1929439877" name="Espace réservé de l'image des diapositives 1"/>
           <p:cNvSpPr>
-            <a:spLocks noChangeAspect="1" noGrp="1" noRot="1"/>
+            <a:spLocks noGrp="1" noRot="1" noChangeAspect="1"/>
           </p:cNvSpPr>
           <p:nvPr>
             <p:ph type="sldImg"/>
@@ -836,7 +860,7 @@
             </a:pPr>
             <a:fld id="{ED9F3D29-5E90-42D2-A1A8-ECEBBDEB87CD}" type="slidenum">
               <a:rPr/>
-              <a:t>5</a:t>
+              <a:t>4</a:t>
             </a:fld>
             <a:endParaRPr lang="fr-FR"/>
           </a:p>
@@ -851,8 +875,8 @@
 </file>
 
 <file path=ppt/notesSlides/notesSlide5.xml><?xml version="1.0" encoding="utf-8"?>
-<p:notes xmlns:a="http://schemas.openxmlformats.org/drawingml/2006/main" xmlns:r="http://schemas.openxmlformats.org/officeDocument/2006/relationships" xmlns:p="http://schemas.openxmlformats.org/presentationml/2006/main" xmlns:m="http://schemas.openxmlformats.org/officeDocument/2006/math" xmlns:w="http://schemas.openxmlformats.org/wordprocessingml/2006/main">
-  <p:cSld name="">
+<p:notes xmlns:a="http://schemas.openxmlformats.org/drawingml/2006/main" xmlns:r="http://schemas.openxmlformats.org/officeDocument/2006/relationships" xmlns:p="http://schemas.openxmlformats.org/presentationml/2006/main">
+  <p:cSld>
     <p:spTree>
       <p:nvGrpSpPr>
         <p:cNvPr id="1" name=""/>
@@ -871,7 +895,7 @@
         <p:nvSpPr>
           <p:cNvPr id="921420717" name="Espace réservé de l'image des diapositives 1"/>
           <p:cNvSpPr>
-            <a:spLocks noChangeAspect="1" noGrp="1" noRot="1"/>
+            <a:spLocks noGrp="1" noRot="1" noChangeAspect="1"/>
           </p:cNvSpPr>
           <p:nvPr>
             <p:ph type="sldImg"/>
@@ -926,7 +950,7 @@
             </a:pPr>
             <a:fld id="{ED9F3D29-5E90-42D2-A1A8-ECEBBDEB87CD}" type="slidenum">
               <a:rPr/>
-              <a:t>6</a:t>
+              <a:t>5</a:t>
             </a:fld>
             <a:endParaRPr lang="fr-FR"/>
           </a:p>
@@ -941,8 +965,8 @@
 </file>
 
 <file path=ppt/notesSlides/notesSlide6.xml><?xml version="1.0" encoding="utf-8"?>
-<p:notes xmlns:a="http://schemas.openxmlformats.org/drawingml/2006/main" xmlns:r="http://schemas.openxmlformats.org/officeDocument/2006/relationships" xmlns:p="http://schemas.openxmlformats.org/presentationml/2006/main" xmlns:m="http://schemas.openxmlformats.org/officeDocument/2006/math" xmlns:w="http://schemas.openxmlformats.org/wordprocessingml/2006/main">
-  <p:cSld name="">
+<p:notes xmlns:a="http://schemas.openxmlformats.org/drawingml/2006/main" xmlns:r="http://schemas.openxmlformats.org/officeDocument/2006/relationships" xmlns:p="http://schemas.openxmlformats.org/presentationml/2006/main">
+  <p:cSld>
     <p:spTree>
       <p:nvGrpSpPr>
         <p:cNvPr id="1" name=""/>
@@ -961,7 +985,7 @@
         <p:nvSpPr>
           <p:cNvPr id="858539536" name="Espace réservé de l'image des diapositives 1"/>
           <p:cNvSpPr>
-            <a:spLocks noChangeAspect="1" noGrp="1" noRot="1"/>
+            <a:spLocks noGrp="1" noRot="1" noChangeAspect="1"/>
           </p:cNvSpPr>
           <p:nvPr>
             <p:ph type="sldImg"/>
@@ -1024,7 +1048,7 @@
             </a:pPr>
             <a:fld id="{ED9F3D29-5E90-42D2-A1A8-ECEBBDEB87CD}" type="slidenum">
               <a:rPr/>
-              <a:t>7</a:t>
+              <a:t>6</a:t>
             </a:fld>
             <a:endParaRPr lang="fr-FR"/>
           </a:p>
@@ -1039,8 +1063,8 @@
 </file>
 
 <file path=ppt/notesSlides/notesSlide7.xml><?xml version="1.0" encoding="utf-8"?>
-<p:notes xmlns:a="http://schemas.openxmlformats.org/drawingml/2006/main" xmlns:r="http://schemas.openxmlformats.org/officeDocument/2006/relationships" xmlns:p="http://schemas.openxmlformats.org/presentationml/2006/main" xmlns:m="http://schemas.openxmlformats.org/officeDocument/2006/math" xmlns:w="http://schemas.openxmlformats.org/wordprocessingml/2006/main">
-  <p:cSld name="">
+<p:notes xmlns:a="http://schemas.openxmlformats.org/drawingml/2006/main" xmlns:r="http://schemas.openxmlformats.org/officeDocument/2006/relationships" xmlns:p="http://schemas.openxmlformats.org/presentationml/2006/main">
+  <p:cSld>
     <p:spTree>
       <p:nvGrpSpPr>
         <p:cNvPr id="1" name=""/>
@@ -1059,7 +1083,7 @@
         <p:nvSpPr>
           <p:cNvPr id="894621977" name="Espace réservé de l'image des diapositives 1"/>
           <p:cNvSpPr>
-            <a:spLocks noChangeAspect="1" noGrp="1" noRot="1"/>
+            <a:spLocks noGrp="1" noRot="1" noChangeAspect="1"/>
           </p:cNvSpPr>
           <p:nvPr>
             <p:ph type="sldImg"/>
@@ -1120,7 +1144,7 @@
             </a:pPr>
             <a:fld id="{ED9F3D29-5E90-42D2-A1A8-ECEBBDEB87CD}" type="slidenum">
               <a:rPr/>
-              <a:t>8</a:t>
+              <a:t>7</a:t>
             </a:fld>
             <a:endParaRPr lang="fr-FR"/>
           </a:p>
@@ -1135,7 +1159,7 @@
 </file>
 
 <file path=ppt/slideLayouts/slideLayout1.xml><?xml version="1.0" encoding="utf-8"?>
-<p:sldLayout xmlns:a="http://schemas.openxmlformats.org/drawingml/2006/main" xmlns:r="http://schemas.openxmlformats.org/officeDocument/2006/relationships" xmlns:p="http://schemas.openxmlformats.org/presentationml/2006/main" xmlns:m="http://schemas.openxmlformats.org/officeDocument/2006/math" xmlns:w="http://schemas.openxmlformats.org/wordprocessingml/2006/main" matchingName="" preserve="1" showMasterPhAnim="0" showMasterSp="1" type="title" userDrawn="1">
+<p:sldLayout xmlns:a="http://schemas.openxmlformats.org/drawingml/2006/main" xmlns:r="http://schemas.openxmlformats.org/officeDocument/2006/relationships" xmlns:p="http://schemas.openxmlformats.org/presentationml/2006/main" showMasterPhAnim="0" type="title" preserve="1" userDrawn="1">
   <p:cSld name="Diapositive de titre">
     <p:spTree>
       <p:nvGrpSpPr>
@@ -1337,7 +1361,7 @@
 </file>
 
 <file path=ppt/slideLayouts/slideLayout10.xml><?xml version="1.0" encoding="utf-8"?>
-<p:sldLayout xmlns:a="http://schemas.openxmlformats.org/drawingml/2006/main" xmlns:r="http://schemas.openxmlformats.org/officeDocument/2006/relationships" xmlns:p="http://schemas.openxmlformats.org/presentationml/2006/main" xmlns:m="http://schemas.openxmlformats.org/officeDocument/2006/math" xmlns:w="http://schemas.openxmlformats.org/wordprocessingml/2006/main" matchingName="" preserve="1" showMasterPhAnim="0" showMasterSp="1" type="vertTx" userDrawn="1">
+<p:sldLayout xmlns:a="http://schemas.openxmlformats.org/drawingml/2006/main" xmlns:r="http://schemas.openxmlformats.org/officeDocument/2006/relationships" xmlns:p="http://schemas.openxmlformats.org/presentationml/2006/main" showMasterPhAnim="0" type="vertTx" preserve="1" userDrawn="1">
   <p:cSld name="Titre et texte vertical">
     <p:spTree>
       <p:nvGrpSpPr>
@@ -1528,7 +1552,7 @@
 </file>
 
 <file path=ppt/slideLayouts/slideLayout11.xml><?xml version="1.0" encoding="utf-8"?>
-<p:sldLayout xmlns:a="http://schemas.openxmlformats.org/drawingml/2006/main" xmlns:r="http://schemas.openxmlformats.org/officeDocument/2006/relationships" xmlns:p="http://schemas.openxmlformats.org/presentationml/2006/main" xmlns:m="http://schemas.openxmlformats.org/officeDocument/2006/math" xmlns:w="http://schemas.openxmlformats.org/wordprocessingml/2006/main" matchingName="" preserve="1" showMasterPhAnim="0" showMasterSp="1" type="vertTitleAndTx" userDrawn="1">
+<p:sldLayout xmlns:a="http://schemas.openxmlformats.org/drawingml/2006/main" xmlns:r="http://schemas.openxmlformats.org/officeDocument/2006/relationships" xmlns:p="http://schemas.openxmlformats.org/presentationml/2006/main" showMasterPhAnim="0" type="vertTitleAndTx" preserve="1" userDrawn="1">
   <p:cSld name="Titre vertical et texte">
     <p:spTree>
       <p:nvGrpSpPr>
@@ -1729,7 +1753,7 @@
 </file>
 
 <file path=ppt/slideLayouts/slideLayout2.xml><?xml version="1.0" encoding="utf-8"?>
-<p:sldLayout xmlns:a="http://schemas.openxmlformats.org/drawingml/2006/main" xmlns:r="http://schemas.openxmlformats.org/officeDocument/2006/relationships" xmlns:p="http://schemas.openxmlformats.org/presentationml/2006/main" xmlns:m="http://schemas.openxmlformats.org/officeDocument/2006/math" xmlns:w="http://schemas.openxmlformats.org/wordprocessingml/2006/main" matchingName="" preserve="1" showMasterPhAnim="0" showMasterSp="1" type="obj" userDrawn="1">
+<p:sldLayout xmlns:a="http://schemas.openxmlformats.org/drawingml/2006/main" xmlns:r="http://schemas.openxmlformats.org/officeDocument/2006/relationships" xmlns:p="http://schemas.openxmlformats.org/presentationml/2006/main" showMasterPhAnim="0" type="obj" preserve="1" userDrawn="1">
   <p:cSld name="Titre et contenu">
     <p:spTree>
       <p:nvGrpSpPr>
@@ -1920,7 +1944,7 @@
 </file>
 
 <file path=ppt/slideLayouts/slideLayout3.xml><?xml version="1.0" encoding="utf-8"?>
-<p:sldLayout xmlns:a="http://schemas.openxmlformats.org/drawingml/2006/main" xmlns:r="http://schemas.openxmlformats.org/officeDocument/2006/relationships" xmlns:p="http://schemas.openxmlformats.org/presentationml/2006/main" xmlns:m="http://schemas.openxmlformats.org/officeDocument/2006/math" xmlns:w="http://schemas.openxmlformats.org/wordprocessingml/2006/main" matchingName="" preserve="1" showMasterPhAnim="0" showMasterSp="1" type="secHead" userDrawn="1">
+<p:sldLayout xmlns:a="http://schemas.openxmlformats.org/drawingml/2006/main" xmlns:r="http://schemas.openxmlformats.org/officeDocument/2006/relationships" xmlns:p="http://schemas.openxmlformats.org/presentationml/2006/main" showMasterPhAnim="0" type="secHead" preserve="1" userDrawn="1">
   <p:cSld name="Titre de section">
     <p:spTree>
       <p:nvGrpSpPr>
@@ -2176,7 +2200,7 @@
 </file>
 
 <file path=ppt/slideLayouts/slideLayout4.xml><?xml version="1.0" encoding="utf-8"?>
-<p:sldLayout xmlns:a="http://schemas.openxmlformats.org/drawingml/2006/main" xmlns:r="http://schemas.openxmlformats.org/officeDocument/2006/relationships" xmlns:p="http://schemas.openxmlformats.org/presentationml/2006/main" xmlns:m="http://schemas.openxmlformats.org/officeDocument/2006/math" xmlns:w="http://schemas.openxmlformats.org/wordprocessingml/2006/main" matchingName="" preserve="1" showMasterPhAnim="0" showMasterSp="1" type="twoObj" userDrawn="1">
+<p:sldLayout xmlns:a="http://schemas.openxmlformats.org/drawingml/2006/main" xmlns:r="http://schemas.openxmlformats.org/officeDocument/2006/relationships" xmlns:p="http://schemas.openxmlformats.org/presentationml/2006/main" showMasterPhAnim="0" type="twoObj" preserve="1" userDrawn="1">
   <p:cSld name="Deux contenus">
     <p:spTree>
       <p:nvGrpSpPr>
@@ -2443,7 +2467,7 @@
 </file>
 
 <file path=ppt/slideLayouts/slideLayout5.xml><?xml version="1.0" encoding="utf-8"?>
-<p:sldLayout xmlns:a="http://schemas.openxmlformats.org/drawingml/2006/main" xmlns:r="http://schemas.openxmlformats.org/officeDocument/2006/relationships" xmlns:p="http://schemas.openxmlformats.org/presentationml/2006/main" xmlns:m="http://schemas.openxmlformats.org/officeDocument/2006/math" xmlns:w="http://schemas.openxmlformats.org/wordprocessingml/2006/main" matchingName="" preserve="1" showMasterPhAnim="0" showMasterSp="1" type="twoTxTwoObj" userDrawn="1">
+<p:sldLayout xmlns:a="http://schemas.openxmlformats.org/drawingml/2006/main" xmlns:r="http://schemas.openxmlformats.org/officeDocument/2006/relationships" xmlns:p="http://schemas.openxmlformats.org/presentationml/2006/main" showMasterPhAnim="0" type="twoTxTwoObj" preserve="1" userDrawn="1">
   <p:cSld name="Comparaison">
     <p:spTree>
       <p:nvGrpSpPr>
@@ -2851,7 +2875,7 @@
 </file>
 
 <file path=ppt/slideLayouts/slideLayout6.xml><?xml version="1.0" encoding="utf-8"?>
-<p:sldLayout xmlns:a="http://schemas.openxmlformats.org/drawingml/2006/main" xmlns:r="http://schemas.openxmlformats.org/officeDocument/2006/relationships" xmlns:p="http://schemas.openxmlformats.org/presentationml/2006/main" xmlns:m="http://schemas.openxmlformats.org/officeDocument/2006/math" xmlns:w="http://schemas.openxmlformats.org/wordprocessingml/2006/main" matchingName="" preserve="1" showMasterPhAnim="0" showMasterSp="1" type="titleOnly" userDrawn="1">
+<p:sldLayout xmlns:a="http://schemas.openxmlformats.org/drawingml/2006/main" xmlns:r="http://schemas.openxmlformats.org/officeDocument/2006/relationships" xmlns:p="http://schemas.openxmlformats.org/presentationml/2006/main" showMasterPhAnim="0" type="titleOnly" preserve="1" userDrawn="1">
   <p:cSld name="Titre seul">
     <p:spTree>
       <p:nvGrpSpPr>
@@ -2976,7 +3000,7 @@
 </file>
 
 <file path=ppt/slideLayouts/slideLayout7.xml><?xml version="1.0" encoding="utf-8"?>
-<p:sldLayout xmlns:a="http://schemas.openxmlformats.org/drawingml/2006/main" xmlns:r="http://schemas.openxmlformats.org/officeDocument/2006/relationships" xmlns:p="http://schemas.openxmlformats.org/presentationml/2006/main" xmlns:m="http://schemas.openxmlformats.org/officeDocument/2006/math" xmlns:w="http://schemas.openxmlformats.org/wordprocessingml/2006/main" matchingName="" preserve="1" showMasterPhAnim="0" showMasterSp="1" type="blank" userDrawn="1">
+<p:sldLayout xmlns:a="http://schemas.openxmlformats.org/drawingml/2006/main" xmlns:r="http://schemas.openxmlformats.org/officeDocument/2006/relationships" xmlns:p="http://schemas.openxmlformats.org/presentationml/2006/main" showMasterPhAnim="0" type="blank" preserve="1" userDrawn="1">
   <p:cSld name="Vide">
     <p:spTree>
       <p:nvGrpSpPr>
@@ -3075,7 +3099,7 @@
 </file>
 
 <file path=ppt/slideLayouts/slideLayout8.xml><?xml version="1.0" encoding="utf-8"?>
-<p:sldLayout xmlns:a="http://schemas.openxmlformats.org/drawingml/2006/main" xmlns:r="http://schemas.openxmlformats.org/officeDocument/2006/relationships" xmlns:p="http://schemas.openxmlformats.org/presentationml/2006/main" xmlns:m="http://schemas.openxmlformats.org/officeDocument/2006/math" xmlns:w="http://schemas.openxmlformats.org/wordprocessingml/2006/main" matchingName="" preserve="1" showMasterPhAnim="0" showMasterSp="1" type="objTx" userDrawn="1">
+<p:sldLayout xmlns:a="http://schemas.openxmlformats.org/drawingml/2006/main" xmlns:r="http://schemas.openxmlformats.org/officeDocument/2006/relationships" xmlns:p="http://schemas.openxmlformats.org/presentationml/2006/main" showMasterPhAnim="0" type="objTx" preserve="1" userDrawn="1">
   <p:cSld name="Contenu avec légende">
     <p:spTree>
       <p:nvGrpSpPr>
@@ -3376,7 +3400,7 @@
 </file>
 
 <file path=ppt/slideLayouts/slideLayout9.xml><?xml version="1.0" encoding="utf-8"?>
-<p:sldLayout xmlns:a="http://schemas.openxmlformats.org/drawingml/2006/main" xmlns:r="http://schemas.openxmlformats.org/officeDocument/2006/relationships" xmlns:p="http://schemas.openxmlformats.org/presentationml/2006/main" xmlns:m="http://schemas.openxmlformats.org/officeDocument/2006/math" xmlns:w="http://schemas.openxmlformats.org/wordprocessingml/2006/main" matchingName="" preserve="1" showMasterPhAnim="0" showMasterSp="1" type="picTx" userDrawn="1">
+<p:sldLayout xmlns:a="http://schemas.openxmlformats.org/drawingml/2006/main" xmlns:r="http://schemas.openxmlformats.org/officeDocument/2006/relationships" xmlns:p="http://schemas.openxmlformats.org/presentationml/2006/main" showMasterPhAnim="0" type="picTx" preserve="1" userDrawn="1">
   <p:cSld name="Image avec légende">
     <p:spTree>
       <p:nvGrpSpPr>
@@ -3642,13 +3666,14 @@
 </file>
 
 <file path=ppt/slideMasters/slideMaster1.xml><?xml version="1.0" encoding="utf-8"?>
-<p:sldMaster xmlns:a="http://schemas.openxmlformats.org/drawingml/2006/main" xmlns:r="http://schemas.openxmlformats.org/officeDocument/2006/relationships" xmlns:p="http://schemas.openxmlformats.org/presentationml/2006/main" xmlns:m="http://schemas.openxmlformats.org/officeDocument/2006/math" xmlns:w="http://schemas.openxmlformats.org/wordprocessingml/2006/main" preserve="0">
-  <p:cSld name="">
+<p:sldMaster xmlns:a="http://schemas.openxmlformats.org/drawingml/2006/main" xmlns:r="http://schemas.openxmlformats.org/officeDocument/2006/relationships" xmlns:p="http://schemas.openxmlformats.org/presentationml/2006/main">
+  <p:cSld>
     <p:bg>
-      <p:bgPr shadeToTitle="0">
+      <p:bgPr>
         <a:solidFill>
           <a:schemeClr val="bg1"/>
         </a:solidFill>
+        <a:effectLst/>
       </p:bgPr>
     </p:bg>
     <p:spTree>
@@ -4205,13 +4230,14 @@
 </file>
 
 <file path=ppt/slides/slide1.xml><?xml version="1.0" encoding="utf-8"?>
-<p:sld xmlns:a="http://schemas.openxmlformats.org/drawingml/2006/main" xmlns:r="http://schemas.openxmlformats.org/officeDocument/2006/relationships" xmlns:p="http://schemas.openxmlformats.org/presentationml/2006/main" xmlns:m="http://schemas.openxmlformats.org/officeDocument/2006/math" xmlns:w="http://schemas.openxmlformats.org/wordprocessingml/2006/main" xmlns:mc="http://schemas.openxmlformats.org/markup-compatibility/2006" showMasterPhAnim="0" showMasterSp="1" show="1">
-  <p:cSld name="">
+<p:sld xmlns:a="http://schemas.openxmlformats.org/drawingml/2006/main" xmlns:r="http://schemas.openxmlformats.org/officeDocument/2006/relationships" xmlns:p="http://schemas.openxmlformats.org/presentationml/2006/main" showMasterPhAnim="0">
+  <p:cSld>
     <p:bg>
-      <p:bgPr shadeToTitle="0">
+      <p:bgPr>
         <a:solidFill>
           <a:srgbClr val="FFFFFF"/>
         </a:solidFill>
+        <a:effectLst/>
       </p:bgPr>
     </p:bg>
     <p:spTree>
@@ -4262,8 +4288,15 @@
                 <a:ea typeface="+mj-lt"/>
                 <a:cs typeface="+mj-lt"/>
               </a:rPr>
-              <a:t>Why</a:t>
-            </a:r>
+              <a:t>Why Websites Never Save</a:t>
+            </a:r>
+            <a:br>
+              <a:rPr lang="fr-FR" sz="5400" b="1">
+                <a:latin typeface="Consolas"/>
+                <a:ea typeface="+mj-lt"/>
+                <a:cs typeface="+mj-lt"/>
+              </a:rPr>
+            </a:br>
             <a:r>
               <a:rPr lang="fr-FR" sz="5400" b="1">
                 <a:solidFill>
@@ -4273,69 +4306,7 @@
                 <a:ea typeface="+mj-lt"/>
                 <a:cs typeface="+mj-lt"/>
               </a:rPr>
-              <a:t> </a:t>
-            </a:r>
-            <a:r>
-              <a:rPr lang="fr-FR" sz="5400" b="1">
-                <a:solidFill>
-                  <a:srgbClr val="00008B"/>
-                </a:solidFill>
-                <a:latin typeface="Consolas"/>
-                <a:ea typeface="+mj-lt"/>
-                <a:cs typeface="+mj-lt"/>
-              </a:rPr>
-              <a:t>Websites</a:t>
-            </a:r>
-            <a:r>
-              <a:rPr lang="fr-FR" sz="5400" b="1">
-                <a:solidFill>
-                  <a:srgbClr val="00008B"/>
-                </a:solidFill>
-                <a:latin typeface="Consolas"/>
-                <a:ea typeface="+mj-lt"/>
-                <a:cs typeface="+mj-lt"/>
-              </a:rPr>
-              <a:t> Never Save</a:t>
-            </a:r>
-            <a:br>
-              <a:rPr lang="fr-FR" sz="5400" b="1">
-                <a:latin typeface="Consolas"/>
-                <a:ea typeface="+mj-lt"/>
-                <a:cs typeface="+mj-lt"/>
-              </a:rPr>
-            </a:br>
-            <a:r>
-              <a:rPr lang="fr-FR" sz="5400" b="1">
-                <a:solidFill>
-                  <a:srgbClr val="00008B"/>
-                </a:solidFill>
-                <a:latin typeface="Consolas"/>
-                <a:ea typeface="+mj-lt"/>
-                <a:cs typeface="+mj-lt"/>
-              </a:rPr>
-              <a:t>Your</a:t>
-            </a:r>
-            <a:r>
-              <a:rPr lang="fr-FR" sz="5400" b="1">
-                <a:solidFill>
-                  <a:srgbClr val="00008B"/>
-                </a:solidFill>
-                <a:latin typeface="Consolas"/>
-                <a:ea typeface="+mj-lt"/>
-                <a:cs typeface="+mj-lt"/>
-              </a:rPr>
-              <a:t> </a:t>
-            </a:r>
-            <a:r>
-              <a:rPr lang="fr-FR" sz="5400" b="1">
-                <a:solidFill>
-                  <a:srgbClr val="00008B"/>
-                </a:solidFill>
-                <a:latin typeface="Consolas"/>
-                <a:ea typeface="+mj-lt"/>
-                <a:cs typeface="+mj-lt"/>
-              </a:rPr>
-              <a:t>Passwords</a:t>
+              <a:t>Your Passwords</a:t>
             </a:r>
             <a:endParaRPr lang="fr-FR" sz="5400" b="1">
               <a:solidFill>
@@ -4378,39 +4349,7 @@
                 <a:ea typeface="+mn-lt"/>
                 <a:cs typeface="+mn-lt"/>
               </a:rPr>
-              <a:t>How </a:t>
-            </a:r>
-            <a:r>
-              <a:rPr lang="fr-FR" sz="3200" b="1">
-                <a:latin typeface="Consolas"/>
-                <a:ea typeface="+mn-lt"/>
-                <a:cs typeface="+mn-lt"/>
-              </a:rPr>
-              <a:t>authentication</a:t>
-            </a:r>
-            <a:r>
-              <a:rPr lang="fr-FR" sz="3200" b="1">
-                <a:latin typeface="Consolas"/>
-                <a:ea typeface="+mn-lt"/>
-                <a:cs typeface="+mn-lt"/>
-              </a:rPr>
-              <a:t> </a:t>
-            </a:r>
-            <a:r>
-              <a:rPr lang="fr-FR" sz="3200" b="1">
-                <a:latin typeface="Consolas"/>
-                <a:ea typeface="+mn-lt"/>
-                <a:cs typeface="+mn-lt"/>
-              </a:rPr>
-              <a:t>works</a:t>
-            </a:r>
-            <a:r>
-              <a:rPr lang="fr-FR" sz="3200" b="1">
-                <a:latin typeface="Consolas"/>
-                <a:ea typeface="+mn-lt"/>
-                <a:cs typeface="+mn-lt"/>
-              </a:rPr>
-              <a:t> in the backend</a:t>
+              <a:t>How authentication works in the backend</a:t>
             </a:r>
             <a:endParaRPr/>
           </a:p>
@@ -4487,7 +4426,9 @@
         </p:spPr>
         <p:txBody>
           <a:bodyPr rot="0" spcFirstLastPara="0" vertOverflow="overflow" horzOverflow="overflow" vert="horz" wrap="square" lIns="91440" tIns="45720" rIns="91440" bIns="45720" numCol="1" spcCol="0" rtlCol="0" fromWordArt="0" anchor="t" anchorCtr="0" forceAA="0" compatLnSpc="1">
-            <a:prstTxWarp prst="textNoShape"/>
+            <a:prstTxWarp prst="textNoShape">
+              <a:avLst/>
+            </a:prstTxWarp>
             <a:spAutoFit/>
           </a:bodyPr>
           <a:lstStyle/>
@@ -4510,13 +4451,13 @@
   <p:clrMapOvr>
     <a:masterClrMapping/>
   </p:clrMapOvr>
-  <mc:AlternateContent xmlns:mc="http://schemas.openxmlformats.org/markup-compatibility/2006">
-    <mc:Choice xmlns:p159="http://schemas.microsoft.com/office/powerpoint/2015/09/main" xmlns:p14="http://schemas.microsoft.com/office/powerpoint/2010/main" Requires="p159">
-      <p:transition spd="fast" p14:dur="250" advClick="1">
-        <p:fade thruBlk="0"/>
+  <mc:AlternateContent xmlns:mc="http://schemas.openxmlformats.org/markup-compatibility/2006" xmlns:p159="http://schemas.microsoft.com/office/powerpoint/2015/09/main">
+    <mc:Choice Requires="p159">
+      <p:transition xmlns:p14="http://schemas.microsoft.com/office/powerpoint/2010/main" p14:dur="250">
+        <p:fade/>
       </p:transition>
     </mc:Choice>
-    <mc:Fallback>
+    <mc:Fallback xmlns:w="http://schemas.openxmlformats.org/wordprocessingml/2006/main" xmlns:m="http://schemas.openxmlformats.org/officeDocument/2006/math" xmlns="">
       <p:transition spd="fast" advClick="1">
         <p:fade thruBlk="0"/>
       </p:transition>
@@ -4526,8 +4467,8 @@
 </file>
 
 <file path=ppt/slides/slide2.xml><?xml version="1.0" encoding="utf-8"?>
-<p:sld xmlns:a="http://schemas.openxmlformats.org/drawingml/2006/main" xmlns:r="http://schemas.openxmlformats.org/officeDocument/2006/relationships" xmlns:p="http://schemas.openxmlformats.org/presentationml/2006/main" xmlns:m="http://schemas.openxmlformats.org/officeDocument/2006/math" xmlns:w="http://schemas.openxmlformats.org/wordprocessingml/2006/main" xmlns:mc="http://schemas.openxmlformats.org/markup-compatibility/2006" showMasterPhAnim="0" showMasterSp="1" show="1">
-  <p:cSld name="">
+<p:sld xmlns:a="http://schemas.openxmlformats.org/drawingml/2006/main" xmlns:r="http://schemas.openxmlformats.org/officeDocument/2006/relationships" xmlns:p="http://schemas.openxmlformats.org/presentationml/2006/main" showMasterPhAnim="0">
+  <p:cSld>
     <p:spTree>
       <p:nvGrpSpPr>
         <p:cNvPr id="1" name=""/>
@@ -4572,28 +4513,7 @@
                 <a:latin typeface="Consolas"/>
                 <a:cs typeface="Courier New"/>
               </a:rPr>
-              <a:t>The </a:t>
-            </a:r>
-            <a:r>
-              <a:rPr lang="fr-FR" b="1">
-                <a:latin typeface="Consolas"/>
-                <a:cs typeface="Courier New"/>
-              </a:rPr>
-              <a:t>Plaintext</a:t>
-            </a:r>
-            <a:r>
-              <a:rPr lang="fr-FR" b="1">
-                <a:latin typeface="Consolas"/>
-                <a:cs typeface="Courier New"/>
-              </a:rPr>
-              <a:t> </a:t>
-            </a:r>
-            <a:r>
-              <a:rPr lang="fr-FR" b="1">
-                <a:latin typeface="Consolas"/>
-                <a:cs typeface="Courier New"/>
-              </a:rPr>
-              <a:t>Problem</a:t>
+              <a:t>The Plaintext Problem</a:t>
             </a:r>
             <a:endParaRPr/>
           </a:p>
@@ -4639,7 +4559,9 @@
         </p:spPr>
         <p:txBody>
           <a:bodyPr rot="0" spcFirstLastPara="0" vertOverflow="overflow" horzOverflow="overflow" vert="horz" wrap="square" lIns="91440" tIns="45720" rIns="91440" bIns="45720" numCol="1" spcCol="0" rtlCol="0" fromWordArt="0" anchor="t" anchorCtr="0" forceAA="0" compatLnSpc="1">
-            <a:prstTxWarp prst="textNoShape"/>
+            <a:prstTxWarp prst="textNoShape">
+              <a:avLst/>
+            </a:prstTxWarp>
             <a:spAutoFit/>
           </a:bodyPr>
           <a:lstStyle/>
@@ -4655,9 +4577,6 @@
               </a:rPr>
               <a:t>Exact input = Exact database record</a:t>
             </a:r>
-            <a:endParaRPr lang="en-US" sz="2400" b="1">
-              <a:latin typeface="Consolas"/>
-            </a:endParaRPr>
           </a:p>
           <a:p>
             <a:pPr marL="285750" indent="-285750">
@@ -4681,9 +4600,6 @@
               </a:rPr>
               <a:t>One breach = Total Database Compromise</a:t>
             </a:r>
-            <a:endParaRPr lang="en-US" sz="2400" b="1">
-              <a:latin typeface="Consolas"/>
-            </a:endParaRPr>
           </a:p>
           <a:p>
             <a:pPr marL="285750" indent="-285750">
@@ -4743,28 +4659,41 @@
         <p:nvGraphicFramePr>
           <p:cNvPr id="2027582524" name="Table 7"/>
           <p:cNvGraphicFramePr>
-            <a:graphicFrameLocks xmlns:a="http://schemas.openxmlformats.org/drawingml/2006/main" noGrp="1"/>
+            <a:graphicFrameLocks noGrp="1"/>
           </p:cNvGraphicFramePr>
           <p:nvPr/>
         </p:nvGraphicFramePr>
-        <p:xfrm rot="0">
+        <p:xfrm>
           <a:off x="1085157" y="1640240"/>
           <a:ext cx="3799244" cy="3485787"/>
         </p:xfrm>
         <a:graphic>
           <a:graphicData uri="http://schemas.openxmlformats.org/drawingml/2006/table">
             <a:tbl>
-              <a:tblPr firstRow="1" firstCol="0" lastRow="0" lastCol="0" bandRow="1" bandCol="0">
+              <a:tblPr firstRow="1" bandRow="1">
                 <a:tableStyleId>{793D81CF-94F2-401A-BA57-92F5A7B2D0C5}</a:tableStyleId>
               </a:tblPr>
               <a:tblGrid>
-                <a:gridCol w="1888789"/>
-                <a:gridCol w="1910455"/>
+                <a:gridCol w="1888789">
+                  <a:extLst>
+                    <a:ext uri="{9D8B030D-6E8A-4147-A177-3AD203B41FA5}">
+                      <a16:colId xmlns:a16="http://schemas.microsoft.com/office/drawing/2014/main" val="20000"/>
+                    </a:ext>
+                  </a:extLst>
+                </a:gridCol>
+                <a:gridCol w="1910455">
+                  <a:extLst>
+                    <a:ext uri="{9D8B030D-6E8A-4147-A177-3AD203B41FA5}">
+                      <a16:colId xmlns:a16="http://schemas.microsoft.com/office/drawing/2014/main" val="20001"/>
+                    </a:ext>
+                  </a:extLst>
+                </a:gridCol>
               </a:tblGrid>
               <a:tr h="1161929">
                 <a:tc>
                   <a:txBody>
                     <a:bodyPr/>
+                    <a:lstStyle/>
                     <a:p>
                       <a:pPr algn="ctr">
                         <a:defRPr/>
@@ -4783,6 +4712,7 @@
                 <a:tc>
                   <a:txBody>
                     <a:bodyPr/>
+                    <a:lstStyle/>
                     <a:p>
                       <a:pPr algn="ctr">
                         <a:defRPr/>
@@ -4798,11 +4728,17 @@
                   </a:txBody>
                   <a:tcPr anchor="ctr"/>
                 </a:tc>
+                <a:extLst>
+                  <a:ext uri="{0D108BD9-81ED-4DB2-BD59-A6C34878D82A}">
+                    <a16:rowId xmlns:a16="http://schemas.microsoft.com/office/drawing/2014/main" val="10000"/>
+                  </a:ext>
+                </a:extLst>
               </a:tr>
               <a:tr h="1161929">
                 <a:tc>
                   <a:txBody>
                     <a:bodyPr/>
+                    <a:lstStyle/>
                     <a:p>
                       <a:pPr marL="0" indent="0" algn="ctr">
                         <a:buNone/>
@@ -4820,6 +4756,7 @@
                 <a:tc>
                   <a:txBody>
                     <a:bodyPr/>
+                    <a:lstStyle/>
                     <a:p>
                       <a:pPr algn="ctr">
                         <a:defRPr/>
@@ -4835,24 +4772,25 @@
                   </a:txBody>
                   <a:tcPr anchor="ctr"/>
                 </a:tc>
+                <a:extLst>
+                  <a:ext uri="{0D108BD9-81ED-4DB2-BD59-A6C34878D82A}">
+                    <a16:rowId xmlns:a16="http://schemas.microsoft.com/office/drawing/2014/main" val="10001"/>
+                  </a:ext>
+                </a:extLst>
               </a:tr>
               <a:tr h="1161929">
                 <a:tc>
                   <a:txBody>
                     <a:bodyPr/>
+                    <a:lstStyle/>
                     <a:p>
                       <a:pPr algn="ctr">
                         <a:defRPr/>
                       </a:pPr>
                       <a:r>
                         <a:rPr lang="en-US"/>
-                        <a:t>charl</a:t>
+                        <a:t>charlie</a:t>
                       </a:r>
-                      <a:r>
-                        <a:rPr lang="en-US"/>
-                        <a:t>ie</a:t>
-                      </a:r>
-                      <a:endParaRPr lang="en-US"/>
                     </a:p>
                   </a:txBody>
                   <a:tcPr anchor="ctr"/>
@@ -4860,6 +4798,7 @@
                 <a:tc>
                   <a:txBody>
                     <a:bodyPr/>
+                    <a:lstStyle/>
                     <a:p>
                       <a:pPr algn="ctr">
                         <a:defRPr/>
@@ -4875,6 +4814,11 @@
                   </a:txBody>
                   <a:tcPr anchor="ctr"/>
                 </a:tc>
+                <a:extLst>
+                  <a:ext uri="{0D108BD9-81ED-4DB2-BD59-A6C34878D82A}">
+                    <a16:rowId xmlns:a16="http://schemas.microsoft.com/office/drawing/2014/main" val="10002"/>
+                  </a:ext>
+                </a:extLst>
               </a:tr>
             </a:tbl>
           </a:graphicData>
@@ -4933,13 +4877,13 @@
   <p:clrMapOvr>
     <a:masterClrMapping/>
   </p:clrMapOvr>
-  <mc:AlternateContent xmlns:mc="http://schemas.openxmlformats.org/markup-compatibility/2006">
-    <mc:Choice xmlns:p159="http://schemas.microsoft.com/office/powerpoint/2015/09/main" xmlns:p14="http://schemas.microsoft.com/office/powerpoint/2010/main" Requires="p159">
-      <p:transition spd="fast" p14:dur="250" advClick="1">
-        <p:fade thruBlk="0"/>
+  <mc:AlternateContent xmlns:mc="http://schemas.openxmlformats.org/markup-compatibility/2006" xmlns:p159="http://schemas.microsoft.com/office/powerpoint/2015/09/main">
+    <mc:Choice Requires="p159">
+      <p:transition xmlns:p14="http://schemas.microsoft.com/office/powerpoint/2010/main" p14:dur="250">
+        <p:fade/>
       </p:transition>
     </mc:Choice>
-    <mc:Fallback>
+    <mc:Fallback xmlns:w="http://schemas.openxmlformats.org/wordprocessingml/2006/main" xmlns:m="http://schemas.openxmlformats.org/officeDocument/2006/math" xmlns="">
       <p:transition spd="fast" advClick="1">
         <p:fade thruBlk="0"/>
       </p:transition>
@@ -4949,8 +4893,8 @@
 </file>
 
 <file path=ppt/slides/slide3.xml><?xml version="1.0" encoding="utf-8"?>
-<p:sld xmlns:a="http://schemas.openxmlformats.org/drawingml/2006/main" xmlns:r="http://schemas.openxmlformats.org/officeDocument/2006/relationships" xmlns:p="http://schemas.openxmlformats.org/presentationml/2006/main" xmlns:m="http://schemas.openxmlformats.org/officeDocument/2006/math" xmlns:w="http://schemas.openxmlformats.org/wordprocessingml/2006/main" xmlns:mc="http://schemas.openxmlformats.org/markup-compatibility/2006" showMasterPhAnim="0" showMasterSp="1" show="1">
-  <p:cSld name="">
+<p:sld xmlns:a="http://schemas.openxmlformats.org/drawingml/2006/main" xmlns:r="http://schemas.openxmlformats.org/officeDocument/2006/relationships" xmlns:p="http://schemas.openxmlformats.org/presentationml/2006/main" showMasterPhAnim="0">
+  <p:cSld>
     <p:spTree>
       <p:nvGrpSpPr>
         <p:cNvPr id="1" name=""/>
@@ -4995,21 +4939,7 @@
                 <a:latin typeface="Consolas"/>
                 <a:cs typeface="Courier New"/>
               </a:rPr>
-              <a:t>Hashing</a:t>
-            </a:r>
-            <a:r>
-              <a:rPr lang="fr-FR" b="1">
-                <a:latin typeface="Consolas"/>
-                <a:cs typeface="Courier New"/>
-              </a:rPr>
-              <a:t> </a:t>
-            </a:r>
-            <a:r>
-              <a:rPr lang="fr-FR" b="1">
-                <a:latin typeface="Consolas"/>
-                <a:cs typeface="Courier New"/>
-              </a:rPr>
-              <a:t>Algorithms</a:t>
+              <a:t>Hashing Algorithms</a:t>
             </a:r>
             <a:endParaRPr b="1"/>
           </a:p>
@@ -5055,7 +4985,9 @@
         </p:spPr>
         <p:txBody>
           <a:bodyPr rot="0" spcFirstLastPara="0" vertOverflow="overflow" horzOverflow="overflow" vert="horz" wrap="square" lIns="91440" tIns="45720" rIns="91440" bIns="45720" numCol="1" spcCol="0" rtlCol="0" fromWordArt="0" anchor="t" anchorCtr="0" forceAA="0" compatLnSpc="1">
-            <a:prstTxWarp prst="textNoShape"/>
+            <a:prstTxWarp prst="textNoShape">
+              <a:avLst/>
+            </a:prstTxWarp>
             <a:spAutoFit/>
           </a:bodyPr>
           <a:lstStyle/>
@@ -5071,9 +5003,6 @@
               </a:rPr>
               <a:t>One-way mathematical function</a:t>
             </a:r>
-            <a:endParaRPr lang="en-US" sz="2400" b="1">
-              <a:latin typeface="Consolas"/>
-            </a:endParaRPr>
           </a:p>
           <a:p>
             <a:pPr marL="285750" indent="-285750">
@@ -5181,13 +5110,13 @@
   <p:clrMapOvr>
     <a:masterClrMapping/>
   </p:clrMapOvr>
-  <mc:AlternateContent xmlns:mc="http://schemas.openxmlformats.org/markup-compatibility/2006">
-    <mc:Choice xmlns:p159="http://schemas.microsoft.com/office/powerpoint/2015/09/main" xmlns:p14="http://schemas.microsoft.com/office/powerpoint/2010/main" Requires="p159">
-      <p:transition spd="fast" p14:dur="250" advClick="1">
-        <p:fade thruBlk="0"/>
+  <mc:AlternateContent xmlns:mc="http://schemas.openxmlformats.org/markup-compatibility/2006" xmlns:p159="http://schemas.microsoft.com/office/powerpoint/2015/09/main">
+    <mc:Choice Requires="p159">
+      <p:transition xmlns:p14="http://schemas.microsoft.com/office/powerpoint/2010/main" p14:dur="250">
+        <p:fade/>
       </p:transition>
     </mc:Choice>
-    <mc:Fallback>
+    <mc:Fallback xmlns:w="http://schemas.openxmlformats.org/wordprocessingml/2006/main" xmlns:m="http://schemas.openxmlformats.org/officeDocument/2006/math" xmlns="">
       <p:transition spd="fast" advClick="1">
         <p:fade thruBlk="0"/>
       </p:transition>
@@ -5197,8 +5126,8 @@
 </file>
 
 <file path=ppt/slides/slide4.xml><?xml version="1.0" encoding="utf-8"?>
-<p:sld xmlns:a="http://schemas.openxmlformats.org/drawingml/2006/main" xmlns:r="http://schemas.openxmlformats.org/officeDocument/2006/relationships" xmlns:p="http://schemas.openxmlformats.org/presentationml/2006/main" xmlns:m="http://schemas.openxmlformats.org/officeDocument/2006/math" xmlns:w="http://schemas.openxmlformats.org/wordprocessingml/2006/main" xmlns:mc="http://schemas.openxmlformats.org/markup-compatibility/2006" showMasterPhAnim="0" showMasterSp="1" show="1">
-  <p:cSld name="">
+<p:sld xmlns:a="http://schemas.openxmlformats.org/drawingml/2006/main" xmlns:r="http://schemas.openxmlformats.org/officeDocument/2006/relationships" xmlns:p="http://schemas.openxmlformats.org/presentationml/2006/main" showMasterPhAnim="0">
+  <p:cSld>
     <p:spTree>
       <p:nvGrpSpPr>
         <p:cNvPr id="1" name=""/>
@@ -5244,39 +5173,7 @@
                 <a:ea typeface="+mj-lt"/>
                 <a:cs typeface="Courier New"/>
               </a:rPr>
-              <a:t>Hashing</a:t>
-            </a:r>
-            <a:r>
-              <a:rPr lang="fr-FR" b="1">
-                <a:latin typeface="Consolas"/>
-                <a:ea typeface="+mj-lt"/>
-                <a:cs typeface="Courier New"/>
-              </a:rPr>
-              <a:t>: The </a:t>
-            </a:r>
-            <a:r>
-              <a:rPr lang="fr-FR" b="1">
-                <a:latin typeface="Consolas"/>
-                <a:ea typeface="+mj-lt"/>
-                <a:cs typeface="Courier New"/>
-              </a:rPr>
-              <a:t>Database</a:t>
-            </a:r>
-            <a:r>
-              <a:rPr lang="fr-FR" b="1">
-                <a:latin typeface="Consolas"/>
-                <a:ea typeface="+mj-lt"/>
-                <a:cs typeface="Courier New"/>
-              </a:rPr>
-              <a:t> </a:t>
-            </a:r>
-            <a:r>
-              <a:rPr lang="fr-FR" b="1">
-                <a:latin typeface="Consolas"/>
-                <a:ea typeface="+mj-lt"/>
-                <a:cs typeface="Courier New"/>
-              </a:rPr>
-              <a:t>View</a:t>
+              <a:t>Hashing: The Database View</a:t>
             </a:r>
             <a:endParaRPr lang="fr-FR">
               <a:latin typeface="Aptos Display"/>
@@ -5326,7 +5223,9 @@
         </p:spPr>
         <p:txBody>
           <a:bodyPr rot="0" spcFirstLastPara="0" vertOverflow="overflow" horzOverflow="overflow" vert="horz" wrap="square" lIns="91440" tIns="45720" rIns="91440" bIns="45720" numCol="1" spcCol="0" rtlCol="0" fromWordArt="0" anchor="t" anchorCtr="0" forceAA="0" compatLnSpc="1">
-            <a:prstTxWarp prst="textNoShape"/>
+            <a:prstTxWarp prst="textNoShape">
+              <a:avLst/>
+            </a:prstTxWarp>
             <a:spAutoFit/>
           </a:bodyPr>
           <a:lstStyle/>
@@ -5342,9 +5241,6 @@
               </a:rPr>
               <a:t>Plaintext exists ONLY in RAM</a:t>
             </a:r>
-            <a:endParaRPr lang="en-US" sz="2400" b="1">
-              <a:latin typeface="Consolas"/>
-            </a:endParaRPr>
           </a:p>
           <a:p>
             <a:pPr marL="285750" indent="-285750">
@@ -5368,9 +5264,6 @@
               </a:rPr>
               <a:t>Database stores ONLY the hash</a:t>
             </a:r>
-            <a:endParaRPr lang="en-US" sz="2400" b="1">
-              <a:latin typeface="Consolas"/>
-            </a:endParaRPr>
           </a:p>
           <a:p>
             <a:pPr marL="285750" indent="-285750">
@@ -5430,29 +5323,48 @@
         <p:nvGraphicFramePr>
           <p:cNvPr id="655621744" name="Table 7"/>
           <p:cNvGraphicFramePr>
-            <a:graphicFrameLocks xmlns:a="http://schemas.openxmlformats.org/drawingml/2006/main" noGrp="1"/>
+            <a:graphicFrameLocks noGrp="1"/>
           </p:cNvGraphicFramePr>
           <p:nvPr/>
         </p:nvGraphicFramePr>
-        <p:xfrm rot="0">
+        <p:xfrm>
           <a:off x="421499" y="1884594"/>
-          <a:ext cx="4401418" cy="4306580"/>
+          <a:ext cx="4586009" cy="4306580"/>
         </p:xfrm>
         <a:graphic>
           <a:graphicData uri="http://schemas.openxmlformats.org/drawingml/2006/table">
             <a:tbl>
-              <a:tblPr firstRow="1" firstCol="0" lastRow="0" lastCol="0" bandRow="1" bandCol="0">
+              <a:tblPr firstRow="1" bandRow="1">
                 <a:tableStyleId>{793D81CF-94F2-401A-BA57-92F5A7B2D0C5}</a:tableStyleId>
               </a:tblPr>
               <a:tblGrid>
-                <a:gridCol w="1396492"/>
-                <a:gridCol w="1658200"/>
-                <a:gridCol w="1531317"/>
+                <a:gridCol w="1396492">
+                  <a:extLst>
+                    <a:ext uri="{9D8B030D-6E8A-4147-A177-3AD203B41FA5}">
+                      <a16:colId xmlns:a16="http://schemas.microsoft.com/office/drawing/2014/main" val="20000"/>
+                    </a:ext>
+                  </a:extLst>
+                </a:gridCol>
+                <a:gridCol w="1658200">
+                  <a:extLst>
+                    <a:ext uri="{9D8B030D-6E8A-4147-A177-3AD203B41FA5}">
+                      <a16:colId xmlns:a16="http://schemas.microsoft.com/office/drawing/2014/main" val="20001"/>
+                    </a:ext>
+                  </a:extLst>
+                </a:gridCol>
+                <a:gridCol w="1531317">
+                  <a:extLst>
+                    <a:ext uri="{9D8B030D-6E8A-4147-A177-3AD203B41FA5}">
+                      <a16:colId xmlns:a16="http://schemas.microsoft.com/office/drawing/2014/main" val="20002"/>
+                    </a:ext>
+                  </a:extLst>
+                </a:gridCol>
               </a:tblGrid>
               <a:tr h="861316">
                 <a:tc>
                   <a:txBody>
                     <a:bodyPr/>
+                    <a:lstStyle/>
                     <a:p>
                       <a:pPr algn="ctr">
                         <a:defRPr/>
@@ -5471,6 +5383,7 @@
                 <a:tc>
                   <a:txBody>
                     <a:bodyPr/>
+                    <a:lstStyle/>
                     <a:p>
                       <a:pPr algn="ctr">
                         <a:defRPr/>
@@ -5500,6 +5413,7 @@
                 <a:tc>
                   <a:txBody>
                     <a:bodyPr/>
+                    <a:lstStyle/>
                     <a:p>
                       <a:pPr lvl="0" algn="ctr">
                         <a:buNone/>
@@ -5529,11 +5443,17 @@
                   </a:txBody>
                   <a:tcPr anchor="ctr"/>
                 </a:tc>
+                <a:extLst>
+                  <a:ext uri="{0D108BD9-81ED-4DB2-BD59-A6C34878D82A}">
+                    <a16:rowId xmlns:a16="http://schemas.microsoft.com/office/drawing/2014/main" val="10000"/>
+                  </a:ext>
+                </a:extLst>
               </a:tr>
               <a:tr h="861316">
                 <a:tc>
                   <a:txBody>
                     <a:bodyPr/>
+                    <a:lstStyle/>
                     <a:p>
                       <a:pPr marL="0" indent="0" algn="ctr">
                         <a:buNone/>
@@ -5551,6 +5471,7 @@
                 <a:tc>
                   <a:txBody>
                     <a:bodyPr/>
+                    <a:lstStyle/>
                     <a:p>
                       <a:pPr algn="ctr">
                         <a:defRPr/>
@@ -5569,6 +5490,7 @@
                 <a:tc>
                   <a:txBody>
                     <a:bodyPr/>
+                    <a:lstStyle/>
                     <a:p>
                       <a:pPr lvl="0" algn="ctr">
                         <a:buNone/>
@@ -5587,11 +5509,17 @@
                   </a:txBody>
                   <a:tcPr anchor="ctr"/>
                 </a:tc>
+                <a:extLst>
+                  <a:ext uri="{0D108BD9-81ED-4DB2-BD59-A6C34878D82A}">
+                    <a16:rowId xmlns:a16="http://schemas.microsoft.com/office/drawing/2014/main" val="10001"/>
+                  </a:ext>
+                </a:extLst>
               </a:tr>
               <a:tr h="861316">
                 <a:tc>
                   <a:txBody>
                     <a:bodyPr/>
+                    <a:lstStyle/>
                     <a:p>
                       <a:pPr algn="ctr">
                         <a:defRPr/>
@@ -5608,6 +5536,7 @@
                 <a:tc>
                   <a:txBody>
                     <a:bodyPr/>
+                    <a:lstStyle/>
                     <a:p>
                       <a:pPr algn="ctr">
                         <a:defRPr/>
@@ -5626,6 +5555,7 @@
                 <a:tc>
                   <a:txBody>
                     <a:bodyPr/>
+                    <a:lstStyle/>
                     <a:p>
                       <a:pPr lvl="0" algn="ctr">
                         <a:buNone/>
@@ -5642,11 +5572,17 @@
                   </a:txBody>
                   <a:tcPr anchor="ctr"/>
                 </a:tc>
+                <a:extLst>
+                  <a:ext uri="{0D108BD9-81ED-4DB2-BD59-A6C34878D82A}">
+                    <a16:rowId xmlns:a16="http://schemas.microsoft.com/office/drawing/2014/main" val="10002"/>
+                  </a:ext>
+                </a:extLst>
               </a:tr>
               <a:tr h="861316">
                 <a:tc>
                   <a:txBody>
                     <a:bodyPr/>
+                    <a:lstStyle/>
                     <a:p>
                       <a:pPr lvl="0" algn="ctr">
                         <a:buNone/>
@@ -5664,6 +5600,7 @@
                 <a:tc>
                   <a:txBody>
                     <a:bodyPr/>
+                    <a:lstStyle/>
                     <a:p>
                       <a:pPr lvl="0" algn="ctr">
                         <a:buNone/>
@@ -5683,6 +5620,7 @@
                 <a:tc>
                   <a:txBody>
                     <a:bodyPr/>
+                    <a:lstStyle/>
                     <a:p>
                       <a:pPr lvl="0" algn="ctr">
                         <a:buNone/>
@@ -5702,11 +5640,17 @@
                   </a:txBody>
                   <a:tcPr anchor="ctr"/>
                 </a:tc>
+                <a:extLst>
+                  <a:ext uri="{0D108BD9-81ED-4DB2-BD59-A6C34878D82A}">
+                    <a16:rowId xmlns:a16="http://schemas.microsoft.com/office/drawing/2014/main" val="10003"/>
+                  </a:ext>
+                </a:extLst>
               </a:tr>
               <a:tr h="861316">
                 <a:tc>
                   <a:txBody>
                     <a:bodyPr/>
+                    <a:lstStyle/>
                     <a:p>
                       <a:pPr lvl="0" algn="ctr">
                         <a:buNone/>
@@ -5724,6 +5668,7 @@
                 <a:tc>
                   <a:txBody>
                     <a:bodyPr/>
+                    <a:lstStyle/>
                     <a:p>
                       <a:pPr lvl="0" algn="ctr">
                         <a:buNone/>
@@ -5743,6 +5688,7 @@
                 <a:tc>
                   <a:txBody>
                     <a:bodyPr/>
+                    <a:lstStyle/>
                     <a:p>
                       <a:pPr lvl="0" algn="ctr">
                         <a:buNone/>
@@ -5761,6 +5707,11 @@
                   </a:txBody>
                   <a:tcPr anchor="ctr"/>
                 </a:tc>
+                <a:extLst>
+                  <a:ext uri="{0D108BD9-81ED-4DB2-BD59-A6C34878D82A}">
+                    <a16:rowId xmlns:a16="http://schemas.microsoft.com/office/drawing/2014/main" val="10004"/>
+                  </a:ext>
+                </a:extLst>
               </a:tr>
             </a:tbl>
           </a:graphicData>
@@ -5832,7 +5783,9 @@
         </p:spPr>
         <p:txBody>
           <a:bodyPr rot="0" spcFirstLastPara="0" vertOverflow="overflow" horzOverflow="overflow" vert="horz" wrap="square" lIns="91440" tIns="45720" rIns="91440" bIns="45720" numCol="1" spcCol="0" rtlCol="0" fromWordArt="0" anchor="t" anchorCtr="0" forceAA="0" compatLnSpc="1">
-            <a:prstTxWarp prst="textNoShape"/>
+            <a:prstTxWarp prst="textNoShape">
+              <a:avLst/>
+            </a:prstTxWarp>
             <a:spAutoFit/>
           </a:bodyPr>
           <a:lstStyle/>
@@ -5862,13 +5815,13 @@
   <p:clrMapOvr>
     <a:masterClrMapping/>
   </p:clrMapOvr>
-  <mc:AlternateContent xmlns:mc="http://schemas.openxmlformats.org/markup-compatibility/2006">
-    <mc:Choice xmlns:p159="http://schemas.microsoft.com/office/powerpoint/2015/09/main" xmlns:p14="http://schemas.microsoft.com/office/powerpoint/2010/main" Requires="p159">
-      <p:transition spd="fast" p14:dur="250" advClick="1">
-        <p:fade thruBlk="0"/>
+  <mc:AlternateContent xmlns:mc="http://schemas.openxmlformats.org/markup-compatibility/2006" xmlns:p159="http://schemas.microsoft.com/office/powerpoint/2015/09/main">
+    <mc:Choice Requires="p159">
+      <p:transition xmlns:p14="http://schemas.microsoft.com/office/powerpoint/2010/main" p14:dur="250">
+        <p:fade/>
       </p:transition>
     </mc:Choice>
-    <mc:Fallback>
+    <mc:Fallback xmlns:w="http://schemas.openxmlformats.org/wordprocessingml/2006/main" xmlns:m="http://schemas.openxmlformats.org/officeDocument/2006/math" xmlns="">
       <p:transition spd="fast" advClick="1">
         <p:fade thruBlk="0"/>
       </p:transition>
@@ -5878,8 +5831,8 @@
 </file>
 
 <file path=ppt/slides/slide5.xml><?xml version="1.0" encoding="utf-8"?>
-<p:sld xmlns:a="http://schemas.openxmlformats.org/drawingml/2006/main" xmlns:r="http://schemas.openxmlformats.org/officeDocument/2006/relationships" xmlns:p="http://schemas.openxmlformats.org/presentationml/2006/main" xmlns:m="http://schemas.openxmlformats.org/officeDocument/2006/math" xmlns:w="http://schemas.openxmlformats.org/wordprocessingml/2006/main" xmlns:mc="http://schemas.openxmlformats.org/markup-compatibility/2006" showMasterPhAnim="0" showMasterSp="1" show="1">
-  <p:cSld name="">
+<p:sld xmlns:a="http://schemas.openxmlformats.org/drawingml/2006/main" xmlns:r="http://schemas.openxmlformats.org/officeDocument/2006/relationships" xmlns:p="http://schemas.openxmlformats.org/presentationml/2006/main" showMasterPhAnim="0">
+  <p:cSld>
     <p:spTree>
       <p:nvGrpSpPr>
         <p:cNvPr id="1" name=""/>
@@ -5925,15 +5878,7 @@
                 <a:ea typeface="+mj-lt"/>
                 <a:cs typeface="Courier New"/>
               </a:rPr>
-              <a:t>Hashing</a:t>
-            </a:r>
-            <a:r>
-              <a:rPr lang="fr-FR" b="1">
-                <a:latin typeface="Consolas"/>
-                <a:ea typeface="+mj-lt"/>
-                <a:cs typeface="Courier New"/>
-              </a:rPr>
-              <a:t> Limitations</a:t>
+              <a:t>Hashing Limitations</a:t>
             </a:r>
             <a:endParaRPr/>
           </a:p>
@@ -5979,7 +5924,9 @@
         </p:spPr>
         <p:txBody>
           <a:bodyPr rot="0" spcFirstLastPara="0" vertOverflow="overflow" horzOverflow="overflow" vert="horz" wrap="square" lIns="91440" tIns="45720" rIns="91440" bIns="45720" numCol="1" spcCol="0" rtlCol="0" fromWordArt="0" anchor="t" anchorCtr="0" forceAA="0" compatLnSpc="1">
-            <a:prstTxWarp prst="textNoShape"/>
+            <a:prstTxWarp prst="textNoShape">
+              <a:avLst/>
+            </a:prstTxWarp>
             <a:spAutoFit/>
           </a:bodyPr>
           <a:lstStyle/>
@@ -5995,9 +5942,6 @@
               </a:rPr>
               <a:t>Deterministic, Same input = Same output</a:t>
             </a:r>
-            <a:endParaRPr lang="en-US" sz="2400" b="1">
-              <a:latin typeface="Consolas"/>
-            </a:endParaRPr>
           </a:p>
           <a:p>
             <a:pPr marL="285750" indent="-285750">
@@ -6021,6 +5965,13 @@
               </a:rPr>
               <a:t>Identical passwords are exposed</a:t>
             </a:r>
+          </a:p>
+          <a:p>
+            <a:pPr marL="285750" indent="-285750">
+              <a:buFont typeface="Calibri"/>
+              <a:buChar char="-"/>
+              <a:defRPr/>
+            </a:pPr>
             <a:endParaRPr lang="en-US" sz="2400" b="1">
               <a:latin typeface="Consolas"/>
             </a:endParaRPr>
@@ -6031,33 +5982,11 @@
               <a:buChar char="-"/>
               <a:defRPr/>
             </a:pPr>
-            <a:endParaRPr lang="en-US" sz="2400" b="1">
-              <a:latin typeface="Consolas"/>
-            </a:endParaRPr>
-          </a:p>
-          <a:p>
-            <a:pPr marL="285750" indent="-285750">
-              <a:buFont typeface="Calibri"/>
-              <a:buChar char="-"/>
-              <a:defRPr/>
-            </a:pPr>
             <a:r>
               <a:rPr lang="en-US" sz="2400" b="1">
                 <a:latin typeface="Consolas"/>
               </a:rPr>
-              <a:t>"Rainbow Tables", dictionaries with common passwords and </a:t>
-            </a:r>
-            <a:r>
-              <a:rPr lang="en-US" sz="2400" b="1">
-                <a:latin typeface="Consolas"/>
-              </a:rPr>
-              <a:t>their</a:t>
-            </a:r>
-            <a:r>
-              <a:rPr lang="en-US" sz="2400" b="1">
-                <a:latin typeface="Consolas"/>
-              </a:rPr>
-              <a:t> hashes</a:t>
+              <a:t>"Rainbow Tables", dictionaries with common passwords and their hashes</a:t>
             </a:r>
             <a:endParaRPr/>
           </a:p>
@@ -6095,29 +6024,54 @@
         <p:nvGraphicFramePr>
           <p:cNvPr id="227650112" name="Table 7"/>
           <p:cNvGraphicFramePr>
-            <a:graphicFrameLocks xmlns:a="http://schemas.openxmlformats.org/drawingml/2006/main" noGrp="1"/>
+            <a:graphicFrameLocks noGrp="1"/>
           </p:cNvGraphicFramePr>
-          <p:nvPr/>
+          <p:nvPr>
+            <p:extLst>
+              <p:ext uri="{D42A27DB-BD31-4B8C-83A1-F6EECF244321}">
+                <p14:modId xmlns:p14="http://schemas.microsoft.com/office/powerpoint/2010/main" val="600080851"/>
+              </p:ext>
+            </p:extLst>
+          </p:nvPr>
         </p:nvGraphicFramePr>
-        <p:xfrm rot="0">
+        <p:xfrm>
           <a:off x="352094" y="1630594"/>
-          <a:ext cx="4401418" cy="4306580"/>
+          <a:ext cx="4401414" cy="4306580"/>
         </p:xfrm>
         <a:graphic>
           <a:graphicData uri="http://schemas.openxmlformats.org/drawingml/2006/table">
             <a:tbl>
-              <a:tblPr firstRow="1" firstCol="0" lastRow="0" lastCol="0" bandRow="1" bandCol="0">
+              <a:tblPr firstRow="1" bandRow="1">
                 <a:tableStyleId>{793D81CF-94F2-401A-BA57-92F5A7B2D0C5}</a:tableStyleId>
               </a:tblPr>
               <a:tblGrid>
-                <a:gridCol w="1440000"/>
-                <a:gridCol w="1491737"/>
-                <a:gridCol w="1469679"/>
+                <a:gridCol w="1439999">
+                  <a:extLst>
+                    <a:ext uri="{9D8B030D-6E8A-4147-A177-3AD203B41FA5}">
+                      <a16:colId xmlns:a16="http://schemas.microsoft.com/office/drawing/2014/main" val="20000"/>
+                    </a:ext>
+                  </a:extLst>
+                </a:gridCol>
+                <a:gridCol w="1572490">
+                  <a:extLst>
+                    <a:ext uri="{9D8B030D-6E8A-4147-A177-3AD203B41FA5}">
+                      <a16:colId xmlns:a16="http://schemas.microsoft.com/office/drawing/2014/main" val="20001"/>
+                    </a:ext>
+                  </a:extLst>
+                </a:gridCol>
+                <a:gridCol w="1388925">
+                  <a:extLst>
+                    <a:ext uri="{9D8B030D-6E8A-4147-A177-3AD203B41FA5}">
+                      <a16:colId xmlns:a16="http://schemas.microsoft.com/office/drawing/2014/main" val="20002"/>
+                    </a:ext>
+                  </a:extLst>
+                </a:gridCol>
               </a:tblGrid>
               <a:tr h="861316">
                 <a:tc>
                   <a:txBody>
                     <a:bodyPr/>
+                    <a:lstStyle/>
                     <a:p>
                       <a:pPr algn="ctr">
                         <a:defRPr/>
@@ -6136,6 +6090,7 @@
                 <a:tc>
                   <a:txBody>
                     <a:bodyPr/>
+                    <a:lstStyle/>
                     <a:p>
                       <a:pPr algn="ctr">
                         <a:defRPr/>
@@ -6147,7 +6102,7 @@
                         <a:t>Password</a:t>
                       </a:r>
                       <a:br>
-                        <a:rPr lang="en-US" b="1" i="0">
+                        <a:rPr lang="en-US" b="1" i="0" dirty="0">
                           <a:latin typeface="Consolas"/>
                         </a:rPr>
                       </a:br>
@@ -6165,6 +6120,7 @@
                 <a:tc>
                   <a:txBody>
                     <a:bodyPr/>
+                    <a:lstStyle/>
                     <a:p>
                       <a:pPr lvl="0" algn="ctr">
                         <a:buNone/>
@@ -6194,11 +6150,17 @@
                   </a:txBody>
                   <a:tcPr anchor="ctr"/>
                 </a:tc>
+                <a:extLst>
+                  <a:ext uri="{0D108BD9-81ED-4DB2-BD59-A6C34878D82A}">
+                    <a16:rowId xmlns:a16="http://schemas.microsoft.com/office/drawing/2014/main" val="10000"/>
+                  </a:ext>
+                </a:extLst>
               </a:tr>
               <a:tr h="861316">
                 <a:tc>
                   <a:txBody>
                     <a:bodyPr/>
+                    <a:lstStyle/>
                     <a:p>
                       <a:pPr marL="0" indent="0" algn="ctr">
                         <a:buNone/>
@@ -6216,6 +6178,7 @@
                 <a:tc>
                   <a:txBody>
                     <a:bodyPr/>
+                    <a:lstStyle/>
                     <a:p>
                       <a:pPr algn="ctr">
                         <a:defRPr/>
@@ -6234,6 +6197,7 @@
                 <a:tc>
                   <a:txBody>
                     <a:bodyPr/>
+                    <a:lstStyle/>
                     <a:p>
                       <a:pPr lvl="0" algn="ctr">
                         <a:buNone/>
@@ -6252,20 +6216,26 @@
                   </a:txBody>
                   <a:tcPr anchor="ctr"/>
                 </a:tc>
+                <a:extLst>
+                  <a:ext uri="{0D108BD9-81ED-4DB2-BD59-A6C34878D82A}">
+                    <a16:rowId xmlns:a16="http://schemas.microsoft.com/office/drawing/2014/main" val="10001"/>
+                  </a:ext>
+                </a:extLst>
               </a:tr>
               <a:tr h="861316">
                 <a:tc>
                   <a:txBody>
                     <a:bodyPr/>
+                    <a:lstStyle/>
                     <a:p>
                       <a:pPr algn="ctr">
                         <a:defRPr/>
                       </a:pPr>
                       <a:r>
-                        <a:rPr lang="en-US"/>
+                        <a:rPr lang="en-US" dirty="0" err="1"/>
                         <a:t>charlie</a:t>
                       </a:r>
-                      <a:endParaRPr/>
+                      <a:endParaRPr dirty="0" err="1"/>
                     </a:p>
                   </a:txBody>
                   <a:tcPr anchor="ctr"/>
@@ -6273,6 +6243,7 @@
                 <a:tc>
                   <a:txBody>
                     <a:bodyPr/>
+                    <a:lstStyle/>
                     <a:p>
                       <a:pPr algn="ctr">
                         <a:defRPr/>
@@ -6291,6 +6262,7 @@
                 <a:tc>
                   <a:txBody>
                     <a:bodyPr/>
+                    <a:lstStyle/>
                     <a:p>
                       <a:pPr lvl="0" algn="ctr">
                         <a:buNone/>
@@ -6307,21 +6279,27 @@
                   </a:txBody>
                   <a:tcPr anchor="ctr"/>
                 </a:tc>
+                <a:extLst>
+                  <a:ext uri="{0D108BD9-81ED-4DB2-BD59-A6C34878D82A}">
+                    <a16:rowId xmlns:a16="http://schemas.microsoft.com/office/drawing/2014/main" val="10002"/>
+                  </a:ext>
+                </a:extLst>
               </a:tr>
               <a:tr h="861316">
                 <a:tc>
                   <a:txBody>
                     <a:bodyPr/>
+                    <a:lstStyle/>
                     <a:p>
                       <a:pPr lvl="0" algn="ctr">
                         <a:buNone/>
                         <a:defRPr/>
                       </a:pPr>
                       <a:r>
-                        <a:rPr lang="en-US"/>
+                        <a:rPr lang="en-US" dirty="0" err="1"/>
                         <a:t>alice</a:t>
                       </a:r>
-                      <a:endParaRPr/>
+                      <a:endParaRPr dirty="0" err="1"/>
                     </a:p>
                   </a:txBody>
                   <a:tcPr anchor="ctr"/>
@@ -6329,6 +6307,7 @@
                 <a:tc>
                   <a:txBody>
                     <a:bodyPr/>
+                    <a:lstStyle/>
                     <a:p>
                       <a:pPr lvl="0" algn="ctr">
                         <a:buNone/>
@@ -6348,6 +6327,7 @@
                 <a:tc>
                   <a:txBody>
                     <a:bodyPr/>
+                    <a:lstStyle/>
                     <a:p>
                       <a:pPr lvl="0" algn="ctr">
                         <a:buNone/>
@@ -6367,11 +6347,17 @@
                   </a:txBody>
                   <a:tcPr anchor="ctr"/>
                 </a:tc>
+                <a:extLst>
+                  <a:ext uri="{0D108BD9-81ED-4DB2-BD59-A6C34878D82A}">
+                    <a16:rowId xmlns:a16="http://schemas.microsoft.com/office/drawing/2014/main" val="10003"/>
+                  </a:ext>
+                </a:extLst>
               </a:tr>
               <a:tr h="861316">
                 <a:tc>
                   <a:txBody>
                     <a:bodyPr/>
+                    <a:lstStyle/>
                     <a:p>
                       <a:pPr lvl="0" algn="ctr">
                         <a:buNone/>
@@ -6389,18 +6375,19 @@
                 <a:tc>
                   <a:txBody>
                     <a:bodyPr/>
+                    <a:lstStyle/>
                     <a:p>
                       <a:pPr lvl="0" algn="ctr">
                         <a:buNone/>
                         <a:defRPr/>
                       </a:pPr>
                       <a:r>
-                        <a:rPr lang="en-US" b="0" i="1">
+                        <a:rPr lang="en-US" b="0" i="1" dirty="0" err="1">
                           <a:latin typeface="Consolas"/>
                         </a:rPr>
                         <a:t>p@ssword</a:t>
                       </a:r>
-                      <a:endParaRPr/>
+                      <a:endParaRPr dirty="0" err="1"/>
                     </a:p>
                   </a:txBody>
                   <a:tcPr anchor="ctr"/>
@@ -6408,6 +6395,7 @@
                 <a:tc>
                   <a:txBody>
                     <a:bodyPr/>
+                    <a:lstStyle/>
                     <a:p>
                       <a:pPr lvl="0" algn="ctr">
                         <a:buNone/>
@@ -6426,6 +6414,11 @@
                   </a:txBody>
                   <a:tcPr anchor="ctr"/>
                 </a:tc>
+                <a:extLst>
+                  <a:ext uri="{0D108BD9-81ED-4DB2-BD59-A6C34878D82A}">
+                    <a16:rowId xmlns:a16="http://schemas.microsoft.com/office/drawing/2014/main" val="10004"/>
+                  </a:ext>
+                </a:extLst>
               </a:tr>
             </a:tbl>
           </a:graphicData>
@@ -6484,13 +6477,13 @@
   <p:clrMapOvr>
     <a:masterClrMapping/>
   </p:clrMapOvr>
-  <mc:AlternateContent xmlns:mc="http://schemas.openxmlformats.org/markup-compatibility/2006">
-    <mc:Choice xmlns:p159="http://schemas.microsoft.com/office/powerpoint/2015/09/main" xmlns:p14="http://schemas.microsoft.com/office/powerpoint/2010/main" Requires="p159">
-      <p:transition spd="fast" p14:dur="250" advClick="1">
-        <p:fade thruBlk="0"/>
+  <mc:AlternateContent xmlns:mc="http://schemas.openxmlformats.org/markup-compatibility/2006" xmlns:p159="http://schemas.microsoft.com/office/powerpoint/2015/09/main">
+    <mc:Choice Requires="p159">
+      <p:transition xmlns:p14="http://schemas.microsoft.com/office/powerpoint/2010/main" p14:dur="250">
+        <p:fade/>
       </p:transition>
     </mc:Choice>
-    <mc:Fallback>
+    <mc:Fallback xmlns:w="http://schemas.openxmlformats.org/wordprocessingml/2006/main" xmlns:m="http://schemas.openxmlformats.org/officeDocument/2006/math" xmlns="">
       <p:transition spd="fast" advClick="1">
         <p:fade thruBlk="0"/>
       </p:transition>
@@ -6500,8 +6493,8 @@
 </file>
 
 <file path=ppt/slides/slide6.xml><?xml version="1.0" encoding="utf-8"?>
-<p:sld xmlns:a="http://schemas.openxmlformats.org/drawingml/2006/main" xmlns:r="http://schemas.openxmlformats.org/officeDocument/2006/relationships" xmlns:p="http://schemas.openxmlformats.org/presentationml/2006/main" xmlns:m="http://schemas.openxmlformats.org/officeDocument/2006/math" xmlns:w="http://schemas.openxmlformats.org/wordprocessingml/2006/main" xmlns:mc="http://schemas.openxmlformats.org/markup-compatibility/2006" showMasterPhAnim="0" showMasterSp="1" show="1">
-  <p:cSld name="">
+<p:sld xmlns:a="http://schemas.openxmlformats.org/drawingml/2006/main" xmlns:r="http://schemas.openxmlformats.org/officeDocument/2006/relationships" xmlns:p="http://schemas.openxmlformats.org/presentationml/2006/main" showMasterPhAnim="0">
+  <p:cSld>
     <p:spTree>
       <p:nvGrpSpPr>
         <p:cNvPr id="1" name=""/>
@@ -6546,21 +6539,7 @@
                 <a:latin typeface="Consolas"/>
                 <a:cs typeface="Courier New"/>
               </a:rPr>
-              <a:t>Salting</a:t>
-            </a:r>
-            <a:r>
-              <a:rPr lang="fr-FR" b="1">
-                <a:latin typeface="Consolas"/>
-                <a:cs typeface="Courier New"/>
-              </a:rPr>
-              <a:t> </a:t>
-            </a:r>
-            <a:r>
-              <a:rPr lang="fr-FR" b="1">
-                <a:latin typeface="Consolas"/>
-                <a:cs typeface="Courier New"/>
-              </a:rPr>
-              <a:t>Implementation</a:t>
+              <a:t>Salting Implementation</a:t>
             </a:r>
             <a:endParaRPr/>
           </a:p>
@@ -6606,7 +6585,9 @@
         </p:spPr>
         <p:txBody>
           <a:bodyPr rot="0" spcFirstLastPara="0" vertOverflow="overflow" horzOverflow="overflow" vert="horz" wrap="square" lIns="91440" tIns="45720" rIns="91440" bIns="45720" numCol="1" spcCol="0" rtlCol="0" fromWordArt="0" anchor="t" anchorCtr="0" forceAA="0" compatLnSpc="1">
-            <a:prstTxWarp prst="textNoShape"/>
+            <a:prstTxWarp prst="textNoShape">
+              <a:avLst/>
+            </a:prstTxWarp>
             <a:spAutoFit/>
           </a:bodyPr>
           <a:lstStyle/>
@@ -6620,31 +6601,19 @@
               <a:rPr lang="en-US" sz="2400" b="1">
                 <a:latin typeface="Consolas"/>
               </a:rPr>
-              <a:t>Password + Unique </a:t>
-            </a:r>
+              <a:t>Password + Unique Random Salt</a:t>
+            </a:r>
+            <a:endParaRPr lang="en-US"/>
+          </a:p>
+          <a:p>
+            <a:pPr>
+              <a:defRPr/>
+            </a:pPr>
             <a:r>
               <a:rPr lang="en-US" sz="2400" b="1">
                 <a:latin typeface="Consolas"/>
               </a:rPr>
-              <a:t>Random Salt</a:t>
-            </a:r>
-            <a:endParaRPr lang="en-US"/>
-          </a:p>
-          <a:p>
-            <a:pPr>
-              <a:defRPr/>
-            </a:pPr>
-            <a:r>
-              <a:rPr lang="en-US" sz="2400" b="1">
-                <a:latin typeface="Consolas"/>
-              </a:rPr>
-              <a:t>  = </a:t>
-            </a:r>
-            <a:r>
-              <a:rPr lang="en-US" sz="2400" b="1">
-                <a:latin typeface="Consolas"/>
-              </a:rPr>
-              <a:t>Hash</a:t>
+              <a:t>  = Hash</a:t>
             </a:r>
             <a:endParaRPr lang="en-US"/>
           </a:p>
@@ -6670,9 +6639,6 @@
               </a:rPr>
               <a:t>Salt saved alongside the hash</a:t>
             </a:r>
-            <a:endParaRPr lang="en-US" sz="2400" b="1">
-              <a:latin typeface="Consolas"/>
-            </a:endParaRPr>
           </a:p>
           <a:p>
             <a:pPr marL="285750" indent="-285750">
@@ -6730,30 +6696,61 @@
         <p:nvGraphicFramePr>
           <p:cNvPr id="823103249" name="Table 7"/>
           <p:cNvGraphicFramePr>
-            <a:graphicFrameLocks xmlns:a="http://schemas.openxmlformats.org/drawingml/2006/main" noGrp="1"/>
+            <a:graphicFrameLocks noGrp="1"/>
           </p:cNvGraphicFramePr>
-          <p:nvPr/>
+          <p:nvPr>
+            <p:extLst>
+              <p:ext uri="{D42A27DB-BD31-4B8C-83A1-F6EECF244321}">
+                <p14:modId xmlns:p14="http://schemas.microsoft.com/office/powerpoint/2010/main" val="2737577786"/>
+              </p:ext>
+            </p:extLst>
+          </p:nvPr>
         </p:nvGraphicFramePr>
-        <p:xfrm rot="0">
+        <p:xfrm>
           <a:off x="438685" y="1717185"/>
-          <a:ext cx="5718604" cy="4306580"/>
+          <a:ext cx="5718599" cy="4306580"/>
         </p:xfrm>
         <a:graphic>
           <a:graphicData uri="http://schemas.openxmlformats.org/drawingml/2006/table">
             <a:tbl>
-              <a:tblPr firstRow="1" firstCol="0" lastRow="0" lastCol="0" bandRow="1" bandCol="0">
+              <a:tblPr firstRow="1" bandRow="1">
                 <a:tableStyleId>{793D81CF-94F2-401A-BA57-92F5A7B2D0C5}</a:tableStyleId>
               </a:tblPr>
               <a:tblGrid>
-                <a:gridCol w="1440000"/>
-                <a:gridCol w="1530000"/>
-                <a:gridCol w="1104787"/>
-                <a:gridCol w="1643815"/>
+                <a:gridCol w="1439999">
+                  <a:extLst>
+                    <a:ext uri="{9D8B030D-6E8A-4147-A177-3AD203B41FA5}">
+                      <a16:colId xmlns:a16="http://schemas.microsoft.com/office/drawing/2014/main" val="20000"/>
+                    </a:ext>
+                  </a:extLst>
+                </a:gridCol>
+                <a:gridCol w="1627909">
+                  <a:extLst>
+                    <a:ext uri="{9D8B030D-6E8A-4147-A177-3AD203B41FA5}">
+                      <a16:colId xmlns:a16="http://schemas.microsoft.com/office/drawing/2014/main" val="20001"/>
+                    </a:ext>
+                  </a:extLst>
+                </a:gridCol>
+                <a:gridCol w="1006877">
+                  <a:extLst>
+                    <a:ext uri="{9D8B030D-6E8A-4147-A177-3AD203B41FA5}">
+                      <a16:colId xmlns:a16="http://schemas.microsoft.com/office/drawing/2014/main" val="20002"/>
+                    </a:ext>
+                  </a:extLst>
+                </a:gridCol>
+                <a:gridCol w="1643814">
+                  <a:extLst>
+                    <a:ext uri="{9D8B030D-6E8A-4147-A177-3AD203B41FA5}">
+                      <a16:colId xmlns:a16="http://schemas.microsoft.com/office/drawing/2014/main" val="20003"/>
+                    </a:ext>
+                  </a:extLst>
+                </a:gridCol>
               </a:tblGrid>
               <a:tr h="861316">
                 <a:tc>
                   <a:txBody>
                     <a:bodyPr/>
+                    <a:lstStyle/>
                     <a:p>
                       <a:pPr algn="ctr">
                         <a:defRPr/>
@@ -6772,6 +6769,7 @@
                 <a:tc>
                   <a:txBody>
                     <a:bodyPr/>
+                    <a:lstStyle/>
                     <a:p>
                       <a:pPr algn="ctr">
                         <a:defRPr/>
@@ -6783,7 +6781,7 @@
                         <a:t>Password</a:t>
                       </a:r>
                       <a:br>
-                        <a:rPr lang="en-US" b="1" i="0">
+                        <a:rPr lang="en-US" b="1" i="0" dirty="0">
                           <a:latin typeface="Consolas"/>
                         </a:rPr>
                       </a:br>
@@ -6801,6 +6799,7 @@
                 <a:tc>
                   <a:txBody>
                     <a:bodyPr/>
+                    <a:lstStyle/>
                     <a:p>
                       <a:pPr lvl="0" algn="ctr">
                         <a:buNone/>
@@ -6820,6 +6819,7 @@
                 <a:tc>
                   <a:txBody>
                     <a:bodyPr/>
+                    <a:lstStyle/>
                     <a:p>
                       <a:pPr lvl="0" algn="ctr">
                         <a:buNone/>
@@ -6849,11 +6849,17 @@
                   </a:txBody>
                   <a:tcPr anchor="ctr"/>
                 </a:tc>
+                <a:extLst>
+                  <a:ext uri="{0D108BD9-81ED-4DB2-BD59-A6C34878D82A}">
+                    <a16:rowId xmlns:a16="http://schemas.microsoft.com/office/drawing/2014/main" val="10000"/>
+                  </a:ext>
+                </a:extLst>
               </a:tr>
               <a:tr h="861316">
                 <a:tc>
                   <a:txBody>
                     <a:bodyPr/>
+                    <a:lstStyle/>
                     <a:p>
                       <a:pPr marL="0" indent="0" algn="ctr">
                         <a:buNone/>
@@ -6871,6 +6877,7 @@
                 <a:tc>
                   <a:txBody>
                     <a:bodyPr/>
+                    <a:lstStyle/>
                     <a:p>
                       <a:pPr algn="ctr">
                         <a:defRPr/>
@@ -6889,6 +6896,7 @@
                 <a:tc>
                   <a:txBody>
                     <a:bodyPr/>
+                    <a:lstStyle/>
                     <a:p>
                       <a:pPr lvl="0" algn="ctr">
                         <a:buNone/>
@@ -6910,6 +6918,7 @@
                 <a:tc>
                   <a:txBody>
                     <a:bodyPr/>
+                    <a:lstStyle/>
                     <a:p>
                       <a:pPr lvl="0" algn="ctr">
                         <a:buNone/>
@@ -6928,20 +6937,26 @@
                   </a:txBody>
                   <a:tcPr anchor="ctr"/>
                 </a:tc>
+                <a:extLst>
+                  <a:ext uri="{0D108BD9-81ED-4DB2-BD59-A6C34878D82A}">
+                    <a16:rowId xmlns:a16="http://schemas.microsoft.com/office/drawing/2014/main" val="10001"/>
+                  </a:ext>
+                </a:extLst>
               </a:tr>
               <a:tr h="861316">
                 <a:tc>
                   <a:txBody>
                     <a:bodyPr/>
+                    <a:lstStyle/>
                     <a:p>
                       <a:pPr algn="ctr">
                         <a:defRPr/>
                       </a:pPr>
                       <a:r>
-                        <a:rPr lang="en-US"/>
+                        <a:rPr lang="en-US" dirty="0" err="1"/>
                         <a:t>charlie</a:t>
                       </a:r>
-                      <a:endParaRPr/>
+                      <a:endParaRPr dirty="0" err="1"/>
                     </a:p>
                   </a:txBody>
                   <a:tcPr anchor="ctr"/>
@@ -6949,6 +6964,7 @@
                 <a:tc>
                   <a:txBody>
                     <a:bodyPr/>
+                    <a:lstStyle/>
                     <a:p>
                       <a:pPr algn="ctr">
                         <a:defRPr/>
@@ -6967,6 +6983,7 @@
                 <a:tc>
                   <a:txBody>
                     <a:bodyPr/>
+                    <a:lstStyle/>
                     <a:p>
                       <a:pPr lvl="0" algn="ctr">
                         <a:buNone/>
@@ -6988,6 +7005,7 @@
                 <a:tc>
                   <a:txBody>
                     <a:bodyPr/>
+                    <a:lstStyle/>
                     <a:p>
                       <a:pPr lvl="0" algn="ctr">
                         <a:buNone/>
@@ -7004,21 +7022,27 @@
                   </a:txBody>
                   <a:tcPr anchor="ctr"/>
                 </a:tc>
+                <a:extLst>
+                  <a:ext uri="{0D108BD9-81ED-4DB2-BD59-A6C34878D82A}">
+                    <a16:rowId xmlns:a16="http://schemas.microsoft.com/office/drawing/2014/main" val="10002"/>
+                  </a:ext>
+                </a:extLst>
               </a:tr>
               <a:tr h="861316">
                 <a:tc>
                   <a:txBody>
                     <a:bodyPr/>
+                    <a:lstStyle/>
                     <a:p>
                       <a:pPr lvl="0" algn="ctr">
                         <a:buNone/>
                         <a:defRPr/>
                       </a:pPr>
                       <a:r>
-                        <a:rPr lang="en-US"/>
+                        <a:rPr lang="en-US" dirty="0" err="1"/>
                         <a:t>alice</a:t>
                       </a:r>
-                      <a:endParaRPr/>
+                      <a:endParaRPr dirty="0" err="1"/>
                     </a:p>
                   </a:txBody>
                   <a:tcPr anchor="ctr"/>
@@ -7026,6 +7050,7 @@
                 <a:tc>
                   <a:txBody>
                     <a:bodyPr/>
+                    <a:lstStyle/>
                     <a:p>
                       <a:pPr lvl="0" algn="ctr">
                         <a:buNone/>
@@ -7045,6 +7070,7 @@
                 <a:tc>
                   <a:txBody>
                     <a:bodyPr/>
+                    <a:lstStyle/>
                     <a:p>
                       <a:pPr lvl="0" algn="ctr">
                         <a:buNone/>
@@ -7069,6 +7095,7 @@
                 <a:tc>
                   <a:txBody>
                     <a:bodyPr/>
+                    <a:lstStyle/>
                     <a:p>
                       <a:pPr lvl="0" algn="ctr">
                         <a:buNone/>
@@ -7088,11 +7115,17 @@
                   </a:txBody>
                   <a:tcPr anchor="ctr"/>
                 </a:tc>
+                <a:extLst>
+                  <a:ext uri="{0D108BD9-81ED-4DB2-BD59-A6C34878D82A}">
+                    <a16:rowId xmlns:a16="http://schemas.microsoft.com/office/drawing/2014/main" val="10003"/>
+                  </a:ext>
+                </a:extLst>
               </a:tr>
               <a:tr h="861316">
                 <a:tc>
                   <a:txBody>
                     <a:bodyPr/>
+                    <a:lstStyle/>
                     <a:p>
                       <a:pPr lvl="0" algn="ctr">
                         <a:buNone/>
@@ -7110,18 +7143,19 @@
                 <a:tc>
                   <a:txBody>
                     <a:bodyPr/>
+                    <a:lstStyle/>
                     <a:p>
                       <a:pPr lvl="0" algn="ctr">
                         <a:buNone/>
                         <a:defRPr/>
                       </a:pPr>
                       <a:r>
-                        <a:rPr lang="en-US" b="0" i="1">
+                        <a:rPr lang="en-US" b="0" i="1" dirty="0" err="1">
                           <a:latin typeface="Consolas"/>
                         </a:rPr>
                         <a:t>p@ssword</a:t>
                       </a:r>
-                      <a:endParaRPr/>
+                      <a:endParaRPr dirty="0" err="1"/>
                     </a:p>
                   </a:txBody>
                   <a:tcPr anchor="ctr"/>
@@ -7129,6 +7163,7 @@
                 <a:tc>
                   <a:txBody>
                     <a:bodyPr/>
+                    <a:lstStyle/>
                     <a:p>
                       <a:pPr lvl="0" algn="ctr">
                         <a:buNone/>
@@ -7150,6 +7185,7 @@
                 <a:tc>
                   <a:txBody>
                     <a:bodyPr/>
+                    <a:lstStyle/>
                     <a:p>
                       <a:pPr lvl="0" algn="ctr">
                         <a:buNone/>
@@ -7168,6 +7204,11 @@
                   </a:txBody>
                   <a:tcPr anchor="ctr"/>
                 </a:tc>
+                <a:extLst>
+                  <a:ext uri="{0D108BD9-81ED-4DB2-BD59-A6C34878D82A}">
+                    <a16:rowId xmlns:a16="http://schemas.microsoft.com/office/drawing/2014/main" val="10004"/>
+                  </a:ext>
+                </a:extLst>
               </a:tr>
             </a:tbl>
           </a:graphicData>
@@ -7228,13 +7269,13 @@
   <p:clrMapOvr>
     <a:masterClrMapping/>
   </p:clrMapOvr>
-  <mc:AlternateContent xmlns:mc="http://schemas.openxmlformats.org/markup-compatibility/2006">
-    <mc:Choice xmlns:p159="http://schemas.microsoft.com/office/powerpoint/2015/09/main" xmlns:p14="http://schemas.microsoft.com/office/powerpoint/2010/main" Requires="p159">
-      <p:transition spd="fast" p14:dur="250" advClick="1">
-        <p:fade thruBlk="0"/>
+  <mc:AlternateContent xmlns:mc="http://schemas.openxmlformats.org/markup-compatibility/2006" xmlns:p159="http://schemas.microsoft.com/office/powerpoint/2015/09/main">
+    <mc:Choice Requires="p159">
+      <p:transition xmlns:p14="http://schemas.microsoft.com/office/powerpoint/2010/main" p14:dur="250">
+        <p:fade/>
       </p:transition>
     </mc:Choice>
-    <mc:Fallback>
+    <mc:Fallback xmlns:w="http://schemas.openxmlformats.org/wordprocessingml/2006/main" xmlns:m="http://schemas.openxmlformats.org/officeDocument/2006/math" xmlns="">
       <p:transition spd="fast" advClick="1">
         <p:fade thruBlk="0"/>
       </p:transition>
@@ -7244,8 +7285,8 @@
 </file>
 
 <file path=ppt/slides/slide7.xml><?xml version="1.0" encoding="utf-8"?>
-<p:sld xmlns:a="http://schemas.openxmlformats.org/drawingml/2006/main" xmlns:r="http://schemas.openxmlformats.org/officeDocument/2006/relationships" xmlns:p="http://schemas.openxmlformats.org/presentationml/2006/main" xmlns:m="http://schemas.openxmlformats.org/officeDocument/2006/math" xmlns:w="http://schemas.openxmlformats.org/wordprocessingml/2006/main" xmlns:mc="http://schemas.openxmlformats.org/markup-compatibility/2006" showMasterPhAnim="0" showMasterSp="1" show="1">
-  <p:cSld name="">
+<p:sld xmlns:a="http://schemas.openxmlformats.org/drawingml/2006/main" xmlns:r="http://schemas.openxmlformats.org/officeDocument/2006/relationships" xmlns:p="http://schemas.openxmlformats.org/presentationml/2006/main" showMasterPhAnim="0">
+  <p:cSld>
     <p:spTree>
       <p:nvGrpSpPr>
         <p:cNvPr id="1" name=""/>
@@ -7336,7 +7377,9 @@
         </p:spPr>
         <p:txBody>
           <a:bodyPr rot="0" spcFirstLastPara="0" vertOverflow="overflow" horzOverflow="overflow" vert="horz" wrap="square" lIns="91440" tIns="45720" rIns="91440" bIns="45720" numCol="1" spcCol="0" rtlCol="0" fromWordArt="0" anchor="t" anchorCtr="0" forceAA="0" compatLnSpc="1">
-            <a:prstTxWarp prst="textNoShape"/>
+            <a:prstTxWarp prst="textNoShape">
+              <a:avLst/>
+            </a:prstTxWarp>
             <a:spAutoFit/>
           </a:bodyPr>
           <a:lstStyle/>
@@ -7352,9 +7395,6 @@
               </a:rPr>
               <a:t>Never store raw passwords</a:t>
             </a:r>
-            <a:endParaRPr lang="en-US" sz="2400" b="1">
-              <a:latin typeface="Consolas"/>
-            </a:endParaRPr>
           </a:p>
           <a:p>
             <a:pPr marL="285750" indent="-285750">
@@ -7378,6 +7418,13 @@
               </a:rPr>
               <a:t>Hashing: One-way mathematical signature</a:t>
             </a:r>
+          </a:p>
+          <a:p>
+            <a:pPr marL="285750" indent="-285750">
+              <a:buFont typeface="Calibri"/>
+              <a:buChar char="-"/>
+              <a:defRPr/>
+            </a:pPr>
             <a:endParaRPr lang="en-US" sz="2400" b="1">
               <a:latin typeface="Consolas"/>
             </a:endParaRPr>
@@ -7388,27 +7435,11 @@
               <a:buChar char="-"/>
               <a:defRPr/>
             </a:pPr>
-            <a:endParaRPr lang="en-US" sz="2400" b="1">
-              <a:latin typeface="Consolas"/>
-            </a:endParaRPr>
-          </a:p>
-          <a:p>
-            <a:pPr marL="285750" indent="-285750">
-              <a:buFont typeface="Calibri"/>
-              <a:buChar char="-"/>
-              <a:defRPr/>
-            </a:pPr>
             <a:r>
               <a:rPr lang="en-US" sz="2400" b="1">
                 <a:latin typeface="Consolas"/>
               </a:rPr>
-              <a:t>Salting: Guarantees uni</a:t>
-            </a:r>
-            <a:r>
-              <a:rPr lang="en-US" sz="2400" b="1">
-                <a:latin typeface="Consolas"/>
-              </a:rPr>
-              <a:t>que values for every user</a:t>
+              <a:t>Salting: Guarantees unique values for every user</a:t>
             </a:r>
             <a:endParaRPr lang="en-US"/>
           </a:p>
@@ -7434,9 +7465,6 @@
               </a:rPr>
               <a:t>MFA: Mandatory secondary layer of security</a:t>
             </a:r>
-            <a:endParaRPr lang="en-US" sz="2400" b="1">
-              <a:latin typeface="Consolas"/>
-            </a:endParaRPr>
           </a:p>
           <a:p>
             <a:pPr marL="285750" indent="-285750">
@@ -7476,7 +7504,9 @@
         </p:spPr>
         <p:txBody>
           <a:bodyPr rot="0" spcFirstLastPara="0" vertOverflow="overflow" horzOverflow="overflow" vert="horz" wrap="square" lIns="91440" tIns="45720" rIns="91440" bIns="45720" numCol="1" spcCol="0" rtlCol="0" fromWordArt="0" anchor="t" anchorCtr="0" forceAA="0" compatLnSpc="1">
-            <a:prstTxWarp prst="textNoShape"/>
+            <a:prstTxWarp prst="textNoShape">
+              <a:avLst/>
+            </a:prstTxWarp>
             <a:spAutoFit/>
           </a:bodyPr>
           <a:lstStyle/>
@@ -7499,13 +7529,13 @@
   <p:clrMapOvr>
     <a:masterClrMapping/>
   </p:clrMapOvr>
-  <mc:AlternateContent xmlns:mc="http://schemas.openxmlformats.org/markup-compatibility/2006">
-    <mc:Choice xmlns:p159="http://schemas.microsoft.com/office/powerpoint/2015/09/main" xmlns:p14="http://schemas.microsoft.com/office/powerpoint/2010/main" Requires="p159">
-      <p:transition spd="fast" p14:dur="250" advClick="1">
-        <p:fade thruBlk="0"/>
+  <mc:AlternateContent xmlns:mc="http://schemas.openxmlformats.org/markup-compatibility/2006" xmlns:p159="http://schemas.microsoft.com/office/powerpoint/2015/09/main">
+    <mc:Choice Requires="p159">
+      <p:transition xmlns:p14="http://schemas.microsoft.com/office/powerpoint/2010/main" p14:dur="250">
+        <p:fade/>
       </p:transition>
     </mc:Choice>
-    <mc:Fallback>
+    <mc:Fallback xmlns:w="http://schemas.openxmlformats.org/wordprocessingml/2006/main" xmlns:m="http://schemas.openxmlformats.org/officeDocument/2006/math" xmlns="">
       <p:transition spd="fast" advClick="1">
         <p:fade thruBlk="0"/>
       </p:transition>
@@ -7846,7 +7876,7 @@
 </file>
 
 <file path=ppt/theme/theme1.xml><?xml version="1.0" encoding="utf-8"?>
-<a:theme xmlns:a="http://schemas.openxmlformats.org/drawingml/2006/main" xmlns:r="http://schemas.openxmlformats.org/officeDocument/2006/relationships" xmlns:p="http://schemas.openxmlformats.org/presentationml/2006/main" name="Thème Office">
+<a:theme xmlns:a="http://schemas.openxmlformats.org/drawingml/2006/main" name="Thème Office">
   <a:themeElements>
     <a:clrScheme name="Office">
       <a:dk1>
@@ -8057,11 +8087,12 @@
       </a:style>
     </a:lnDef>
   </a:objectDefaults>
+  <a:extraClrSchemeLst/>
 </a:theme>
 </file>
 
 <file path=ppt/theme/theme2.xml><?xml version="1.0" encoding="utf-8"?>
-<a:theme xmlns:a="http://schemas.openxmlformats.org/drawingml/2006/main" xmlns:r="http://schemas.openxmlformats.org/officeDocument/2006/relationships" xmlns:p="http://schemas.openxmlformats.org/presentationml/2006/main" name="Thème Office">
+<a:theme xmlns:a="http://schemas.openxmlformats.org/drawingml/2006/main" name="Thème Office">
   <a:themeElements>
     <a:clrScheme name="Office">
       <a:dk1>
@@ -8252,5 +8283,6 @@
     </a:fmtScheme>
   </a:themeElements>
   <a:objectDefaults/>
+  <a:extraClrSchemeLst/>
 </a:theme>
 </file>